--- a/docs/reports/태양광·수소 데이터수집·AI분석 예상안.pptx
+++ b/docs/reports/태양광·수소 데이터수집·AI분석 예상안.pptx
@@ -20,9 +20,14 @@
     <p:sldId id="268" r:id="rId14"/>
     <p:sldId id="269" r:id="rId15"/>
     <p:sldId id="270" r:id="rId16"/>
+    <p:sldId id="271" r:id="rId17"/>
+    <p:sldId id="272" r:id="rId18"/>
+    <p:sldId id="273" r:id="rId19"/>
+    <p:sldId id="274" r:id="rId20"/>
+    <p:sldId id="275" r:id="rId21"/>
   </p:sldIdLst>
   <p:notesMasterIdLst>
-    <p:notesMasterId r:id="rId17"/>
+    <p:notesMasterId r:id="rId22"/>
   </p:notesMasterIdLst>
   <p:sldSz cx="18288000" cy="10287000"/>
   <p:notesSz cx="10287000" cy="18288000"/>
@@ -1086,6 +1091,358 @@
 </p:notes>
 </file>
 
+<file path=ppt/notesSlides/notesSlide16.xml><?xml version="1.0" encoding="utf-8"?>
+<p:notes xmlns:a="http://schemas.openxmlformats.org/drawingml/2006/main" xmlns:r="http://schemas.openxmlformats.org/officeDocument/2006/relationships" xmlns:p="http://schemas.openxmlformats.org/presentationml/2006/main">
+  <p:cSld>
+    <p:spTree>
+      <p:nvGrpSpPr>
+        <p:cNvPr id="1" name=""/>
+        <p:cNvGrpSpPr/>
+        <p:nvPr/>
+      </p:nvGrpSpPr>
+      <p:grpSpPr>
+        <a:xfrm>
+          <a:off x="0" y="0"/>
+          <a:ext cx="0" cy="0"/>
+          <a:chOff x="0" y="0"/>
+          <a:chExt cx="0" cy="0"/>
+        </a:xfrm>
+      </p:grpSpPr>
+      <p:sp>
+        <p:nvSpPr>
+          <p:cNvPr id="2" name="Slide Image Placeholder 1"/>
+          <p:cNvSpPr>
+            <a:spLocks noGrp="1" noRot="1" noChangeAspect="1"/>
+          </p:cNvSpPr>
+          <p:nvPr>
+            <p:ph type="sldImg"/>
+          </p:nvPr>
+        </p:nvSpPr>
+        <p:spPr/>
+      </p:sp>
+      <p:sp>
+        <p:nvSpPr>
+          <p:cNvPr id="3" name="Notes Placeholder 2"/>
+          <p:cNvSpPr>
+            <a:spLocks noGrp="1"/>
+          </p:cNvSpPr>
+          <p:nvPr>
+            <p:ph type="body" idx="1"/>
+          </p:nvPr>
+        </p:nvSpPr>
+        <p:spPr/>
+        <p:txBody>
+          <a:bodyPr/>
+          <a:lstStyle/>
+          <a:p>
+            <a:r>
+              <a:rPr lang="en-US" dirty="0"/>
+              <a:t/>
+            </a:r>
+            <a:endParaRPr lang="en-US" dirty="0"/>
+          </a:p>
+        </p:txBody>
+      </p:sp>
+      <p:sp>
+        <p:nvSpPr>
+          <p:cNvPr id="4" name="Slide Number Placeholder 3"/>
+          <p:cNvSpPr>
+            <a:spLocks noGrp="1"/>
+          </p:cNvSpPr>
+          <p:nvPr>
+            <p:ph type="sldNum" sz="quarter" idx="10"/>
+          </p:nvPr>
+        </p:nvSpPr>
+        <p:spPr/>
+        <p:txBody>
+          <a:bodyPr/>
+          <a:lstStyle/>
+          <a:p>
+            <a:fld id="{F7021451-1387-4CA6-816F-3879F97B5CBC}" type="slidenum">
+              <a:rPr lang="en-US"/>
+              <a:t>16</a:t>
+            </a:fld>
+            <a:endParaRPr lang="en-US"/>
+          </a:p>
+        </p:txBody>
+      </p:sp>
+    </p:spTree>
+    <p:extLst>
+      <p:ext uri="{BB962C8B-B14F-4D97-AF65-F5344CB8AC3E}">
+        <p14:creationId xmlns:p14="http://schemas.microsoft.com/office/powerpoint/2010/main" val="1024086991"/>
+      </p:ext>
+    </p:extLst>
+  </p:cSld>
+  <p:clrMapOvr>
+    <a:masterClrMapping/>
+  </p:clrMapOvr>
+</p:notes>
+</file>
+
+<file path=ppt/notesSlides/notesSlide17.xml><?xml version="1.0" encoding="utf-8"?>
+<p:notes xmlns:a="http://schemas.openxmlformats.org/drawingml/2006/main" xmlns:r="http://schemas.openxmlformats.org/officeDocument/2006/relationships" xmlns:p="http://schemas.openxmlformats.org/presentationml/2006/main">
+  <p:cSld>
+    <p:spTree>
+      <p:nvGrpSpPr>
+        <p:cNvPr id="1" name=""/>
+        <p:cNvGrpSpPr/>
+        <p:nvPr/>
+      </p:nvGrpSpPr>
+      <p:grpSpPr>
+        <a:xfrm>
+          <a:off x="0" y="0"/>
+          <a:ext cx="0" cy="0"/>
+          <a:chOff x="0" y="0"/>
+          <a:chExt cx="0" cy="0"/>
+        </a:xfrm>
+      </p:grpSpPr>
+      <p:sp>
+        <p:nvSpPr>
+          <p:cNvPr id="2" name="Slide Image Placeholder 1"/>
+          <p:cNvSpPr>
+            <a:spLocks noGrp="1" noRot="1" noChangeAspect="1"/>
+          </p:cNvSpPr>
+          <p:nvPr>
+            <p:ph type="sldImg"/>
+          </p:nvPr>
+        </p:nvSpPr>
+        <p:spPr/>
+      </p:sp>
+      <p:sp>
+        <p:nvSpPr>
+          <p:cNvPr id="3" name="Notes Placeholder 2"/>
+          <p:cNvSpPr>
+            <a:spLocks noGrp="1"/>
+          </p:cNvSpPr>
+          <p:nvPr>
+            <p:ph type="body" idx="1"/>
+          </p:nvPr>
+        </p:nvSpPr>
+        <p:spPr/>
+        <p:txBody>
+          <a:bodyPr/>
+          <a:lstStyle/>
+          <a:p>
+            <a:r>
+              <a:rPr lang="en-US" dirty="0"/>
+              <a:t/>
+            </a:r>
+            <a:endParaRPr lang="en-US" dirty="0"/>
+          </a:p>
+        </p:txBody>
+      </p:sp>
+      <p:sp>
+        <p:nvSpPr>
+          <p:cNvPr id="4" name="Slide Number Placeholder 3"/>
+          <p:cNvSpPr>
+            <a:spLocks noGrp="1"/>
+          </p:cNvSpPr>
+          <p:nvPr>
+            <p:ph type="sldNum" sz="quarter" idx="10"/>
+          </p:nvPr>
+        </p:nvSpPr>
+        <p:spPr/>
+        <p:txBody>
+          <a:bodyPr/>
+          <a:lstStyle/>
+          <a:p>
+            <a:fld id="{F7021451-1387-4CA6-816F-3879F97B5CBC}" type="slidenum">
+              <a:rPr lang="en-US"/>
+              <a:t>17</a:t>
+            </a:fld>
+            <a:endParaRPr lang="en-US"/>
+          </a:p>
+        </p:txBody>
+      </p:sp>
+    </p:spTree>
+    <p:extLst>
+      <p:ext uri="{BB962C8B-B14F-4D97-AF65-F5344CB8AC3E}">
+        <p14:creationId xmlns:p14="http://schemas.microsoft.com/office/powerpoint/2010/main" val="1024086991"/>
+      </p:ext>
+    </p:extLst>
+  </p:cSld>
+  <p:clrMapOvr>
+    <a:masterClrMapping/>
+  </p:clrMapOvr>
+</p:notes>
+</file>
+
+<file path=ppt/notesSlides/notesSlide18.xml><?xml version="1.0" encoding="utf-8"?>
+<p:notes xmlns:a="http://schemas.openxmlformats.org/drawingml/2006/main" xmlns:r="http://schemas.openxmlformats.org/officeDocument/2006/relationships" xmlns:p="http://schemas.openxmlformats.org/presentationml/2006/main">
+  <p:cSld>
+    <p:spTree>
+      <p:nvGrpSpPr>
+        <p:cNvPr id="1" name=""/>
+        <p:cNvGrpSpPr/>
+        <p:nvPr/>
+      </p:nvGrpSpPr>
+      <p:grpSpPr>
+        <a:xfrm>
+          <a:off x="0" y="0"/>
+          <a:ext cx="0" cy="0"/>
+          <a:chOff x="0" y="0"/>
+          <a:chExt cx="0" cy="0"/>
+        </a:xfrm>
+      </p:grpSpPr>
+      <p:sp>
+        <p:nvSpPr>
+          <p:cNvPr id="2" name="Slide Image Placeholder 1"/>
+          <p:cNvSpPr>
+            <a:spLocks noGrp="1" noRot="1" noChangeAspect="1"/>
+          </p:cNvSpPr>
+          <p:nvPr>
+            <p:ph type="sldImg"/>
+          </p:nvPr>
+        </p:nvSpPr>
+        <p:spPr/>
+      </p:sp>
+      <p:sp>
+        <p:nvSpPr>
+          <p:cNvPr id="3" name="Notes Placeholder 2"/>
+          <p:cNvSpPr>
+            <a:spLocks noGrp="1"/>
+          </p:cNvSpPr>
+          <p:nvPr>
+            <p:ph type="body" idx="1"/>
+          </p:nvPr>
+        </p:nvSpPr>
+        <p:spPr/>
+        <p:txBody>
+          <a:bodyPr/>
+          <a:lstStyle/>
+          <a:p>
+            <a:r>
+              <a:rPr lang="en-US" dirty="0"/>
+              <a:t/>
+            </a:r>
+            <a:endParaRPr lang="en-US" dirty="0"/>
+          </a:p>
+        </p:txBody>
+      </p:sp>
+      <p:sp>
+        <p:nvSpPr>
+          <p:cNvPr id="4" name="Slide Number Placeholder 3"/>
+          <p:cNvSpPr>
+            <a:spLocks noGrp="1"/>
+          </p:cNvSpPr>
+          <p:nvPr>
+            <p:ph type="sldNum" sz="quarter" idx="10"/>
+          </p:nvPr>
+        </p:nvSpPr>
+        <p:spPr/>
+        <p:txBody>
+          <a:bodyPr/>
+          <a:lstStyle/>
+          <a:p>
+            <a:fld id="{F7021451-1387-4CA6-816F-3879F97B5CBC}" type="slidenum">
+              <a:rPr lang="en-US"/>
+              <a:t>18</a:t>
+            </a:fld>
+            <a:endParaRPr lang="en-US"/>
+          </a:p>
+        </p:txBody>
+      </p:sp>
+    </p:spTree>
+    <p:extLst>
+      <p:ext uri="{BB962C8B-B14F-4D97-AF65-F5344CB8AC3E}">
+        <p14:creationId xmlns:p14="http://schemas.microsoft.com/office/powerpoint/2010/main" val="1024086991"/>
+      </p:ext>
+    </p:extLst>
+  </p:cSld>
+  <p:clrMapOvr>
+    <a:masterClrMapping/>
+  </p:clrMapOvr>
+</p:notes>
+</file>
+
+<file path=ppt/notesSlides/notesSlide19.xml><?xml version="1.0" encoding="utf-8"?>
+<p:notes xmlns:a="http://schemas.openxmlformats.org/drawingml/2006/main" xmlns:r="http://schemas.openxmlformats.org/officeDocument/2006/relationships" xmlns:p="http://schemas.openxmlformats.org/presentationml/2006/main">
+  <p:cSld>
+    <p:spTree>
+      <p:nvGrpSpPr>
+        <p:cNvPr id="1" name=""/>
+        <p:cNvGrpSpPr/>
+        <p:nvPr/>
+      </p:nvGrpSpPr>
+      <p:grpSpPr>
+        <a:xfrm>
+          <a:off x="0" y="0"/>
+          <a:ext cx="0" cy="0"/>
+          <a:chOff x="0" y="0"/>
+          <a:chExt cx="0" cy="0"/>
+        </a:xfrm>
+      </p:grpSpPr>
+      <p:sp>
+        <p:nvSpPr>
+          <p:cNvPr id="2" name="Slide Image Placeholder 1"/>
+          <p:cNvSpPr>
+            <a:spLocks noGrp="1" noRot="1" noChangeAspect="1"/>
+          </p:cNvSpPr>
+          <p:nvPr>
+            <p:ph type="sldImg"/>
+          </p:nvPr>
+        </p:nvSpPr>
+        <p:spPr/>
+      </p:sp>
+      <p:sp>
+        <p:nvSpPr>
+          <p:cNvPr id="3" name="Notes Placeholder 2"/>
+          <p:cNvSpPr>
+            <a:spLocks noGrp="1"/>
+          </p:cNvSpPr>
+          <p:nvPr>
+            <p:ph type="body" idx="1"/>
+          </p:nvPr>
+        </p:nvSpPr>
+        <p:spPr/>
+        <p:txBody>
+          <a:bodyPr/>
+          <a:lstStyle/>
+          <a:p>
+            <a:r>
+              <a:rPr lang="en-US" dirty="0"/>
+              <a:t/>
+            </a:r>
+            <a:endParaRPr lang="en-US" dirty="0"/>
+          </a:p>
+        </p:txBody>
+      </p:sp>
+      <p:sp>
+        <p:nvSpPr>
+          <p:cNvPr id="4" name="Slide Number Placeholder 3"/>
+          <p:cNvSpPr>
+            <a:spLocks noGrp="1"/>
+          </p:cNvSpPr>
+          <p:nvPr>
+            <p:ph type="sldNum" sz="quarter" idx="10"/>
+          </p:nvPr>
+        </p:nvSpPr>
+        <p:spPr/>
+        <p:txBody>
+          <a:bodyPr/>
+          <a:lstStyle/>
+          <a:p>
+            <a:fld id="{F7021451-1387-4CA6-816F-3879F97B5CBC}" type="slidenum">
+              <a:rPr lang="en-US"/>
+              <a:t>19</a:t>
+            </a:fld>
+            <a:endParaRPr lang="en-US"/>
+          </a:p>
+        </p:txBody>
+      </p:sp>
+    </p:spTree>
+    <p:extLst>
+      <p:ext uri="{BB962C8B-B14F-4D97-AF65-F5344CB8AC3E}">
+        <p14:creationId xmlns:p14="http://schemas.microsoft.com/office/powerpoint/2010/main" val="1024086991"/>
+      </p:ext>
+    </p:extLst>
+  </p:cSld>
+  <p:clrMapOvr>
+    <a:masterClrMapping/>
+  </p:clrMapOvr>
+</p:notes>
+</file>
+
 <file path=ppt/notesSlides/notesSlide2.xml><?xml version="1.0" encoding="utf-8"?>
 <p:notes xmlns:a="http://schemas.openxmlformats.org/drawingml/2006/main" xmlns:r="http://schemas.openxmlformats.org/officeDocument/2006/relationships" xmlns:p="http://schemas.openxmlformats.org/presentationml/2006/main">
   <p:cSld>
@@ -1156,6 +1513,94 @@
             <a:fld id="{F7021451-1387-4CA6-816F-3879F97B5CBC}" type="slidenum">
               <a:rPr lang="en-US"/>
               <a:t>2</a:t>
+            </a:fld>
+            <a:endParaRPr lang="en-US"/>
+          </a:p>
+        </p:txBody>
+      </p:sp>
+    </p:spTree>
+    <p:extLst>
+      <p:ext uri="{BB962C8B-B14F-4D97-AF65-F5344CB8AC3E}">
+        <p14:creationId xmlns:p14="http://schemas.microsoft.com/office/powerpoint/2010/main" val="1024086991"/>
+      </p:ext>
+    </p:extLst>
+  </p:cSld>
+  <p:clrMapOvr>
+    <a:masterClrMapping/>
+  </p:clrMapOvr>
+</p:notes>
+</file>
+
+<file path=ppt/notesSlides/notesSlide20.xml><?xml version="1.0" encoding="utf-8"?>
+<p:notes xmlns:a="http://schemas.openxmlformats.org/drawingml/2006/main" xmlns:r="http://schemas.openxmlformats.org/officeDocument/2006/relationships" xmlns:p="http://schemas.openxmlformats.org/presentationml/2006/main">
+  <p:cSld>
+    <p:spTree>
+      <p:nvGrpSpPr>
+        <p:cNvPr id="1" name=""/>
+        <p:cNvGrpSpPr/>
+        <p:nvPr/>
+      </p:nvGrpSpPr>
+      <p:grpSpPr>
+        <a:xfrm>
+          <a:off x="0" y="0"/>
+          <a:ext cx="0" cy="0"/>
+          <a:chOff x="0" y="0"/>
+          <a:chExt cx="0" cy="0"/>
+        </a:xfrm>
+      </p:grpSpPr>
+      <p:sp>
+        <p:nvSpPr>
+          <p:cNvPr id="2" name="Slide Image Placeholder 1"/>
+          <p:cNvSpPr>
+            <a:spLocks noGrp="1" noRot="1" noChangeAspect="1"/>
+          </p:cNvSpPr>
+          <p:nvPr>
+            <p:ph type="sldImg"/>
+          </p:nvPr>
+        </p:nvSpPr>
+        <p:spPr/>
+      </p:sp>
+      <p:sp>
+        <p:nvSpPr>
+          <p:cNvPr id="3" name="Notes Placeholder 2"/>
+          <p:cNvSpPr>
+            <a:spLocks noGrp="1"/>
+          </p:cNvSpPr>
+          <p:nvPr>
+            <p:ph type="body" idx="1"/>
+          </p:nvPr>
+        </p:nvSpPr>
+        <p:spPr/>
+        <p:txBody>
+          <a:bodyPr/>
+          <a:lstStyle/>
+          <a:p>
+            <a:r>
+              <a:rPr lang="en-US" dirty="0"/>
+              <a:t/>
+            </a:r>
+            <a:endParaRPr lang="en-US" dirty="0"/>
+          </a:p>
+        </p:txBody>
+      </p:sp>
+      <p:sp>
+        <p:nvSpPr>
+          <p:cNvPr id="4" name="Slide Number Placeholder 3"/>
+          <p:cNvSpPr>
+            <a:spLocks noGrp="1"/>
+          </p:cNvSpPr>
+          <p:nvPr>
+            <p:ph type="sldNum" sz="quarter" idx="10"/>
+          </p:nvPr>
+        </p:nvSpPr>
+        <p:spPr/>
+        <p:txBody>
+          <a:bodyPr/>
+          <a:lstStyle/>
+          <a:p>
+            <a:fld id="{F7021451-1387-4CA6-816F-3879F97B5CBC}" type="slidenum">
+              <a:rPr lang="en-US"/>
+              <a:t>20</a:t>
             </a:fld>
             <a:endParaRPr lang="en-US"/>
           </a:p>
@@ -2143,7 +2588,7 @@
       </p:sp>
       <p:pic>
         <p:nvPicPr>
-          <p:cNvPr id="3" name="Image 0" descr="C:\Users\jungm\AppData\Local\Temp\claude\c--Users-jungm-Desktop-projects-simple-solar-dashboard\d489bc63-0117-4773-8ee7-099d2a95864b\scratchpad\docbuild\assets\first-logo.png">    </p:cNvPr>
+          <p:cNvPr id="3" name="Image 0" descr="C:\Users\jungm\Desktop\projects\simple\solar-dashboard\docs\reports\_source\first-logo.png">    </p:cNvPr>
           <p:cNvPicPr>
             <a:picLocks noChangeAspect="1"/>
           </p:cNvPicPr>
@@ -2198,7 +2643,7 @@
                 <a:ea typeface="Pretendard" pitchFamily="34" charset="-122"/>
                 <a:cs typeface="Pretendard" pitchFamily="34" charset="-120"/>
               </a:rPr>
-              <a:t>태양광·수소 발전 데이터 분석 예상안</a:t>
+              <a:t>태양광·수소 발전 데이터 분석 예상안 · 제2판</a:t>
             </a:r>
             <a:endParaRPr lang="ko-KR" sz="3000" dirty="0"/>
           </a:p>
@@ -2277,7 +2722,7 @@
                 <a:ea typeface="Pretendard" pitchFamily="34" charset="-122"/>
                 <a:cs typeface="Pretendard" pitchFamily="34" charset="-120"/>
               </a:rPr>
-              <a:t>보통 받는 데이터 · 월/분기 AI 분석 · 리포트 구성</a:t>
+              <a:t>보통 받는 데이터 · AI 분석 · 리포트 · 실제 도면 적용 사례</a:t>
             </a:r>
             <a:endParaRPr lang="ko-KR" sz="7600" dirty="0"/>
           </a:p>
@@ -2336,7 +2781,7 @@
                 <a:ea typeface="Pretendard" pitchFamily="34" charset="-122"/>
                 <a:cs typeface="Pretendard" pitchFamily="34" charset="-120"/>
               </a:rPr>
-              <a:t>주식회사 퍼스트씨앤디      |      작성일 2026. 09. 14</a:t>
+              <a:t>주식회사 퍼스트씨앤디      |      작성일 2026. 09. 17</a:t>
             </a:r>
             <a:endParaRPr lang="ko-KR" sz="2200" dirty="0"/>
           </a:p>
@@ -2376,7 +2821,7 @@
       </p:grpSpPr>
       <p:pic>
         <p:nvPicPr>
-          <p:cNvPr id="2" name="Image 0" descr="C:\Users\jungm\AppData\Local\Temp\claude\c--Users-jungm-Desktop-projects-simple-solar-dashboard\d489bc63-0117-4773-8ee7-099d2a95864b\scratchpad\docbuild\assets\first-logo.png">    </p:cNvPr>
+          <p:cNvPr id="2" name="Image 0" descr="C:\Users\jungm\Desktop\projects\simple\solar-dashboard\docs\reports\_source\first-logo.png">    </p:cNvPr>
           <p:cNvPicPr>
             <a:picLocks noChangeAspect="1"/>
           </p:cNvPicPr>
@@ -2557,7 +3002,7 @@
       </p:sp>
       <p:pic>
         <p:nvPicPr>
-          <p:cNvPr id="8" name="Image 1" descr="C:\Users\jungm\AppData\Local\Temp\claude\c--Users-jungm-Desktop-projects-simple-solar-dashboard\d489bc63-0117-4773-8ee7-099d2a95864b\scratchpad\docbuild\first\out\charts\ess-trend-slide.png">    </p:cNvPr>
+          <p:cNvPr id="8" name="Image 1" descr="C:\Users\jungm\Desktop\projects\simple\solar-dashboard\docs\reports\_source\charts\ess-trend-slide.png">    </p:cNvPr>
           <p:cNvPicPr>
             <a:picLocks noChangeAspect="1"/>
           </p:cNvPicPr>
@@ -2806,7 +3251,7 @@
       </p:grpSpPr>
       <p:pic>
         <p:nvPicPr>
-          <p:cNvPr id="2" name="Image 0" descr="C:\Users\jungm\AppData\Local\Temp\claude\c--Users-jungm-Desktop-projects-simple-solar-dashboard\d489bc63-0117-4773-8ee7-099d2a95864b\scratchpad\docbuild\assets\first-logo.png">    </p:cNvPr>
+          <p:cNvPr id="2" name="Image 0" descr="C:\Users\jungm\Desktop\projects\simple\solar-dashboard\docs\reports\_source\first-logo.png">    </p:cNvPr>
           <p:cNvPicPr>
             <a:picLocks noChangeAspect="1"/>
           </p:cNvPicPr>
@@ -2979,7 +3424,7 @@
                 <a:ea typeface="Pretendard" pitchFamily="34" charset="-122"/>
                 <a:cs typeface="Pretendard" pitchFamily="34" charset="-120"/>
               </a:rPr>
-              <a:t>※ 분석 항목 47개를 주기별로 집계(중복 포함, 엑셀 ‘분석항목×주기’) · PV 열화율 기준: IEA PVPS T13-22</a:t>
+              <a:t>※ 분석 항목 50개(초판 47 + 가평 구성 3)를 주기별로 집계(중복 포함, 엑셀 ‘분석항목×주기’) · PV 열화율 기준: IEA PVPS T13-22</a:t>
             </a:r>
             <a:endParaRPr lang="ko-KR" sz="1600" dirty="0"/>
           </a:p>
@@ -2987,7 +3432,7 @@
       </p:sp>
       <p:pic>
         <p:nvPicPr>
-          <p:cNvPr id="8" name="Image 1" descr="C:\Users\jungm\AppData\Local\Temp\claude\c--Users-jungm-Desktop-projects-simple-solar-dashboard\d489bc63-0117-4773-8ee7-099d2a95864b\scratchpad\docbuild\first\out\charts\cadence-slide.png">    </p:cNvPr>
+          <p:cNvPr id="8" name="Image 1" descr="C:\Users\jungm\Desktop\projects\simple\solar-dashboard\docs\reports\_source\charts\cadence-slide.png">    </p:cNvPr>
           <p:cNvPicPr>
             <a:picLocks noChangeAspect="1"/>
           </p:cNvPicPr>
@@ -3091,7 +3536,7 @@
                 <a:ea typeface="Pretendard" pitchFamily="34" charset="-122"/>
                 <a:cs typeface="Pretendard" pitchFamily="34" charset="-120"/>
               </a:rPr>
-              <a:t>월간 36개: PR·가용률·트립 등 이상·손실</a:t>
+              <a:t>월간 39개: PR·가용률·트립 등 이상·손실</a:t>
             </a:r>
             <a:endParaRPr lang="ko-KR" sz="2400" dirty="0"/>
           </a:p>
@@ -3112,7 +3557,7 @@
                 <a:ea typeface="Pretendard" pitchFamily="34" charset="-122"/>
                 <a:cs typeface="Pretendard" pitchFamily="34" charset="-120"/>
               </a:rPr>
-              <a:t>분기 15개: ESS 용량·스택 전압 추세(잠정)</a:t>
+              <a:t>분기 16개: ESS 용량·스택 전압 추세(잠정)</a:t>
             </a:r>
             <a:endParaRPr lang="ko-KR" sz="2400" dirty="0"/>
           </a:p>
@@ -3215,7 +3660,7 @@
       </p:grpSpPr>
       <p:pic>
         <p:nvPicPr>
-          <p:cNvPr id="2" name="Image 0" descr="C:\Users\jungm\AppData\Local\Temp\claude\c--Users-jungm-Desktop-projects-simple-solar-dashboard\d489bc63-0117-4773-8ee7-099d2a95864b\scratchpad\docbuild\assets\first-logo.png">    </p:cNvPr>
+          <p:cNvPr id="2" name="Image 0" descr="C:\Users\jungm\Desktop\projects\simple\solar-dashboard\docs\reports\_source\first-logo.png">    </p:cNvPr>
           <p:cNvPicPr>
             <a:picLocks noChangeAspect="1"/>
           </p:cNvPicPr>
@@ -4043,7 +4488,7 @@
       </p:grpSpPr>
       <p:pic>
         <p:nvPicPr>
-          <p:cNvPr id="2" name="Image 0" descr="C:\Users\jungm\AppData\Local\Temp\claude\c--Users-jungm-Desktop-projects-simple-solar-dashboard\d489bc63-0117-4773-8ee7-099d2a95864b\scratchpad\docbuild\assets\first-logo.png">    </p:cNvPr>
+          <p:cNvPr id="2" name="Image 0" descr="C:\Users\jungm\Desktop\projects\simple\solar-dashboard\docs\reports\_source\first-logo.png">    </p:cNvPr>
           <p:cNvPicPr>
             <a:picLocks noChangeAspect="1"/>
           </p:cNvPicPr>
@@ -4975,7 +5420,7 @@
       </p:grpSpPr>
       <p:pic>
         <p:nvPicPr>
-          <p:cNvPr id="2" name="Image 0" descr="C:\Users\jungm\AppData\Local\Temp\claude\c--Users-jungm-Desktop-projects-simple-solar-dashboard\d489bc63-0117-4773-8ee7-099d2a95864b\scratchpad\docbuild\assets\first-logo.png">    </p:cNvPr>
+          <p:cNvPr id="2" name="Image 0" descr="C:\Users\jungm\Desktop\projects\simple\solar-dashboard\docs\reports\_source\first-logo.png">    </p:cNvPr>
           <p:cNvPicPr>
             <a:picLocks noChangeAspect="1"/>
           </p:cNvPicPr>
@@ -7655,7 +8100,7 @@
       </p:grpSpPr>
       <p:pic>
         <p:nvPicPr>
-          <p:cNvPr id="2" name="Image 0" descr="C:\Users\jungm\AppData\Local\Temp\claude\c--Users-jungm-Desktop-projects-simple-solar-dashboard\d489bc63-0117-4773-8ee7-099d2a95864b\scratchpad\docbuild\assets\first-logo.png">    </p:cNvPr>
+          <p:cNvPr id="2" name="Image 0" descr="C:\Users\jungm\Desktop\projects\simple\solar-dashboard\docs\reports\_source\first-logo.png">    </p:cNvPr>
           <p:cNvPicPr>
             <a:picLocks noChangeAspect="1"/>
           </p:cNvPicPr>
@@ -7749,7 +8194,7 @@
                 <a:ea typeface="Pretendard" pitchFamily="34" charset="-122"/>
                 <a:cs typeface="Pretendard" pitchFamily="34" charset="-120"/>
               </a:rPr>
-              <a:t>한계 · 결론과 다음 단계</a:t>
+              <a:t>실제 사업 도면을 그대로 넣어 봤습니다</a:t>
             </a:r>
             <a:endParaRPr lang="ko-KR" sz="4400" dirty="0"/>
           </a:p>
@@ -7828,7 +8273,7 @@
                 <a:ea typeface="Pretendard" pitchFamily="34" charset="-122"/>
                 <a:cs typeface="Pretendard" pitchFamily="34" charset="-120"/>
               </a:rPr>
-              <a:t>※ 초기 고장 집중: 운전 시점이 알려진 ESS 고장의 72%가 시공·시운전·운전 2년 안에 발생(EPRI 2024)</a:t>
+              <a:t>※ 도면의 계통 다섯 중 콘솔이 원래 알던 것은 둘(수전해·연료전지)뿐이었습니다</a:t>
             </a:r>
             <a:endParaRPr lang="ko-KR" sz="1600" dirty="0"/>
           </a:p>
@@ -7836,14 +8281,171 @@
       </p:sp>
       <p:sp>
         <p:nvSpPr>
-          <p:cNvPr id="8" name="Shape 5"/>
+          <p:cNvPr id="8" name="Text 5"/>
           <p:cNvSpPr/>
           <p:nvPr/>
         </p:nvSpPr>
         <p:spPr>
           <a:xfrm>
             <a:off x="914400" y="3246120"/>
-            <a:ext cx="16459200" cy="1261872"/>
+            <a:ext cx="16459200" cy="685800"/>
+          </a:xfrm>
+          <a:prstGeom prst="rect">
+            <a:avLst/>
+          </a:prstGeom>
+          <a:noFill/>
+          <a:ln/>
+        </p:spPr>
+        <p:txBody>
+          <a:bodyPr wrap="square" lIns="0" tIns="0" rIns="0" bIns="0" rtlCol="0" anchor="t"/>
+          <a:lstStyle/>
+          <a:p>
+            <a:pPr indent="0" marL="0">
+              <a:buNone/>
+            </a:pPr>
+            <a:r>
+              <a:rPr lang="ko-KR" altLang="en-US" sz="2100" dirty="0">
+                <a:solidFill>
+                  <a:srgbClr val="222222"/>
+                </a:solidFill>
+                <a:latin typeface="Pretendard" pitchFamily="34" charset="0"/>
+                <a:ea typeface="Pretendard" pitchFamily="34" charset="-122"/>
+                <a:cs typeface="Pretendard" pitchFamily="34" charset="-120"/>
+              </a:rPr>
+              <a:t>가평 2MW 청정수소발전 P&amp;ID(FCND-GP-PID-002 REV.2, 2026-07-17). 앞 세 단계는 운전 데이터 없이 끝났습니다.</a:t>
+            </a:r>
+            <a:endParaRPr lang="ko-KR" sz="2100" dirty="0"/>
+          </a:p>
+        </p:txBody>
+      </p:sp>
+      <p:sp>
+        <p:nvSpPr>
+          <p:cNvPr id="9" name="Text 6"/>
+          <p:cNvSpPr/>
+          <p:nvPr/>
+        </p:nvSpPr>
+        <p:spPr>
+          <a:xfrm>
+            <a:off x="914400" y="4069080"/>
+            <a:ext cx="8001000" cy="365760"/>
+          </a:xfrm>
+          <a:prstGeom prst="rect">
+            <a:avLst/>
+          </a:prstGeom>
+          <a:noFill/>
+          <a:ln/>
+        </p:spPr>
+        <p:txBody>
+          <a:bodyPr wrap="square" lIns="0" tIns="0" rIns="0" bIns="0" rtlCol="0" anchor="t"/>
+          <a:lstStyle/>
+          <a:p>
+            <a:pPr algn="ctr" indent="0" marL="0">
+              <a:buNone/>
+            </a:pPr>
+            <a:r>
+              <a:rPr lang="ko-KR" altLang="en-US" sz="1800" b="1" dirty="0">
+                <a:solidFill>
+                  <a:srgbClr val="4081ED"/>
+                </a:solidFill>
+                <a:latin typeface="Pretendard" pitchFamily="34" charset="0"/>
+                <a:ea typeface="Pretendard" pitchFamily="34" charset="-122"/>
+                <a:cs typeface="Pretendard" pitchFamily="34" charset="-120"/>
+              </a:rPr>
+              <a:t>도면·계약만으로 — 완료</a:t>
+            </a:r>
+            <a:endParaRPr lang="ko-KR" sz="1800" dirty="0"/>
+          </a:p>
+        </p:txBody>
+      </p:sp>
+      <p:sp>
+        <p:nvSpPr>
+          <p:cNvPr id="10" name="Shape 7"/>
+          <p:cNvSpPr/>
+          <p:nvPr/>
+        </p:nvSpPr>
+        <p:spPr>
+          <a:xfrm>
+            <a:off x="914400" y="4453128"/>
+            <a:ext cx="8001000" cy="27432"/>
+          </a:xfrm>
+          <a:prstGeom prst="rect">
+            <a:avLst/>
+          </a:prstGeom>
+          <a:solidFill>
+            <a:srgbClr val="3E7EE7"/>
+          </a:solidFill>
+          <a:ln/>
+        </p:spPr>
+      </p:sp>
+      <p:sp>
+        <p:nvSpPr>
+          <p:cNvPr id="11" name="Text 8"/>
+          <p:cNvSpPr/>
+          <p:nvPr/>
+        </p:nvSpPr>
+        <p:spPr>
+          <a:xfrm>
+            <a:off x="9372600" y="4069080"/>
+            <a:ext cx="8001000" cy="365760"/>
+          </a:xfrm>
+          <a:prstGeom prst="rect">
+            <a:avLst/>
+          </a:prstGeom>
+          <a:noFill/>
+          <a:ln/>
+        </p:spPr>
+        <p:txBody>
+          <a:bodyPr wrap="square" lIns="0" tIns="0" rIns="0" bIns="0" rtlCol="0" anchor="t"/>
+          <a:lstStyle/>
+          <a:p>
+            <a:pPr algn="ctr" indent="0" marL="0">
+              <a:buNone/>
+            </a:pPr>
+            <a:r>
+              <a:rPr lang="ko-KR" altLang="en-US" sz="1800" b="1" dirty="0">
+                <a:solidFill>
+                  <a:srgbClr val="5F6368"/>
+                </a:solidFill>
+                <a:latin typeface="Pretendard" pitchFamily="34" charset="0"/>
+                <a:ea typeface="Pretendard" pitchFamily="34" charset="-122"/>
+                <a:cs typeface="Pretendard" pitchFamily="34" charset="-120"/>
+              </a:rPr>
+              <a:t>현장 계기가 붙어야 — 대기</a:t>
+            </a:r>
+            <a:endParaRPr lang="ko-KR" sz="1800" dirty="0"/>
+          </a:p>
+        </p:txBody>
+      </p:sp>
+      <p:sp>
+        <p:nvSpPr>
+          <p:cNvPr id="12" name="Shape 9"/>
+          <p:cNvSpPr/>
+          <p:nvPr/>
+        </p:nvSpPr>
+        <p:spPr>
+          <a:xfrm>
+            <a:off x="9372600" y="4453128"/>
+            <a:ext cx="8001000" cy="27432"/>
+          </a:xfrm>
+          <a:prstGeom prst="rect">
+            <a:avLst/>
+          </a:prstGeom>
+          <a:solidFill>
+            <a:srgbClr val="D9DEE6"/>
+          </a:solidFill>
+          <a:ln/>
+        </p:spPr>
+      </p:sp>
+      <p:sp>
+        <p:nvSpPr>
+          <p:cNvPr id="13" name="Shape 10"/>
+          <p:cNvSpPr/>
+          <p:nvPr/>
+        </p:nvSpPr>
+        <p:spPr>
+          <a:xfrm>
+            <a:off x="914400" y="4617720"/>
+            <a:ext cx="2362200" cy="1417320"/>
           </a:xfrm>
           <a:prstGeom prst="rect">
             <a:avLst/>
@@ -7856,14 +8458,2570 @@
       </p:sp>
       <p:sp>
         <p:nvSpPr>
-          <p:cNvPr id="9" name="Text 6"/>
+          <p:cNvPr id="14" name="Text 11"/>
           <p:cNvSpPr/>
           <p:nvPr/>
         </p:nvSpPr>
         <p:spPr>
           <a:xfrm>
-            <a:off x="1234440" y="3355848"/>
-            <a:ext cx="15819120" cy="1042416"/>
+            <a:off x="1051560" y="4617720"/>
+            <a:ext cx="2087880" cy="1417320"/>
+          </a:xfrm>
+          <a:prstGeom prst="rect">
+            <a:avLst/>
+          </a:prstGeom>
+          <a:noFill/>
+          <a:ln/>
+        </p:spPr>
+        <p:txBody>
+          <a:bodyPr wrap="square" lIns="0" tIns="0" rIns="0" bIns="0" rtlCol="0" anchor="ctr"/>
+          <a:lstStyle/>
+          <a:p>
+            <a:pPr algn="ctr" indent="0" marL="0">
+              <a:spcAft>
+                <a:spcPts val="400"/>
+              </a:spcAft>
+              <a:buNone/>
+            </a:pPr>
+            <a:r>
+              <a:rPr lang="ko-KR" altLang="en-US" sz="2300" b="1" dirty="0">
+                <a:solidFill>
+                  <a:srgbClr val="4081ED"/>
+                </a:solidFill>
+                <a:latin typeface="Pretendard" pitchFamily="34" charset="0"/>
+                <a:ea typeface="Pretendard" pitchFamily="34" charset="-122"/>
+                <a:cs typeface="Pretendard" pitchFamily="34" charset="-120"/>
+              </a:rPr>
+              <a:t>카탈로그 등록</a:t>
+            </a:r>
+            <a:endParaRPr lang="ko-KR" sz="2300" dirty="0"/>
+          </a:p>
+          <a:p>
+            <a:pPr algn="ctr" indent="0" marL="0">
+              <a:buNone/>
+            </a:pPr>
+            <a:r>
+              <a:rPr lang="ko-KR" altLang="en-US" sz="1700" dirty="0">
+                <a:solidFill>
+                  <a:srgbClr val="5F6368"/>
+                </a:solidFill>
+                <a:latin typeface="Pretendard" pitchFamily="34" charset="0"/>
+                <a:ea typeface="Pretendard" pitchFamily="34" charset="-122"/>
+                <a:cs typeface="Pretendard" pitchFamily="34" charset="-120"/>
+              </a:rPr>
+              <a:t>설비종류 8종·계측 39종</a:t>
+            </a:r>
+            <a:endParaRPr lang="ko-KR" sz="2300" dirty="0"/>
+          </a:p>
+        </p:txBody>
+      </p:sp>
+      <p:sp>
+        <p:nvSpPr>
+          <p:cNvPr id="15" name="Text 12"/>
+          <p:cNvSpPr/>
+          <p:nvPr/>
+        </p:nvSpPr>
+        <p:spPr>
+          <a:xfrm>
+            <a:off x="3276600" y="4617720"/>
+            <a:ext cx="457200" cy="1417320"/>
+          </a:xfrm>
+          <a:prstGeom prst="rect">
+            <a:avLst/>
+          </a:prstGeom>
+          <a:noFill/>
+          <a:ln/>
+        </p:spPr>
+        <p:txBody>
+          <a:bodyPr wrap="square" lIns="0" tIns="0" rIns="0" bIns="0" rtlCol="0" anchor="ctr"/>
+          <a:lstStyle/>
+          <a:p>
+            <a:pPr algn="ctr" indent="0" marL="0">
+              <a:buNone/>
+            </a:pPr>
+            <a:r>
+              <a:rPr lang="ko-KR" altLang="en-US" sz="2600" dirty="0">
+                <a:solidFill>
+                  <a:srgbClr val="858585"/>
+                </a:solidFill>
+                <a:latin typeface="Pretendard" pitchFamily="34" charset="0"/>
+                <a:ea typeface="Pretendard" pitchFamily="34" charset="-122"/>
+                <a:cs typeface="Pretendard" pitchFamily="34" charset="-120"/>
+              </a:rPr>
+              <a:t>→</a:t>
+            </a:r>
+            <a:endParaRPr lang="ko-KR" sz="2600" dirty="0"/>
+          </a:p>
+        </p:txBody>
+      </p:sp>
+      <p:sp>
+        <p:nvSpPr>
+          <p:cNvPr id="16" name="Shape 13"/>
+          <p:cNvSpPr/>
+          <p:nvPr/>
+        </p:nvSpPr>
+        <p:spPr>
+          <a:xfrm>
+            <a:off x="3733800" y="4617720"/>
+            <a:ext cx="2362200" cy="1417320"/>
+          </a:xfrm>
+          <a:prstGeom prst="rect">
+            <a:avLst/>
+          </a:prstGeom>
+          <a:solidFill>
+            <a:srgbClr val="EEF3FC"/>
+          </a:solidFill>
+          <a:ln/>
+        </p:spPr>
+      </p:sp>
+      <p:sp>
+        <p:nvSpPr>
+          <p:cNvPr id="17" name="Text 14"/>
+          <p:cNvSpPr/>
+          <p:nvPr/>
+        </p:nvSpPr>
+        <p:spPr>
+          <a:xfrm>
+            <a:off x="3870960" y="4617720"/>
+            <a:ext cx="2087880" cy="1417320"/>
+          </a:xfrm>
+          <a:prstGeom prst="rect">
+            <a:avLst/>
+          </a:prstGeom>
+          <a:noFill/>
+          <a:ln/>
+        </p:spPr>
+        <p:txBody>
+          <a:bodyPr wrap="square" lIns="0" tIns="0" rIns="0" bIns="0" rtlCol="0" anchor="ctr"/>
+          <a:lstStyle/>
+          <a:p>
+            <a:pPr algn="ctr" indent="0" marL="0">
+              <a:spcAft>
+                <a:spcPts val="400"/>
+              </a:spcAft>
+              <a:buNone/>
+            </a:pPr>
+            <a:r>
+              <a:rPr lang="ko-KR" altLang="en-US" sz="2300" b="1" dirty="0">
+                <a:solidFill>
+                  <a:srgbClr val="4081ED"/>
+                </a:solidFill>
+                <a:latin typeface="Pretendard" pitchFamily="34" charset="0"/>
+                <a:ea typeface="Pretendard" pitchFamily="34" charset="-122"/>
+                <a:cs typeface="Pretendard" pitchFamily="34" charset="-120"/>
+              </a:rPr>
+              <a:t>태그 매핑</a:t>
+            </a:r>
+            <a:endParaRPr lang="ko-KR" sz="2300" dirty="0"/>
+          </a:p>
+          <a:p>
+            <a:pPr algn="ctr" indent="0" marL="0">
+              <a:buNone/>
+            </a:pPr>
+            <a:r>
+              <a:rPr lang="ko-KR" altLang="en-US" sz="1700" dirty="0">
+                <a:solidFill>
+                  <a:srgbClr val="5F6368"/>
+                </a:solidFill>
+                <a:latin typeface="Pretendard" pitchFamily="34" charset="0"/>
+                <a:ea typeface="Pretendard" pitchFamily="34" charset="-122"/>
+                <a:cs typeface="Pretendard" pitchFamily="34" charset="-120"/>
+              </a:rPr>
+              <a:t>도면 태그 10점 1:1</a:t>
+            </a:r>
+            <a:endParaRPr lang="ko-KR" sz="2300" dirty="0"/>
+          </a:p>
+        </p:txBody>
+      </p:sp>
+      <p:sp>
+        <p:nvSpPr>
+          <p:cNvPr id="18" name="Text 15"/>
+          <p:cNvSpPr/>
+          <p:nvPr/>
+        </p:nvSpPr>
+        <p:spPr>
+          <a:xfrm>
+            <a:off x="6096000" y="4617720"/>
+            <a:ext cx="457200" cy="1417320"/>
+          </a:xfrm>
+          <a:prstGeom prst="rect">
+            <a:avLst/>
+          </a:prstGeom>
+          <a:noFill/>
+          <a:ln/>
+        </p:spPr>
+        <p:txBody>
+          <a:bodyPr wrap="square" lIns="0" tIns="0" rIns="0" bIns="0" rtlCol="0" anchor="ctr"/>
+          <a:lstStyle/>
+          <a:p>
+            <a:pPr algn="ctr" indent="0" marL="0">
+              <a:buNone/>
+            </a:pPr>
+            <a:r>
+              <a:rPr lang="ko-KR" altLang="en-US" sz="2600" dirty="0">
+                <a:solidFill>
+                  <a:srgbClr val="858585"/>
+                </a:solidFill>
+                <a:latin typeface="Pretendard" pitchFamily="34" charset="0"/>
+                <a:ea typeface="Pretendard" pitchFamily="34" charset="-122"/>
+                <a:cs typeface="Pretendard" pitchFamily="34" charset="-120"/>
+              </a:rPr>
+              <a:t>→</a:t>
+            </a:r>
+            <a:endParaRPr lang="ko-KR" sz="2600" dirty="0"/>
+          </a:p>
+        </p:txBody>
+      </p:sp>
+      <p:sp>
+        <p:nvSpPr>
+          <p:cNvPr id="19" name="Shape 16"/>
+          <p:cNvSpPr/>
+          <p:nvPr/>
+        </p:nvSpPr>
+        <p:spPr>
+          <a:xfrm>
+            <a:off x="6553200" y="4617720"/>
+            <a:ext cx="2362200" cy="1417320"/>
+          </a:xfrm>
+          <a:prstGeom prst="rect">
+            <a:avLst/>
+          </a:prstGeom>
+          <a:solidFill>
+            <a:srgbClr val="EEF3FC"/>
+          </a:solidFill>
+          <a:ln/>
+        </p:spPr>
+      </p:sp>
+      <p:sp>
+        <p:nvSpPr>
+          <p:cNvPr id="20" name="Text 17"/>
+          <p:cNvSpPr/>
+          <p:nvPr/>
+        </p:nvSpPr>
+        <p:spPr>
+          <a:xfrm>
+            <a:off x="6690360" y="4617720"/>
+            <a:ext cx="2087880" cy="1417320"/>
+          </a:xfrm>
+          <a:prstGeom prst="rect">
+            <a:avLst/>
+          </a:prstGeom>
+          <a:noFill/>
+          <a:ln/>
+        </p:spPr>
+        <p:txBody>
+          <a:bodyPr wrap="square" lIns="0" tIns="0" rIns="0" bIns="0" rtlCol="0" anchor="ctr"/>
+          <a:lstStyle/>
+          <a:p>
+            <a:pPr algn="ctr" indent="0" marL="0">
+              <a:spcAft>
+                <a:spcPts val="400"/>
+              </a:spcAft>
+              <a:buNone/>
+            </a:pPr>
+            <a:r>
+              <a:rPr lang="ko-KR" altLang="en-US" sz="2300" b="1" dirty="0">
+                <a:solidFill>
+                  <a:srgbClr val="4081ED"/>
+                </a:solidFill>
+                <a:latin typeface="Pretendard" pitchFamily="34" charset="0"/>
+                <a:ea typeface="Pretendard" pitchFamily="34" charset="-122"/>
+                <a:cs typeface="Pretendard" pitchFamily="34" charset="-120"/>
+              </a:rPr>
+              <a:t>사이트 등록</a:t>
+            </a:r>
+            <a:endParaRPr lang="ko-KR" sz="2300" dirty="0"/>
+          </a:p>
+          <a:p>
+            <a:pPr algn="ctr" indent="0" marL="0">
+              <a:buNone/>
+            </a:pPr>
+            <a:r>
+              <a:rPr lang="ko-KR" altLang="en-US" sz="1700" dirty="0">
+                <a:solidFill>
+                  <a:srgbClr val="5F6368"/>
+                </a:solidFill>
+                <a:latin typeface="Pretendard" pitchFamily="34" charset="0"/>
+                <a:ea typeface="Pretendard" pitchFamily="34" charset="-122"/>
+                <a:cs typeface="Pretendard" pitchFamily="34" charset="-120"/>
+              </a:rPr>
+              <a:t>설비 17개·명판 그대로</a:t>
+            </a:r>
+            <a:endParaRPr lang="ko-KR" sz="2300" dirty="0"/>
+          </a:p>
+        </p:txBody>
+      </p:sp>
+      <p:sp>
+        <p:nvSpPr>
+          <p:cNvPr id="21" name="Text 18"/>
+          <p:cNvSpPr/>
+          <p:nvPr/>
+        </p:nvSpPr>
+        <p:spPr>
+          <a:xfrm>
+            <a:off x="8915400" y="4617720"/>
+            <a:ext cx="457200" cy="1417320"/>
+          </a:xfrm>
+          <a:prstGeom prst="rect">
+            <a:avLst/>
+          </a:prstGeom>
+          <a:noFill/>
+          <a:ln/>
+        </p:spPr>
+        <p:txBody>
+          <a:bodyPr wrap="square" lIns="0" tIns="0" rIns="0" bIns="0" rtlCol="0" anchor="ctr"/>
+          <a:lstStyle/>
+          <a:p>
+            <a:pPr algn="ctr" indent="0" marL="0">
+              <a:buNone/>
+            </a:pPr>
+            <a:r>
+              <a:rPr lang="ko-KR" altLang="en-US" sz="2600" dirty="0">
+                <a:solidFill>
+                  <a:srgbClr val="858585"/>
+                </a:solidFill>
+                <a:latin typeface="Pretendard" pitchFamily="34" charset="0"/>
+                <a:ea typeface="Pretendard" pitchFamily="34" charset="-122"/>
+                <a:cs typeface="Pretendard" pitchFamily="34" charset="-120"/>
+              </a:rPr>
+              <a:t>→</a:t>
+            </a:r>
+            <a:endParaRPr lang="ko-KR" sz="2600" dirty="0"/>
+          </a:p>
+        </p:txBody>
+      </p:sp>
+      <p:sp>
+        <p:nvSpPr>
+          <p:cNvPr id="22" name="Shape 19"/>
+          <p:cNvSpPr/>
+          <p:nvPr/>
+        </p:nvSpPr>
+        <p:spPr>
+          <a:xfrm>
+            <a:off x="9372600" y="4617720"/>
+            <a:ext cx="2362200" cy="1417320"/>
+          </a:xfrm>
+          <a:prstGeom prst="rect">
+            <a:avLst/>
+          </a:prstGeom>
+          <a:solidFill>
+            <a:srgbClr val="FFFFFF"/>
+          </a:solidFill>
+          <a:ln w="12700">
+            <a:solidFill>
+              <a:srgbClr val="D9DEE6"/>
+            </a:solidFill>
+            <a:prstDash val="solid"/>
+          </a:ln>
+        </p:spPr>
+      </p:sp>
+      <p:sp>
+        <p:nvSpPr>
+          <p:cNvPr id="23" name="Text 20"/>
+          <p:cNvSpPr/>
+          <p:nvPr/>
+        </p:nvSpPr>
+        <p:spPr>
+          <a:xfrm>
+            <a:off x="9509760" y="4617720"/>
+            <a:ext cx="2087880" cy="1417320"/>
+          </a:xfrm>
+          <a:prstGeom prst="rect">
+            <a:avLst/>
+          </a:prstGeom>
+          <a:noFill/>
+          <a:ln/>
+        </p:spPr>
+        <p:txBody>
+          <a:bodyPr wrap="square" lIns="0" tIns="0" rIns="0" bIns="0" rtlCol="0" anchor="ctr"/>
+          <a:lstStyle/>
+          <a:p>
+            <a:pPr algn="ctr" indent="0" marL="0">
+              <a:spcAft>
+                <a:spcPts val="400"/>
+              </a:spcAft>
+              <a:buNone/>
+            </a:pPr>
+            <a:r>
+              <a:rPr lang="ko-KR" altLang="en-US" sz="2300" b="1" dirty="0">
+                <a:solidFill>
+                  <a:srgbClr val="222222"/>
+                </a:solidFill>
+                <a:latin typeface="Pretendard" pitchFamily="34" charset="0"/>
+                <a:ea typeface="Pretendard" pitchFamily="34" charset="-122"/>
+                <a:cs typeface="Pretendard" pitchFamily="34" charset="-120"/>
+              </a:rPr>
+              <a:t>수집</a:t>
+            </a:r>
+            <a:endParaRPr lang="ko-KR" sz="2300" dirty="0"/>
+          </a:p>
+          <a:p>
+            <a:pPr algn="ctr" indent="0" marL="0">
+              <a:buNone/>
+            </a:pPr>
+            <a:r>
+              <a:rPr lang="ko-KR" altLang="en-US" sz="1700" dirty="0">
+                <a:solidFill>
+                  <a:srgbClr val="5F6368"/>
+                </a:solidFill>
+                <a:latin typeface="Pretendard" pitchFamily="34" charset="0"/>
+                <a:ea typeface="Pretendard" pitchFamily="34" charset="-122"/>
+                <a:cs typeface="Pretendard" pitchFamily="34" charset="-120"/>
+              </a:rPr>
+              <a:t>원시 보존·미매핑 인박스</a:t>
+            </a:r>
+            <a:endParaRPr lang="ko-KR" sz="2300" dirty="0"/>
+          </a:p>
+        </p:txBody>
+      </p:sp>
+      <p:sp>
+        <p:nvSpPr>
+          <p:cNvPr id="24" name="Text 21"/>
+          <p:cNvSpPr/>
+          <p:nvPr/>
+        </p:nvSpPr>
+        <p:spPr>
+          <a:xfrm>
+            <a:off x="11734800" y="4617720"/>
+            <a:ext cx="457200" cy="1417320"/>
+          </a:xfrm>
+          <a:prstGeom prst="rect">
+            <a:avLst/>
+          </a:prstGeom>
+          <a:noFill/>
+          <a:ln/>
+        </p:spPr>
+        <p:txBody>
+          <a:bodyPr wrap="square" lIns="0" tIns="0" rIns="0" bIns="0" rtlCol="0" anchor="ctr"/>
+          <a:lstStyle/>
+          <a:p>
+            <a:pPr algn="ctr" indent="0" marL="0">
+              <a:buNone/>
+            </a:pPr>
+            <a:r>
+              <a:rPr lang="ko-KR" altLang="en-US" sz="2600" dirty="0">
+                <a:solidFill>
+                  <a:srgbClr val="858585"/>
+                </a:solidFill>
+                <a:latin typeface="Pretendard" pitchFamily="34" charset="0"/>
+                <a:ea typeface="Pretendard" pitchFamily="34" charset="-122"/>
+                <a:cs typeface="Pretendard" pitchFamily="34" charset="-120"/>
+              </a:rPr>
+              <a:t>→</a:t>
+            </a:r>
+            <a:endParaRPr lang="ko-KR" sz="2600" dirty="0"/>
+          </a:p>
+        </p:txBody>
+      </p:sp>
+      <p:sp>
+        <p:nvSpPr>
+          <p:cNvPr id="25" name="Shape 22"/>
+          <p:cNvSpPr/>
+          <p:nvPr/>
+        </p:nvSpPr>
+        <p:spPr>
+          <a:xfrm>
+            <a:off x="12192000" y="4617720"/>
+            <a:ext cx="2362200" cy="1417320"/>
+          </a:xfrm>
+          <a:prstGeom prst="rect">
+            <a:avLst/>
+          </a:prstGeom>
+          <a:solidFill>
+            <a:srgbClr val="FFFFFF"/>
+          </a:solidFill>
+          <a:ln w="12700">
+            <a:solidFill>
+              <a:srgbClr val="D9DEE6"/>
+            </a:solidFill>
+            <a:prstDash val="solid"/>
+          </a:ln>
+        </p:spPr>
+      </p:sp>
+      <p:sp>
+        <p:nvSpPr>
+          <p:cNvPr id="26" name="Text 23"/>
+          <p:cNvSpPr/>
+          <p:nvPr/>
+        </p:nvSpPr>
+        <p:spPr>
+          <a:xfrm>
+            <a:off x="12329160" y="4617720"/>
+            <a:ext cx="2087880" cy="1417320"/>
+          </a:xfrm>
+          <a:prstGeom prst="rect">
+            <a:avLst/>
+          </a:prstGeom>
+          <a:noFill/>
+          <a:ln/>
+        </p:spPr>
+        <p:txBody>
+          <a:bodyPr wrap="square" lIns="0" tIns="0" rIns="0" bIns="0" rtlCol="0" anchor="ctr"/>
+          <a:lstStyle/>
+          <a:p>
+            <a:pPr algn="ctr" indent="0" marL="0">
+              <a:spcAft>
+                <a:spcPts val="400"/>
+              </a:spcAft>
+              <a:buNone/>
+            </a:pPr>
+            <a:r>
+              <a:rPr lang="ko-KR" altLang="en-US" sz="2300" b="1" dirty="0">
+                <a:solidFill>
+                  <a:srgbClr val="222222"/>
+                </a:solidFill>
+                <a:latin typeface="Pretendard" pitchFamily="34" charset="0"/>
+                <a:ea typeface="Pretendard" pitchFamily="34" charset="-122"/>
+                <a:cs typeface="Pretendard" pitchFamily="34" charset="-120"/>
+              </a:rPr>
+              <a:t>분석</a:t>
+            </a:r>
+            <a:endParaRPr lang="ko-KR" sz="2300" dirty="0"/>
+          </a:p>
+          <a:p>
+            <a:pPr algn="ctr" indent="0" marL="0">
+              <a:buNone/>
+            </a:pPr>
+            <a:r>
+              <a:rPr lang="ko-KR" altLang="en-US" sz="1700" dirty="0">
+                <a:solidFill>
+                  <a:srgbClr val="5F6368"/>
+                </a:solidFill>
+                <a:latin typeface="Pretendard" pitchFamily="34" charset="0"/>
+                <a:ea typeface="Pretendard" pitchFamily="34" charset="-122"/>
+                <a:cs typeface="Pretendard" pitchFamily="34" charset="-120"/>
+              </a:rPr>
+              <a:t>탐지기 17종·준비도</a:t>
+            </a:r>
+            <a:endParaRPr lang="ko-KR" sz="2300" dirty="0"/>
+          </a:p>
+        </p:txBody>
+      </p:sp>
+      <p:sp>
+        <p:nvSpPr>
+          <p:cNvPr id="27" name="Text 24"/>
+          <p:cNvSpPr/>
+          <p:nvPr/>
+        </p:nvSpPr>
+        <p:spPr>
+          <a:xfrm>
+            <a:off x="14554200" y="4617720"/>
+            <a:ext cx="457200" cy="1417320"/>
+          </a:xfrm>
+          <a:prstGeom prst="rect">
+            <a:avLst/>
+          </a:prstGeom>
+          <a:noFill/>
+          <a:ln/>
+        </p:spPr>
+        <p:txBody>
+          <a:bodyPr wrap="square" lIns="0" tIns="0" rIns="0" bIns="0" rtlCol="0" anchor="ctr"/>
+          <a:lstStyle/>
+          <a:p>
+            <a:pPr algn="ctr" indent="0" marL="0">
+              <a:buNone/>
+            </a:pPr>
+            <a:r>
+              <a:rPr lang="ko-KR" altLang="en-US" sz="2600" dirty="0">
+                <a:solidFill>
+                  <a:srgbClr val="858585"/>
+                </a:solidFill>
+                <a:latin typeface="Pretendard" pitchFamily="34" charset="0"/>
+                <a:ea typeface="Pretendard" pitchFamily="34" charset="-122"/>
+                <a:cs typeface="Pretendard" pitchFamily="34" charset="-120"/>
+              </a:rPr>
+              <a:t>→</a:t>
+            </a:r>
+            <a:endParaRPr lang="ko-KR" sz="2600" dirty="0"/>
+          </a:p>
+        </p:txBody>
+      </p:sp>
+      <p:sp>
+        <p:nvSpPr>
+          <p:cNvPr id="28" name="Shape 25"/>
+          <p:cNvSpPr/>
+          <p:nvPr/>
+        </p:nvSpPr>
+        <p:spPr>
+          <a:xfrm>
+            <a:off x="15011400" y="4617720"/>
+            <a:ext cx="2362200" cy="1417320"/>
+          </a:xfrm>
+          <a:prstGeom prst="rect">
+            <a:avLst/>
+          </a:prstGeom>
+          <a:solidFill>
+            <a:srgbClr val="FFFFFF"/>
+          </a:solidFill>
+          <a:ln w="12700">
+            <a:solidFill>
+              <a:srgbClr val="D9DEE6"/>
+            </a:solidFill>
+            <a:prstDash val="solid"/>
+          </a:ln>
+        </p:spPr>
+      </p:sp>
+      <p:sp>
+        <p:nvSpPr>
+          <p:cNvPr id="29" name="Text 26"/>
+          <p:cNvSpPr/>
+          <p:nvPr/>
+        </p:nvSpPr>
+        <p:spPr>
+          <a:xfrm>
+            <a:off x="15148560" y="4617720"/>
+            <a:ext cx="2087880" cy="1417320"/>
+          </a:xfrm>
+          <a:prstGeom prst="rect">
+            <a:avLst/>
+          </a:prstGeom>
+          <a:noFill/>
+          <a:ln/>
+        </p:spPr>
+        <p:txBody>
+          <a:bodyPr wrap="square" lIns="0" tIns="0" rIns="0" bIns="0" rtlCol="0" anchor="ctr"/>
+          <a:lstStyle/>
+          <a:p>
+            <a:pPr algn="ctr" indent="0" marL="0">
+              <a:spcAft>
+                <a:spcPts val="400"/>
+              </a:spcAft>
+              <a:buNone/>
+            </a:pPr>
+            <a:r>
+              <a:rPr lang="ko-KR" altLang="en-US" sz="2300" b="1" dirty="0">
+                <a:solidFill>
+                  <a:srgbClr val="222222"/>
+                </a:solidFill>
+                <a:latin typeface="Pretendard" pitchFamily="34" charset="0"/>
+                <a:ea typeface="Pretendard" pitchFamily="34" charset="-122"/>
+                <a:cs typeface="Pretendard" pitchFamily="34" charset="-120"/>
+              </a:rPr>
+              <a:t>리포트</a:t>
+            </a:r>
+            <a:endParaRPr lang="ko-KR" sz="2300" dirty="0"/>
+          </a:p>
+          <a:p>
+            <a:pPr algn="ctr" indent="0" marL="0">
+              <a:buNone/>
+            </a:pPr>
+            <a:r>
+              <a:rPr lang="ko-KR" altLang="en-US" sz="1700" dirty="0">
+                <a:solidFill>
+                  <a:srgbClr val="5F6368"/>
+                </a:solidFill>
+                <a:latin typeface="Pretendard" pitchFamily="34" charset="0"/>
+                <a:ea typeface="Pretendard" pitchFamily="34" charset="-122"/>
+                <a:cs typeface="Pretendard" pitchFamily="34" charset="-120"/>
+              </a:rPr>
+              <a:t>초안→검토→PDF</a:t>
+            </a:r>
+            <a:endParaRPr lang="ko-KR" sz="2300" dirty="0"/>
+          </a:p>
+        </p:txBody>
+      </p:sp>
+      <p:sp>
+        <p:nvSpPr>
+          <p:cNvPr id="30" name="Shape 27"/>
+          <p:cNvSpPr/>
+          <p:nvPr/>
+        </p:nvSpPr>
+        <p:spPr>
+          <a:xfrm>
+            <a:off x="914400" y="6446520"/>
+            <a:ext cx="5303520" cy="2788920"/>
+          </a:xfrm>
+          <a:prstGeom prst="rect">
+            <a:avLst/>
+          </a:prstGeom>
+          <a:solidFill>
+            <a:srgbClr val="FFFFFF"/>
+          </a:solidFill>
+          <a:ln w="12700">
+            <a:solidFill>
+              <a:srgbClr val="D9DEE6"/>
+            </a:solidFill>
+            <a:prstDash val="solid"/>
+          </a:ln>
+        </p:spPr>
+      </p:sp>
+      <p:sp>
+        <p:nvSpPr>
+          <p:cNvPr id="31" name="Shape 28"/>
+          <p:cNvSpPr/>
+          <p:nvPr/>
+        </p:nvSpPr>
+        <p:spPr>
+          <a:xfrm>
+            <a:off x="914400" y="6446520"/>
+            <a:ext cx="5303520" cy="64008"/>
+          </a:xfrm>
+          <a:prstGeom prst="rect">
+            <a:avLst/>
+          </a:prstGeom>
+          <a:solidFill>
+            <a:srgbClr val="3E7EE7"/>
+          </a:solidFill>
+          <a:ln/>
+        </p:spPr>
+      </p:sp>
+      <p:sp>
+        <p:nvSpPr>
+          <p:cNvPr id="32" name="Text 29"/>
+          <p:cNvSpPr/>
+          <p:nvPr/>
+        </p:nvSpPr>
+        <p:spPr>
+          <a:xfrm>
+            <a:off x="1188720" y="6720840"/>
+            <a:ext cx="4754880" cy="2377440"/>
+          </a:xfrm>
+          <a:prstGeom prst="rect">
+            <a:avLst/>
+          </a:prstGeom>
+          <a:noFill/>
+          <a:ln/>
+        </p:spPr>
+        <p:txBody>
+          <a:bodyPr wrap="square" lIns="0" tIns="0" rIns="0" bIns="0" rtlCol="0" anchor="t"/>
+          <a:lstStyle/>
+          <a:p>
+            <a:pPr indent="0" marL="0">
+              <a:spcAft>
+                <a:spcPts val="200"/>
+              </a:spcAft>
+              <a:buNone/>
+            </a:pPr>
+            <a:r>
+              <a:rPr lang="ko-KR" altLang="en-US" sz="1600" b="1" dirty="0">
+                <a:solidFill>
+                  <a:srgbClr val="5F6368"/>
+                </a:solidFill>
+                <a:latin typeface="Pretendard" pitchFamily="34" charset="0"/>
+                <a:ea typeface="Pretendard" pitchFamily="34" charset="-122"/>
+                <a:cs typeface="Pretendard" pitchFamily="34" charset="-120"/>
+              </a:rPr>
+              <a:t>도면</a:t>
+            </a:r>
+            <a:endParaRPr lang="ko-KR" sz="1600" dirty="0"/>
+          </a:p>
+          <a:p>
+            <a:pPr indent="0" marL="0">
+              <a:spcAft>
+                <a:spcPts val="1000"/>
+              </a:spcAft>
+              <a:buNone/>
+            </a:pPr>
+            <a:r>
+              <a:rPr lang="ko-KR" altLang="en-US" sz="2300" b="1" dirty="0">
+                <a:solidFill>
+                  <a:srgbClr val="4081ED"/>
+                </a:solidFill>
+                <a:latin typeface="Pretendard" pitchFamily="34" charset="0"/>
+                <a:ea typeface="Pretendard" pitchFamily="34" charset="-122"/>
+                <a:cs typeface="Pretendard" pitchFamily="34" charset="-120"/>
+              </a:rPr>
+              <a:t>설비 구성</a:t>
+            </a:r>
+            <a:endParaRPr lang="ko-KR" sz="1600" dirty="0"/>
+          </a:p>
+          <a:p>
+            <a:pPr marL="279400" indent="-279400">
+              <a:spcAft>
+                <a:spcPts val="800"/>
+              </a:spcAft>
+              <a:buSzPct val="100000"/>
+              <a:buChar char="•"/>
+            </a:pPr>
+            <a:r>
+              <a:rPr lang="ko-KR" altLang="en-US" sz="1700" dirty="0">
+                <a:solidFill>
+                  <a:srgbClr val="222222"/>
+                </a:solidFill>
+                <a:latin typeface="Pretendard" pitchFamily="34" charset="0"/>
+                <a:ea typeface="Pretendard" pitchFamily="34" charset="-122"/>
+                <a:cs typeface="Pretendard" pitchFamily="34" charset="-120"/>
+              </a:rPr>
+              <a:t>태양광 1.5 MWp · ESS 2.0 MWh</a:t>
+            </a:r>
+            <a:endParaRPr lang="ko-KR" sz="1600" dirty="0"/>
+          </a:p>
+          <a:p>
+            <a:pPr marL="279400" indent="-279400">
+              <a:spcAft>
+                <a:spcPts val="800"/>
+              </a:spcAft>
+              <a:buSzPct val="100000"/>
+              <a:buChar char="•"/>
+            </a:pPr>
+            <a:r>
+              <a:rPr lang="ko-KR" altLang="en-US" sz="1700" dirty="0">
+                <a:solidFill>
+                  <a:srgbClr val="222222"/>
+                </a:solidFill>
+                <a:latin typeface="Pretendard" pitchFamily="34" charset="0"/>
+                <a:ea typeface="Pretendard" pitchFamily="34" charset="-122"/>
+                <a:cs typeface="Pretendard" pitchFamily="34" charset="-120"/>
+              </a:rPr>
+              <a:t>PEM 수전해 2.5 MW · H₂ 500 Nm³/h @30 bar</a:t>
+            </a:r>
+            <a:endParaRPr lang="ko-KR" sz="1600" dirty="0"/>
+          </a:p>
+          <a:p>
+            <a:pPr marL="279400" indent="-279400">
+              <a:spcAft>
+                <a:spcPts val="800"/>
+              </a:spcAft>
+              <a:buSzPct val="100000"/>
+              <a:buChar char="•"/>
+            </a:pPr>
+            <a:r>
+              <a:rPr lang="ko-KR" altLang="en-US" sz="1700" dirty="0">
+                <a:solidFill>
+                  <a:srgbClr val="222222"/>
+                </a:solidFill>
+                <a:latin typeface="Pretendard" pitchFamily="34" charset="0"/>
+                <a:ea typeface="Pretendard" pitchFamily="34" charset="-122"/>
+                <a:cs typeface="Pretendard" pitchFamily="34" charset="-120"/>
+              </a:rPr>
+              <a:t>버퍼 30 bar·50 m³ → 감압 30→0.8 bar</a:t>
+            </a:r>
+            <a:endParaRPr lang="ko-KR" sz="1600" dirty="0"/>
+          </a:p>
+          <a:p>
+            <a:pPr marL="279400" indent="-279400">
+              <a:spcAft>
+                <a:spcPts val="800"/>
+              </a:spcAft>
+              <a:buSzPct val="100000"/>
+              <a:buChar char="•"/>
+            </a:pPr>
+            <a:r>
+              <a:rPr lang="ko-KR" altLang="en-US" sz="1700" dirty="0">
+                <a:solidFill>
+                  <a:srgbClr val="222222"/>
+                </a:solidFill>
+                <a:latin typeface="Pretendard" pitchFamily="34" charset="0"/>
+                <a:ea typeface="Pretendard" pitchFamily="34" charset="-122"/>
+                <a:cs typeface="Pretendard" pitchFamily="34" charset="-120"/>
+              </a:rPr>
+              <a:t>PEM 연료전지 2.0 MW · H₂ 1,340 Nm³/h</a:t>
+            </a:r>
+            <a:endParaRPr lang="ko-KR" sz="1600" dirty="0"/>
+          </a:p>
+        </p:txBody>
+      </p:sp>
+      <p:sp>
+        <p:nvSpPr>
+          <p:cNvPr id="33" name="Shape 30"/>
+          <p:cNvSpPr/>
+          <p:nvPr/>
+        </p:nvSpPr>
+        <p:spPr>
+          <a:xfrm>
+            <a:off x="6492240" y="6446520"/>
+            <a:ext cx="5303520" cy="2788920"/>
+          </a:xfrm>
+          <a:prstGeom prst="rect">
+            <a:avLst/>
+          </a:prstGeom>
+          <a:solidFill>
+            <a:srgbClr val="FFFFFF"/>
+          </a:solidFill>
+          <a:ln w="12700">
+            <a:solidFill>
+              <a:srgbClr val="D9DEE6"/>
+            </a:solidFill>
+            <a:prstDash val="solid"/>
+          </a:ln>
+        </p:spPr>
+      </p:sp>
+      <p:sp>
+        <p:nvSpPr>
+          <p:cNvPr id="34" name="Shape 31"/>
+          <p:cNvSpPr/>
+          <p:nvPr/>
+        </p:nvSpPr>
+        <p:spPr>
+          <a:xfrm>
+            <a:off x="6492240" y="6446520"/>
+            <a:ext cx="5303520" cy="64008"/>
+          </a:xfrm>
+          <a:prstGeom prst="rect">
+            <a:avLst/>
+          </a:prstGeom>
+          <a:solidFill>
+            <a:srgbClr val="3E7EE7"/>
+          </a:solidFill>
+          <a:ln/>
+        </p:spPr>
+      </p:sp>
+      <p:sp>
+        <p:nvSpPr>
+          <p:cNvPr id="35" name="Text 32"/>
+          <p:cNvSpPr/>
+          <p:nvPr/>
+        </p:nvSpPr>
+        <p:spPr>
+          <a:xfrm>
+            <a:off x="6766560" y="6720840"/>
+            <a:ext cx="4754880" cy="2377440"/>
+          </a:xfrm>
+          <a:prstGeom prst="rect">
+            <a:avLst/>
+          </a:prstGeom>
+          <a:noFill/>
+          <a:ln/>
+        </p:spPr>
+        <p:txBody>
+          <a:bodyPr wrap="square" lIns="0" tIns="0" rIns="0" bIns="0" rtlCol="0" anchor="t"/>
+          <a:lstStyle/>
+          <a:p>
+            <a:pPr indent="0" marL="0">
+              <a:spcAft>
+                <a:spcPts val="200"/>
+              </a:spcAft>
+              <a:buNone/>
+            </a:pPr>
+            <a:r>
+              <a:rPr lang="ko-KR" altLang="en-US" sz="1600" b="1" dirty="0">
+                <a:solidFill>
+                  <a:srgbClr val="5F6368"/>
+                </a:solidFill>
+                <a:latin typeface="Pretendard" pitchFamily="34" charset="0"/>
+                <a:ea typeface="Pretendard" pitchFamily="34" charset="-122"/>
+                <a:cs typeface="Pretendard" pitchFamily="34" charset="-120"/>
+              </a:rPr>
+              <a:t>매핑</a:t>
+            </a:r>
+            <a:endParaRPr lang="ko-KR" sz="1600" dirty="0"/>
+          </a:p>
+          <a:p>
+            <a:pPr indent="0" marL="0">
+              <a:spcAft>
+                <a:spcPts val="1000"/>
+              </a:spcAft>
+              <a:buNone/>
+            </a:pPr>
+            <a:r>
+              <a:rPr lang="ko-KR" altLang="en-US" sz="2300" b="1" dirty="0">
+                <a:solidFill>
+                  <a:srgbClr val="4081ED"/>
+                </a:solidFill>
+                <a:latin typeface="Pretendard" pitchFamily="34" charset="0"/>
+                <a:ea typeface="Pretendard" pitchFamily="34" charset="-122"/>
+                <a:cs typeface="Pretendard" pitchFamily="34" charset="-120"/>
+              </a:rPr>
+              <a:t>바로 받을 수 있는 것</a:t>
+            </a:r>
+            <a:endParaRPr lang="ko-KR" sz="1600" dirty="0"/>
+          </a:p>
+          <a:p>
+            <a:pPr marL="279400" indent="-279400">
+              <a:spcAft>
+                <a:spcPts val="800"/>
+              </a:spcAft>
+              <a:buSzPct val="100000"/>
+              <a:buChar char="•"/>
+            </a:pPr>
+            <a:r>
+              <a:rPr lang="ko-KR" altLang="en-US" sz="1700" dirty="0">
+                <a:solidFill>
+                  <a:srgbClr val="222222"/>
+                </a:solidFill>
+                <a:latin typeface="Pretendard" pitchFamily="34" charset="0"/>
+                <a:ea typeface="Pretendard" pitchFamily="34" charset="-122"/>
+                <a:cs typeface="Pretendard" pitchFamily="34" charset="-120"/>
+              </a:rPr>
+              <a:t>계장 태그 10점 — 압력 3·유량 3·온도 3·수위 1</a:t>
+            </a:r>
+            <a:endParaRPr lang="ko-KR" sz="1600" dirty="0"/>
+          </a:p>
+          <a:p>
+            <a:pPr marL="279400" indent="-279400">
+              <a:spcAft>
+                <a:spcPts val="800"/>
+              </a:spcAft>
+              <a:buSzPct val="100000"/>
+              <a:buChar char="•"/>
+            </a:pPr>
+            <a:r>
+              <a:rPr lang="ko-KR" altLang="en-US" sz="1700" dirty="0">
+                <a:solidFill>
+                  <a:srgbClr val="222222"/>
+                </a:solidFill>
+                <a:latin typeface="Pretendard" pitchFamily="34" charset="0"/>
+                <a:ea typeface="Pretendard" pitchFamily="34" charset="-122"/>
+                <a:cs typeface="Pretendard" pitchFamily="34" charset="-120"/>
+              </a:rPr>
+              <a:t>모두 기존 계측 항목에 그대로 매핑</a:t>
+            </a:r>
+            <a:endParaRPr lang="ko-KR" sz="1600" dirty="0"/>
+          </a:p>
+          <a:p>
+            <a:pPr marL="279400" indent="-279400">
+              <a:spcAft>
+                <a:spcPts val="800"/>
+              </a:spcAft>
+              <a:buSzPct val="100000"/>
+              <a:buChar char="•"/>
+            </a:pPr>
+            <a:r>
+              <a:rPr lang="ko-KR" altLang="en-US" sz="1700" dirty="0">
+                <a:solidFill>
+                  <a:srgbClr val="222222"/>
+                </a:solidFill>
+                <a:latin typeface="Pretendard" pitchFamily="34" charset="0"/>
+                <a:ea typeface="Pretendard" pitchFamily="34" charset="-122"/>
+                <a:cs typeface="Pretendard" pitchFamily="34" charset="-120"/>
+              </a:rPr>
+              <a:t>산소·폐열·수처리·감압·반입은 설비종류부터 신설</a:t>
+            </a:r>
+            <a:endParaRPr lang="ko-KR" sz="1600" dirty="0"/>
+          </a:p>
+        </p:txBody>
+      </p:sp>
+      <p:sp>
+        <p:nvSpPr>
+          <p:cNvPr id="36" name="Shape 33"/>
+          <p:cNvSpPr/>
+          <p:nvPr/>
+        </p:nvSpPr>
+        <p:spPr>
+          <a:xfrm>
+            <a:off x="12070080" y="6446520"/>
+            <a:ext cx="5303520" cy="2788920"/>
+          </a:xfrm>
+          <a:prstGeom prst="rect">
+            <a:avLst/>
+          </a:prstGeom>
+          <a:solidFill>
+            <a:srgbClr val="FFFFFF"/>
+          </a:solidFill>
+          <a:ln w="12700">
+            <a:solidFill>
+              <a:srgbClr val="D9DEE6"/>
+            </a:solidFill>
+            <a:prstDash val="solid"/>
+          </a:ln>
+        </p:spPr>
+      </p:sp>
+      <p:sp>
+        <p:nvSpPr>
+          <p:cNvPr id="37" name="Shape 34"/>
+          <p:cNvSpPr/>
+          <p:nvPr/>
+        </p:nvSpPr>
+        <p:spPr>
+          <a:xfrm>
+            <a:off x="12070080" y="6446520"/>
+            <a:ext cx="5303520" cy="64008"/>
+          </a:xfrm>
+          <a:prstGeom prst="rect">
+            <a:avLst/>
+          </a:prstGeom>
+          <a:solidFill>
+            <a:srgbClr val="3E7EE7"/>
+          </a:solidFill>
+          <a:ln/>
+        </p:spPr>
+      </p:sp>
+      <p:sp>
+        <p:nvSpPr>
+          <p:cNvPr id="38" name="Text 35"/>
+          <p:cNvSpPr/>
+          <p:nvPr/>
+        </p:nvSpPr>
+        <p:spPr>
+          <a:xfrm>
+            <a:off x="12344400" y="6720840"/>
+            <a:ext cx="4754880" cy="2377440"/>
+          </a:xfrm>
+          <a:prstGeom prst="rect">
+            <a:avLst/>
+          </a:prstGeom>
+          <a:noFill/>
+          <a:ln/>
+        </p:spPr>
+        <p:txBody>
+          <a:bodyPr wrap="square" lIns="0" tIns="0" rIns="0" bIns="0" rtlCol="0" anchor="t"/>
+          <a:lstStyle/>
+          <a:p>
+            <a:pPr indent="0" marL="0">
+              <a:spcAft>
+                <a:spcPts val="200"/>
+              </a:spcAft>
+              <a:buNone/>
+            </a:pPr>
+            <a:r>
+              <a:rPr lang="ko-KR" altLang="en-US" sz="1600" b="1" dirty="0">
+                <a:solidFill>
+                  <a:srgbClr val="5F6368"/>
+                </a:solidFill>
+                <a:latin typeface="Pretendard" pitchFamily="34" charset="0"/>
+                <a:ea typeface="Pretendard" pitchFamily="34" charset="-122"/>
+                <a:cs typeface="Pretendard" pitchFamily="34" charset="-120"/>
+              </a:rPr>
+              <a:t>공백</a:t>
+            </a:r>
+            <a:endParaRPr lang="ko-KR" sz="1600" dirty="0"/>
+          </a:p>
+          <a:p>
+            <a:pPr indent="0" marL="0">
+              <a:spcAft>
+                <a:spcPts val="1000"/>
+              </a:spcAft>
+              <a:buNone/>
+            </a:pPr>
+            <a:r>
+              <a:rPr lang="ko-KR" altLang="en-US" sz="2300" b="1" dirty="0">
+                <a:solidFill>
+                  <a:srgbClr val="4081ED"/>
+                </a:solidFill>
+                <a:latin typeface="Pretendard" pitchFamily="34" charset="0"/>
+                <a:ea typeface="Pretendard" pitchFamily="34" charset="-122"/>
+                <a:cs typeface="Pretendard" pitchFamily="34" charset="-120"/>
+              </a:rPr>
+              <a:t>신설 요청</a:t>
+            </a:r>
+            <a:endParaRPr lang="ko-KR" sz="1600" dirty="0"/>
+          </a:p>
+          <a:p>
+            <a:pPr marL="279400" indent="-279400">
+              <a:spcAft>
+                <a:spcPts val="800"/>
+              </a:spcAft>
+              <a:buSzPct val="100000"/>
+              <a:buChar char="•"/>
+            </a:pPr>
+            <a:r>
+              <a:rPr lang="ko-KR" altLang="en-US" sz="1700" dirty="0">
+                <a:solidFill>
+                  <a:srgbClr val="222222"/>
+                </a:solidFill>
+                <a:latin typeface="Pretendard" pitchFamily="34" charset="0"/>
+                <a:ea typeface="Pretendard" pitchFamily="34" charset="-122"/>
+                <a:cs typeface="Pretendard" pitchFamily="34" charset="-120"/>
+              </a:rPr>
+              <a:t>52행(필수 37·권장 15) — 계기 39점</a:t>
+            </a:r>
+            <a:endParaRPr lang="ko-KR" sz="1600" dirty="0"/>
+          </a:p>
+          <a:p>
+            <a:pPr marL="279400" indent="-279400">
+              <a:spcAft>
+                <a:spcPts val="800"/>
+              </a:spcAft>
+              <a:buSzPct val="100000"/>
+              <a:buChar char="•"/>
+            </a:pPr>
+            <a:r>
+              <a:rPr lang="ko-KR" altLang="en-US" sz="1700" dirty="0">
+                <a:solidFill>
+                  <a:srgbClr val="222222"/>
+                </a:solidFill>
+                <a:latin typeface="Pretendard" pitchFamily="34" charset="0"/>
+                <a:ea typeface="Pretendard" pitchFamily="34" charset="-122"/>
+                <a:cs typeface="Pretendard" pitchFamily="34" charset="-120"/>
+              </a:rPr>
+              <a:t>다섯 점이 없으면 해당 영역 판정 자체가 불가</a:t>
+            </a:r>
+            <a:endParaRPr lang="ko-KR" sz="1600" dirty="0"/>
+          </a:p>
+          <a:p>
+            <a:pPr marL="279400" indent="-279400">
+              <a:spcAft>
+                <a:spcPts val="800"/>
+              </a:spcAft>
+              <a:buSzPct val="100000"/>
+              <a:buChar char="•"/>
+            </a:pPr>
+            <a:r>
+              <a:rPr lang="ko-KR" altLang="en-US" sz="1700" dirty="0">
+                <a:solidFill>
+                  <a:srgbClr val="222222"/>
+                </a:solidFill>
+                <a:latin typeface="Pretendard" pitchFamily="34" charset="0"/>
+                <a:ea typeface="Pretendard" pitchFamily="34" charset="-122"/>
+                <a:cs typeface="Pretendard" pitchFamily="34" charset="-120"/>
+              </a:rPr>
+              <a:t>계기는 설계 단계에서만 싸다 — REV.3 전에 송부</a:t>
+            </a:r>
+            <a:endParaRPr lang="ko-KR" sz="1600" dirty="0"/>
+          </a:p>
+        </p:txBody>
+      </p:sp>
+    </p:spTree>
+  </p:cSld>
+  <p:clrMapOvr>
+    <a:masterClrMapping/>
+  </p:clrMapOvr>
+</p:sld>
+</file>
+
+<file path=ppt/slides/slide16.xml><?xml version="1.0" encoding="utf-8"?>
+<p:sld xmlns:a="http://schemas.openxmlformats.org/drawingml/2006/main" xmlns:r="http://schemas.openxmlformats.org/officeDocument/2006/relationships" xmlns:p="http://schemas.openxmlformats.org/presentationml/2006/main">
+  <p:cSld name="Slide 16">
+    <p:bg>
+      <p:bgPr>
+        <a:solidFill>
+          <a:srgbClr val="FAFAFA"/>
+        </a:solidFill>
+      </p:bgPr>
+    </p:bg>
+    <p:spTree>
+      <p:nvGrpSpPr>
+        <p:cNvPr id="1" name=""/>
+        <p:cNvGrpSpPr/>
+        <p:nvPr/>
+      </p:nvGrpSpPr>
+      <p:grpSpPr>
+        <a:xfrm>
+          <a:off x="0" y="0"/>
+          <a:ext cx="0" cy="0"/>
+          <a:chOff x="0" y="0"/>
+          <a:chExt cx="0" cy="0"/>
+        </a:xfrm>
+      </p:grpSpPr>
+      <p:pic>
+        <p:nvPicPr>
+          <p:cNvPr id="2" name="Image 0" descr="C:\Users\jungm\Desktop\projects\simple\solar-dashboard\docs\reports\_source\first-logo.png">    </p:cNvPr>
+          <p:cNvPicPr>
+            <a:picLocks noChangeAspect="1"/>
+          </p:cNvPicPr>
+          <p:nvPr/>
+        </p:nvPicPr>
+        <p:blipFill>
+          <a:blip r:embed="rId1"/>
+          <a:stretch>
+            <a:fillRect/>
+          </a:stretch>
+        </p:blipFill>
+        <p:spPr>
+          <a:xfrm>
+            <a:off x="14950440" y="502920"/>
+            <a:ext cx="2468880" cy="384048"/>
+          </a:xfrm>
+          <a:prstGeom prst="rect">
+            <a:avLst/>
+          </a:prstGeom>
+        </p:spPr>
+      </p:pic>
+      <p:sp>
+        <p:nvSpPr>
+          <p:cNvPr id="3" name="Text 0"/>
+          <p:cNvSpPr/>
+          <p:nvPr/>
+        </p:nvSpPr>
+        <p:spPr>
+          <a:xfrm>
+            <a:off x="914400" y="566928"/>
+            <a:ext cx="4572000" cy="1051560"/>
+          </a:xfrm>
+          <a:prstGeom prst="rect">
+            <a:avLst/>
+          </a:prstGeom>
+          <a:noFill/>
+          <a:ln/>
+        </p:spPr>
+        <p:txBody>
+          <a:bodyPr wrap="square" lIns="0" tIns="0" rIns="0" bIns="0" rtlCol="0" anchor="b"/>
+          <a:lstStyle/>
+          <a:p>
+            <a:pPr indent="0" marL="0">
+              <a:buNone/>
+            </a:pPr>
+            <a:r>
+              <a:rPr lang="ko-KR" altLang="en-US" sz="6600" b="1" dirty="0">
+                <a:solidFill>
+                  <a:srgbClr val="4081ED"/>
+                </a:solidFill>
+                <a:latin typeface="Pretendard" pitchFamily="34" charset="0"/>
+                <a:ea typeface="Pretendard" pitchFamily="34" charset="-122"/>
+                <a:cs typeface="Pretendard" pitchFamily="34" charset="-120"/>
+              </a:rPr>
+              <a:t>15</a:t>
+            </a:r>
+            <a:endParaRPr lang="ko-KR" sz="6600" dirty="0"/>
+          </a:p>
+        </p:txBody>
+      </p:sp>
+      <p:sp>
+        <p:nvSpPr>
+          <p:cNvPr id="4" name="Text 1"/>
+          <p:cNvSpPr/>
+          <p:nvPr/>
+        </p:nvSpPr>
+        <p:spPr>
+          <a:xfrm>
+            <a:off x="914400" y="1600200"/>
+            <a:ext cx="16002000" cy="1234440"/>
+          </a:xfrm>
+          <a:prstGeom prst="rect">
+            <a:avLst/>
+          </a:prstGeom>
+          <a:noFill/>
+          <a:ln/>
+        </p:spPr>
+        <p:txBody>
+          <a:bodyPr wrap="square" lIns="0" tIns="0" rIns="0" bIns="0" rtlCol="0" anchor="ctr"/>
+          <a:lstStyle/>
+          <a:p>
+            <a:pPr indent="0" marL="0">
+              <a:buNone/>
+            </a:pPr>
+            <a:r>
+              <a:rPr lang="ko-KR" altLang="en-US" sz="4400" b="1" dirty="0">
+                <a:solidFill>
+                  <a:srgbClr val="222222"/>
+                </a:solidFill>
+                <a:latin typeface="Pretendard" pitchFamily="34" charset="0"/>
+                <a:ea typeface="Pretendard" pitchFamily="34" charset="-122"/>
+                <a:cs typeface="Pretendard" pitchFamily="34" charset="-120"/>
+              </a:rPr>
+              <a:t>도면 수치를 역산하니 설계 검토 사항 3건이 나왔습니다</a:t>
+            </a:r>
+            <a:endParaRPr lang="ko-KR" sz="4400" dirty="0"/>
+          </a:p>
+        </p:txBody>
+      </p:sp>
+      <p:sp>
+        <p:nvSpPr>
+          <p:cNvPr id="5" name="Shape 2"/>
+          <p:cNvSpPr/>
+          <p:nvPr/>
+        </p:nvSpPr>
+        <p:spPr>
+          <a:xfrm>
+            <a:off x="914400" y="2852928"/>
+            <a:ext cx="16459200" cy="18288"/>
+          </a:xfrm>
+          <a:prstGeom prst="rect">
+            <a:avLst/>
+          </a:prstGeom>
+          <a:solidFill>
+            <a:srgbClr val="D9DEE6"/>
+          </a:solidFill>
+          <a:ln/>
+        </p:spPr>
+      </p:sp>
+      <p:sp>
+        <p:nvSpPr>
+          <p:cNvPr id="6" name="Shape 3"/>
+          <p:cNvSpPr/>
+          <p:nvPr/>
+        </p:nvSpPr>
+        <p:spPr>
+          <a:xfrm>
+            <a:off x="914400" y="2825496"/>
+            <a:ext cx="2834640" cy="64008"/>
+          </a:xfrm>
+          <a:prstGeom prst="rect">
+            <a:avLst/>
+          </a:prstGeom>
+          <a:solidFill>
+            <a:srgbClr val="3E7EE7"/>
+          </a:solidFill>
+          <a:ln/>
+        </p:spPr>
+      </p:sp>
+      <p:sp>
+        <p:nvSpPr>
+          <p:cNvPr id="7" name="Text 4"/>
+          <p:cNvSpPr/>
+          <p:nvPr/>
+        </p:nvSpPr>
+        <p:spPr>
+          <a:xfrm>
+            <a:off x="914400" y="9555480"/>
+            <a:ext cx="16459200" cy="365760"/>
+          </a:xfrm>
+          <a:prstGeom prst="rect">
+            <a:avLst/>
+          </a:prstGeom>
+          <a:noFill/>
+          <a:ln/>
+        </p:spPr>
+        <p:txBody>
+          <a:bodyPr wrap="square" lIns="0" tIns="0" rIns="0" bIns="0" rtlCol="0" anchor="ctr"/>
+          <a:lstStyle/>
+          <a:p>
+            <a:pPr indent="0" marL="0">
+              <a:buNone/>
+            </a:pPr>
+            <a:r>
+              <a:rPr lang="ko-KR" altLang="en-US" sz="1600" dirty="0">
+                <a:solidFill>
+                  <a:srgbClr val="5F6368"/>
+                </a:solidFill>
+                <a:latin typeface="Pretendard" pitchFamily="34" charset="0"/>
+                <a:ea typeface="Pretendard" pitchFamily="34" charset="-122"/>
+                <a:cs typeface="Pretendard" pitchFamily="34" charset="-120"/>
+              </a:rPr>
+              <a:t>※ 모든 수치는 도면 표기값에서 역산한 계산값이며 실측이 아닙니다. 계산 근거와 출처는 동봉 보고서 7장</a:t>
+            </a:r>
+            <a:endParaRPr lang="ko-KR" sz="1600" dirty="0"/>
+          </a:p>
+        </p:txBody>
+      </p:sp>
+      <p:graphicFrame>
+        <p:nvGraphicFramePr>
+          <p:cNvPr id="17" name="Table 0"/>
+          <p:cNvGraphicFramePr>
+            <a:graphicFrameLocks noGrp="1"/>
+          </p:cNvGraphicFramePr>
+          <p:nvPr>
+            <p:extLst>
+              <p:ext uri="{D42A27DB-BD31-4B8C-83A1-F6EECF244321}">
+                <p14:modId xmlns:p14="http://schemas.microsoft.com/office/powerpoint/2010/main" val="1579011935"/>
+              </p:ext>
+            </p:extLst>
+          </p:nvPr>
+        </p:nvGraphicFramePr>
+        <p:xfrm>
+          <a:off x="914400" y="3246120"/>
+          <a:ext cx="16459200" cy="914400"/>
+        </p:xfrm>
+        <a:graphic>
+          <a:graphicData uri="http://schemas.openxmlformats.org/drawingml/2006/table">
+            <a:tbl>
+              <a:tblPr/>
+              <a:tblGrid>
+                <a:gridCol w="2210937"/>
+                <a:gridCol w="3684896"/>
+                <a:gridCol w="5650173"/>
+                <a:gridCol w="4913194"/>
+              </a:tblGrid>
+              <a:tr h="640080">
+                <a:tc>
+                  <a:txBody>
+                    <a:bodyPr/>
+                    <a:lstStyle/>
+                    <a:p>
+                      <a:pPr algn="ctr" indent="0" marL="0">
+                        <a:buNone/>
+                      </a:pPr>
+                      <a:r>
+                        <a:rPr lang="ko-KR" altLang="en-US" sz="1700" b="1" dirty="0">
+                          <a:solidFill>
+                            <a:srgbClr val="222222"/>
+                          </a:solidFill>
+                          <a:latin typeface="Pretendard" pitchFamily="34" charset="0"/>
+                          <a:ea typeface="Pretendard" pitchFamily="34" charset="-122"/>
+                          <a:cs typeface="Pretendard" pitchFamily="34" charset="-120"/>
+                        </a:rPr>
+                        <a:t>검토 사항</a:t>
+                      </a:r>
+                      <a:endParaRPr lang="ko-KR" sz="1700" dirty="0">
+                        <a:latin typeface="Pretendard" charset="0"/>
+                        <a:ea typeface="Pretendard" charset="0"/>
+                        <a:cs typeface="Pretendard" charset="0"/>
+                      </a:endParaRPr>
+                    </a:p>
+                  </a:txBody>
+                  <a:tcPr marL="137160" marR="137160" marT="45720" marB="45720" anchor="ctr">
+                    <a:lnL w="12700" cap="flat" cmpd="sng" algn="ctr">
+                      <a:solidFill>
+                        <a:srgbClr val="D9DEE6"/>
+                      </a:solidFill>
+                      <a:prstDash val="solid"/>
+                      <a:round/>
+                      <a:headEnd type="none" w="med" len="med"/>
+                      <a:tailEnd type="none" w="med" len="med"/>
+                    </a:lnL>
+                    <a:lnR w="12700" cap="flat" cmpd="sng" algn="ctr">
+                      <a:solidFill>
+                        <a:srgbClr val="D9DEE6"/>
+                      </a:solidFill>
+                      <a:prstDash val="solid"/>
+                      <a:round/>
+                      <a:headEnd type="none" w="med" len="med"/>
+                      <a:tailEnd type="none" w="med" len="med"/>
+                    </a:lnR>
+                    <a:lnT w="12700" cap="flat" cmpd="sng" algn="ctr">
+                      <a:solidFill>
+                        <a:srgbClr val="D9DEE6"/>
+                      </a:solidFill>
+                      <a:prstDash val="solid"/>
+                      <a:round/>
+                      <a:headEnd type="none" w="med" len="med"/>
+                      <a:tailEnd type="none" w="med" len="med"/>
+                    </a:lnT>
+                    <a:lnB w="12700" cap="flat" cmpd="sng" algn="ctr">
+                      <a:solidFill>
+                        <a:srgbClr val="D9DEE6"/>
+                      </a:solidFill>
+                      <a:prstDash val="solid"/>
+                      <a:round/>
+                      <a:headEnd type="none" w="med" len="med"/>
+                      <a:tailEnd type="none" w="med" len="med"/>
+                    </a:lnB>
+                    <a:solidFill>
+                      <a:srgbClr val="DCE6F2"/>
+                    </a:solidFill>
+                  </a:tcPr>
+                </a:tc>
+                <a:tc>
+                  <a:txBody>
+                    <a:bodyPr/>
+                    <a:lstStyle/>
+                    <a:p>
+                      <a:pPr algn="l" indent="0" marL="0">
+                        <a:buNone/>
+                      </a:pPr>
+                      <a:r>
+                        <a:rPr lang="ko-KR" altLang="en-US" sz="1700" b="1" dirty="0">
+                          <a:solidFill>
+                            <a:srgbClr val="222222"/>
+                          </a:solidFill>
+                          <a:latin typeface="Pretendard" pitchFamily="34" charset="0"/>
+                          <a:ea typeface="Pretendard" pitchFamily="34" charset="-122"/>
+                          <a:cs typeface="Pretendard" pitchFamily="34" charset="-120"/>
+                        </a:rPr>
+                        <a:t>도면 표기</a:t>
+                      </a:r>
+                      <a:endParaRPr lang="ko-KR" sz="1700" dirty="0">
+                        <a:latin typeface="Pretendard" charset="0"/>
+                        <a:ea typeface="Pretendard" charset="0"/>
+                        <a:cs typeface="Pretendard" charset="0"/>
+                      </a:endParaRPr>
+                    </a:p>
+                  </a:txBody>
+                  <a:tcPr marL="137160" marR="137160" marT="45720" marB="45720" anchor="ctr">
+                    <a:lnL w="12700" cap="flat" cmpd="sng" algn="ctr">
+                      <a:solidFill>
+                        <a:srgbClr val="D9DEE6"/>
+                      </a:solidFill>
+                      <a:prstDash val="solid"/>
+                      <a:round/>
+                      <a:headEnd type="none" w="med" len="med"/>
+                      <a:tailEnd type="none" w="med" len="med"/>
+                    </a:lnL>
+                    <a:lnR w="12700" cap="flat" cmpd="sng" algn="ctr">
+                      <a:solidFill>
+                        <a:srgbClr val="D9DEE6"/>
+                      </a:solidFill>
+                      <a:prstDash val="solid"/>
+                      <a:round/>
+                      <a:headEnd type="none" w="med" len="med"/>
+                      <a:tailEnd type="none" w="med" len="med"/>
+                    </a:lnR>
+                    <a:lnT w="12700" cap="flat" cmpd="sng" algn="ctr">
+                      <a:solidFill>
+                        <a:srgbClr val="D9DEE6"/>
+                      </a:solidFill>
+                      <a:prstDash val="solid"/>
+                      <a:round/>
+                      <a:headEnd type="none" w="med" len="med"/>
+                      <a:tailEnd type="none" w="med" len="med"/>
+                    </a:lnT>
+                    <a:lnB w="12700" cap="flat" cmpd="sng" algn="ctr">
+                      <a:solidFill>
+                        <a:srgbClr val="D9DEE6"/>
+                      </a:solidFill>
+                      <a:prstDash val="solid"/>
+                      <a:round/>
+                      <a:headEnd type="none" w="med" len="med"/>
+                      <a:tailEnd type="none" w="med" len="med"/>
+                    </a:lnB>
+                    <a:solidFill>
+                      <a:srgbClr val="DCE6F2"/>
+                    </a:solidFill>
+                  </a:tcPr>
+                </a:tc>
+                <a:tc>
+                  <a:txBody>
+                    <a:bodyPr/>
+                    <a:lstStyle/>
+                    <a:p>
+                      <a:pPr algn="l" indent="0" marL="0">
+                        <a:buNone/>
+                      </a:pPr>
+                      <a:r>
+                        <a:rPr lang="ko-KR" altLang="en-US" sz="1700" b="1" dirty="0">
+                          <a:solidFill>
+                            <a:srgbClr val="222222"/>
+                          </a:solidFill>
+                          <a:latin typeface="Pretendard" pitchFamily="34" charset="0"/>
+                          <a:ea typeface="Pretendard" pitchFamily="34" charset="-122"/>
+                          <a:cs typeface="Pretendard" pitchFamily="34" charset="-120"/>
+                        </a:rPr>
+                        <a:t>역산 결과 (계산)</a:t>
+                      </a:r>
+                      <a:endParaRPr lang="ko-KR" sz="1700" dirty="0">
+                        <a:latin typeface="Pretendard" charset="0"/>
+                        <a:ea typeface="Pretendard" charset="0"/>
+                        <a:cs typeface="Pretendard" charset="0"/>
+                      </a:endParaRPr>
+                    </a:p>
+                  </a:txBody>
+                  <a:tcPr marL="137160" marR="137160" marT="45720" marB="45720" anchor="ctr">
+                    <a:lnL w="12700" cap="flat" cmpd="sng" algn="ctr">
+                      <a:solidFill>
+                        <a:srgbClr val="D9DEE6"/>
+                      </a:solidFill>
+                      <a:prstDash val="solid"/>
+                      <a:round/>
+                      <a:headEnd type="none" w="med" len="med"/>
+                      <a:tailEnd type="none" w="med" len="med"/>
+                    </a:lnL>
+                    <a:lnR w="12700" cap="flat" cmpd="sng" algn="ctr">
+                      <a:solidFill>
+                        <a:srgbClr val="D9DEE6"/>
+                      </a:solidFill>
+                      <a:prstDash val="solid"/>
+                      <a:round/>
+                      <a:headEnd type="none" w="med" len="med"/>
+                      <a:tailEnd type="none" w="med" len="med"/>
+                    </a:lnR>
+                    <a:lnT w="12700" cap="flat" cmpd="sng" algn="ctr">
+                      <a:solidFill>
+                        <a:srgbClr val="D9DEE6"/>
+                      </a:solidFill>
+                      <a:prstDash val="solid"/>
+                      <a:round/>
+                      <a:headEnd type="none" w="med" len="med"/>
+                      <a:tailEnd type="none" w="med" len="med"/>
+                    </a:lnT>
+                    <a:lnB w="12700" cap="flat" cmpd="sng" algn="ctr">
+                      <a:solidFill>
+                        <a:srgbClr val="D9DEE6"/>
+                      </a:solidFill>
+                      <a:prstDash val="solid"/>
+                      <a:round/>
+                      <a:headEnd type="none" w="med" len="med"/>
+                      <a:tailEnd type="none" w="med" len="med"/>
+                    </a:lnB>
+                    <a:solidFill>
+                      <a:srgbClr val="DCE6F2"/>
+                    </a:solidFill>
+                  </a:tcPr>
+                </a:tc>
+                <a:tc>
+                  <a:txBody>
+                    <a:bodyPr/>
+                    <a:lstStyle/>
+                    <a:p>
+                      <a:pPr algn="l" indent="0" marL="0">
+                        <a:buNone/>
+                      </a:pPr>
+                      <a:r>
+                        <a:rPr lang="ko-KR" altLang="en-US" sz="1700" b="1" dirty="0">
+                          <a:solidFill>
+                            <a:srgbClr val="222222"/>
+                          </a:solidFill>
+                          <a:latin typeface="Pretendard" pitchFamily="34" charset="0"/>
+                          <a:ea typeface="Pretendard" pitchFamily="34" charset="-122"/>
+                          <a:cs typeface="Pretendard" pitchFamily="34" charset="-120"/>
+                        </a:rPr>
+                        <a:t>뜻하는 것</a:t>
+                      </a:r>
+                      <a:endParaRPr lang="ko-KR" sz="1700" dirty="0">
+                        <a:latin typeface="Pretendard" charset="0"/>
+                        <a:ea typeface="Pretendard" charset="0"/>
+                        <a:cs typeface="Pretendard" charset="0"/>
+                      </a:endParaRPr>
+                    </a:p>
+                  </a:txBody>
+                  <a:tcPr marL="137160" marR="137160" marT="45720" marB="45720" anchor="ctr">
+                    <a:lnL w="12700" cap="flat" cmpd="sng" algn="ctr">
+                      <a:solidFill>
+                        <a:srgbClr val="D9DEE6"/>
+                      </a:solidFill>
+                      <a:prstDash val="solid"/>
+                      <a:round/>
+                      <a:headEnd type="none" w="med" len="med"/>
+                      <a:tailEnd type="none" w="med" len="med"/>
+                    </a:lnL>
+                    <a:lnR w="12700" cap="flat" cmpd="sng" algn="ctr">
+                      <a:solidFill>
+                        <a:srgbClr val="D9DEE6"/>
+                      </a:solidFill>
+                      <a:prstDash val="solid"/>
+                      <a:round/>
+                      <a:headEnd type="none" w="med" len="med"/>
+                      <a:tailEnd type="none" w="med" len="med"/>
+                    </a:lnR>
+                    <a:lnT w="12700" cap="flat" cmpd="sng" algn="ctr">
+                      <a:solidFill>
+                        <a:srgbClr val="D9DEE6"/>
+                      </a:solidFill>
+                      <a:prstDash val="solid"/>
+                      <a:round/>
+                      <a:headEnd type="none" w="med" len="med"/>
+                      <a:tailEnd type="none" w="med" len="med"/>
+                    </a:lnT>
+                    <a:lnB w="12700" cap="flat" cmpd="sng" algn="ctr">
+                      <a:solidFill>
+                        <a:srgbClr val="D9DEE6"/>
+                      </a:solidFill>
+                      <a:prstDash val="solid"/>
+                      <a:round/>
+                      <a:headEnd type="none" w="med" len="med"/>
+                      <a:tailEnd type="none" w="med" len="med"/>
+                    </a:lnB>
+                    <a:solidFill>
+                      <a:srgbClr val="DCE6F2"/>
+                    </a:solidFill>
+                  </a:tcPr>
+                </a:tc>
+              </a:tr>
+              <a:tr h="673100">
+                <a:tc>
+                  <a:txBody>
+                    <a:bodyPr/>
+                    <a:lstStyle/>
+                    <a:p>
+                      <a:pPr algn="ctr" indent="0" marL="0">
+                        <a:buNone/>
+                      </a:pPr>
+                      <a:r>
+                        <a:rPr lang="ko-KR" altLang="en-US" sz="1700" dirty="0">
+                          <a:solidFill>
+                            <a:srgbClr val="222222"/>
+                          </a:solidFill>
+                          <a:latin typeface="Pretendard" pitchFamily="34" charset="0"/>
+                          <a:ea typeface="Pretendard" pitchFamily="34" charset="-122"/>
+                          <a:cs typeface="Pretendard" pitchFamily="34" charset="-120"/>
+                        </a:rPr>
+                        <a:t>① 산소 판매</a:t>
+                      </a:r>
+                      <a:endParaRPr lang="ko-KR" sz="1700" dirty="0">
+                        <a:latin typeface="Pretendard" charset="0"/>
+                        <a:ea typeface="Pretendard" charset="0"/>
+                        <a:cs typeface="Pretendard" charset="0"/>
+                      </a:endParaRPr>
+                    </a:p>
+                  </a:txBody>
+                  <a:tcPr marL="137160" marR="137160" marT="45720" marB="45720" anchor="ctr">
+                    <a:lnL w="12700" cap="flat" cmpd="sng" algn="ctr">
+                      <a:solidFill>
+                        <a:srgbClr val="D9DEE6"/>
+                      </a:solidFill>
+                      <a:prstDash val="solid"/>
+                      <a:round/>
+                      <a:headEnd type="none" w="med" len="med"/>
+                      <a:tailEnd type="none" w="med" len="med"/>
+                    </a:lnL>
+                    <a:lnR w="12700" cap="flat" cmpd="sng" algn="ctr">
+                      <a:solidFill>
+                        <a:srgbClr val="D9DEE6"/>
+                      </a:solidFill>
+                      <a:prstDash val="solid"/>
+                      <a:round/>
+                      <a:headEnd type="none" w="med" len="med"/>
+                      <a:tailEnd type="none" w="med" len="med"/>
+                    </a:lnR>
+                    <a:lnT w="12700" cap="flat" cmpd="sng" algn="ctr">
+                      <a:solidFill>
+                        <a:srgbClr val="D9DEE6"/>
+                      </a:solidFill>
+                      <a:prstDash val="solid"/>
+                      <a:round/>
+                      <a:headEnd type="none" w="med" len="med"/>
+                      <a:tailEnd type="none" w="med" len="med"/>
+                    </a:lnT>
+                    <a:lnB w="12700" cap="flat" cmpd="sng" algn="ctr">
+                      <a:solidFill>
+                        <a:srgbClr val="D9DEE6"/>
+                      </a:solidFill>
+                      <a:prstDash val="solid"/>
+                      <a:round/>
+                      <a:headEnd type="none" w="med" len="med"/>
+                      <a:tailEnd type="none" w="med" len="med"/>
+                    </a:lnB>
+                    <a:solidFill>
+                      <a:srgbClr val="FFFFFF"/>
+                    </a:solidFill>
+                  </a:tcPr>
+                </a:tc>
+                <a:tc>
+                  <a:txBody>
+                    <a:bodyPr/>
+                    <a:lstStyle/>
+                    <a:p>
+                      <a:pPr algn="l" indent="0" marL="0">
+                        <a:buNone/>
+                      </a:pPr>
+                      <a:r>
+                        <a:rPr lang="ko-KR" altLang="en-US" sz="1700" dirty="0">
+                          <a:solidFill>
+                            <a:srgbClr val="222222"/>
+                          </a:solidFill>
+                          <a:latin typeface="Pretendard" pitchFamily="34" charset="0"/>
+                          <a:ea typeface="Pretendard" pitchFamily="34" charset="-122"/>
+                          <a:cs typeface="Pretendard" pitchFamily="34" charset="-120"/>
+                        </a:rPr>
+                        <a:t>15 bar·30 m³ 탱크, 생산 250 Nm³/h, 트럭 출하. 압축기 없음</a:t>
+                      </a:r>
+                      <a:endParaRPr lang="ko-KR" sz="1700" dirty="0">
+                        <a:latin typeface="Pretendard" charset="0"/>
+                        <a:ea typeface="Pretendard" charset="0"/>
+                        <a:cs typeface="Pretendard" charset="0"/>
+                      </a:endParaRPr>
+                    </a:p>
+                  </a:txBody>
+                  <a:tcPr marL="137160" marR="137160" marT="45720" marB="45720" anchor="ctr">
+                    <a:lnL w="12700" cap="flat" cmpd="sng" algn="ctr">
+                      <a:solidFill>
+                        <a:srgbClr val="D9DEE6"/>
+                      </a:solidFill>
+                      <a:prstDash val="solid"/>
+                      <a:round/>
+                      <a:headEnd type="none" w="med" len="med"/>
+                      <a:tailEnd type="none" w="med" len="med"/>
+                    </a:lnL>
+                    <a:lnR w="12700" cap="flat" cmpd="sng" algn="ctr">
+                      <a:solidFill>
+                        <a:srgbClr val="D9DEE6"/>
+                      </a:solidFill>
+                      <a:prstDash val="solid"/>
+                      <a:round/>
+                      <a:headEnd type="none" w="med" len="med"/>
+                      <a:tailEnd type="none" w="med" len="med"/>
+                    </a:lnR>
+                    <a:lnT w="12700" cap="flat" cmpd="sng" algn="ctr">
+                      <a:solidFill>
+                        <a:srgbClr val="D9DEE6"/>
+                      </a:solidFill>
+                      <a:prstDash val="solid"/>
+                      <a:round/>
+                      <a:headEnd type="none" w="med" len="med"/>
+                      <a:tailEnd type="none" w="med" len="med"/>
+                    </a:lnT>
+                    <a:lnB w="12700" cap="flat" cmpd="sng" algn="ctr">
+                      <a:solidFill>
+                        <a:srgbClr val="D9DEE6"/>
+                      </a:solidFill>
+                      <a:prstDash val="solid"/>
+                      <a:round/>
+                      <a:headEnd type="none" w="med" len="med"/>
+                      <a:tailEnd type="none" w="med" len="med"/>
+                    </a:lnB>
+                    <a:solidFill>
+                      <a:srgbClr val="FFFFFF"/>
+                    </a:solidFill>
+                  </a:tcPr>
+                </a:tc>
+                <a:tc>
+                  <a:txBody>
+                    <a:bodyPr/>
+                    <a:lstStyle/>
+                    <a:p>
+                      <a:pPr algn="l" indent="0" marL="0">
+                        <a:buNone/>
+                      </a:pPr>
+                      <a:r>
+                        <a:rPr lang="ko-KR" altLang="en-US" sz="1700" dirty="0">
+                          <a:solidFill>
+                            <a:srgbClr val="222222"/>
+                          </a:solidFill>
+                          <a:latin typeface="Pretendard" pitchFamily="34" charset="0"/>
+                          <a:ea typeface="Pretendard" pitchFamily="34" charset="-122"/>
+                          <a:cs typeface="Pretendard" pitchFamily="34" charset="-120"/>
+                        </a:rPr>
+                        <a:t>생산 357 kg/h, 만재 재고 637 kg → 체류 1.8시간. 트레일러 충전압 150~200 bar에 못 미쳐 충전 불가</a:t>
+                      </a:r>
+                      <a:endParaRPr lang="ko-KR" sz="1700" dirty="0">
+                        <a:latin typeface="Pretendard" charset="0"/>
+                        <a:ea typeface="Pretendard" charset="0"/>
+                        <a:cs typeface="Pretendard" charset="0"/>
+                      </a:endParaRPr>
+                    </a:p>
+                  </a:txBody>
+                  <a:tcPr marL="137160" marR="137160" marT="45720" marB="45720" anchor="ctr">
+                    <a:lnL w="12700" cap="flat" cmpd="sng" algn="ctr">
+                      <a:solidFill>
+                        <a:srgbClr val="D9DEE6"/>
+                      </a:solidFill>
+                      <a:prstDash val="solid"/>
+                      <a:round/>
+                      <a:headEnd type="none" w="med" len="med"/>
+                      <a:tailEnd type="none" w="med" len="med"/>
+                    </a:lnL>
+                    <a:lnR w="12700" cap="flat" cmpd="sng" algn="ctr">
+                      <a:solidFill>
+                        <a:srgbClr val="D9DEE6"/>
+                      </a:solidFill>
+                      <a:prstDash val="solid"/>
+                      <a:round/>
+                      <a:headEnd type="none" w="med" len="med"/>
+                      <a:tailEnd type="none" w="med" len="med"/>
+                    </a:lnR>
+                    <a:lnT w="12700" cap="flat" cmpd="sng" algn="ctr">
+                      <a:solidFill>
+                        <a:srgbClr val="D9DEE6"/>
+                      </a:solidFill>
+                      <a:prstDash val="solid"/>
+                      <a:round/>
+                      <a:headEnd type="none" w="med" len="med"/>
+                      <a:tailEnd type="none" w="med" len="med"/>
+                    </a:lnT>
+                    <a:lnB w="12700" cap="flat" cmpd="sng" algn="ctr">
+                      <a:solidFill>
+                        <a:srgbClr val="D9DEE6"/>
+                      </a:solidFill>
+                      <a:prstDash val="solid"/>
+                      <a:round/>
+                      <a:headEnd type="none" w="med" len="med"/>
+                      <a:tailEnd type="none" w="med" len="med"/>
+                    </a:lnB>
+                    <a:solidFill>
+                      <a:srgbClr val="FFFFFF"/>
+                    </a:solidFill>
+                  </a:tcPr>
+                </a:tc>
+                <a:tc>
+                  <a:txBody>
+                    <a:bodyPr/>
+                    <a:lstStyle/>
+                    <a:p>
+                      <a:pPr algn="l" indent="0" marL="0">
+                        <a:buNone/>
+                      </a:pPr>
+                      <a:r>
+                        <a:rPr lang="ko-KR" altLang="en-US" sz="1700" dirty="0">
+                          <a:solidFill>
+                            <a:srgbClr val="222222"/>
+                          </a:solidFill>
+                          <a:latin typeface="Pretendard" pitchFamily="34" charset="0"/>
+                          <a:ea typeface="Pretendard" pitchFamily="34" charset="-122"/>
+                          <a:cs typeface="Pretendard" pitchFamily="34" charset="-120"/>
+                        </a:rPr>
+                        <a:t>현 설계로는 70~80% 방출. 압축기 도입·탱크 증설·판매 포기 중 고르는 경제성 안건</a:t>
+                      </a:r>
+                      <a:endParaRPr lang="ko-KR" sz="1700" dirty="0">
+                        <a:latin typeface="Pretendard" charset="0"/>
+                        <a:ea typeface="Pretendard" charset="0"/>
+                        <a:cs typeface="Pretendard" charset="0"/>
+                      </a:endParaRPr>
+                    </a:p>
+                  </a:txBody>
+                  <a:tcPr marL="137160" marR="137160" marT="45720" marB="45720" anchor="ctr">
+                    <a:lnL w="12700" cap="flat" cmpd="sng" algn="ctr">
+                      <a:solidFill>
+                        <a:srgbClr val="D9DEE6"/>
+                      </a:solidFill>
+                      <a:prstDash val="solid"/>
+                      <a:round/>
+                      <a:headEnd type="none" w="med" len="med"/>
+                      <a:tailEnd type="none" w="med" len="med"/>
+                    </a:lnL>
+                    <a:lnR w="12700" cap="flat" cmpd="sng" algn="ctr">
+                      <a:solidFill>
+                        <a:srgbClr val="D9DEE6"/>
+                      </a:solidFill>
+                      <a:prstDash val="solid"/>
+                      <a:round/>
+                      <a:headEnd type="none" w="med" len="med"/>
+                      <a:tailEnd type="none" w="med" len="med"/>
+                    </a:lnR>
+                    <a:lnT w="12700" cap="flat" cmpd="sng" algn="ctr">
+                      <a:solidFill>
+                        <a:srgbClr val="D9DEE6"/>
+                      </a:solidFill>
+                      <a:prstDash val="solid"/>
+                      <a:round/>
+                      <a:headEnd type="none" w="med" len="med"/>
+                      <a:tailEnd type="none" w="med" len="med"/>
+                    </a:lnT>
+                    <a:lnB w="12700" cap="flat" cmpd="sng" algn="ctr">
+                      <a:solidFill>
+                        <a:srgbClr val="D9DEE6"/>
+                      </a:solidFill>
+                      <a:prstDash val="solid"/>
+                      <a:round/>
+                      <a:headEnd type="none" w="med" len="med"/>
+                      <a:tailEnd type="none" w="med" len="med"/>
+                    </a:lnB>
+                    <a:solidFill>
+                      <a:srgbClr val="FFFFFF"/>
+                    </a:solidFill>
+                  </a:tcPr>
+                </a:tc>
+              </a:tr>
+              <a:tr h="936498">
+                <a:tc>
+                  <a:txBody>
+                    <a:bodyPr/>
+                    <a:lstStyle/>
+                    <a:p>
+                      <a:pPr algn="ctr" indent="0" marL="0">
+                        <a:buNone/>
+                      </a:pPr>
+                      <a:r>
+                        <a:rPr lang="ko-KR" altLang="en-US" sz="1700" dirty="0">
+                          <a:solidFill>
+                            <a:srgbClr val="222222"/>
+                          </a:solidFill>
+                          <a:latin typeface="Pretendard" pitchFamily="34" charset="0"/>
+                          <a:ea typeface="Pretendard" pitchFamily="34" charset="-122"/>
+                          <a:cs typeface="Pretendard" pitchFamily="34" charset="-120"/>
+                        </a:rPr>
+                        <a:t>② 폐열 3% 절감</a:t>
+                      </a:r>
+                      <a:endParaRPr lang="ko-KR" sz="1700" dirty="0">
+                        <a:latin typeface="Pretendard" charset="0"/>
+                        <a:ea typeface="Pretendard" charset="0"/>
+                        <a:cs typeface="Pretendard" charset="0"/>
+                      </a:endParaRPr>
+                    </a:p>
+                  </a:txBody>
+                  <a:tcPr marL="137160" marR="137160" marT="45720" marB="45720" anchor="ctr">
+                    <a:lnL w="12700" cap="flat" cmpd="sng" algn="ctr">
+                      <a:solidFill>
+                        <a:srgbClr val="D9DEE6"/>
+                      </a:solidFill>
+                      <a:prstDash val="solid"/>
+                      <a:round/>
+                      <a:headEnd type="none" w="med" len="med"/>
+                      <a:tailEnd type="none" w="med" len="med"/>
+                    </a:lnL>
+                    <a:lnR w="12700" cap="flat" cmpd="sng" algn="ctr">
+                      <a:solidFill>
+                        <a:srgbClr val="D9DEE6"/>
+                      </a:solidFill>
+                      <a:prstDash val="solid"/>
+                      <a:round/>
+                      <a:headEnd type="none" w="med" len="med"/>
+                      <a:tailEnd type="none" w="med" len="med"/>
+                    </a:lnR>
+                    <a:lnT w="12700" cap="flat" cmpd="sng" algn="ctr">
+                      <a:solidFill>
+                        <a:srgbClr val="D9DEE6"/>
+                      </a:solidFill>
+                      <a:prstDash val="solid"/>
+                      <a:round/>
+                      <a:headEnd type="none" w="med" len="med"/>
+                      <a:tailEnd type="none" w="med" len="med"/>
+                    </a:lnT>
+                    <a:lnB w="12700" cap="flat" cmpd="sng" algn="ctr">
+                      <a:solidFill>
+                        <a:srgbClr val="D9DEE6"/>
+                      </a:solidFill>
+                      <a:prstDash val="solid"/>
+                      <a:round/>
+                      <a:headEnd type="none" w="med" len="med"/>
+                      <a:tailEnd type="none" w="med" len="med"/>
+                    </a:lnB>
+                    <a:solidFill>
+                      <a:srgbClr val="FFFFFF"/>
+                    </a:solidFill>
+                  </a:tcPr>
+                </a:tc>
+                <a:tc>
+                  <a:txBody>
+                    <a:bodyPr/>
+                    <a:lstStyle/>
+                    <a:p>
+                      <a:pPr algn="l" indent="0" marL="0">
+                        <a:buNone/>
+                      </a:pPr>
+                      <a:r>
+                        <a:rPr lang="ko-KR" altLang="en-US" sz="1700" dirty="0">
+                          <a:solidFill>
+                            <a:srgbClr val="222222"/>
+                          </a:solidFill>
+                          <a:latin typeface="Pretendard" pitchFamily="34" charset="0"/>
+                          <a:ea typeface="Pretendard" pitchFamily="34" charset="-122"/>
+                          <a:cs typeface="Pretendard" pitchFamily="34" charset="-120"/>
+                        </a:rPr>
+                        <a:t>FC 냉각수 75 °C에서 350 kWth 회수 → 급수 예열, 수전해 전력 3% 절감</a:t>
+                      </a:r>
+                      <a:endParaRPr lang="ko-KR" sz="1700" dirty="0">
+                        <a:latin typeface="Pretendard" charset="0"/>
+                        <a:ea typeface="Pretendard" charset="0"/>
+                        <a:cs typeface="Pretendard" charset="0"/>
+                      </a:endParaRPr>
+                    </a:p>
+                  </a:txBody>
+                  <a:tcPr marL="137160" marR="137160" marT="45720" marB="45720" anchor="ctr">
+                    <a:lnL w="12700" cap="flat" cmpd="sng" algn="ctr">
+                      <a:solidFill>
+                        <a:srgbClr val="D9DEE6"/>
+                      </a:solidFill>
+                      <a:prstDash val="solid"/>
+                      <a:round/>
+                      <a:headEnd type="none" w="med" len="med"/>
+                      <a:tailEnd type="none" w="med" len="med"/>
+                    </a:lnL>
+                    <a:lnR w="12700" cap="flat" cmpd="sng" algn="ctr">
+                      <a:solidFill>
+                        <a:srgbClr val="D9DEE6"/>
+                      </a:solidFill>
+                      <a:prstDash val="solid"/>
+                      <a:round/>
+                      <a:headEnd type="none" w="med" len="med"/>
+                      <a:tailEnd type="none" w="med" len="med"/>
+                    </a:lnR>
+                    <a:lnT w="12700" cap="flat" cmpd="sng" algn="ctr">
+                      <a:solidFill>
+                        <a:srgbClr val="D9DEE6"/>
+                      </a:solidFill>
+                      <a:prstDash val="solid"/>
+                      <a:round/>
+                      <a:headEnd type="none" w="med" len="med"/>
+                      <a:tailEnd type="none" w="med" len="med"/>
+                    </a:lnT>
+                    <a:lnB w="12700" cap="flat" cmpd="sng" algn="ctr">
+                      <a:solidFill>
+                        <a:srgbClr val="D9DEE6"/>
+                      </a:solidFill>
+                      <a:prstDash val="solid"/>
+                      <a:round/>
+                      <a:headEnd type="none" w="med" len="med"/>
+                      <a:tailEnd type="none" w="med" len="med"/>
+                    </a:lnB>
+                    <a:solidFill>
+                      <a:srgbClr val="FFFFFF"/>
+                    </a:solidFill>
+                  </a:tcPr>
+                </a:tc>
+                <a:tc>
+                  <a:txBody>
+                    <a:bodyPr/>
+                    <a:lstStyle/>
+                    <a:p>
+                      <a:pPr algn="l" indent="0" marL="0">
+                        <a:buNone/>
+                      </a:pPr>
+                      <a:r>
+                        <a:rPr lang="ko-KR" altLang="en-US" sz="1700" dirty="0">
+                          <a:solidFill>
+                            <a:srgbClr val="222222"/>
+                          </a:solidFill>
+                          <a:latin typeface="Pretendard" pitchFamily="34" charset="0"/>
+                          <a:ea typeface="Pretendard" pitchFamily="34" charset="-122"/>
+                          <a:cs typeface="Pretendard" pitchFamily="34" charset="-120"/>
+                        </a:rPr>
+                        <a:t>급수 0.5 m³/h를 15→55 °C로 올리는 열은 23.3 kWth = 2.5 MW의 0.93%. 다 받으려면 7.5 m³/h(15배)</a:t>
+                      </a:r>
+                      <a:endParaRPr lang="ko-KR" sz="1700" dirty="0">
+                        <a:latin typeface="Pretendard" charset="0"/>
+                        <a:ea typeface="Pretendard" charset="0"/>
+                        <a:cs typeface="Pretendard" charset="0"/>
+                      </a:endParaRPr>
+                    </a:p>
+                  </a:txBody>
+                  <a:tcPr marL="137160" marR="137160" marT="45720" marB="45720" anchor="ctr">
+                    <a:lnL w="12700" cap="flat" cmpd="sng" algn="ctr">
+                      <a:solidFill>
+                        <a:srgbClr val="D9DEE6"/>
+                      </a:solidFill>
+                      <a:prstDash val="solid"/>
+                      <a:round/>
+                      <a:headEnd type="none" w="med" len="med"/>
+                      <a:tailEnd type="none" w="med" len="med"/>
+                    </a:lnL>
+                    <a:lnR w="12700" cap="flat" cmpd="sng" algn="ctr">
+                      <a:solidFill>
+                        <a:srgbClr val="D9DEE6"/>
+                      </a:solidFill>
+                      <a:prstDash val="solid"/>
+                      <a:round/>
+                      <a:headEnd type="none" w="med" len="med"/>
+                      <a:tailEnd type="none" w="med" len="med"/>
+                    </a:lnR>
+                    <a:lnT w="12700" cap="flat" cmpd="sng" algn="ctr">
+                      <a:solidFill>
+                        <a:srgbClr val="D9DEE6"/>
+                      </a:solidFill>
+                      <a:prstDash val="solid"/>
+                      <a:round/>
+                      <a:headEnd type="none" w="med" len="med"/>
+                      <a:tailEnd type="none" w="med" len="med"/>
+                    </a:lnT>
+                    <a:lnB w="12700" cap="flat" cmpd="sng" algn="ctr">
+                      <a:solidFill>
+                        <a:srgbClr val="D9DEE6"/>
+                      </a:solidFill>
+                      <a:prstDash val="solid"/>
+                      <a:round/>
+                      <a:headEnd type="none" w="med" len="med"/>
+                      <a:tailEnd type="none" w="med" len="med"/>
+                    </a:lnB>
+                    <a:solidFill>
+                      <a:srgbClr val="FFFFFF"/>
+                    </a:solidFill>
+                  </a:tcPr>
+                </a:tc>
+                <a:tc>
+                  <a:txBody>
+                    <a:bodyPr/>
+                    <a:lstStyle/>
+                    <a:p>
+                      <a:pPr algn="l" indent="0" marL="0">
+                        <a:buNone/>
+                      </a:pPr>
+                      <a:r>
+                        <a:rPr lang="ko-KR" altLang="en-US" sz="1700" dirty="0">
+                          <a:solidFill>
+                            <a:srgbClr val="222222"/>
+                          </a:solidFill>
+                          <a:latin typeface="Pretendard" pitchFamily="34" charset="0"/>
+                          <a:ea typeface="Pretendard" pitchFamily="34" charset="-122"/>
+                          <a:cs typeface="Pretendard" pitchFamily="34" charset="-120"/>
+                        </a:rPr>
+                        <a:t>350 kWth는 ‘FC 회수 가능 총열량’으로 읽어야 한다. 잔여 1,664 kWth를 버릴 덤프쿨러가 도면에 없다</a:t>
+                      </a:r>
+                      <a:endParaRPr lang="ko-KR" sz="1700" dirty="0">
+                        <a:latin typeface="Pretendard" charset="0"/>
+                        <a:ea typeface="Pretendard" charset="0"/>
+                        <a:cs typeface="Pretendard" charset="0"/>
+                      </a:endParaRPr>
+                    </a:p>
+                  </a:txBody>
+                  <a:tcPr marL="137160" marR="137160" marT="45720" marB="45720" anchor="ctr">
+                    <a:lnL w="12700" cap="flat" cmpd="sng" algn="ctr">
+                      <a:solidFill>
+                        <a:srgbClr val="D9DEE6"/>
+                      </a:solidFill>
+                      <a:prstDash val="solid"/>
+                      <a:round/>
+                      <a:headEnd type="none" w="med" len="med"/>
+                      <a:tailEnd type="none" w="med" len="med"/>
+                    </a:lnL>
+                    <a:lnR w="12700" cap="flat" cmpd="sng" algn="ctr">
+                      <a:solidFill>
+                        <a:srgbClr val="D9DEE6"/>
+                      </a:solidFill>
+                      <a:prstDash val="solid"/>
+                      <a:round/>
+                      <a:headEnd type="none" w="med" len="med"/>
+                      <a:tailEnd type="none" w="med" len="med"/>
+                    </a:lnR>
+                    <a:lnT w="12700" cap="flat" cmpd="sng" algn="ctr">
+                      <a:solidFill>
+                        <a:srgbClr val="D9DEE6"/>
+                      </a:solidFill>
+                      <a:prstDash val="solid"/>
+                      <a:round/>
+                      <a:headEnd type="none" w="med" len="med"/>
+                      <a:tailEnd type="none" w="med" len="med"/>
+                    </a:lnT>
+                    <a:lnB w="12700" cap="flat" cmpd="sng" algn="ctr">
+                      <a:solidFill>
+                        <a:srgbClr val="D9DEE6"/>
+                      </a:solidFill>
+                      <a:prstDash val="solid"/>
+                      <a:round/>
+                      <a:headEnd type="none" w="med" len="med"/>
+                      <a:tailEnd type="none" w="med" len="med"/>
+                    </a:lnB>
+                    <a:solidFill>
+                      <a:srgbClr val="FFFFFF"/>
+                    </a:solidFill>
+                  </a:tcPr>
+                </a:tc>
+              </a:tr>
+              <a:tr h="936498">
+                <a:tc>
+                  <a:txBody>
+                    <a:bodyPr/>
+                    <a:lstStyle/>
+                    <a:p>
+                      <a:pPr algn="ctr" indent="0" marL="0">
+                        <a:buNone/>
+                      </a:pPr>
+                      <a:r>
+                        <a:rPr lang="ko-KR" altLang="en-US" sz="1700" dirty="0">
+                          <a:solidFill>
+                            <a:srgbClr val="222222"/>
+                          </a:solidFill>
+                          <a:latin typeface="Pretendard" pitchFamily="34" charset="0"/>
+                          <a:ea typeface="Pretendard" pitchFamily="34" charset="-122"/>
+                          <a:cs typeface="Pretendard" pitchFamily="34" charset="-120"/>
+                        </a:rPr>
+                        <a:t>③ 수소 자급률</a:t>
+                      </a:r>
+                      <a:endParaRPr lang="ko-KR" sz="1700" dirty="0">
+                        <a:latin typeface="Pretendard" charset="0"/>
+                        <a:ea typeface="Pretendard" charset="0"/>
+                        <a:cs typeface="Pretendard" charset="0"/>
+                      </a:endParaRPr>
+                    </a:p>
+                  </a:txBody>
+                  <a:tcPr marL="137160" marR="137160" marT="45720" marB="45720" anchor="ctr">
+                    <a:lnL w="12700" cap="flat" cmpd="sng" algn="ctr">
+                      <a:solidFill>
+                        <a:srgbClr val="D9DEE6"/>
+                      </a:solidFill>
+                      <a:prstDash val="solid"/>
+                      <a:round/>
+                      <a:headEnd type="none" w="med" len="med"/>
+                      <a:tailEnd type="none" w="med" len="med"/>
+                    </a:lnL>
+                    <a:lnR w="12700" cap="flat" cmpd="sng" algn="ctr">
+                      <a:solidFill>
+                        <a:srgbClr val="D9DEE6"/>
+                      </a:solidFill>
+                      <a:prstDash val="solid"/>
+                      <a:round/>
+                      <a:headEnd type="none" w="med" len="med"/>
+                      <a:tailEnd type="none" w="med" len="med"/>
+                    </a:lnR>
+                    <a:lnT w="12700" cap="flat" cmpd="sng" algn="ctr">
+                      <a:solidFill>
+                        <a:srgbClr val="D9DEE6"/>
+                      </a:solidFill>
+                      <a:prstDash val="solid"/>
+                      <a:round/>
+                      <a:headEnd type="none" w="med" len="med"/>
+                      <a:tailEnd type="none" w="med" len="med"/>
+                    </a:lnT>
+                    <a:lnB w="12700" cap="flat" cmpd="sng" algn="ctr">
+                      <a:solidFill>
+                        <a:srgbClr val="D9DEE6"/>
+                      </a:solidFill>
+                      <a:prstDash val="solid"/>
+                      <a:round/>
+                      <a:headEnd type="none" w="med" len="med"/>
+                      <a:tailEnd type="none" w="med" len="med"/>
+                    </a:lnB>
+                    <a:solidFill>
+                      <a:srgbClr val="FFFFFF"/>
+                    </a:solidFill>
+                  </a:tcPr>
+                </a:tc>
+                <a:tc>
+                  <a:txBody>
+                    <a:bodyPr/>
+                    <a:lstStyle/>
+                    <a:p>
+                      <a:pPr algn="l" indent="0" marL="0">
+                        <a:buNone/>
+                      </a:pPr>
+                      <a:r>
+                        <a:rPr lang="ko-KR" altLang="en-US" sz="1700" dirty="0">
+                          <a:solidFill>
+                            <a:srgbClr val="222222"/>
+                          </a:solidFill>
+                          <a:latin typeface="Pretendard" pitchFamily="34" charset="0"/>
+                          <a:ea typeface="Pretendard" pitchFamily="34" charset="-122"/>
+                          <a:cs typeface="Pretendard" pitchFamily="34" charset="-120"/>
+                        </a:rPr>
+                        <a:t>수전해 500 Nm³/h, 연료전지 1,340 Nm³/h, 버퍼 30 bar·50 m³</a:t>
+                      </a:r>
+                      <a:endParaRPr lang="ko-KR" sz="1700" dirty="0">
+                        <a:latin typeface="Pretendard" charset="0"/>
+                        <a:ea typeface="Pretendard" charset="0"/>
+                        <a:cs typeface="Pretendard" charset="0"/>
+                      </a:endParaRPr>
+                    </a:p>
+                  </a:txBody>
+                  <a:tcPr marL="137160" marR="137160" marT="45720" marB="45720" anchor="ctr">
+                    <a:lnL w="12700" cap="flat" cmpd="sng" algn="ctr">
+                      <a:solidFill>
+                        <a:srgbClr val="D9DEE6"/>
+                      </a:solidFill>
+                      <a:prstDash val="solid"/>
+                      <a:round/>
+                      <a:headEnd type="none" w="med" len="med"/>
+                      <a:tailEnd type="none" w="med" len="med"/>
+                    </a:lnL>
+                    <a:lnR w="12700" cap="flat" cmpd="sng" algn="ctr">
+                      <a:solidFill>
+                        <a:srgbClr val="D9DEE6"/>
+                      </a:solidFill>
+                      <a:prstDash val="solid"/>
+                      <a:round/>
+                      <a:headEnd type="none" w="med" len="med"/>
+                      <a:tailEnd type="none" w="med" len="med"/>
+                    </a:lnR>
+                    <a:lnT w="12700" cap="flat" cmpd="sng" algn="ctr">
+                      <a:solidFill>
+                        <a:srgbClr val="D9DEE6"/>
+                      </a:solidFill>
+                      <a:prstDash val="solid"/>
+                      <a:round/>
+                      <a:headEnd type="none" w="med" len="med"/>
+                      <a:tailEnd type="none" w="med" len="med"/>
+                    </a:lnT>
+                    <a:lnB w="12700" cap="flat" cmpd="sng" algn="ctr">
+                      <a:solidFill>
+                        <a:srgbClr val="D9DEE6"/>
+                      </a:solidFill>
+                      <a:prstDash val="solid"/>
+                      <a:round/>
+                      <a:headEnd type="none" w="med" len="med"/>
+                      <a:tailEnd type="none" w="med" len="med"/>
+                    </a:lnB>
+                    <a:solidFill>
+                      <a:srgbClr val="FFFFFF"/>
+                    </a:solidFill>
+                  </a:tcPr>
+                </a:tc>
+                <a:tc>
+                  <a:txBody>
+                    <a:bodyPr/>
+                    <a:lstStyle/>
+                    <a:p>
+                      <a:pPr algn="l" indent="0" marL="0">
+                        <a:buNone/>
+                      </a:pPr>
+                      <a:r>
+                        <a:rPr lang="ko-KR" altLang="en-US" sz="1700" dirty="0">
+                          <a:solidFill>
+                            <a:srgbClr val="222222"/>
+                          </a:solidFill>
+                          <a:latin typeface="Pretendard" pitchFamily="34" charset="0"/>
+                          <a:ea typeface="Pretendard" pitchFamily="34" charset="-122"/>
+                          <a:cs typeface="Pretendard" pitchFamily="34" charset="-120"/>
+                        </a:rPr>
+                        <a:t>생산 44.9 vs 소비 120.4 kg/h → 자급률 37.3%. 버퍼 가용 102.8 kg = FC 단독 0.85시간</a:t>
+                      </a:r>
+                      <a:endParaRPr lang="ko-KR" sz="1700" dirty="0">
+                        <a:latin typeface="Pretendard" charset="0"/>
+                        <a:ea typeface="Pretendard" charset="0"/>
+                        <a:cs typeface="Pretendard" charset="0"/>
+                      </a:endParaRPr>
+                    </a:p>
+                  </a:txBody>
+                  <a:tcPr marL="137160" marR="137160" marT="45720" marB="45720" anchor="ctr">
+                    <a:lnL w="12700" cap="flat" cmpd="sng" algn="ctr">
+                      <a:solidFill>
+                        <a:srgbClr val="D9DEE6"/>
+                      </a:solidFill>
+                      <a:prstDash val="solid"/>
+                      <a:round/>
+                      <a:headEnd type="none" w="med" len="med"/>
+                      <a:tailEnd type="none" w="med" len="med"/>
+                    </a:lnL>
+                    <a:lnR w="12700" cap="flat" cmpd="sng" algn="ctr">
+                      <a:solidFill>
+                        <a:srgbClr val="D9DEE6"/>
+                      </a:solidFill>
+                      <a:prstDash val="solid"/>
+                      <a:round/>
+                      <a:headEnd type="none" w="med" len="med"/>
+                      <a:tailEnd type="none" w="med" len="med"/>
+                    </a:lnR>
+                    <a:lnT w="12700" cap="flat" cmpd="sng" algn="ctr">
+                      <a:solidFill>
+                        <a:srgbClr val="D9DEE6"/>
+                      </a:solidFill>
+                      <a:prstDash val="solid"/>
+                      <a:round/>
+                      <a:headEnd type="none" w="med" len="med"/>
+                      <a:tailEnd type="none" w="med" len="med"/>
+                    </a:lnT>
+                    <a:lnB w="12700" cap="flat" cmpd="sng" algn="ctr">
+                      <a:solidFill>
+                        <a:srgbClr val="D9DEE6"/>
+                      </a:solidFill>
+                      <a:prstDash val="solid"/>
+                      <a:round/>
+                      <a:headEnd type="none" w="med" len="med"/>
+                      <a:tailEnd type="none" w="med" len="med"/>
+                    </a:lnB>
+                    <a:solidFill>
+                      <a:srgbClr val="FFFFFF"/>
+                    </a:solidFill>
+                  </a:tcPr>
+                </a:tc>
+                <a:tc>
+                  <a:txBody>
+                    <a:bodyPr/>
+                    <a:lstStyle/>
+                    <a:p>
+                      <a:pPr algn="l" indent="0" marL="0">
+                        <a:buNone/>
+                      </a:pPr>
+                      <a:r>
+                        <a:rPr lang="ko-KR" altLang="en-US" sz="1700" dirty="0">
+                          <a:solidFill>
+                            <a:srgbClr val="222222"/>
+                          </a:solidFill>
+                          <a:latin typeface="Pretendard" pitchFamily="34" charset="0"/>
+                          <a:ea typeface="Pretendard" pitchFamily="34" charset="-122"/>
+                          <a:cs typeface="Pretendard" pitchFamily="34" charset="-120"/>
+                        </a:rPr>
+                        <a:t>하루 약 869 kg 외부 반입 필요(Type I 4.4대). 물질수지 식에 ‘반입’ 항이 없으면 매일 음(−) 잔차</a:t>
+                      </a:r>
+                      <a:endParaRPr lang="ko-KR" sz="1700" dirty="0">
+                        <a:latin typeface="Pretendard" charset="0"/>
+                        <a:ea typeface="Pretendard" charset="0"/>
+                        <a:cs typeface="Pretendard" charset="0"/>
+                      </a:endParaRPr>
+                    </a:p>
+                  </a:txBody>
+                  <a:tcPr marL="137160" marR="137160" marT="45720" marB="45720" anchor="ctr">
+                    <a:lnL w="12700" cap="flat" cmpd="sng" algn="ctr">
+                      <a:solidFill>
+                        <a:srgbClr val="D9DEE6"/>
+                      </a:solidFill>
+                      <a:prstDash val="solid"/>
+                      <a:round/>
+                      <a:headEnd type="none" w="med" len="med"/>
+                      <a:tailEnd type="none" w="med" len="med"/>
+                    </a:lnL>
+                    <a:lnR w="12700" cap="flat" cmpd="sng" algn="ctr">
+                      <a:solidFill>
+                        <a:srgbClr val="D9DEE6"/>
+                      </a:solidFill>
+                      <a:prstDash val="solid"/>
+                      <a:round/>
+                      <a:headEnd type="none" w="med" len="med"/>
+                      <a:tailEnd type="none" w="med" len="med"/>
+                    </a:lnR>
+                    <a:lnT w="12700" cap="flat" cmpd="sng" algn="ctr">
+                      <a:solidFill>
+                        <a:srgbClr val="D9DEE6"/>
+                      </a:solidFill>
+                      <a:prstDash val="solid"/>
+                      <a:round/>
+                      <a:headEnd type="none" w="med" len="med"/>
+                      <a:tailEnd type="none" w="med" len="med"/>
+                    </a:lnT>
+                    <a:lnB w="12700" cap="flat" cmpd="sng" algn="ctr">
+                      <a:solidFill>
+                        <a:srgbClr val="D9DEE6"/>
+                      </a:solidFill>
+                      <a:prstDash val="solid"/>
+                      <a:round/>
+                      <a:headEnd type="none" w="med" len="med"/>
+                      <a:tailEnd type="none" w="med" len="med"/>
+                    </a:lnB>
+                    <a:solidFill>
+                      <a:srgbClr val="FFFFFF"/>
+                    </a:solidFill>
+                  </a:tcPr>
+                </a:tc>
+              </a:tr>
+            </a:tbl>
+          </a:graphicData>
+        </a:graphic>
+      </p:graphicFrame>
+      <p:sp>
+        <p:nvSpPr>
+          <p:cNvPr id="9" name="Shape 5"/>
+          <p:cNvSpPr/>
+          <p:nvPr/>
+        </p:nvSpPr>
+        <p:spPr>
+          <a:xfrm>
+            <a:off x="914400" y="6798056"/>
+            <a:ext cx="16459200" cy="1591056"/>
+          </a:xfrm>
+          <a:prstGeom prst="rect">
+            <a:avLst/>
+          </a:prstGeom>
+          <a:solidFill>
+            <a:srgbClr val="EEF3FC"/>
+          </a:solidFill>
+          <a:ln/>
+        </p:spPr>
+      </p:sp>
+      <p:sp>
+        <p:nvSpPr>
+          <p:cNvPr id="10" name="Text 6"/>
+          <p:cNvSpPr/>
+          <p:nvPr/>
+        </p:nvSpPr>
+        <p:spPr>
+          <a:xfrm>
+            <a:off x="1234440" y="6907784"/>
+            <a:ext cx="15819120" cy="1371600"/>
           </a:xfrm>
           <a:prstGeom prst="rect">
             <a:avLst/>
@@ -7890,7 +11048,7 @@
                 <a:ea typeface="Pretendard" pitchFamily="34" charset="-122"/>
                 <a:cs typeface="Pretendard" pitchFamily="34" charset="-120"/>
               </a:rPr>
-              <a:t>결론</a:t>
+              <a:t>콘솔이 하는 일</a:t>
             </a:r>
             <a:endParaRPr lang="ko-KR" sz="2200" dirty="0"/>
           </a:p>
@@ -7907,22 +11065,2163 @@
                 <a:ea typeface="Pretendard" pitchFamily="34" charset="-122"/>
                 <a:cs typeface="Pretendard" pitchFamily="34" charset="-120"/>
               </a:rPr>
-              <a:t>보통 받는 데이터 189개를 같은 조건으로 쌓고 주기별 판정 수준을 나누면, 발전소별 노후와 개선 여지를 근거와 함께 설명할 수 있습니다.</a:t>
+              <a:t>설계를 바꾸는 것은 콘솔의 몫이 아닙니다. 탱크 만재 시간 비율·방출 손실률·회수율·예열 ON/OFF 전력 차이를 매달 계산해 투자 판단의 근거를 숫자로 만듭니다.</a:t>
             </a:r>
             <a:endParaRPr lang="ko-KR" sz="2200" dirty="0"/>
           </a:p>
         </p:txBody>
       </p:sp>
-      <p:sp>
-        <p:nvSpPr>
-          <p:cNvPr id="10" name="Shape 7"/>
+    </p:spTree>
+  </p:cSld>
+  <p:clrMapOvr>
+    <a:masterClrMapping/>
+  </p:clrMapOvr>
+</p:sld>
+</file>
+
+<file path=ppt/slides/slide17.xml><?xml version="1.0" encoding="utf-8"?>
+<p:sld xmlns:a="http://schemas.openxmlformats.org/drawingml/2006/main" xmlns:r="http://schemas.openxmlformats.org/officeDocument/2006/relationships" xmlns:p="http://schemas.openxmlformats.org/presentationml/2006/main">
+  <p:cSld name="Slide 17">
+    <p:bg>
+      <p:bgPr>
+        <a:solidFill>
+          <a:srgbClr val="FAFAFA"/>
+        </a:solidFill>
+      </p:bgPr>
+    </p:bg>
+    <p:spTree>
+      <p:nvGrpSpPr>
+        <p:cNvPr id="1" name=""/>
+        <p:cNvGrpSpPr/>
+        <p:nvPr/>
+      </p:nvGrpSpPr>
+      <p:grpSpPr>
+        <a:xfrm>
+          <a:off x="0" y="0"/>
+          <a:ext cx="0" cy="0"/>
+          <a:chOff x="0" y="0"/>
+          <a:chExt cx="0" cy="0"/>
+        </a:xfrm>
+      </p:grpSpPr>
+      <p:pic>
+        <p:nvPicPr>
+          <p:cNvPr id="2" name="Image 0" descr="C:\Users\jungm\Desktop\projects\simple\solar-dashboard\docs\reports\_source\first-logo.png">    </p:cNvPr>
+          <p:cNvPicPr>
+            <a:picLocks noChangeAspect="1"/>
+          </p:cNvPicPr>
+          <p:nvPr/>
+        </p:nvPicPr>
+        <p:blipFill>
+          <a:blip r:embed="rId1"/>
+          <a:stretch>
+            <a:fillRect/>
+          </a:stretch>
+        </p:blipFill>
+        <p:spPr>
+          <a:xfrm>
+            <a:off x="14950440" y="502920"/>
+            <a:ext cx="2468880" cy="384048"/>
+          </a:xfrm>
+          <a:prstGeom prst="rect">
+            <a:avLst/>
+          </a:prstGeom>
+        </p:spPr>
+      </p:pic>
+      <p:sp>
+        <p:nvSpPr>
+          <p:cNvPr id="3" name="Text 0"/>
           <p:cNvSpPr/>
           <p:nvPr/>
         </p:nvSpPr>
         <p:spPr>
           <a:xfrm>
-            <a:off x="914400" y="4782312"/>
-            <a:ext cx="5303520" cy="3657600"/>
+            <a:off x="914400" y="566928"/>
+            <a:ext cx="4572000" cy="1051560"/>
+          </a:xfrm>
+          <a:prstGeom prst="rect">
+            <a:avLst/>
+          </a:prstGeom>
+          <a:noFill/>
+          <a:ln/>
+        </p:spPr>
+        <p:txBody>
+          <a:bodyPr wrap="square" lIns="0" tIns="0" rIns="0" bIns="0" rtlCol="0" anchor="b"/>
+          <a:lstStyle/>
+          <a:p>
+            <a:pPr indent="0" marL="0">
+              <a:buNone/>
+            </a:pPr>
+            <a:r>
+              <a:rPr lang="ko-KR" altLang="en-US" sz="6600" b="1" dirty="0">
+                <a:solidFill>
+                  <a:srgbClr val="4081ED"/>
+                </a:solidFill>
+                <a:latin typeface="Pretendard" pitchFamily="34" charset="0"/>
+                <a:ea typeface="Pretendard" pitchFamily="34" charset="-122"/>
+                <a:cs typeface="Pretendard" pitchFamily="34" charset="-120"/>
+              </a:rPr>
+              <a:t>16</a:t>
+            </a:r>
+            <a:endParaRPr lang="ko-KR" sz="6600" dirty="0"/>
+          </a:p>
+        </p:txBody>
+      </p:sp>
+      <p:sp>
+        <p:nvSpPr>
+          <p:cNvPr id="4" name="Text 1"/>
+          <p:cNvSpPr/>
+          <p:nvPr/>
+        </p:nvSpPr>
+        <p:spPr>
+          <a:xfrm>
+            <a:off x="914400" y="1600200"/>
+            <a:ext cx="16002000" cy="1234440"/>
+          </a:xfrm>
+          <a:prstGeom prst="rect">
+            <a:avLst/>
+          </a:prstGeom>
+          <a:noFill/>
+          <a:ln/>
+        </p:spPr>
+        <p:txBody>
+          <a:bodyPr wrap="square" lIns="0" tIns="0" rIns="0" bIns="0" rtlCol="0" anchor="ctr"/>
+          <a:lstStyle/>
+          <a:p>
+            <a:pPr indent="0" marL="0">
+              <a:buNone/>
+            </a:pPr>
+            <a:r>
+              <a:rPr lang="ko-KR" altLang="en-US" sz="4400" b="1" dirty="0">
+                <a:solidFill>
+                  <a:srgbClr val="222222"/>
+                </a:solidFill>
+                <a:latin typeface="Pretendard" pitchFamily="34" charset="0"/>
+                <a:ea typeface="Pretendard" pitchFamily="34" charset="-122"/>
+                <a:cs typeface="Pretendard" pitchFamily="34" charset="-120"/>
+              </a:rPr>
+              <a:t>계기 신설은 설계 단계에서만 쌉니다</a:t>
+            </a:r>
+            <a:endParaRPr lang="ko-KR" sz="4400" dirty="0"/>
+          </a:p>
+        </p:txBody>
+      </p:sp>
+      <p:sp>
+        <p:nvSpPr>
+          <p:cNvPr id="5" name="Shape 2"/>
+          <p:cNvSpPr/>
+          <p:nvPr/>
+        </p:nvSpPr>
+        <p:spPr>
+          <a:xfrm>
+            <a:off x="914400" y="2852928"/>
+            <a:ext cx="16459200" cy="18288"/>
+          </a:xfrm>
+          <a:prstGeom prst="rect">
+            <a:avLst/>
+          </a:prstGeom>
+          <a:solidFill>
+            <a:srgbClr val="D9DEE6"/>
+          </a:solidFill>
+          <a:ln/>
+        </p:spPr>
+      </p:sp>
+      <p:sp>
+        <p:nvSpPr>
+          <p:cNvPr id="6" name="Shape 3"/>
+          <p:cNvSpPr/>
+          <p:nvPr/>
+        </p:nvSpPr>
+        <p:spPr>
+          <a:xfrm>
+            <a:off x="914400" y="2825496"/>
+            <a:ext cx="2834640" cy="64008"/>
+          </a:xfrm>
+          <a:prstGeom prst="rect">
+            <a:avLst/>
+          </a:prstGeom>
+          <a:solidFill>
+            <a:srgbClr val="3E7EE7"/>
+          </a:solidFill>
+          <a:ln/>
+        </p:spPr>
+      </p:sp>
+      <p:sp>
+        <p:nvSpPr>
+          <p:cNvPr id="7" name="Text 4"/>
+          <p:cNvSpPr/>
+          <p:nvPr/>
+        </p:nvSpPr>
+        <p:spPr>
+          <a:xfrm>
+            <a:off x="914400" y="9555480"/>
+            <a:ext cx="16459200" cy="365760"/>
+          </a:xfrm>
+          <a:prstGeom prst="rect">
+            <a:avLst/>
+          </a:prstGeom>
+          <a:noFill/>
+          <a:ln/>
+        </p:spPr>
+        <p:txBody>
+          <a:bodyPr wrap="square" lIns="0" tIns="0" rIns="0" bIns="0" rtlCol="0" anchor="ctr"/>
+          <a:lstStyle/>
+          <a:p>
+            <a:pPr indent="0" marL="0">
+              <a:buNone/>
+            </a:pPr>
+            <a:r>
+              <a:rPr lang="ko-KR" altLang="en-US" sz="1600" dirty="0">
+                <a:solidFill>
+                  <a:srgbClr val="5F6368"/>
+                </a:solidFill>
+                <a:latin typeface="Pretendard" pitchFamily="34" charset="0"/>
+                <a:ea typeface="Pretendard" pitchFamily="34" charset="-122"/>
+                <a:cs typeface="Pretendard" pitchFamily="34" charset="-120"/>
+              </a:rPr>
+              <a:t>※ 이 밖에 명판·문서(Nm³ 기준조건, 압력 기준)와 장부(반입·출하 전표, 법정 품질검사 기록)는 텔레메트리로 오지 않아 CSV 서식을 먼저 합의합니다</a:t>
+            </a:r>
+            <a:endParaRPr lang="ko-KR" sz="1600" dirty="0"/>
+          </a:p>
+        </p:txBody>
+      </p:sp>
+      <p:sp>
+        <p:nvSpPr>
+          <p:cNvPr id="8" name="Text 5"/>
+          <p:cNvSpPr/>
+          <p:nvPr/>
+        </p:nvSpPr>
+        <p:spPr>
+          <a:xfrm>
+            <a:off x="914400" y="3246120"/>
+            <a:ext cx="16459200" cy="548640"/>
+          </a:xfrm>
+          <a:prstGeom prst="rect">
+            <a:avLst/>
+          </a:prstGeom>
+          <a:noFill/>
+          <a:ln/>
+        </p:spPr>
+        <p:txBody>
+          <a:bodyPr wrap="square" lIns="0" tIns="0" rIns="0" bIns="0" rtlCol="0" anchor="t"/>
+          <a:lstStyle/>
+          <a:p>
+            <a:pPr indent="0" marL="0">
+              <a:buNone/>
+            </a:pPr>
+            <a:r>
+              <a:rPr lang="ko-KR" altLang="en-US" sz="2400" b="1" dirty="0">
+                <a:solidFill>
+                  <a:srgbClr val="222222"/>
+                </a:solidFill>
+                <a:latin typeface="Pretendard" pitchFamily="34" charset="0"/>
+                <a:ea typeface="Pretendard" pitchFamily="34" charset="-122"/>
+                <a:cs typeface="Pretendard" pitchFamily="34" charset="-120"/>
+              </a:rPr>
+              <a:t>데이터 계약 추가 요청 52행 — 요구 정확도에는 모두 근거를 붙였습니다</a:t>
+            </a:r>
+            <a:endParaRPr lang="ko-KR" sz="2400" dirty="0"/>
+          </a:p>
+        </p:txBody>
+      </p:sp>
+      <p:graphicFrame>
+        <p:nvGraphicFramePr>
+          <p:cNvPr id="18" name="Table 0"/>
+          <p:cNvGraphicFramePr>
+            <a:graphicFrameLocks noGrp="1"/>
+          </p:cNvGraphicFramePr>
+          <p:nvPr>
+            <p:extLst>
+              <p:ext uri="{D42A27DB-BD31-4B8C-83A1-F6EECF244321}">
+                <p14:modId xmlns:p14="http://schemas.microsoft.com/office/powerpoint/2010/main" val="1579011935"/>
+              </p:ext>
+            </p:extLst>
+          </p:nvPr>
+        </p:nvGraphicFramePr>
+        <p:xfrm>
+          <a:off x="914400" y="3886200"/>
+          <a:ext cx="16459200" cy="914400"/>
+        </p:xfrm>
+        <a:graphic>
+          <a:graphicData uri="http://schemas.openxmlformats.org/drawingml/2006/table">
+            <a:tbl>
+              <a:tblPr/>
+              <a:tblGrid>
+                <a:gridCol w="2372497"/>
+                <a:gridCol w="1037968"/>
+                <a:gridCol w="5634681"/>
+                <a:gridCol w="7414054"/>
+              </a:tblGrid>
+              <a:tr h="640080">
+                <a:tc>
+                  <a:txBody>
+                    <a:bodyPr/>
+                    <a:lstStyle/>
+                    <a:p>
+                      <a:pPr algn="ctr" indent="0" marL="0">
+                        <a:buNone/>
+                      </a:pPr>
+                      <a:r>
+                        <a:rPr lang="ko-KR" altLang="en-US" sz="1700" b="1" dirty="0">
+                          <a:solidFill>
+                            <a:srgbClr val="222222"/>
+                          </a:solidFill>
+                          <a:latin typeface="Pretendard" pitchFamily="34" charset="0"/>
+                          <a:ea typeface="Pretendard" pitchFamily="34" charset="-122"/>
+                          <a:cs typeface="Pretendard" pitchFamily="34" charset="-120"/>
+                        </a:rPr>
+                        <a:t>그룹</a:t>
+                      </a:r>
+                      <a:endParaRPr lang="ko-KR" sz="1700" dirty="0">
+                        <a:latin typeface="Pretendard" charset="0"/>
+                        <a:ea typeface="Pretendard" charset="0"/>
+                        <a:cs typeface="Pretendard" charset="0"/>
+                      </a:endParaRPr>
+                    </a:p>
+                  </a:txBody>
+                  <a:tcPr marL="137160" marR="137160" marT="45720" marB="45720" anchor="ctr">
+                    <a:lnL w="12700" cap="flat" cmpd="sng" algn="ctr">
+                      <a:solidFill>
+                        <a:srgbClr val="D9DEE6"/>
+                      </a:solidFill>
+                      <a:prstDash val="solid"/>
+                      <a:round/>
+                      <a:headEnd type="none" w="med" len="med"/>
+                      <a:tailEnd type="none" w="med" len="med"/>
+                    </a:lnL>
+                    <a:lnR w="12700" cap="flat" cmpd="sng" algn="ctr">
+                      <a:solidFill>
+                        <a:srgbClr val="D9DEE6"/>
+                      </a:solidFill>
+                      <a:prstDash val="solid"/>
+                      <a:round/>
+                      <a:headEnd type="none" w="med" len="med"/>
+                      <a:tailEnd type="none" w="med" len="med"/>
+                    </a:lnR>
+                    <a:lnT w="12700" cap="flat" cmpd="sng" algn="ctr">
+                      <a:solidFill>
+                        <a:srgbClr val="D9DEE6"/>
+                      </a:solidFill>
+                      <a:prstDash val="solid"/>
+                      <a:round/>
+                      <a:headEnd type="none" w="med" len="med"/>
+                      <a:tailEnd type="none" w="med" len="med"/>
+                    </a:lnT>
+                    <a:lnB w="12700" cap="flat" cmpd="sng" algn="ctr">
+                      <a:solidFill>
+                        <a:srgbClr val="D9DEE6"/>
+                      </a:solidFill>
+                      <a:prstDash val="solid"/>
+                      <a:round/>
+                      <a:headEnd type="none" w="med" len="med"/>
+                      <a:tailEnd type="none" w="med" len="med"/>
+                    </a:lnB>
+                    <a:solidFill>
+                      <a:srgbClr val="DCE6F2"/>
+                    </a:solidFill>
+                  </a:tcPr>
+                </a:tc>
+                <a:tc>
+                  <a:txBody>
+                    <a:bodyPr/>
+                    <a:lstStyle/>
+                    <a:p>
+                      <a:pPr algn="ctr" indent="0" marL="0">
+                        <a:buNone/>
+                      </a:pPr>
+                      <a:r>
+                        <a:rPr lang="ko-KR" altLang="en-US" sz="1700" b="1" dirty="0">
+                          <a:solidFill>
+                            <a:srgbClr val="222222"/>
+                          </a:solidFill>
+                          <a:latin typeface="Pretendard" pitchFamily="34" charset="0"/>
+                          <a:ea typeface="Pretendard" pitchFamily="34" charset="-122"/>
+                          <a:cs typeface="Pretendard" pitchFamily="34" charset="-120"/>
+                        </a:rPr>
+                        <a:t>행</a:t>
+                      </a:r>
+                      <a:endParaRPr lang="ko-KR" sz="1700" dirty="0">
+                        <a:latin typeface="Pretendard" charset="0"/>
+                        <a:ea typeface="Pretendard" charset="0"/>
+                        <a:cs typeface="Pretendard" charset="0"/>
+                      </a:endParaRPr>
+                    </a:p>
+                  </a:txBody>
+                  <a:tcPr marL="137160" marR="137160" marT="45720" marB="45720" anchor="ctr">
+                    <a:lnL w="12700" cap="flat" cmpd="sng" algn="ctr">
+                      <a:solidFill>
+                        <a:srgbClr val="D9DEE6"/>
+                      </a:solidFill>
+                      <a:prstDash val="solid"/>
+                      <a:round/>
+                      <a:headEnd type="none" w="med" len="med"/>
+                      <a:tailEnd type="none" w="med" len="med"/>
+                    </a:lnL>
+                    <a:lnR w="12700" cap="flat" cmpd="sng" algn="ctr">
+                      <a:solidFill>
+                        <a:srgbClr val="D9DEE6"/>
+                      </a:solidFill>
+                      <a:prstDash val="solid"/>
+                      <a:round/>
+                      <a:headEnd type="none" w="med" len="med"/>
+                      <a:tailEnd type="none" w="med" len="med"/>
+                    </a:lnR>
+                    <a:lnT w="12700" cap="flat" cmpd="sng" algn="ctr">
+                      <a:solidFill>
+                        <a:srgbClr val="D9DEE6"/>
+                      </a:solidFill>
+                      <a:prstDash val="solid"/>
+                      <a:round/>
+                      <a:headEnd type="none" w="med" len="med"/>
+                      <a:tailEnd type="none" w="med" len="med"/>
+                    </a:lnT>
+                    <a:lnB w="12700" cap="flat" cmpd="sng" algn="ctr">
+                      <a:solidFill>
+                        <a:srgbClr val="D9DEE6"/>
+                      </a:solidFill>
+                      <a:prstDash val="solid"/>
+                      <a:round/>
+                      <a:headEnd type="none" w="med" len="med"/>
+                      <a:tailEnd type="none" w="med" len="med"/>
+                    </a:lnB>
+                    <a:solidFill>
+                      <a:srgbClr val="DCE6F2"/>
+                    </a:solidFill>
+                  </a:tcPr>
+                </a:tc>
+                <a:tc>
+                  <a:txBody>
+                    <a:bodyPr/>
+                    <a:lstStyle/>
+                    <a:p>
+                      <a:pPr algn="l" indent="0" marL="0">
+                        <a:buNone/>
+                      </a:pPr>
+                      <a:r>
+                        <a:rPr lang="ko-KR" altLang="en-US" sz="1700" b="1" dirty="0">
+                          <a:solidFill>
+                            <a:srgbClr val="222222"/>
+                          </a:solidFill>
+                          <a:latin typeface="Pretendard" pitchFamily="34" charset="0"/>
+                          <a:ea typeface="Pretendard" pitchFamily="34" charset="-122"/>
+                          <a:cs typeface="Pretendard" pitchFamily="34" charset="-120"/>
+                        </a:rPr>
+                        <a:t>특히 중요한 것</a:t>
+                      </a:r>
+                      <a:endParaRPr lang="ko-KR" sz="1700" dirty="0">
+                        <a:latin typeface="Pretendard" charset="0"/>
+                        <a:ea typeface="Pretendard" charset="0"/>
+                        <a:cs typeface="Pretendard" charset="0"/>
+                      </a:endParaRPr>
+                    </a:p>
+                  </a:txBody>
+                  <a:tcPr marL="137160" marR="137160" marT="45720" marB="45720" anchor="ctr">
+                    <a:lnL w="12700" cap="flat" cmpd="sng" algn="ctr">
+                      <a:solidFill>
+                        <a:srgbClr val="D9DEE6"/>
+                      </a:solidFill>
+                      <a:prstDash val="solid"/>
+                      <a:round/>
+                      <a:headEnd type="none" w="med" len="med"/>
+                      <a:tailEnd type="none" w="med" len="med"/>
+                    </a:lnL>
+                    <a:lnR w="12700" cap="flat" cmpd="sng" algn="ctr">
+                      <a:solidFill>
+                        <a:srgbClr val="D9DEE6"/>
+                      </a:solidFill>
+                      <a:prstDash val="solid"/>
+                      <a:round/>
+                      <a:headEnd type="none" w="med" len="med"/>
+                      <a:tailEnd type="none" w="med" len="med"/>
+                    </a:lnR>
+                    <a:lnT w="12700" cap="flat" cmpd="sng" algn="ctr">
+                      <a:solidFill>
+                        <a:srgbClr val="D9DEE6"/>
+                      </a:solidFill>
+                      <a:prstDash val="solid"/>
+                      <a:round/>
+                      <a:headEnd type="none" w="med" len="med"/>
+                      <a:tailEnd type="none" w="med" len="med"/>
+                    </a:lnT>
+                    <a:lnB w="12700" cap="flat" cmpd="sng" algn="ctr">
+                      <a:solidFill>
+                        <a:srgbClr val="D9DEE6"/>
+                      </a:solidFill>
+                      <a:prstDash val="solid"/>
+                      <a:round/>
+                      <a:headEnd type="none" w="med" len="med"/>
+                      <a:tailEnd type="none" w="med" len="med"/>
+                    </a:lnB>
+                    <a:solidFill>
+                      <a:srgbClr val="DCE6F2"/>
+                    </a:solidFill>
+                  </a:tcPr>
+                </a:tc>
+                <a:tc>
+                  <a:txBody>
+                    <a:bodyPr/>
+                    <a:lstStyle/>
+                    <a:p>
+                      <a:pPr algn="l" indent="0" marL="0">
+                        <a:buNone/>
+                      </a:pPr>
+                      <a:r>
+                        <a:rPr lang="ko-KR" altLang="en-US" sz="1700" b="1" dirty="0">
+                          <a:solidFill>
+                            <a:srgbClr val="222222"/>
+                          </a:solidFill>
+                          <a:latin typeface="Pretendard" pitchFamily="34" charset="0"/>
+                          <a:ea typeface="Pretendard" pitchFamily="34" charset="-122"/>
+                          <a:cs typeface="Pretendard" pitchFamily="34" charset="-120"/>
+                        </a:rPr>
+                        <a:t>그 정확도를 요구하는 근거</a:t>
+                      </a:r>
+                      <a:endParaRPr lang="ko-KR" sz="1700" dirty="0">
+                        <a:latin typeface="Pretendard" charset="0"/>
+                        <a:ea typeface="Pretendard" charset="0"/>
+                        <a:cs typeface="Pretendard" charset="0"/>
+                      </a:endParaRPr>
+                    </a:p>
+                  </a:txBody>
+                  <a:tcPr marL="137160" marR="137160" marT="45720" marB="45720" anchor="ctr">
+                    <a:lnL w="12700" cap="flat" cmpd="sng" algn="ctr">
+                      <a:solidFill>
+                        <a:srgbClr val="D9DEE6"/>
+                      </a:solidFill>
+                      <a:prstDash val="solid"/>
+                      <a:round/>
+                      <a:headEnd type="none" w="med" len="med"/>
+                      <a:tailEnd type="none" w="med" len="med"/>
+                    </a:lnL>
+                    <a:lnR w="12700" cap="flat" cmpd="sng" algn="ctr">
+                      <a:solidFill>
+                        <a:srgbClr val="D9DEE6"/>
+                      </a:solidFill>
+                      <a:prstDash val="solid"/>
+                      <a:round/>
+                      <a:headEnd type="none" w="med" len="med"/>
+                      <a:tailEnd type="none" w="med" len="med"/>
+                    </a:lnR>
+                    <a:lnT w="12700" cap="flat" cmpd="sng" algn="ctr">
+                      <a:solidFill>
+                        <a:srgbClr val="D9DEE6"/>
+                      </a:solidFill>
+                      <a:prstDash val="solid"/>
+                      <a:round/>
+                      <a:headEnd type="none" w="med" len="med"/>
+                      <a:tailEnd type="none" w="med" len="med"/>
+                    </a:lnT>
+                    <a:lnB w="12700" cap="flat" cmpd="sng" algn="ctr">
+                      <a:solidFill>
+                        <a:srgbClr val="D9DEE6"/>
+                      </a:solidFill>
+                      <a:prstDash val="solid"/>
+                      <a:round/>
+                      <a:headEnd type="none" w="med" len="med"/>
+                      <a:tailEnd type="none" w="med" len="med"/>
+                    </a:lnB>
+                    <a:solidFill>
+                      <a:srgbClr val="DCE6F2"/>
+                    </a:solidFill>
+                  </a:tcPr>
+                </a:tc>
+              </a:tr>
+              <a:tr h="673100">
+                <a:tc>
+                  <a:txBody>
+                    <a:bodyPr/>
+                    <a:lstStyle/>
+                    <a:p>
+                      <a:pPr algn="ctr" indent="0" marL="0">
+                        <a:buNone/>
+                      </a:pPr>
+                      <a:r>
+                        <a:rPr lang="ko-KR" altLang="en-US" sz="1700" dirty="0">
+                          <a:solidFill>
+                            <a:srgbClr val="222222"/>
+                          </a:solidFill>
+                          <a:latin typeface="Pretendard" pitchFamily="34" charset="0"/>
+                          <a:ea typeface="Pretendard" pitchFamily="34" charset="-122"/>
+                          <a:cs typeface="Pretendard" pitchFamily="34" charset="-120"/>
+                        </a:rPr>
+                        <a:t>부산물 산소</a:t>
+                      </a:r>
+                      <a:endParaRPr lang="ko-KR" sz="1700" dirty="0">
+                        <a:latin typeface="Pretendard" charset="0"/>
+                        <a:ea typeface="Pretendard" charset="0"/>
+                        <a:cs typeface="Pretendard" charset="0"/>
+                      </a:endParaRPr>
+                    </a:p>
+                  </a:txBody>
+                  <a:tcPr marL="137160" marR="137160" marT="45720" marB="45720" anchor="ctr">
+                    <a:lnL w="12700" cap="flat" cmpd="sng" algn="ctr">
+                      <a:solidFill>
+                        <a:srgbClr val="D9DEE6"/>
+                      </a:solidFill>
+                      <a:prstDash val="solid"/>
+                      <a:round/>
+                      <a:headEnd type="none" w="med" len="med"/>
+                      <a:tailEnd type="none" w="med" len="med"/>
+                    </a:lnL>
+                    <a:lnR w="12700" cap="flat" cmpd="sng" algn="ctr">
+                      <a:solidFill>
+                        <a:srgbClr val="D9DEE6"/>
+                      </a:solidFill>
+                      <a:prstDash val="solid"/>
+                      <a:round/>
+                      <a:headEnd type="none" w="med" len="med"/>
+                      <a:tailEnd type="none" w="med" len="med"/>
+                    </a:lnR>
+                    <a:lnT w="12700" cap="flat" cmpd="sng" algn="ctr">
+                      <a:solidFill>
+                        <a:srgbClr val="D9DEE6"/>
+                      </a:solidFill>
+                      <a:prstDash val="solid"/>
+                      <a:round/>
+                      <a:headEnd type="none" w="med" len="med"/>
+                      <a:tailEnd type="none" w="med" len="med"/>
+                    </a:lnT>
+                    <a:lnB w="12700" cap="flat" cmpd="sng" algn="ctr">
+                      <a:solidFill>
+                        <a:srgbClr val="D9DEE6"/>
+                      </a:solidFill>
+                      <a:prstDash val="solid"/>
+                      <a:round/>
+                      <a:headEnd type="none" w="med" len="med"/>
+                      <a:tailEnd type="none" w="med" len="med"/>
+                    </a:lnB>
+                    <a:solidFill>
+                      <a:srgbClr val="FFFFFF"/>
+                    </a:solidFill>
+                  </a:tcPr>
+                </a:tc>
+                <a:tc>
+                  <a:txBody>
+                    <a:bodyPr/>
+                    <a:lstStyle/>
+                    <a:p>
+                      <a:pPr algn="ctr" indent="0" marL="0">
+                        <a:buNone/>
+                      </a:pPr>
+                      <a:r>
+                        <a:rPr lang="ko-KR" altLang="en-US" sz="1700" dirty="0">
+                          <a:solidFill>
+                            <a:srgbClr val="222222"/>
+                          </a:solidFill>
+                          <a:latin typeface="Pretendard" pitchFamily="34" charset="0"/>
+                          <a:ea typeface="Pretendard" pitchFamily="34" charset="-122"/>
+                          <a:cs typeface="Pretendard" pitchFamily="34" charset="-120"/>
+                        </a:rPr>
+                        <a:t>12</a:t>
+                      </a:r>
+                      <a:endParaRPr lang="ko-KR" sz="1700" dirty="0">
+                        <a:latin typeface="Pretendard" charset="0"/>
+                        <a:ea typeface="Pretendard" charset="0"/>
+                        <a:cs typeface="Pretendard" charset="0"/>
+                      </a:endParaRPr>
+                    </a:p>
+                  </a:txBody>
+                  <a:tcPr marL="137160" marR="137160" marT="45720" marB="45720" anchor="ctr">
+                    <a:lnL w="12700" cap="flat" cmpd="sng" algn="ctr">
+                      <a:solidFill>
+                        <a:srgbClr val="D9DEE6"/>
+                      </a:solidFill>
+                      <a:prstDash val="solid"/>
+                      <a:round/>
+                      <a:headEnd type="none" w="med" len="med"/>
+                      <a:tailEnd type="none" w="med" len="med"/>
+                    </a:lnL>
+                    <a:lnR w="12700" cap="flat" cmpd="sng" algn="ctr">
+                      <a:solidFill>
+                        <a:srgbClr val="D9DEE6"/>
+                      </a:solidFill>
+                      <a:prstDash val="solid"/>
+                      <a:round/>
+                      <a:headEnd type="none" w="med" len="med"/>
+                      <a:tailEnd type="none" w="med" len="med"/>
+                    </a:lnR>
+                    <a:lnT w="12700" cap="flat" cmpd="sng" algn="ctr">
+                      <a:solidFill>
+                        <a:srgbClr val="D9DEE6"/>
+                      </a:solidFill>
+                      <a:prstDash val="solid"/>
+                      <a:round/>
+                      <a:headEnd type="none" w="med" len="med"/>
+                      <a:tailEnd type="none" w="med" len="med"/>
+                    </a:lnT>
+                    <a:lnB w="12700" cap="flat" cmpd="sng" algn="ctr">
+                      <a:solidFill>
+                        <a:srgbClr val="D9DEE6"/>
+                      </a:solidFill>
+                      <a:prstDash val="solid"/>
+                      <a:round/>
+                      <a:headEnd type="none" w="med" len="med"/>
+                      <a:tailEnd type="none" w="med" len="med"/>
+                    </a:lnB>
+                    <a:solidFill>
+                      <a:srgbClr val="FFFFFF"/>
+                    </a:solidFill>
+                  </a:tcPr>
+                </a:tc>
+                <a:tc>
+                  <a:txBody>
+                    <a:bodyPr/>
+                    <a:lstStyle/>
+                    <a:p>
+                      <a:pPr algn="l" indent="0" marL="0">
+                        <a:buNone/>
+                      </a:pPr>
+                      <a:r>
+                        <a:rPr lang="ko-KR" altLang="en-US" sz="1700" dirty="0">
+                          <a:solidFill>
+                            <a:srgbClr val="222222"/>
+                          </a:solidFill>
+                          <a:latin typeface="Pretendard" pitchFamily="34" charset="0"/>
+                          <a:ea typeface="Pretendard" pitchFamily="34" charset="-122"/>
+                          <a:cs typeface="Pretendard" pitchFamily="34" charset="-120"/>
+                        </a:rPr>
+                        <a:t>TT-401 탱크 온도, 산소 중 수소 분석기, 출하 적산 ±0.5%</a:t>
+                      </a:r>
+                      <a:endParaRPr lang="ko-KR" sz="1700" dirty="0">
+                        <a:latin typeface="Pretendard" charset="0"/>
+                        <a:ea typeface="Pretendard" charset="0"/>
+                        <a:cs typeface="Pretendard" charset="0"/>
+                      </a:endParaRPr>
+                    </a:p>
+                  </a:txBody>
+                  <a:tcPr marL="137160" marR="137160" marT="45720" marB="45720" anchor="ctr">
+                    <a:lnL w="12700" cap="flat" cmpd="sng" algn="ctr">
+                      <a:solidFill>
+                        <a:srgbClr val="D9DEE6"/>
+                      </a:solidFill>
+                      <a:prstDash val="solid"/>
+                      <a:round/>
+                      <a:headEnd type="none" w="med" len="med"/>
+                      <a:tailEnd type="none" w="med" len="med"/>
+                    </a:lnL>
+                    <a:lnR w="12700" cap="flat" cmpd="sng" algn="ctr">
+                      <a:solidFill>
+                        <a:srgbClr val="D9DEE6"/>
+                      </a:solidFill>
+                      <a:prstDash val="solid"/>
+                      <a:round/>
+                      <a:headEnd type="none" w="med" len="med"/>
+                      <a:tailEnd type="none" w="med" len="med"/>
+                    </a:lnR>
+                    <a:lnT w="12700" cap="flat" cmpd="sng" algn="ctr">
+                      <a:solidFill>
+                        <a:srgbClr val="D9DEE6"/>
+                      </a:solidFill>
+                      <a:prstDash val="solid"/>
+                      <a:round/>
+                      <a:headEnd type="none" w="med" len="med"/>
+                      <a:tailEnd type="none" w="med" len="med"/>
+                    </a:lnT>
+                    <a:lnB w="12700" cap="flat" cmpd="sng" algn="ctr">
+                      <a:solidFill>
+                        <a:srgbClr val="D9DEE6"/>
+                      </a:solidFill>
+                      <a:prstDash val="solid"/>
+                      <a:round/>
+                      <a:headEnd type="none" w="med" len="med"/>
+                      <a:tailEnd type="none" w="med" len="med"/>
+                    </a:lnB>
+                    <a:solidFill>
+                      <a:srgbClr val="FFFFFF"/>
+                    </a:solidFill>
+                  </a:tcPr>
+                </a:tc>
+                <a:tc>
+                  <a:txBody>
+                    <a:bodyPr/>
+                    <a:lstStyle/>
+                    <a:p>
+                      <a:pPr algn="l" indent="0" marL="0">
+                        <a:buNone/>
+                      </a:pPr>
+                      <a:r>
+                        <a:rPr lang="ko-KR" altLang="en-US" sz="1700" dirty="0">
+                          <a:solidFill>
+                            <a:srgbClr val="222222"/>
+                          </a:solidFill>
+                          <a:latin typeface="Pretendard" pitchFamily="34" charset="0"/>
+                          <a:ea typeface="Pretendard" pitchFamily="34" charset="-122"/>
+                          <a:cs typeface="Pretendard" pitchFamily="34" charset="-120"/>
+                        </a:rPr>
+                        <a:t>온도 없이는 재고 환산 자체가 불가. HTO는 법정 압축금지선 2 vol% 판정용이라 분해능 0.05 vol% 필요</a:t>
+                      </a:r>
+                      <a:endParaRPr lang="ko-KR" sz="1700" dirty="0">
+                        <a:latin typeface="Pretendard" charset="0"/>
+                        <a:ea typeface="Pretendard" charset="0"/>
+                        <a:cs typeface="Pretendard" charset="0"/>
+                      </a:endParaRPr>
+                    </a:p>
+                  </a:txBody>
+                  <a:tcPr marL="137160" marR="137160" marT="45720" marB="45720" anchor="ctr">
+                    <a:lnL w="12700" cap="flat" cmpd="sng" algn="ctr">
+                      <a:solidFill>
+                        <a:srgbClr val="D9DEE6"/>
+                      </a:solidFill>
+                      <a:prstDash val="solid"/>
+                      <a:round/>
+                      <a:headEnd type="none" w="med" len="med"/>
+                      <a:tailEnd type="none" w="med" len="med"/>
+                    </a:lnL>
+                    <a:lnR w="12700" cap="flat" cmpd="sng" algn="ctr">
+                      <a:solidFill>
+                        <a:srgbClr val="D9DEE6"/>
+                      </a:solidFill>
+                      <a:prstDash val="solid"/>
+                      <a:round/>
+                      <a:headEnd type="none" w="med" len="med"/>
+                      <a:tailEnd type="none" w="med" len="med"/>
+                    </a:lnR>
+                    <a:lnT w="12700" cap="flat" cmpd="sng" algn="ctr">
+                      <a:solidFill>
+                        <a:srgbClr val="D9DEE6"/>
+                      </a:solidFill>
+                      <a:prstDash val="solid"/>
+                      <a:round/>
+                      <a:headEnd type="none" w="med" len="med"/>
+                      <a:tailEnd type="none" w="med" len="med"/>
+                    </a:lnT>
+                    <a:lnB w="12700" cap="flat" cmpd="sng" algn="ctr">
+                      <a:solidFill>
+                        <a:srgbClr val="D9DEE6"/>
+                      </a:solidFill>
+                      <a:prstDash val="solid"/>
+                      <a:round/>
+                      <a:headEnd type="none" w="med" len="med"/>
+                      <a:tailEnd type="none" w="med" len="med"/>
+                    </a:lnB>
+                    <a:solidFill>
+                      <a:srgbClr val="FFFFFF"/>
+                    </a:solidFill>
+                  </a:tcPr>
+                </a:tc>
+              </a:tr>
+              <a:tr h="673100">
+                <a:tc>
+                  <a:txBody>
+                    <a:bodyPr/>
+                    <a:lstStyle/>
+                    <a:p>
+                      <a:pPr algn="ctr" indent="0" marL="0">
+                        <a:buNone/>
+                      </a:pPr>
+                      <a:r>
+                        <a:rPr lang="ko-KR" altLang="en-US" sz="1700" dirty="0">
+                          <a:solidFill>
+                            <a:srgbClr val="222222"/>
+                          </a:solidFill>
+                          <a:latin typeface="Pretendard" pitchFamily="34" charset="0"/>
+                          <a:ea typeface="Pretendard" pitchFamily="34" charset="-122"/>
+                          <a:cs typeface="Pretendard" pitchFamily="34" charset="-120"/>
+                        </a:rPr>
+                        <a:t>폐열회수</a:t>
+                      </a:r>
+                      <a:endParaRPr lang="ko-KR" sz="1700" dirty="0">
+                        <a:latin typeface="Pretendard" charset="0"/>
+                        <a:ea typeface="Pretendard" charset="0"/>
+                        <a:cs typeface="Pretendard" charset="0"/>
+                      </a:endParaRPr>
+                    </a:p>
+                  </a:txBody>
+                  <a:tcPr marL="137160" marR="137160" marT="45720" marB="45720" anchor="ctr">
+                    <a:lnL w="12700" cap="flat" cmpd="sng" algn="ctr">
+                      <a:solidFill>
+                        <a:srgbClr val="D9DEE6"/>
+                      </a:solidFill>
+                      <a:prstDash val="solid"/>
+                      <a:round/>
+                      <a:headEnd type="none" w="med" len="med"/>
+                      <a:tailEnd type="none" w="med" len="med"/>
+                    </a:lnL>
+                    <a:lnR w="12700" cap="flat" cmpd="sng" algn="ctr">
+                      <a:solidFill>
+                        <a:srgbClr val="D9DEE6"/>
+                      </a:solidFill>
+                      <a:prstDash val="solid"/>
+                      <a:round/>
+                      <a:headEnd type="none" w="med" len="med"/>
+                      <a:tailEnd type="none" w="med" len="med"/>
+                    </a:lnR>
+                    <a:lnT w="12700" cap="flat" cmpd="sng" algn="ctr">
+                      <a:solidFill>
+                        <a:srgbClr val="D9DEE6"/>
+                      </a:solidFill>
+                      <a:prstDash val="solid"/>
+                      <a:round/>
+                      <a:headEnd type="none" w="med" len="med"/>
+                      <a:tailEnd type="none" w="med" len="med"/>
+                    </a:lnT>
+                    <a:lnB w="12700" cap="flat" cmpd="sng" algn="ctr">
+                      <a:solidFill>
+                        <a:srgbClr val="D9DEE6"/>
+                      </a:solidFill>
+                      <a:prstDash val="solid"/>
+                      <a:round/>
+                      <a:headEnd type="none" w="med" len="med"/>
+                      <a:tailEnd type="none" w="med" len="med"/>
+                    </a:lnB>
+                    <a:solidFill>
+                      <a:srgbClr val="FFFFFF"/>
+                    </a:solidFill>
+                  </a:tcPr>
+                </a:tc>
+                <a:tc>
+                  <a:txBody>
+                    <a:bodyPr/>
+                    <a:lstStyle/>
+                    <a:p>
+                      <a:pPr algn="ctr" indent="0" marL="0">
+                        <a:buNone/>
+                      </a:pPr>
+                      <a:r>
+                        <a:rPr lang="ko-KR" altLang="en-US" sz="1700" dirty="0">
+                          <a:solidFill>
+                            <a:srgbClr val="222222"/>
+                          </a:solidFill>
+                          <a:latin typeface="Pretendard" pitchFamily="34" charset="0"/>
+                          <a:ea typeface="Pretendard" pitchFamily="34" charset="-122"/>
+                          <a:cs typeface="Pretendard" pitchFamily="34" charset="-120"/>
+                        </a:rPr>
+                        <a:t>10</a:t>
+                      </a:r>
+                      <a:endParaRPr lang="ko-KR" sz="1700" dirty="0">
+                        <a:latin typeface="Pretendard" charset="0"/>
+                        <a:ea typeface="Pretendard" charset="0"/>
+                        <a:cs typeface="Pretendard" charset="0"/>
+                      </a:endParaRPr>
+                    </a:p>
+                  </a:txBody>
+                  <a:tcPr marL="137160" marR="137160" marT="45720" marB="45720" anchor="ctr">
+                    <a:lnL w="12700" cap="flat" cmpd="sng" algn="ctr">
+                      <a:solidFill>
+                        <a:srgbClr val="D9DEE6"/>
+                      </a:solidFill>
+                      <a:prstDash val="solid"/>
+                      <a:round/>
+                      <a:headEnd type="none" w="med" len="med"/>
+                      <a:tailEnd type="none" w="med" len="med"/>
+                    </a:lnL>
+                    <a:lnR w="12700" cap="flat" cmpd="sng" algn="ctr">
+                      <a:solidFill>
+                        <a:srgbClr val="D9DEE6"/>
+                      </a:solidFill>
+                      <a:prstDash val="solid"/>
+                      <a:round/>
+                      <a:headEnd type="none" w="med" len="med"/>
+                      <a:tailEnd type="none" w="med" len="med"/>
+                    </a:lnR>
+                    <a:lnT w="12700" cap="flat" cmpd="sng" algn="ctr">
+                      <a:solidFill>
+                        <a:srgbClr val="D9DEE6"/>
+                      </a:solidFill>
+                      <a:prstDash val="solid"/>
+                      <a:round/>
+                      <a:headEnd type="none" w="med" len="med"/>
+                      <a:tailEnd type="none" w="med" len="med"/>
+                    </a:lnT>
+                    <a:lnB w="12700" cap="flat" cmpd="sng" algn="ctr">
+                      <a:solidFill>
+                        <a:srgbClr val="D9DEE6"/>
+                      </a:solidFill>
+                      <a:prstDash val="solid"/>
+                      <a:round/>
+                      <a:headEnd type="none" w="med" len="med"/>
+                      <a:tailEnd type="none" w="med" len="med"/>
+                    </a:lnB>
+                    <a:solidFill>
+                      <a:srgbClr val="FFFFFF"/>
+                    </a:solidFill>
+                  </a:tcPr>
+                </a:tc>
+                <a:tc>
+                  <a:txBody>
+                    <a:bodyPr/>
+                    <a:lstStyle/>
+                    <a:p>
+                      <a:pPr algn="l" indent="0" marL="0">
+                        <a:buNone/>
+                      </a:pPr>
+                      <a:r>
+                        <a:rPr lang="ko-KR" altLang="en-US" sz="1700" dirty="0">
+                          <a:solidFill>
+                            <a:srgbClr val="222222"/>
+                          </a:solidFill>
+                          <a:latin typeface="Pretendard" pitchFamily="34" charset="0"/>
+                          <a:ea typeface="Pretendard" pitchFamily="34" charset="-122"/>
+                          <a:cs typeface="Pretendard" pitchFamily="34" charset="-120"/>
+                        </a:rPr>
+                        <a:t>TT-304 2차측 입구 온도, CT-301 급수 전도도, 적산열량계</a:t>
+                      </a:r>
+                      <a:endParaRPr lang="ko-KR" sz="1700" dirty="0">
+                        <a:latin typeface="Pretendard" charset="0"/>
+                        <a:ea typeface="Pretendard" charset="0"/>
+                        <a:cs typeface="Pretendard" charset="0"/>
+                      </a:endParaRPr>
+                    </a:p>
+                  </a:txBody>
+                  <a:tcPr marL="137160" marR="137160" marT="45720" marB="45720" anchor="ctr">
+                    <a:lnL w="12700" cap="flat" cmpd="sng" algn="ctr">
+                      <a:solidFill>
+                        <a:srgbClr val="D9DEE6"/>
+                      </a:solidFill>
+                      <a:prstDash val="solid"/>
+                      <a:round/>
+                      <a:headEnd type="none" w="med" len="med"/>
+                      <a:tailEnd type="none" w="med" len="med"/>
+                    </a:lnL>
+                    <a:lnR w="12700" cap="flat" cmpd="sng" algn="ctr">
+                      <a:solidFill>
+                        <a:srgbClr val="D9DEE6"/>
+                      </a:solidFill>
+                      <a:prstDash val="solid"/>
+                      <a:round/>
+                      <a:headEnd type="none" w="med" len="med"/>
+                      <a:tailEnd type="none" w="med" len="med"/>
+                    </a:lnR>
+                    <a:lnT w="12700" cap="flat" cmpd="sng" algn="ctr">
+                      <a:solidFill>
+                        <a:srgbClr val="D9DEE6"/>
+                      </a:solidFill>
+                      <a:prstDash val="solid"/>
+                      <a:round/>
+                      <a:headEnd type="none" w="med" len="med"/>
+                      <a:tailEnd type="none" w="med" len="med"/>
+                    </a:lnT>
+                    <a:lnB w="12700" cap="flat" cmpd="sng" algn="ctr">
+                      <a:solidFill>
+                        <a:srgbClr val="D9DEE6"/>
+                      </a:solidFill>
+                      <a:prstDash val="solid"/>
+                      <a:round/>
+                      <a:headEnd type="none" w="med" len="med"/>
+                      <a:tailEnd type="none" w="med" len="med"/>
+                    </a:lnB>
+                    <a:solidFill>
+                      <a:srgbClr val="FFFFFF"/>
+                    </a:solidFill>
+                  </a:tcPr>
+                </a:tc>
+                <a:tc>
+                  <a:txBody>
+                    <a:bodyPr/>
+                    <a:lstStyle/>
+                    <a:p>
+                      <a:pPr algn="l" indent="0" marL="0">
+                        <a:buNone/>
+                      </a:pPr>
+                      <a:r>
+                        <a:rPr lang="ko-KR" altLang="en-US" sz="1700" dirty="0">
+                          <a:solidFill>
+                            <a:srgbClr val="222222"/>
+                          </a:solidFill>
+                          <a:latin typeface="Pretendard" pitchFamily="34" charset="0"/>
+                          <a:ea typeface="Pretendard" pitchFamily="34" charset="-122"/>
+                          <a:cs typeface="Pretendard" pitchFamily="34" charset="-120"/>
+                        </a:rPr>
+                        <a:t>온도 쌍 편차 0.1 °C 이내(EN 1434 Class 2) — 안 맞으면 ΔT 15 K에서 오차가 바로 1%를 먹는다</a:t>
+                      </a:r>
+                      <a:endParaRPr lang="ko-KR" sz="1700" dirty="0">
+                        <a:latin typeface="Pretendard" charset="0"/>
+                        <a:ea typeface="Pretendard" charset="0"/>
+                        <a:cs typeface="Pretendard" charset="0"/>
+                      </a:endParaRPr>
+                    </a:p>
+                  </a:txBody>
+                  <a:tcPr marL="137160" marR="137160" marT="45720" marB="45720" anchor="ctr">
+                    <a:lnL w="12700" cap="flat" cmpd="sng" algn="ctr">
+                      <a:solidFill>
+                        <a:srgbClr val="D9DEE6"/>
+                      </a:solidFill>
+                      <a:prstDash val="solid"/>
+                      <a:round/>
+                      <a:headEnd type="none" w="med" len="med"/>
+                      <a:tailEnd type="none" w="med" len="med"/>
+                    </a:lnL>
+                    <a:lnR w="12700" cap="flat" cmpd="sng" algn="ctr">
+                      <a:solidFill>
+                        <a:srgbClr val="D9DEE6"/>
+                      </a:solidFill>
+                      <a:prstDash val="solid"/>
+                      <a:round/>
+                      <a:headEnd type="none" w="med" len="med"/>
+                      <a:tailEnd type="none" w="med" len="med"/>
+                    </a:lnR>
+                    <a:lnT w="12700" cap="flat" cmpd="sng" algn="ctr">
+                      <a:solidFill>
+                        <a:srgbClr val="D9DEE6"/>
+                      </a:solidFill>
+                      <a:prstDash val="solid"/>
+                      <a:round/>
+                      <a:headEnd type="none" w="med" len="med"/>
+                      <a:tailEnd type="none" w="med" len="med"/>
+                    </a:lnT>
+                    <a:lnB w="12700" cap="flat" cmpd="sng" algn="ctr">
+                      <a:solidFill>
+                        <a:srgbClr val="D9DEE6"/>
+                      </a:solidFill>
+                      <a:prstDash val="solid"/>
+                      <a:round/>
+                      <a:headEnd type="none" w="med" len="med"/>
+                      <a:tailEnd type="none" w="med" len="med"/>
+                    </a:lnB>
+                    <a:solidFill>
+                      <a:srgbClr val="FFFFFF"/>
+                    </a:solidFill>
+                  </a:tcPr>
+                </a:tc>
+              </a:tr>
+              <a:tr h="673100">
+                <a:tc>
+                  <a:txBody>
+                    <a:bodyPr/>
+                    <a:lstStyle/>
+                    <a:p>
+                      <a:pPr algn="ctr" indent="0" marL="0">
+                        <a:buNone/>
+                      </a:pPr>
+                      <a:r>
+                        <a:rPr lang="ko-KR" altLang="en-US" sz="1700" dirty="0">
+                          <a:solidFill>
+                            <a:srgbClr val="222222"/>
+                          </a:solidFill>
+                          <a:latin typeface="Pretendard" pitchFamily="34" charset="0"/>
+                          <a:ea typeface="Pretendard" pitchFamily="34" charset="-122"/>
+                          <a:cs typeface="Pretendard" pitchFamily="34" charset="-120"/>
+                        </a:rPr>
+                        <a:t>수처리</a:t>
+                      </a:r>
+                      <a:endParaRPr lang="ko-KR" sz="1700" dirty="0">
+                        <a:latin typeface="Pretendard" charset="0"/>
+                        <a:ea typeface="Pretendard" charset="0"/>
+                        <a:cs typeface="Pretendard" charset="0"/>
+                      </a:endParaRPr>
+                    </a:p>
+                  </a:txBody>
+                  <a:tcPr marL="137160" marR="137160" marT="45720" marB="45720" anchor="ctr">
+                    <a:lnL w="12700" cap="flat" cmpd="sng" algn="ctr">
+                      <a:solidFill>
+                        <a:srgbClr val="D9DEE6"/>
+                      </a:solidFill>
+                      <a:prstDash val="solid"/>
+                      <a:round/>
+                      <a:headEnd type="none" w="med" len="med"/>
+                      <a:tailEnd type="none" w="med" len="med"/>
+                    </a:lnL>
+                    <a:lnR w="12700" cap="flat" cmpd="sng" algn="ctr">
+                      <a:solidFill>
+                        <a:srgbClr val="D9DEE6"/>
+                      </a:solidFill>
+                      <a:prstDash val="solid"/>
+                      <a:round/>
+                      <a:headEnd type="none" w="med" len="med"/>
+                      <a:tailEnd type="none" w="med" len="med"/>
+                    </a:lnR>
+                    <a:lnT w="12700" cap="flat" cmpd="sng" algn="ctr">
+                      <a:solidFill>
+                        <a:srgbClr val="D9DEE6"/>
+                      </a:solidFill>
+                      <a:prstDash val="solid"/>
+                      <a:round/>
+                      <a:headEnd type="none" w="med" len="med"/>
+                      <a:tailEnd type="none" w="med" len="med"/>
+                    </a:lnT>
+                    <a:lnB w="12700" cap="flat" cmpd="sng" algn="ctr">
+                      <a:solidFill>
+                        <a:srgbClr val="D9DEE6"/>
+                      </a:solidFill>
+                      <a:prstDash val="solid"/>
+                      <a:round/>
+                      <a:headEnd type="none" w="med" len="med"/>
+                      <a:tailEnd type="none" w="med" len="med"/>
+                    </a:lnB>
+                    <a:solidFill>
+                      <a:srgbClr val="FFFFFF"/>
+                    </a:solidFill>
+                  </a:tcPr>
+                </a:tc>
+                <a:tc>
+                  <a:txBody>
+                    <a:bodyPr/>
+                    <a:lstStyle/>
+                    <a:p>
+                      <a:pPr algn="ctr" indent="0" marL="0">
+                        <a:buNone/>
+                      </a:pPr>
+                      <a:r>
+                        <a:rPr lang="ko-KR" altLang="en-US" sz="1700" dirty="0">
+                          <a:solidFill>
+                            <a:srgbClr val="222222"/>
+                          </a:solidFill>
+                          <a:latin typeface="Pretendard" pitchFamily="34" charset="0"/>
+                          <a:ea typeface="Pretendard" pitchFamily="34" charset="-122"/>
+                          <a:cs typeface="Pretendard" pitchFamily="34" charset="-120"/>
+                        </a:rPr>
+                        <a:t>14</a:t>
+                      </a:r>
+                      <a:endParaRPr lang="ko-KR" sz="1700" dirty="0">
+                        <a:latin typeface="Pretendard" charset="0"/>
+                        <a:ea typeface="Pretendard" charset="0"/>
+                        <a:cs typeface="Pretendard" charset="0"/>
+                      </a:endParaRPr>
+                    </a:p>
+                  </a:txBody>
+                  <a:tcPr marL="137160" marR="137160" marT="45720" marB="45720" anchor="ctr">
+                    <a:lnL w="12700" cap="flat" cmpd="sng" algn="ctr">
+                      <a:solidFill>
+                        <a:srgbClr val="D9DEE6"/>
+                      </a:solidFill>
+                      <a:prstDash val="solid"/>
+                      <a:round/>
+                      <a:headEnd type="none" w="med" len="med"/>
+                      <a:tailEnd type="none" w="med" len="med"/>
+                    </a:lnL>
+                    <a:lnR w="12700" cap="flat" cmpd="sng" algn="ctr">
+                      <a:solidFill>
+                        <a:srgbClr val="D9DEE6"/>
+                      </a:solidFill>
+                      <a:prstDash val="solid"/>
+                      <a:round/>
+                      <a:headEnd type="none" w="med" len="med"/>
+                      <a:tailEnd type="none" w="med" len="med"/>
+                    </a:lnR>
+                    <a:lnT w="12700" cap="flat" cmpd="sng" algn="ctr">
+                      <a:solidFill>
+                        <a:srgbClr val="D9DEE6"/>
+                      </a:solidFill>
+                      <a:prstDash val="solid"/>
+                      <a:round/>
+                      <a:headEnd type="none" w="med" len="med"/>
+                      <a:tailEnd type="none" w="med" len="med"/>
+                    </a:lnT>
+                    <a:lnB w="12700" cap="flat" cmpd="sng" algn="ctr">
+                      <a:solidFill>
+                        <a:srgbClr val="D9DEE6"/>
+                      </a:solidFill>
+                      <a:prstDash val="solid"/>
+                      <a:round/>
+                      <a:headEnd type="none" w="med" len="med"/>
+                      <a:tailEnd type="none" w="med" len="med"/>
+                    </a:lnB>
+                    <a:solidFill>
+                      <a:srgbClr val="FFFFFF"/>
+                    </a:solidFill>
+                  </a:tcPr>
+                </a:tc>
+                <a:tc>
+                  <a:txBody>
+                    <a:bodyPr/>
+                    <a:lstStyle/>
+                    <a:p>
+                      <a:pPr algn="l" indent="0" marL="0">
+                        <a:buNone/>
+                      </a:pPr>
+                      <a:r>
+                        <a:rPr lang="ko-KR" altLang="en-US" sz="1700" dirty="0">
+                          <a:solidFill>
+                            <a:srgbClr val="222222"/>
+                          </a:solidFill>
+                          <a:latin typeface="Pretendard" pitchFamily="34" charset="0"/>
+                          <a:ea typeface="Pretendard" pitchFamily="34" charset="-122"/>
+                          <a:cs typeface="Pretendard" pitchFamily="34" charset="-120"/>
+                        </a:rPr>
+                        <a:t>RO·혼상수지 후단 전도도, 재순환 유량계, 급수 적산계</a:t>
+                      </a:r>
+                      <a:endParaRPr lang="ko-KR" sz="1700" dirty="0">
+                        <a:latin typeface="Pretendard" charset="0"/>
+                        <a:ea typeface="Pretendard" charset="0"/>
+                        <a:cs typeface="Pretendard" charset="0"/>
+                      </a:endParaRPr>
+                    </a:p>
+                  </a:txBody>
+                  <a:tcPr marL="137160" marR="137160" marT="45720" marB="45720" anchor="ctr">
+                    <a:lnL w="12700" cap="flat" cmpd="sng" algn="ctr">
+                      <a:solidFill>
+                        <a:srgbClr val="D9DEE6"/>
+                      </a:solidFill>
+                      <a:prstDash val="solid"/>
+                      <a:round/>
+                      <a:headEnd type="none" w="med" len="med"/>
+                      <a:tailEnd type="none" w="med" len="med"/>
+                    </a:lnL>
+                    <a:lnR w="12700" cap="flat" cmpd="sng" algn="ctr">
+                      <a:solidFill>
+                        <a:srgbClr val="D9DEE6"/>
+                      </a:solidFill>
+                      <a:prstDash val="solid"/>
+                      <a:round/>
+                      <a:headEnd type="none" w="med" len="med"/>
+                      <a:tailEnd type="none" w="med" len="med"/>
+                    </a:lnR>
+                    <a:lnT w="12700" cap="flat" cmpd="sng" algn="ctr">
+                      <a:solidFill>
+                        <a:srgbClr val="D9DEE6"/>
+                      </a:solidFill>
+                      <a:prstDash val="solid"/>
+                      <a:round/>
+                      <a:headEnd type="none" w="med" len="med"/>
+                      <a:tailEnd type="none" w="med" len="med"/>
+                    </a:lnT>
+                    <a:lnB w="12700" cap="flat" cmpd="sng" algn="ctr">
+                      <a:solidFill>
+                        <a:srgbClr val="D9DEE6"/>
+                      </a:solidFill>
+                      <a:prstDash val="solid"/>
+                      <a:round/>
+                      <a:headEnd type="none" w="med" len="med"/>
+                      <a:tailEnd type="none" w="med" len="med"/>
+                    </a:lnB>
+                    <a:solidFill>
+                      <a:srgbClr val="FFFFFF"/>
+                    </a:solidFill>
+                  </a:tcPr>
+                </a:tc>
+                <a:tc>
+                  <a:txBody>
+                    <a:bodyPr/>
+                    <a:lstStyle/>
+                    <a:p>
+                      <a:pPr algn="l" indent="0" marL="0">
+                        <a:buNone/>
+                      </a:pPr>
+                      <a:r>
+                        <a:rPr lang="ko-KR" altLang="en-US" sz="1700" dirty="0">
+                          <a:solidFill>
+                            <a:srgbClr val="222222"/>
+                          </a:solidFill>
+                          <a:latin typeface="Pretendard" pitchFamily="34" charset="0"/>
+                          <a:ea typeface="Pretendard" pitchFamily="34" charset="-122"/>
+                          <a:cs typeface="Pretendard" pitchFamily="34" charset="-120"/>
+                        </a:rPr>
+                        <a:t>운전 목표 0.1 µS/cm와 경보 1.0 µS/cm를 가르려면 0.055~2 µS/cm 구간 분해능이 필요하다</a:t>
+                      </a:r>
+                      <a:endParaRPr lang="ko-KR" sz="1700" dirty="0">
+                        <a:latin typeface="Pretendard" charset="0"/>
+                        <a:ea typeface="Pretendard" charset="0"/>
+                        <a:cs typeface="Pretendard" charset="0"/>
+                      </a:endParaRPr>
+                    </a:p>
+                  </a:txBody>
+                  <a:tcPr marL="137160" marR="137160" marT="45720" marB="45720" anchor="ctr">
+                    <a:lnL w="12700" cap="flat" cmpd="sng" algn="ctr">
+                      <a:solidFill>
+                        <a:srgbClr val="D9DEE6"/>
+                      </a:solidFill>
+                      <a:prstDash val="solid"/>
+                      <a:round/>
+                      <a:headEnd type="none" w="med" len="med"/>
+                      <a:tailEnd type="none" w="med" len="med"/>
+                    </a:lnL>
+                    <a:lnR w="12700" cap="flat" cmpd="sng" algn="ctr">
+                      <a:solidFill>
+                        <a:srgbClr val="D9DEE6"/>
+                      </a:solidFill>
+                      <a:prstDash val="solid"/>
+                      <a:round/>
+                      <a:headEnd type="none" w="med" len="med"/>
+                      <a:tailEnd type="none" w="med" len="med"/>
+                    </a:lnR>
+                    <a:lnT w="12700" cap="flat" cmpd="sng" algn="ctr">
+                      <a:solidFill>
+                        <a:srgbClr val="D9DEE6"/>
+                      </a:solidFill>
+                      <a:prstDash val="solid"/>
+                      <a:round/>
+                      <a:headEnd type="none" w="med" len="med"/>
+                      <a:tailEnd type="none" w="med" len="med"/>
+                    </a:lnT>
+                    <a:lnB w="12700" cap="flat" cmpd="sng" algn="ctr">
+                      <a:solidFill>
+                        <a:srgbClr val="D9DEE6"/>
+                      </a:solidFill>
+                      <a:prstDash val="solid"/>
+                      <a:round/>
+                      <a:headEnd type="none" w="med" len="med"/>
+                      <a:tailEnd type="none" w="med" len="med"/>
+                    </a:lnB>
+                    <a:solidFill>
+                      <a:srgbClr val="FFFFFF"/>
+                    </a:solidFill>
+                  </a:tcPr>
+                </a:tc>
+              </a:tr>
+              <a:tr h="673100">
+                <a:tc>
+                  <a:txBody>
+                    <a:bodyPr/>
+                    <a:lstStyle/>
+                    <a:p>
+                      <a:pPr algn="ctr" indent="0" marL="0">
+                        <a:buNone/>
+                      </a:pPr>
+                      <a:r>
+                        <a:rPr lang="ko-KR" altLang="en-US" sz="1700" dirty="0">
+                          <a:solidFill>
+                            <a:srgbClr val="222222"/>
+                          </a:solidFill>
+                          <a:latin typeface="Pretendard" pitchFamily="34" charset="0"/>
+                          <a:ea typeface="Pretendard" pitchFamily="34" charset="-122"/>
+                          <a:cs typeface="Pretendard" pitchFamily="34" charset="-120"/>
+                        </a:rPr>
+                        <a:t>감압·버퍼</a:t>
+                      </a:r>
+                      <a:endParaRPr lang="ko-KR" sz="1700" dirty="0">
+                        <a:latin typeface="Pretendard" charset="0"/>
+                        <a:ea typeface="Pretendard" charset="0"/>
+                        <a:cs typeface="Pretendard" charset="0"/>
+                      </a:endParaRPr>
+                    </a:p>
+                  </a:txBody>
+                  <a:tcPr marL="137160" marR="137160" marT="45720" marB="45720" anchor="ctr">
+                    <a:lnL w="12700" cap="flat" cmpd="sng" algn="ctr">
+                      <a:solidFill>
+                        <a:srgbClr val="D9DEE6"/>
+                      </a:solidFill>
+                      <a:prstDash val="solid"/>
+                      <a:round/>
+                      <a:headEnd type="none" w="med" len="med"/>
+                      <a:tailEnd type="none" w="med" len="med"/>
+                    </a:lnL>
+                    <a:lnR w="12700" cap="flat" cmpd="sng" algn="ctr">
+                      <a:solidFill>
+                        <a:srgbClr val="D9DEE6"/>
+                      </a:solidFill>
+                      <a:prstDash val="solid"/>
+                      <a:round/>
+                      <a:headEnd type="none" w="med" len="med"/>
+                      <a:tailEnd type="none" w="med" len="med"/>
+                    </a:lnR>
+                    <a:lnT w="12700" cap="flat" cmpd="sng" algn="ctr">
+                      <a:solidFill>
+                        <a:srgbClr val="D9DEE6"/>
+                      </a:solidFill>
+                      <a:prstDash val="solid"/>
+                      <a:round/>
+                      <a:headEnd type="none" w="med" len="med"/>
+                      <a:tailEnd type="none" w="med" len="med"/>
+                    </a:lnT>
+                    <a:lnB w="12700" cap="flat" cmpd="sng" algn="ctr">
+                      <a:solidFill>
+                        <a:srgbClr val="D9DEE6"/>
+                      </a:solidFill>
+                      <a:prstDash val="solid"/>
+                      <a:round/>
+                      <a:headEnd type="none" w="med" len="med"/>
+                      <a:tailEnd type="none" w="med" len="med"/>
+                    </a:lnB>
+                    <a:solidFill>
+                      <a:srgbClr val="FFFFFF"/>
+                    </a:solidFill>
+                  </a:tcPr>
+                </a:tc>
+                <a:tc>
+                  <a:txBody>
+                    <a:bodyPr/>
+                    <a:lstStyle/>
+                    <a:p>
+                      <a:pPr algn="ctr" indent="0" marL="0">
+                        <a:buNone/>
+                      </a:pPr>
+                      <a:r>
+                        <a:rPr lang="ko-KR" altLang="en-US" sz="1700" dirty="0">
+                          <a:solidFill>
+                            <a:srgbClr val="222222"/>
+                          </a:solidFill>
+                          <a:latin typeface="Pretendard" pitchFamily="34" charset="0"/>
+                          <a:ea typeface="Pretendard" pitchFamily="34" charset="-122"/>
+                          <a:cs typeface="Pretendard" pitchFamily="34" charset="-120"/>
+                        </a:rPr>
+                        <a:t>6</a:t>
+                      </a:r>
+                      <a:endParaRPr lang="ko-KR" sz="1700" dirty="0">
+                        <a:latin typeface="Pretendard" charset="0"/>
+                        <a:ea typeface="Pretendard" charset="0"/>
+                        <a:cs typeface="Pretendard" charset="0"/>
+                      </a:endParaRPr>
+                    </a:p>
+                  </a:txBody>
+                  <a:tcPr marL="137160" marR="137160" marT="45720" marB="45720" anchor="ctr">
+                    <a:lnL w="12700" cap="flat" cmpd="sng" algn="ctr">
+                      <a:solidFill>
+                        <a:srgbClr val="D9DEE6"/>
+                      </a:solidFill>
+                      <a:prstDash val="solid"/>
+                      <a:round/>
+                      <a:headEnd type="none" w="med" len="med"/>
+                      <a:tailEnd type="none" w="med" len="med"/>
+                    </a:lnL>
+                    <a:lnR w="12700" cap="flat" cmpd="sng" algn="ctr">
+                      <a:solidFill>
+                        <a:srgbClr val="D9DEE6"/>
+                      </a:solidFill>
+                      <a:prstDash val="solid"/>
+                      <a:round/>
+                      <a:headEnd type="none" w="med" len="med"/>
+                      <a:tailEnd type="none" w="med" len="med"/>
+                    </a:lnR>
+                    <a:lnT w="12700" cap="flat" cmpd="sng" algn="ctr">
+                      <a:solidFill>
+                        <a:srgbClr val="D9DEE6"/>
+                      </a:solidFill>
+                      <a:prstDash val="solid"/>
+                      <a:round/>
+                      <a:headEnd type="none" w="med" len="med"/>
+                      <a:tailEnd type="none" w="med" len="med"/>
+                    </a:lnT>
+                    <a:lnB w="12700" cap="flat" cmpd="sng" algn="ctr">
+                      <a:solidFill>
+                        <a:srgbClr val="D9DEE6"/>
+                      </a:solidFill>
+                      <a:prstDash val="solid"/>
+                      <a:round/>
+                      <a:headEnd type="none" w="med" len="med"/>
+                      <a:tailEnd type="none" w="med" len="med"/>
+                    </a:lnB>
+                    <a:solidFill>
+                      <a:srgbClr val="FFFFFF"/>
+                    </a:solidFill>
+                  </a:tcPr>
+                </a:tc>
+                <a:tc>
+                  <a:txBody>
+                    <a:bodyPr/>
+                    <a:lstStyle/>
+                    <a:p>
+                      <a:pPr algn="l" indent="0" marL="0">
+                        <a:buNone/>
+                      </a:pPr>
+                      <a:r>
+                        <a:rPr lang="ko-KR" altLang="en-US" sz="1700" dirty="0">
+                          <a:solidFill>
+                            <a:srgbClr val="222222"/>
+                          </a:solidFill>
+                          <a:latin typeface="Pretendard" pitchFamily="34" charset="0"/>
+                          <a:ea typeface="Pretendard" pitchFamily="34" charset="-122"/>
+                          <a:cs typeface="Pretendard" pitchFamily="34" charset="-120"/>
+                        </a:rPr>
+                        <a:t>TT-201 버퍼 가스 온도, PT-202 스팬 재지정, PLC 1초 압력통계</a:t>
+                      </a:r>
+                      <a:endParaRPr lang="ko-KR" sz="1700" dirty="0">
+                        <a:latin typeface="Pretendard" charset="0"/>
+                        <a:ea typeface="Pretendard" charset="0"/>
+                        <a:cs typeface="Pretendard" charset="0"/>
+                      </a:endParaRPr>
+                    </a:p>
+                  </a:txBody>
+                  <a:tcPr marL="137160" marR="137160" marT="45720" marB="45720" anchor="ctr">
+                    <a:lnL w="12700" cap="flat" cmpd="sng" algn="ctr">
+                      <a:solidFill>
+                        <a:srgbClr val="D9DEE6"/>
+                      </a:solidFill>
+                      <a:prstDash val="solid"/>
+                      <a:round/>
+                      <a:headEnd type="none" w="med" len="med"/>
+                      <a:tailEnd type="none" w="med" len="med"/>
+                    </a:lnL>
+                    <a:lnR w="12700" cap="flat" cmpd="sng" algn="ctr">
+                      <a:solidFill>
+                        <a:srgbClr val="D9DEE6"/>
+                      </a:solidFill>
+                      <a:prstDash val="solid"/>
+                      <a:round/>
+                      <a:headEnd type="none" w="med" len="med"/>
+                      <a:tailEnd type="none" w="med" len="med"/>
+                    </a:lnR>
+                    <a:lnT w="12700" cap="flat" cmpd="sng" algn="ctr">
+                      <a:solidFill>
+                        <a:srgbClr val="D9DEE6"/>
+                      </a:solidFill>
+                      <a:prstDash val="solid"/>
+                      <a:round/>
+                      <a:headEnd type="none" w="med" len="med"/>
+                      <a:tailEnd type="none" w="med" len="med"/>
+                    </a:lnT>
+                    <a:lnB w="12700" cap="flat" cmpd="sng" algn="ctr">
+                      <a:solidFill>
+                        <a:srgbClr val="D9DEE6"/>
+                      </a:solidFill>
+                      <a:prstDash val="solid"/>
+                      <a:round/>
+                      <a:headEnd type="none" w="med" len="med"/>
+                      <a:tailEnd type="none" w="med" len="med"/>
+                    </a:lnB>
+                    <a:solidFill>
+                      <a:srgbClr val="FFFFFF"/>
+                    </a:solidFill>
+                  </a:tcPr>
+                </a:tc>
+                <a:tc>
+                  <a:txBody>
+                    <a:bodyPr/>
+                    <a:lstStyle/>
+                    <a:p>
+                      <a:pPr algn="l" indent="0" marL="0">
+                        <a:buNone/>
+                      </a:pPr>
+                      <a:r>
+                        <a:rPr lang="ko-KR" altLang="en-US" sz="1700" dirty="0">
+                          <a:solidFill>
+                            <a:srgbClr val="222222"/>
+                          </a:solidFill>
+                          <a:latin typeface="Pretendard" pitchFamily="34" charset="0"/>
+                          <a:ea typeface="Pretendard" pitchFamily="34" charset="-122"/>
+                          <a:cs typeface="Pretendard" pitchFamily="34" charset="-120"/>
+                        </a:rPr>
+                        <a:t>0~40 bar 스팬으로는 40 mbar/h급 크리프 판정이 원리상 불가능하다. 0~4 bar·≤0.075%FS로 바꿔야 한다</a:t>
+                      </a:r>
+                      <a:endParaRPr lang="ko-KR" sz="1700" dirty="0">
+                        <a:latin typeface="Pretendard" charset="0"/>
+                        <a:ea typeface="Pretendard" charset="0"/>
+                        <a:cs typeface="Pretendard" charset="0"/>
+                      </a:endParaRPr>
+                    </a:p>
+                  </a:txBody>
+                  <a:tcPr marL="137160" marR="137160" marT="45720" marB="45720" anchor="ctr">
+                    <a:lnL w="12700" cap="flat" cmpd="sng" algn="ctr">
+                      <a:solidFill>
+                        <a:srgbClr val="D9DEE6"/>
+                      </a:solidFill>
+                      <a:prstDash val="solid"/>
+                      <a:round/>
+                      <a:headEnd type="none" w="med" len="med"/>
+                      <a:tailEnd type="none" w="med" len="med"/>
+                    </a:lnL>
+                    <a:lnR w="12700" cap="flat" cmpd="sng" algn="ctr">
+                      <a:solidFill>
+                        <a:srgbClr val="D9DEE6"/>
+                      </a:solidFill>
+                      <a:prstDash val="solid"/>
+                      <a:round/>
+                      <a:headEnd type="none" w="med" len="med"/>
+                      <a:tailEnd type="none" w="med" len="med"/>
+                    </a:lnR>
+                    <a:lnT w="12700" cap="flat" cmpd="sng" algn="ctr">
+                      <a:solidFill>
+                        <a:srgbClr val="D9DEE6"/>
+                      </a:solidFill>
+                      <a:prstDash val="solid"/>
+                      <a:round/>
+                      <a:headEnd type="none" w="med" len="med"/>
+                      <a:tailEnd type="none" w="med" len="med"/>
+                    </a:lnT>
+                    <a:lnB w="12700" cap="flat" cmpd="sng" algn="ctr">
+                      <a:solidFill>
+                        <a:srgbClr val="D9DEE6"/>
+                      </a:solidFill>
+                      <a:prstDash val="solid"/>
+                      <a:round/>
+                      <a:headEnd type="none" w="med" len="med"/>
+                      <a:tailEnd type="none" w="med" len="med"/>
+                    </a:lnB>
+                    <a:solidFill>
+                      <a:srgbClr val="FFFFFF"/>
+                    </a:solidFill>
+                  </a:tcPr>
+                </a:tc>
+              </a:tr>
+              <a:tr h="673100">
+                <a:tc>
+                  <a:txBody>
+                    <a:bodyPr/>
+                    <a:lstStyle/>
+                    <a:p>
+                      <a:pPr algn="ctr" indent="0" marL="0">
+                        <a:buNone/>
+                      </a:pPr>
+                      <a:r>
+                        <a:rPr lang="ko-KR" altLang="en-US" sz="1700" dirty="0">
+                          <a:solidFill>
+                            <a:srgbClr val="222222"/>
+                          </a:solidFill>
+                          <a:latin typeface="Pretendard" pitchFamily="34" charset="0"/>
+                          <a:ea typeface="Pretendard" pitchFamily="34" charset="-122"/>
+                          <a:cs typeface="Pretendard" pitchFamily="34" charset="-120"/>
+                        </a:rPr>
+                        <a:t>외부 반입</a:t>
+                      </a:r>
+                      <a:endParaRPr lang="ko-KR" sz="1700" dirty="0">
+                        <a:latin typeface="Pretendard" charset="0"/>
+                        <a:ea typeface="Pretendard" charset="0"/>
+                        <a:cs typeface="Pretendard" charset="0"/>
+                      </a:endParaRPr>
+                    </a:p>
+                  </a:txBody>
+                  <a:tcPr marL="137160" marR="137160" marT="45720" marB="45720" anchor="ctr">
+                    <a:lnL w="12700" cap="flat" cmpd="sng" algn="ctr">
+                      <a:solidFill>
+                        <a:srgbClr val="D9DEE6"/>
+                      </a:solidFill>
+                      <a:prstDash val="solid"/>
+                      <a:round/>
+                      <a:headEnd type="none" w="med" len="med"/>
+                      <a:tailEnd type="none" w="med" len="med"/>
+                    </a:lnL>
+                    <a:lnR w="12700" cap="flat" cmpd="sng" algn="ctr">
+                      <a:solidFill>
+                        <a:srgbClr val="D9DEE6"/>
+                      </a:solidFill>
+                      <a:prstDash val="solid"/>
+                      <a:round/>
+                      <a:headEnd type="none" w="med" len="med"/>
+                      <a:tailEnd type="none" w="med" len="med"/>
+                    </a:lnR>
+                    <a:lnT w="12700" cap="flat" cmpd="sng" algn="ctr">
+                      <a:solidFill>
+                        <a:srgbClr val="D9DEE6"/>
+                      </a:solidFill>
+                      <a:prstDash val="solid"/>
+                      <a:round/>
+                      <a:headEnd type="none" w="med" len="med"/>
+                      <a:tailEnd type="none" w="med" len="med"/>
+                    </a:lnT>
+                    <a:lnB w="12700" cap="flat" cmpd="sng" algn="ctr">
+                      <a:solidFill>
+                        <a:srgbClr val="D9DEE6"/>
+                      </a:solidFill>
+                      <a:prstDash val="solid"/>
+                      <a:round/>
+                      <a:headEnd type="none" w="med" len="med"/>
+                      <a:tailEnd type="none" w="med" len="med"/>
+                    </a:lnB>
+                    <a:solidFill>
+                      <a:srgbClr val="FFFFFF"/>
+                    </a:solidFill>
+                  </a:tcPr>
+                </a:tc>
+                <a:tc>
+                  <a:txBody>
+                    <a:bodyPr/>
+                    <a:lstStyle/>
+                    <a:p>
+                      <a:pPr algn="ctr" indent="0" marL="0">
+                        <a:buNone/>
+                      </a:pPr>
+                      <a:r>
+                        <a:rPr lang="ko-KR" altLang="en-US" sz="1700" dirty="0">
+                          <a:solidFill>
+                            <a:srgbClr val="222222"/>
+                          </a:solidFill>
+                          <a:latin typeface="Pretendard" pitchFamily="34" charset="0"/>
+                          <a:ea typeface="Pretendard" pitchFamily="34" charset="-122"/>
+                          <a:cs typeface="Pretendard" pitchFamily="34" charset="-120"/>
+                        </a:rPr>
+                        <a:t>8</a:t>
+                      </a:r>
+                      <a:endParaRPr lang="ko-KR" sz="1700" dirty="0">
+                        <a:latin typeface="Pretendard" charset="0"/>
+                        <a:ea typeface="Pretendard" charset="0"/>
+                        <a:cs typeface="Pretendard" charset="0"/>
+                      </a:endParaRPr>
+                    </a:p>
+                  </a:txBody>
+                  <a:tcPr marL="137160" marR="137160" marT="45720" marB="45720" anchor="ctr">
+                    <a:lnL w="12700" cap="flat" cmpd="sng" algn="ctr">
+                      <a:solidFill>
+                        <a:srgbClr val="D9DEE6"/>
+                      </a:solidFill>
+                      <a:prstDash val="solid"/>
+                      <a:round/>
+                      <a:headEnd type="none" w="med" len="med"/>
+                      <a:tailEnd type="none" w="med" len="med"/>
+                    </a:lnL>
+                    <a:lnR w="12700" cap="flat" cmpd="sng" algn="ctr">
+                      <a:solidFill>
+                        <a:srgbClr val="D9DEE6"/>
+                      </a:solidFill>
+                      <a:prstDash val="solid"/>
+                      <a:round/>
+                      <a:headEnd type="none" w="med" len="med"/>
+                      <a:tailEnd type="none" w="med" len="med"/>
+                    </a:lnR>
+                    <a:lnT w="12700" cap="flat" cmpd="sng" algn="ctr">
+                      <a:solidFill>
+                        <a:srgbClr val="D9DEE6"/>
+                      </a:solidFill>
+                      <a:prstDash val="solid"/>
+                      <a:round/>
+                      <a:headEnd type="none" w="med" len="med"/>
+                      <a:tailEnd type="none" w="med" len="med"/>
+                    </a:lnT>
+                    <a:lnB w="12700" cap="flat" cmpd="sng" algn="ctr">
+                      <a:solidFill>
+                        <a:srgbClr val="D9DEE6"/>
+                      </a:solidFill>
+                      <a:prstDash val="solid"/>
+                      <a:round/>
+                      <a:headEnd type="none" w="med" len="med"/>
+                      <a:tailEnd type="none" w="med" len="med"/>
+                    </a:lnB>
+                    <a:solidFill>
+                      <a:srgbClr val="FFFFFF"/>
+                    </a:solidFill>
+                  </a:tcPr>
+                </a:tc>
+                <a:tc>
+                  <a:txBody>
+                    <a:bodyPr/>
+                    <a:lstStyle/>
+                    <a:p>
+                      <a:pPr algn="l" indent="0" marL="0">
+                        <a:buNone/>
+                      </a:pPr>
+                      <a:r>
+                        <a:rPr lang="ko-KR" altLang="en-US" sz="1700" dirty="0">
+                          <a:solidFill>
+                            <a:srgbClr val="222222"/>
+                          </a:solidFill>
+                          <a:latin typeface="Pretendard" pitchFamily="34" charset="0"/>
+                          <a:ea typeface="Pretendard" pitchFamily="34" charset="-122"/>
+                          <a:cs typeface="Pretendard" pitchFamily="34" charset="-120"/>
+                        </a:rPr>
+                        <a:t>코리올리 질량유량계·적산계, 접지 접점, 하역 상태 코드</a:t>
+                      </a:r>
+                      <a:endParaRPr lang="ko-KR" sz="1700" dirty="0">
+                        <a:latin typeface="Pretendard" charset="0"/>
+                        <a:ea typeface="Pretendard" charset="0"/>
+                        <a:cs typeface="Pretendard" charset="0"/>
+                      </a:endParaRPr>
+                    </a:p>
+                  </a:txBody>
+                  <a:tcPr marL="137160" marR="137160" marT="45720" marB="45720" anchor="ctr">
+                    <a:lnL w="12700" cap="flat" cmpd="sng" algn="ctr">
+                      <a:solidFill>
+                        <a:srgbClr val="D9DEE6"/>
+                      </a:solidFill>
+                      <a:prstDash val="solid"/>
+                      <a:round/>
+                      <a:headEnd type="none" w="med" len="med"/>
+                      <a:tailEnd type="none" w="med" len="med"/>
+                    </a:lnL>
+                    <a:lnR w="12700" cap="flat" cmpd="sng" algn="ctr">
+                      <a:solidFill>
+                        <a:srgbClr val="D9DEE6"/>
+                      </a:solidFill>
+                      <a:prstDash val="solid"/>
+                      <a:round/>
+                      <a:headEnd type="none" w="med" len="med"/>
+                      <a:tailEnd type="none" w="med" len="med"/>
+                    </a:lnR>
+                    <a:lnT w="12700" cap="flat" cmpd="sng" algn="ctr">
+                      <a:solidFill>
+                        <a:srgbClr val="D9DEE6"/>
+                      </a:solidFill>
+                      <a:prstDash val="solid"/>
+                      <a:round/>
+                      <a:headEnd type="none" w="med" len="med"/>
+                      <a:tailEnd type="none" w="med" len="med"/>
+                    </a:lnT>
+                    <a:lnB w="12700" cap="flat" cmpd="sng" algn="ctr">
+                      <a:solidFill>
+                        <a:srgbClr val="D9DEE6"/>
+                      </a:solidFill>
+                      <a:prstDash val="solid"/>
+                      <a:round/>
+                      <a:headEnd type="none" w="med" len="med"/>
+                      <a:tailEnd type="none" w="med" len="med"/>
+                    </a:lnB>
+                    <a:solidFill>
+                      <a:srgbClr val="FFFFFF"/>
+                    </a:solidFill>
+                  </a:tcPr>
+                </a:tc>
+                <a:tc>
+                  <a:txBody>
+                    <a:bodyPr/>
+                    <a:lstStyle/>
+                    <a:p>
+                      <a:pPr algn="l" indent="0" marL="0">
+                        <a:buNone/>
+                      </a:pPr>
+                      <a:r>
+                        <a:rPr lang="ko-KR" altLang="en-US" sz="1700" dirty="0">
+                          <a:solidFill>
+                            <a:srgbClr val="222222"/>
+                          </a:solidFill>
+                          <a:latin typeface="Pretendard" pitchFamily="34" charset="0"/>
+                          <a:ea typeface="Pretendard" pitchFamily="34" charset="-122"/>
+                          <a:cs typeface="Pretendard" pitchFamily="34" charset="-120"/>
+                        </a:rPr>
+                        <a:t>±1.5%(OIML 등급 2)면 869 kg/일에서 잔차 1.35%p — 임계 2%의 68%를 계량 오차가 혼자 먹는다</a:t>
+                      </a:r>
+                      <a:endParaRPr lang="ko-KR" sz="1700" dirty="0">
+                        <a:latin typeface="Pretendard" charset="0"/>
+                        <a:ea typeface="Pretendard" charset="0"/>
+                        <a:cs typeface="Pretendard" charset="0"/>
+                      </a:endParaRPr>
+                    </a:p>
+                  </a:txBody>
+                  <a:tcPr marL="137160" marR="137160" marT="45720" marB="45720" anchor="ctr">
+                    <a:lnL w="12700" cap="flat" cmpd="sng" algn="ctr">
+                      <a:solidFill>
+                        <a:srgbClr val="D9DEE6"/>
+                      </a:solidFill>
+                      <a:prstDash val="solid"/>
+                      <a:round/>
+                      <a:headEnd type="none" w="med" len="med"/>
+                      <a:tailEnd type="none" w="med" len="med"/>
+                    </a:lnL>
+                    <a:lnR w="12700" cap="flat" cmpd="sng" algn="ctr">
+                      <a:solidFill>
+                        <a:srgbClr val="D9DEE6"/>
+                      </a:solidFill>
+                      <a:prstDash val="solid"/>
+                      <a:round/>
+                      <a:headEnd type="none" w="med" len="med"/>
+                      <a:tailEnd type="none" w="med" len="med"/>
+                    </a:lnR>
+                    <a:lnT w="12700" cap="flat" cmpd="sng" algn="ctr">
+                      <a:solidFill>
+                        <a:srgbClr val="D9DEE6"/>
+                      </a:solidFill>
+                      <a:prstDash val="solid"/>
+                      <a:round/>
+                      <a:headEnd type="none" w="med" len="med"/>
+                      <a:tailEnd type="none" w="med" len="med"/>
+                    </a:lnT>
+                    <a:lnB w="12700" cap="flat" cmpd="sng" algn="ctr">
+                      <a:solidFill>
+                        <a:srgbClr val="D9DEE6"/>
+                      </a:solidFill>
+                      <a:prstDash val="solid"/>
+                      <a:round/>
+                      <a:headEnd type="none" w="med" len="med"/>
+                      <a:tailEnd type="none" w="med" len="med"/>
+                    </a:lnB>
+                    <a:solidFill>
+                      <a:srgbClr val="FFFFFF"/>
+                    </a:solidFill>
+                  </a:tcPr>
+                </a:tc>
+              </a:tr>
+            </a:tbl>
+          </a:graphicData>
+        </a:graphic>
+      </p:graphicFrame>
+    </p:spTree>
+  </p:cSld>
+  <p:clrMapOvr>
+    <a:masterClrMapping/>
+  </p:clrMapOvr>
+</p:sld>
+</file>
+
+<file path=ppt/slides/slide18.xml><?xml version="1.0" encoding="utf-8"?>
+<p:sld xmlns:a="http://schemas.openxmlformats.org/drawingml/2006/main" xmlns:r="http://schemas.openxmlformats.org/officeDocument/2006/relationships" xmlns:p="http://schemas.openxmlformats.org/presentationml/2006/main">
+  <p:cSld name="Slide 18">
+    <p:bg>
+      <p:bgPr>
+        <a:solidFill>
+          <a:srgbClr val="FAFAFA"/>
+        </a:solidFill>
+      </p:bgPr>
+    </p:bg>
+    <p:spTree>
+      <p:nvGrpSpPr>
+        <p:cNvPr id="1" name=""/>
+        <p:cNvGrpSpPr/>
+        <p:nvPr/>
+      </p:nvGrpSpPr>
+      <p:grpSpPr>
+        <a:xfrm>
+          <a:off x="0" y="0"/>
+          <a:ext cx="0" cy="0"/>
+          <a:chOff x="0" y="0"/>
+          <a:chExt cx="0" cy="0"/>
+        </a:xfrm>
+      </p:grpSpPr>
+      <p:pic>
+        <p:nvPicPr>
+          <p:cNvPr id="2" name="Image 0" descr="C:\Users\jungm\Desktop\projects\simple\solar-dashboard\docs\reports\_source\first-logo.png">    </p:cNvPr>
+          <p:cNvPicPr>
+            <a:picLocks noChangeAspect="1"/>
+          </p:cNvPicPr>
+          <p:nvPr/>
+        </p:nvPicPr>
+        <p:blipFill>
+          <a:blip r:embed="rId1"/>
+          <a:stretch>
+            <a:fillRect/>
+          </a:stretch>
+        </p:blipFill>
+        <p:spPr>
+          <a:xfrm>
+            <a:off x="14950440" y="502920"/>
+            <a:ext cx="2468880" cy="384048"/>
+          </a:xfrm>
+          <a:prstGeom prst="rect">
+            <a:avLst/>
+          </a:prstGeom>
+        </p:spPr>
+      </p:pic>
+      <p:sp>
+        <p:nvSpPr>
+          <p:cNvPr id="3" name="Text 0"/>
+          <p:cNvSpPr/>
+          <p:nvPr/>
+        </p:nvSpPr>
+        <p:spPr>
+          <a:xfrm>
+            <a:off x="914400" y="566928"/>
+            <a:ext cx="4572000" cy="1051560"/>
+          </a:xfrm>
+          <a:prstGeom prst="rect">
+            <a:avLst/>
+          </a:prstGeom>
+          <a:noFill/>
+          <a:ln/>
+        </p:spPr>
+        <p:txBody>
+          <a:bodyPr wrap="square" lIns="0" tIns="0" rIns="0" bIns="0" rtlCol="0" anchor="b"/>
+          <a:lstStyle/>
+          <a:p>
+            <a:pPr indent="0" marL="0">
+              <a:buNone/>
+            </a:pPr>
+            <a:r>
+              <a:rPr lang="ko-KR" altLang="en-US" sz="6600" b="1" dirty="0">
+                <a:solidFill>
+                  <a:srgbClr val="4081ED"/>
+                </a:solidFill>
+                <a:latin typeface="Pretendard" pitchFamily="34" charset="0"/>
+                <a:ea typeface="Pretendard" pitchFamily="34" charset="-122"/>
+                <a:cs typeface="Pretendard" pitchFamily="34" charset="-120"/>
+              </a:rPr>
+              <a:t>17</a:t>
+            </a:r>
+            <a:endParaRPr lang="ko-KR" sz="6600" dirty="0"/>
+          </a:p>
+        </p:txBody>
+      </p:sp>
+      <p:sp>
+        <p:nvSpPr>
+          <p:cNvPr id="4" name="Text 1"/>
+          <p:cNvSpPr/>
+          <p:nvPr/>
+        </p:nvSpPr>
+        <p:spPr>
+          <a:xfrm>
+            <a:off x="914400" y="1600200"/>
+            <a:ext cx="16002000" cy="1234440"/>
+          </a:xfrm>
+          <a:prstGeom prst="rect">
+            <a:avLst/>
+          </a:prstGeom>
+          <a:noFill/>
+          <a:ln/>
+        </p:spPr>
+        <p:txBody>
+          <a:bodyPr wrap="square" lIns="0" tIns="0" rIns="0" bIns="0" rtlCol="0" anchor="ctr"/>
+          <a:lstStyle/>
+          <a:p>
+            <a:pPr indent="0" marL="0">
+              <a:buNone/>
+            </a:pPr>
+            <a:r>
+              <a:rPr lang="ko-KR" altLang="en-US" sz="4400" b="1" dirty="0">
+                <a:solidFill>
+                  <a:srgbClr val="222222"/>
+                </a:solidFill>
+                <a:latin typeface="Pretendard" pitchFamily="34" charset="0"/>
+                <a:ea typeface="Pretendard" pitchFamily="34" charset="-122"/>
+                <a:cs typeface="Pretendard" pitchFamily="34" charset="-120"/>
+              </a:rPr>
+              <a:t>예상안이 아니라 지금 동작하는 화면입니다</a:t>
+            </a:r>
+            <a:endParaRPr lang="ko-KR" sz="4400" dirty="0"/>
+          </a:p>
+        </p:txBody>
+      </p:sp>
+      <p:sp>
+        <p:nvSpPr>
+          <p:cNvPr id="5" name="Shape 2"/>
+          <p:cNvSpPr/>
+          <p:nvPr/>
+        </p:nvSpPr>
+        <p:spPr>
+          <a:xfrm>
+            <a:off x="914400" y="2852928"/>
+            <a:ext cx="16459200" cy="18288"/>
+          </a:xfrm>
+          <a:prstGeom prst="rect">
+            <a:avLst/>
+          </a:prstGeom>
+          <a:solidFill>
+            <a:srgbClr val="D9DEE6"/>
+          </a:solidFill>
+          <a:ln/>
+        </p:spPr>
+      </p:sp>
+      <p:sp>
+        <p:nvSpPr>
+          <p:cNvPr id="6" name="Shape 3"/>
+          <p:cNvSpPr/>
+          <p:nvPr/>
+        </p:nvSpPr>
+        <p:spPr>
+          <a:xfrm>
+            <a:off x="914400" y="2825496"/>
+            <a:ext cx="2834640" cy="64008"/>
+          </a:xfrm>
+          <a:prstGeom prst="rect">
+            <a:avLst/>
+          </a:prstGeom>
+          <a:solidFill>
+            <a:srgbClr val="3E7EE7"/>
+          </a:solidFill>
+          <a:ln/>
+        </p:spPr>
+      </p:sp>
+      <p:sp>
+        <p:nvSpPr>
+          <p:cNvPr id="7" name="Text 4"/>
+          <p:cNvSpPr/>
+          <p:nvPr/>
+        </p:nvSpPr>
+        <p:spPr>
+          <a:xfrm>
+            <a:off x="914400" y="9555480"/>
+            <a:ext cx="16459200" cy="365760"/>
+          </a:xfrm>
+          <a:prstGeom prst="rect">
+            <a:avLst/>
+          </a:prstGeom>
+          <a:noFill/>
+          <a:ln/>
+        </p:spPr>
+        <p:txBody>
+          <a:bodyPr wrap="square" lIns="0" tIns="0" rIns="0" bIns="0" rtlCol="0" anchor="ctr"/>
+          <a:lstStyle/>
+          <a:p>
+            <a:pPr indent="0" marL="0">
+              <a:buNone/>
+            </a:pPr>
+            <a:r>
+              <a:rPr lang="ko-KR" altLang="en-US" sz="1600" dirty="0">
+                <a:solidFill>
+                  <a:srgbClr val="5F6368"/>
+                </a:solidFill>
+                <a:latin typeface="Pretendard" pitchFamily="34" charset="0"/>
+                <a:ea typeface="Pretendard" pitchFamily="34" charset="-122"/>
+                <a:cs typeface="Pretendard" pitchFamily="34" charset="-120"/>
+              </a:rPr>
+              <a:t>※ 가상 사이트 4곳의 시뮬레이션 데이터로 동작과 오탐률을 확인한 상태입니다. 실제 운전 데이터 검증은 계기 설치 이후입니다</a:t>
+            </a:r>
+            <a:endParaRPr lang="ko-KR" sz="1600" dirty="0"/>
+          </a:p>
+        </p:txBody>
+      </p:sp>
+      <p:sp>
+        <p:nvSpPr>
+          <p:cNvPr id="8" name="Shape 5"/>
+          <p:cNvSpPr/>
+          <p:nvPr/>
+        </p:nvSpPr>
+        <p:spPr>
+          <a:xfrm>
+            <a:off x="914400" y="3246120"/>
+            <a:ext cx="8092440" cy="2857500"/>
           </a:xfrm>
           <a:prstGeom prst="rect">
             <a:avLst/>
@@ -7940,14 +13239,14 @@
       </p:sp>
       <p:sp>
         <p:nvSpPr>
-          <p:cNvPr id="11" name="Shape 8"/>
+          <p:cNvPr id="9" name="Shape 6"/>
           <p:cNvSpPr/>
           <p:nvPr/>
         </p:nvSpPr>
         <p:spPr>
           <a:xfrm>
-            <a:off x="914400" y="4782312"/>
-            <a:ext cx="5303520" cy="64008"/>
+            <a:off x="914400" y="3246120"/>
+            <a:ext cx="8092440" cy="64008"/>
           </a:xfrm>
           <a:prstGeom prst="rect">
             <a:avLst/>
@@ -7960,14 +13259,14 @@
       </p:sp>
       <p:sp>
         <p:nvSpPr>
-          <p:cNvPr id="12" name="Text 9"/>
+          <p:cNvPr id="10" name="Text 7"/>
           <p:cNvSpPr/>
           <p:nvPr/>
         </p:nvSpPr>
         <p:spPr>
           <a:xfrm>
-            <a:off x="1234440" y="5102352"/>
-            <a:ext cx="4663440" cy="3108960"/>
+            <a:off x="1188720" y="3520440"/>
+            <a:ext cx="7543800" cy="2446020"/>
           </a:xfrm>
           <a:prstGeom prst="rect">
             <a:avLst/>
@@ -7978,6 +13277,26 @@
         <p:txBody>
           <a:bodyPr wrap="square" lIns="0" tIns="0" rIns="0" bIns="0" rtlCol="0" anchor="t"/>
           <a:lstStyle/>
+          <a:p>
+            <a:pPr indent="0" marL="0">
+              <a:spcAft>
+                <a:spcPts val="200"/>
+              </a:spcAft>
+              <a:buNone/>
+            </a:pPr>
+            <a:r>
+              <a:rPr lang="ko-KR" altLang="en-US" sz="1600" b="1" dirty="0">
+                <a:solidFill>
+                  <a:srgbClr val="5F6368"/>
+                </a:solidFill>
+                <a:latin typeface="Pretendard" pitchFamily="34" charset="0"/>
+                <a:ea typeface="Pretendard" pitchFamily="34" charset="-122"/>
+                <a:cs typeface="Pretendard" pitchFamily="34" charset="-120"/>
+              </a:rPr>
+              <a:t>발견 → 조치</a:t>
+            </a:r>
+            <a:endParaRPr lang="ko-KR" sz="1600" dirty="0"/>
+          </a:p>
           <a:p>
             <a:pPr indent="0" marL="0">
               <a:spcAft>
@@ -7994,14 +13313,14 @@
                 <a:ea typeface="Pretendard" pitchFamily="34" charset="-122"/>
                 <a:cs typeface="Pretendard" pitchFamily="34" charset="-120"/>
               </a:rPr>
-              <a:t>한계</a:t>
+              <a:t>분석 데스크</a:t>
             </a:r>
-            <a:endParaRPr lang="ko-KR" sz="2300" dirty="0"/>
+            <a:endParaRPr lang="ko-KR" sz="1600" dirty="0"/>
           </a:p>
           <a:p>
             <a:pPr marL="279400" indent="-279400">
               <a:spcAft>
-                <a:spcPts val="1400"/>
+                <a:spcPts val="800"/>
               </a:spcAft>
               <a:buSzPct val="100000"/>
               <a:buChar char="•"/>
@@ -8015,14 +13334,14 @@
                 <a:ea typeface="Pretendard" pitchFamily="34" charset="-122"/>
                 <a:cs typeface="Pretendard" pitchFamily="34" charset="-120"/>
               </a:rPr>
-              <a:t>실측이 아닌 문헌·표준 기반, 리포트 수치는 가상</a:t>
+              <a:t>탐지기 17종의 발견사항을 근거 데이터와 함께 본다</a:t>
             </a:r>
-            <a:endParaRPr lang="ko-KR" sz="2300" dirty="0"/>
+            <a:endParaRPr lang="ko-KR" sz="1600" dirty="0"/>
           </a:p>
           <a:p>
             <a:pPr marL="279400" indent="-279400">
               <a:spcAft>
-                <a:spcPts val="1400"/>
+                <a:spcPts val="800"/>
               </a:spcAft>
               <a:buSzPct val="100000"/>
               <a:buChar char="•"/>
@@ -8036,14 +13355,14 @@
                 <a:ea typeface="Pretendard" pitchFamily="34" charset="-122"/>
                 <a:cs typeface="Pretendard" pitchFamily="34" charset="-120"/>
               </a:rPr>
-              <a:t>벤더 데이터 접근권이 없으면 셀·스택 판정 불가</a:t>
+              <a:t>원인 판별 체크·쉬운 말 설명·권장 조치</a:t>
             </a:r>
-            <a:endParaRPr lang="ko-KR" sz="2300" dirty="0"/>
+            <a:endParaRPr lang="ko-KR" sz="1600" dirty="0"/>
           </a:p>
           <a:p>
             <a:pPr marL="279400" indent="-279400">
               <a:spcAft>
-                <a:spcPts val="1400"/>
+                <a:spcPts val="800"/>
               </a:spcAft>
               <a:buSzPct val="100000"/>
               <a:buChar char="•"/>
@@ -8057,22 +13376,22 @@
                 <a:ea typeface="Pretendard" pitchFamily="34" charset="-122"/>
                 <a:cs typeface="Pretendard" pitchFamily="34" charset="-120"/>
               </a:rPr>
-              <a:t>초기 1~2년은 고장 집중, 이상 탐지 우선</a:t>
+              <a:t>조치 기록 → 조치 전후를 같은 조건으로 비교해 효과 검증</a:t>
             </a:r>
-            <a:endParaRPr lang="ko-KR" sz="2300" dirty="0"/>
+            <a:endParaRPr lang="ko-KR" sz="1600" dirty="0"/>
           </a:p>
         </p:txBody>
       </p:sp>
       <p:sp>
         <p:nvSpPr>
-          <p:cNvPr id="13" name="Shape 10"/>
+          <p:cNvPr id="11" name="Shape 8"/>
           <p:cNvSpPr/>
           <p:nvPr/>
         </p:nvSpPr>
         <p:spPr>
           <a:xfrm>
-            <a:off x="6492240" y="4782312"/>
-            <a:ext cx="5303520" cy="3657600"/>
+            <a:off x="9281160" y="3246120"/>
+            <a:ext cx="8092440" cy="2857500"/>
           </a:xfrm>
           <a:prstGeom prst="rect">
             <a:avLst/>
@@ -8090,14 +13409,14 @@
       </p:sp>
       <p:sp>
         <p:nvSpPr>
-          <p:cNvPr id="14" name="Shape 11"/>
+          <p:cNvPr id="12" name="Shape 9"/>
           <p:cNvSpPr/>
           <p:nvPr/>
         </p:nvSpPr>
         <p:spPr>
           <a:xfrm>
-            <a:off x="6492240" y="4782312"/>
-            <a:ext cx="5303520" cy="64008"/>
+            <a:off x="9281160" y="3246120"/>
+            <a:ext cx="8092440" cy="64008"/>
           </a:xfrm>
           <a:prstGeom prst="rect">
             <a:avLst/>
@@ -8110,14 +13429,14 @@
       </p:sp>
       <p:sp>
         <p:nvSpPr>
-          <p:cNvPr id="15" name="Text 12"/>
+          <p:cNvPr id="13" name="Text 10"/>
           <p:cNvSpPr/>
           <p:nvPr/>
         </p:nvSpPr>
         <p:spPr>
           <a:xfrm>
-            <a:off x="6812280" y="5102352"/>
-            <a:ext cx="4663440" cy="3108960"/>
+            <a:off x="9555480" y="3520440"/>
+            <a:ext cx="7543800" cy="2446020"/>
           </a:xfrm>
           <a:prstGeom prst="rect">
             <a:avLst/>
@@ -8128,6 +13447,26 @@
         <p:txBody>
           <a:bodyPr wrap="square" lIns="0" tIns="0" rIns="0" bIns="0" rtlCol="0" anchor="t"/>
           <a:lstStyle/>
+          <a:p>
+            <a:pPr indent="0" marL="0">
+              <a:spcAft>
+                <a:spcPts val="200"/>
+              </a:spcAft>
+              <a:buNone/>
+            </a:pPr>
+            <a:r>
+              <a:rPr lang="ko-KR" altLang="en-US" sz="1600" b="1" dirty="0">
+                <a:solidFill>
+                  <a:srgbClr val="5F6368"/>
+                </a:solidFill>
+                <a:latin typeface="Pretendard" pitchFamily="34" charset="0"/>
+                <a:ea typeface="Pretendard" pitchFamily="34" charset="-122"/>
+                <a:cs typeface="Pretendard" pitchFamily="34" charset="-120"/>
+              </a:rPr>
+              <a:t>현황</a:t>
+            </a:r>
+            <a:endParaRPr lang="ko-KR" sz="1600" dirty="0"/>
+          </a:p>
           <a:p>
             <a:pPr indent="0" marL="0">
               <a:spcAft>
@@ -8144,14 +13483,14 @@
                 <a:ea typeface="Pretendard" pitchFamily="34" charset="-122"/>
                 <a:cs typeface="Pretendard" pitchFamily="34" charset="-120"/>
               </a:rPr>
-              <a:t>다음 단계</a:t>
+              <a:t>상태 지도 · 사이트 상세</a:t>
             </a:r>
-            <a:endParaRPr lang="ko-KR" sz="2300" dirty="0"/>
+            <a:endParaRPr lang="ko-KR" sz="1600" dirty="0"/>
           </a:p>
           <a:p>
             <a:pPr marL="279400" indent="-279400">
               <a:spcAft>
-                <a:spcPts val="1400"/>
+                <a:spcPts val="800"/>
               </a:spcAft>
               <a:buSzPct val="100000"/>
               <a:buChar char="•"/>
@@ -8165,14 +13504,14 @@
                 <a:ea typeface="Pretendard" pitchFamily="34" charset="-122"/>
                 <a:cs typeface="Pretendard" pitchFamily="34" charset="-120"/>
               </a:rPr>
-              <a:t>필수 115개 중심으로 벤더와 데이터 계약 협의</a:t>
+              <a:t>사이트별 상태를 지도에 표시</a:t>
             </a:r>
-            <a:endParaRPr lang="ko-KR" sz="2300" dirty="0"/>
+            <a:endParaRPr lang="ko-KR" sz="1600" dirty="0"/>
           </a:p>
           <a:p>
             <a:pPr marL="279400" indent="-279400">
               <a:spcAft>
-                <a:spcPts val="1400"/>
+                <a:spcPts val="800"/>
               </a:spcAft>
               <a:buSzPct val="100000"/>
               <a:buChar char="•"/>
@@ -8186,14 +13525,14 @@
                 <a:ea typeface="Pretendard" pitchFamily="34" charset="-122"/>
                 <a:cs typeface="Pretendard" pitchFamily="34" charset="-120"/>
               </a:rPr>
-              <a:t>정비이력·알람코드 표준 양식 확정</a:t>
+              <a:t>오늘 KPI, 체인 원장(PV→수소→발전), 물질수지 잔차</a:t>
             </a:r>
-            <a:endParaRPr lang="ko-KR" sz="2300" dirty="0"/>
+            <a:endParaRPr lang="ko-KR" sz="1600" dirty="0"/>
           </a:p>
           <a:p>
             <a:pPr marL="279400" indent="-279400">
               <a:spcAft>
-                <a:spcPts val="1400"/>
+                <a:spcPts val="800"/>
               </a:spcAft>
               <a:buSzPct val="100000"/>
               <a:buChar char="•"/>
@@ -8207,22 +13546,22 @@
                 <a:ea typeface="Pretendard" pitchFamily="34" charset="-122"/>
                 <a:cs typeface="Pretendard" pitchFamily="34" charset="-120"/>
               </a:rPr>
-              <a:t>파일럿 3개월 기준값 수집 → 월간 리포트 시범</a:t>
+              <a:t>탐지 준비도 — 어느 탐지기가 왜 못 도는지</a:t>
             </a:r>
-            <a:endParaRPr lang="ko-KR" sz="2300" dirty="0"/>
+            <a:endParaRPr lang="ko-KR" sz="1600" dirty="0"/>
           </a:p>
         </p:txBody>
       </p:sp>
       <p:sp>
         <p:nvSpPr>
-          <p:cNvPr id="16" name="Shape 13"/>
+          <p:cNvPr id="14" name="Shape 11"/>
           <p:cNvSpPr/>
           <p:nvPr/>
         </p:nvSpPr>
         <p:spPr>
           <a:xfrm>
-            <a:off x="12070080" y="4782312"/>
-            <a:ext cx="5303520" cy="3657600"/>
+            <a:off x="914400" y="6377940"/>
+            <a:ext cx="8092440" cy="2857500"/>
           </a:xfrm>
           <a:prstGeom prst="rect">
             <a:avLst/>
@@ -8240,14 +13579,14 @@
       </p:sp>
       <p:sp>
         <p:nvSpPr>
-          <p:cNvPr id="17" name="Shape 14"/>
+          <p:cNvPr id="15" name="Shape 12"/>
           <p:cNvSpPr/>
           <p:nvPr/>
         </p:nvSpPr>
         <p:spPr>
           <a:xfrm>
-            <a:off x="12070080" y="4782312"/>
-            <a:ext cx="5303520" cy="64008"/>
+            <a:off x="914400" y="6377940"/>
+            <a:ext cx="8092440" cy="64008"/>
           </a:xfrm>
           <a:prstGeom prst="rect">
             <a:avLst/>
@@ -8260,14 +13599,14 @@
       </p:sp>
       <p:sp>
         <p:nvSpPr>
-          <p:cNvPr id="18" name="Text 15"/>
+          <p:cNvPr id="16" name="Text 13"/>
           <p:cNvSpPr/>
           <p:nvPr/>
         </p:nvSpPr>
         <p:spPr>
           <a:xfrm>
-            <a:off x="12390120" y="5102352"/>
-            <a:ext cx="4663440" cy="3108960"/>
+            <a:off x="1188720" y="6652260"/>
+            <a:ext cx="7543800" cy="2446020"/>
           </a:xfrm>
           <a:prstGeom prst="rect">
             <a:avLst/>
@@ -8278,6 +13617,26 @@
         <p:txBody>
           <a:bodyPr wrap="square" lIns="0" tIns="0" rIns="0" bIns="0" rtlCol="0" anchor="t"/>
           <a:lstStyle/>
+          <a:p>
+            <a:pPr indent="0" marL="0">
+              <a:spcAft>
+                <a:spcPts val="200"/>
+              </a:spcAft>
+              <a:buNone/>
+            </a:pPr>
+            <a:r>
+              <a:rPr lang="ko-KR" altLang="en-US" sz="1600" b="1" dirty="0">
+                <a:solidFill>
+                  <a:srgbClr val="5F6368"/>
+                </a:solidFill>
+                <a:latin typeface="Pretendard" pitchFamily="34" charset="0"/>
+                <a:ea typeface="Pretendard" pitchFamily="34" charset="-122"/>
+                <a:cs typeface="Pretendard" pitchFamily="34" charset="-120"/>
+              </a:rPr>
+              <a:t>도면</a:t>
+            </a:r>
+            <a:endParaRPr lang="ko-KR" sz="1600" dirty="0"/>
+          </a:p>
           <a:p>
             <a:pPr indent="0" marL="0">
               <a:spcAft>
@@ -8294,14 +13653,14 @@
                 <a:ea typeface="Pretendard" pitchFamily="34" charset="-122"/>
                 <a:cs typeface="Pretendard" pitchFamily="34" charset="-120"/>
               </a:rPr>
-              <a:t>기대 효과</a:t>
+              <a:t>공정도(P&amp;ID) 화면</a:t>
             </a:r>
-            <a:endParaRPr lang="ko-KR" sz="2300" dirty="0"/>
+            <a:endParaRPr lang="ko-KR" sz="1600" dirty="0"/>
           </a:p>
           <a:p>
             <a:pPr marL="279400" indent="-279400">
               <a:spcAft>
-                <a:spcPts val="1400"/>
+                <a:spcPts val="800"/>
               </a:spcAft>
               <a:buSzPct val="100000"/>
               <a:buChar char="•"/>
@@ -8315,14 +13674,14 @@
                 <a:ea typeface="Pretendard" pitchFamily="34" charset="-122"/>
                 <a:cs typeface="Pretendard" pitchFamily="34" charset="-120"/>
               </a:rPr>
-              <a:t>월간: 손실·트립·오염을 원인별로 나눠 조치</a:t>
+              <a:t>도면 좌표를 그대로 옮긴 SVG 상태판(읽기 전용)</a:t>
             </a:r>
-            <a:endParaRPr lang="ko-KR" sz="2300" dirty="0"/>
+            <a:endParaRPr lang="ko-KR" sz="1600" dirty="0"/>
           </a:p>
           <a:p>
             <a:pPr marL="279400" indent="-279400">
               <a:spcAft>
-                <a:spcPts val="1400"/>
+                <a:spcPts val="800"/>
               </a:spcAft>
               <a:buSzPct val="100000"/>
               <a:buChar char="•"/>
@@ -8336,14 +13695,14 @@
                 <a:ea typeface="Pretendard" pitchFamily="34" charset="-122"/>
                 <a:cs typeface="Pretendard" pitchFamily="34" charset="-120"/>
               </a:rPr>
-              <a:t>분기·연간: 용량·스택 추세로 교체·보강 시점 판단</a:t>
+              <a:t>태그별 값과 발견사항 배지를 같은 그림 위에</a:t>
             </a:r>
-            <a:endParaRPr lang="ko-KR" sz="2300" dirty="0"/>
+            <a:endParaRPr lang="ko-KR" sz="1600" dirty="0"/>
           </a:p>
           <a:p>
             <a:pPr marL="279400" indent="-279400">
               <a:spcAft>
-                <a:spcPts val="1400"/>
+                <a:spcPts val="800"/>
               </a:spcAft>
               <a:buSzPct val="100000"/>
               <a:buChar char="•"/>
@@ -8357,12 +13716,2280 @@
                 <a:ea typeface="Pretendard" pitchFamily="34" charset="-122"/>
                 <a:cs typeface="Pretendard" pitchFamily="34" charset="-120"/>
               </a:rPr>
-              <a:t>설비 구매 전에 계약에 넣을 수집 목록 확보</a:t>
+              <a:t>미설치 계기는 ‘미설치’로 — 계측 공백이 한눈에 보인다</a:t>
             </a:r>
-            <a:endParaRPr lang="ko-KR" sz="2300" dirty="0"/>
+            <a:endParaRPr lang="ko-KR" sz="1600" dirty="0"/>
           </a:p>
         </p:txBody>
       </p:sp>
+      <p:sp>
+        <p:nvSpPr>
+          <p:cNvPr id="17" name="Shape 14"/>
+          <p:cNvSpPr/>
+          <p:nvPr/>
+        </p:nvSpPr>
+        <p:spPr>
+          <a:xfrm>
+            <a:off x="9281160" y="6377940"/>
+            <a:ext cx="8092440" cy="2857500"/>
+          </a:xfrm>
+          <a:prstGeom prst="rect">
+            <a:avLst/>
+          </a:prstGeom>
+          <a:solidFill>
+            <a:srgbClr val="FFFFFF"/>
+          </a:solidFill>
+          <a:ln w="12700">
+            <a:solidFill>
+              <a:srgbClr val="D9DEE6"/>
+            </a:solidFill>
+            <a:prstDash val="solid"/>
+          </a:ln>
+        </p:spPr>
+      </p:sp>
+      <p:sp>
+        <p:nvSpPr>
+          <p:cNvPr id="18" name="Shape 15"/>
+          <p:cNvSpPr/>
+          <p:nvPr/>
+        </p:nvSpPr>
+        <p:spPr>
+          <a:xfrm>
+            <a:off x="9281160" y="6377940"/>
+            <a:ext cx="8092440" cy="64008"/>
+          </a:xfrm>
+          <a:prstGeom prst="rect">
+            <a:avLst/>
+          </a:prstGeom>
+          <a:solidFill>
+            <a:srgbClr val="3E7EE7"/>
+          </a:solidFill>
+          <a:ln/>
+        </p:spPr>
+      </p:sp>
+      <p:sp>
+        <p:nvSpPr>
+          <p:cNvPr id="19" name="Text 16"/>
+          <p:cNvSpPr/>
+          <p:nvPr/>
+        </p:nvSpPr>
+        <p:spPr>
+          <a:xfrm>
+            <a:off x="9555480" y="6652260"/>
+            <a:ext cx="7543800" cy="2446020"/>
+          </a:xfrm>
+          <a:prstGeom prst="rect">
+            <a:avLst/>
+          </a:prstGeom>
+          <a:noFill/>
+          <a:ln/>
+        </p:spPr>
+        <p:txBody>
+          <a:bodyPr wrap="square" lIns="0" tIns="0" rIns="0" bIns="0" rtlCol="0" anchor="t"/>
+          <a:lstStyle/>
+          <a:p>
+            <a:pPr indent="0" marL="0">
+              <a:spcAft>
+                <a:spcPts val="200"/>
+              </a:spcAft>
+              <a:buNone/>
+            </a:pPr>
+            <a:r>
+              <a:rPr lang="ko-KR" altLang="en-US" sz="1600" b="1" dirty="0">
+                <a:solidFill>
+                  <a:srgbClr val="5F6368"/>
+                </a:solidFill>
+                <a:latin typeface="Pretendard" pitchFamily="34" charset="0"/>
+                <a:ea typeface="Pretendard" pitchFamily="34" charset="-122"/>
+                <a:cs typeface="Pretendard" pitchFamily="34" charset="-120"/>
+              </a:rPr>
+              <a:t>문장</a:t>
+            </a:r>
+            <a:endParaRPr lang="ko-KR" sz="1600" dirty="0"/>
+          </a:p>
+          <a:p>
+            <a:pPr indent="0" marL="0">
+              <a:spcAft>
+                <a:spcPts val="1000"/>
+              </a:spcAft>
+              <a:buNone/>
+            </a:pPr>
+            <a:r>
+              <a:rPr lang="ko-KR" altLang="en-US" sz="2300" b="1" dirty="0">
+                <a:solidFill>
+                  <a:srgbClr val="4081ED"/>
+                </a:solidFill>
+                <a:latin typeface="Pretendard" pitchFamily="34" charset="0"/>
+                <a:ea typeface="Pretendard" pitchFamily="34" charset="-122"/>
+                <a:cs typeface="Pretendard" pitchFamily="34" charset="-120"/>
+              </a:rPr>
+              <a:t>AI 설명</a:t>
+            </a:r>
+            <a:endParaRPr lang="ko-KR" sz="1600" dirty="0"/>
+          </a:p>
+          <a:p>
+            <a:pPr marL="279400" indent="-279400">
+              <a:spcAft>
+                <a:spcPts val="800"/>
+              </a:spcAft>
+              <a:buSzPct val="100000"/>
+              <a:buChar char="•"/>
+            </a:pPr>
+            <a:r>
+              <a:rPr lang="ko-KR" altLang="en-US" sz="1700" dirty="0">
+                <a:solidFill>
+                  <a:srgbClr val="222222"/>
+                </a:solidFill>
+                <a:latin typeface="Pretendard" pitchFamily="34" charset="0"/>
+                <a:ea typeface="Pretendard" pitchFamily="34" charset="-122"/>
+                <a:cs typeface="Pretendard" pitchFamily="34" charset="-120"/>
+              </a:rPr>
+              <a:t>수치·판정은 분석 엔진, 문장만 Gemini가 다듬는다</a:t>
+            </a:r>
+            <a:endParaRPr lang="ko-KR" sz="1600" dirty="0"/>
+          </a:p>
+          <a:p>
+            <a:pPr marL="279400" indent="-279400">
+              <a:spcAft>
+                <a:spcPts val="800"/>
+              </a:spcAft>
+              <a:buSzPct val="100000"/>
+              <a:buChar char="•"/>
+            </a:pPr>
+            <a:r>
+              <a:rPr lang="ko-KR" altLang="en-US" sz="1700" dirty="0">
+                <a:solidFill>
+                  <a:srgbClr val="222222"/>
+                </a:solidFill>
+                <a:latin typeface="Pretendard" pitchFamily="34" charset="0"/>
+                <a:ea typeface="Pretendard" pitchFamily="34" charset="-122"/>
+                <a:cs typeface="Pretendard" pitchFamily="34" charset="-120"/>
+              </a:rPr>
+              <a:t>숫자·이름·방향·금지표현 등 6가지를 기계로 검증</a:t>
+            </a:r>
+            <a:endParaRPr lang="ko-KR" sz="1600" dirty="0"/>
+          </a:p>
+          <a:p>
+            <a:pPr marL="279400" indent="-279400">
+              <a:spcAft>
+                <a:spcPts val="800"/>
+              </a:spcAft>
+              <a:buSzPct val="100000"/>
+              <a:buChar char="•"/>
+            </a:pPr>
+            <a:r>
+              <a:rPr lang="ko-KR" altLang="en-US" sz="1700" dirty="0">
+                <a:solidFill>
+                  <a:srgbClr val="222222"/>
+                </a:solidFill>
+                <a:latin typeface="Pretendard" pitchFamily="34" charset="0"/>
+                <a:ea typeface="Pretendard" pitchFamily="34" charset="-122"/>
+                <a:cs typeface="Pretendard" pitchFamily="34" charset="-120"/>
+              </a:rPr>
+              <a:t>하나라도 걸리면 채택하지 않고 틀 문장으로 되돌린다</a:t>
+            </a:r>
+            <a:endParaRPr lang="ko-KR" sz="1600" dirty="0"/>
+          </a:p>
+        </p:txBody>
+      </p:sp>
+    </p:spTree>
+  </p:cSld>
+  <p:clrMapOvr>
+    <a:masterClrMapping/>
+  </p:clrMapOvr>
+</p:sld>
+</file>
+
+<file path=ppt/slides/slide19.xml><?xml version="1.0" encoding="utf-8"?>
+<p:sld xmlns:a="http://schemas.openxmlformats.org/drawingml/2006/main" xmlns:r="http://schemas.openxmlformats.org/officeDocument/2006/relationships" xmlns:p="http://schemas.openxmlformats.org/presentationml/2006/main">
+  <p:cSld name="Slide 19">
+    <p:bg>
+      <p:bgPr>
+        <a:solidFill>
+          <a:srgbClr val="FAFAFA"/>
+        </a:solidFill>
+      </p:bgPr>
+    </p:bg>
+    <p:spTree>
+      <p:nvGrpSpPr>
+        <p:cNvPr id="1" name=""/>
+        <p:cNvGrpSpPr/>
+        <p:nvPr/>
+      </p:nvGrpSpPr>
+      <p:grpSpPr>
+        <a:xfrm>
+          <a:off x="0" y="0"/>
+          <a:ext cx="0" cy="0"/>
+          <a:chOff x="0" y="0"/>
+          <a:chExt cx="0" cy="0"/>
+        </a:xfrm>
+      </p:grpSpPr>
+      <p:pic>
+        <p:nvPicPr>
+          <p:cNvPr id="2" name="Image 0" descr="C:\Users\jungm\Desktop\projects\simple\solar-dashboard\docs\reports\_source\first-logo.png">    </p:cNvPr>
+          <p:cNvPicPr>
+            <a:picLocks noChangeAspect="1"/>
+          </p:cNvPicPr>
+          <p:nvPr/>
+        </p:nvPicPr>
+        <p:blipFill>
+          <a:blip r:embed="rId1"/>
+          <a:stretch>
+            <a:fillRect/>
+          </a:stretch>
+        </p:blipFill>
+        <p:spPr>
+          <a:xfrm>
+            <a:off x="14950440" y="502920"/>
+            <a:ext cx="2468880" cy="384048"/>
+          </a:xfrm>
+          <a:prstGeom prst="rect">
+            <a:avLst/>
+          </a:prstGeom>
+        </p:spPr>
+      </p:pic>
+      <p:sp>
+        <p:nvSpPr>
+          <p:cNvPr id="3" name="Text 0"/>
+          <p:cNvSpPr/>
+          <p:nvPr/>
+        </p:nvSpPr>
+        <p:spPr>
+          <a:xfrm>
+            <a:off x="914400" y="566928"/>
+            <a:ext cx="4572000" cy="1051560"/>
+          </a:xfrm>
+          <a:prstGeom prst="rect">
+            <a:avLst/>
+          </a:prstGeom>
+          <a:noFill/>
+          <a:ln/>
+        </p:spPr>
+        <p:txBody>
+          <a:bodyPr wrap="square" lIns="0" tIns="0" rIns="0" bIns="0" rtlCol="0" anchor="b"/>
+          <a:lstStyle/>
+          <a:p>
+            <a:pPr indent="0" marL="0">
+              <a:buNone/>
+            </a:pPr>
+            <a:r>
+              <a:rPr lang="ko-KR" altLang="en-US" sz="6600" b="1" dirty="0">
+                <a:solidFill>
+                  <a:srgbClr val="4081ED"/>
+                </a:solidFill>
+                <a:latin typeface="Pretendard" pitchFamily="34" charset="0"/>
+                <a:ea typeface="Pretendard" pitchFamily="34" charset="-122"/>
+                <a:cs typeface="Pretendard" pitchFamily="34" charset="-120"/>
+              </a:rPr>
+              <a:t>18</a:t>
+            </a:r>
+            <a:endParaRPr lang="ko-KR" sz="6600" dirty="0"/>
+          </a:p>
+        </p:txBody>
+      </p:sp>
+      <p:sp>
+        <p:nvSpPr>
+          <p:cNvPr id="4" name="Text 1"/>
+          <p:cNvSpPr/>
+          <p:nvPr/>
+        </p:nvSpPr>
+        <p:spPr>
+          <a:xfrm>
+            <a:off x="914400" y="1600200"/>
+            <a:ext cx="16002000" cy="1234440"/>
+          </a:xfrm>
+          <a:prstGeom prst="rect">
+            <a:avLst/>
+          </a:prstGeom>
+          <a:noFill/>
+          <a:ln/>
+        </p:spPr>
+        <p:txBody>
+          <a:bodyPr wrap="square" lIns="0" tIns="0" rIns="0" bIns="0" rtlCol="0" anchor="ctr"/>
+          <a:lstStyle/>
+          <a:p>
+            <a:pPr indent="0" marL="0">
+              <a:buNone/>
+            </a:pPr>
+            <a:r>
+              <a:rPr lang="ko-KR" altLang="en-US" sz="4400" b="1" dirty="0">
+                <a:solidFill>
+                  <a:srgbClr val="222222"/>
+                </a:solidFill>
+                <a:latin typeface="Pretendard" pitchFamily="34" charset="0"/>
+                <a:ea typeface="Pretendard" pitchFamily="34" charset="-122"/>
+                <a:cs typeface="Pretendard" pitchFamily="34" charset="-120"/>
+              </a:rPr>
+              <a:t>예상안에서 ‘구현 완료’로 바뀐 것</a:t>
+            </a:r>
+            <a:endParaRPr lang="ko-KR" sz="4400" dirty="0"/>
+          </a:p>
+        </p:txBody>
+      </p:sp>
+      <p:sp>
+        <p:nvSpPr>
+          <p:cNvPr id="5" name="Shape 2"/>
+          <p:cNvSpPr/>
+          <p:nvPr/>
+        </p:nvSpPr>
+        <p:spPr>
+          <a:xfrm>
+            <a:off x="914400" y="2852928"/>
+            <a:ext cx="16459200" cy="18288"/>
+          </a:xfrm>
+          <a:prstGeom prst="rect">
+            <a:avLst/>
+          </a:prstGeom>
+          <a:solidFill>
+            <a:srgbClr val="D9DEE6"/>
+          </a:solidFill>
+          <a:ln/>
+        </p:spPr>
+      </p:sp>
+      <p:sp>
+        <p:nvSpPr>
+          <p:cNvPr id="6" name="Shape 3"/>
+          <p:cNvSpPr/>
+          <p:nvPr/>
+        </p:nvSpPr>
+        <p:spPr>
+          <a:xfrm>
+            <a:off x="914400" y="2825496"/>
+            <a:ext cx="2834640" cy="64008"/>
+          </a:xfrm>
+          <a:prstGeom prst="rect">
+            <a:avLst/>
+          </a:prstGeom>
+          <a:solidFill>
+            <a:srgbClr val="3E7EE7"/>
+          </a:solidFill>
+          <a:ln/>
+        </p:spPr>
+      </p:sp>
+      <p:sp>
+        <p:nvSpPr>
+          <p:cNvPr id="7" name="Text 4"/>
+          <p:cNvSpPr/>
+          <p:nvPr/>
+        </p:nvSpPr>
+        <p:spPr>
+          <a:xfrm>
+            <a:off x="914400" y="9555480"/>
+            <a:ext cx="16459200" cy="365760"/>
+          </a:xfrm>
+          <a:prstGeom prst="rect">
+            <a:avLst/>
+          </a:prstGeom>
+          <a:noFill/>
+          <a:ln/>
+        </p:spPr>
+        <p:txBody>
+          <a:bodyPr wrap="square" lIns="0" tIns="0" rIns="0" bIns="0" rtlCol="0" anchor="ctr"/>
+          <a:lstStyle/>
+          <a:p>
+            <a:pPr indent="0" marL="0">
+              <a:buNone/>
+            </a:pPr>
+            <a:r>
+              <a:rPr lang="ko-KR" altLang="en-US" sz="1600" dirty="0">
+                <a:solidFill>
+                  <a:srgbClr val="5F6368"/>
+                </a:solidFill>
+                <a:latin typeface="Pretendard" pitchFamily="34" charset="0"/>
+                <a:ea typeface="Pretendard" pitchFamily="34" charset="-122"/>
+                <a:cs typeface="Pretendard" pitchFamily="34" charset="-120"/>
+              </a:rPr>
+              <a:t>※ ‘완료’는 코드와 단위 테스트가 있고 화면에서 동작한다는 뜻입니다</a:t>
+            </a:r>
+            <a:endParaRPr lang="ko-KR" sz="1600" dirty="0"/>
+          </a:p>
+        </p:txBody>
+      </p:sp>
+      <p:graphicFrame>
+        <p:nvGraphicFramePr>
+          <p:cNvPr id="20" name="Table 0"/>
+          <p:cNvGraphicFramePr>
+            <a:graphicFrameLocks noGrp="1"/>
+          </p:cNvGraphicFramePr>
+          <p:nvPr>
+            <p:extLst>
+              <p:ext uri="{D42A27DB-BD31-4B8C-83A1-F6EECF244321}">
+                <p14:modId xmlns:p14="http://schemas.microsoft.com/office/powerpoint/2010/main" val="1579011935"/>
+              </p:ext>
+            </p:extLst>
+          </p:nvPr>
+        </p:nvGraphicFramePr>
+        <p:xfrm>
+          <a:off x="914400" y="3246120"/>
+          <a:ext cx="16459200" cy="914400"/>
+        </p:xfrm>
+        <a:graphic>
+          <a:graphicData uri="http://schemas.openxmlformats.org/drawingml/2006/table">
+            <a:tbl>
+              <a:tblPr/>
+              <a:tblGrid>
+                <a:gridCol w="3451123"/>
+                <a:gridCol w="1592826"/>
+                <a:gridCol w="11415252"/>
+              </a:tblGrid>
+              <a:tr h="640080">
+                <a:tc>
+                  <a:txBody>
+                    <a:bodyPr/>
+                    <a:lstStyle/>
+                    <a:p>
+                      <a:pPr algn="l" indent="0" marL="0">
+                        <a:buNone/>
+                      </a:pPr>
+                      <a:r>
+                        <a:rPr lang="ko-KR" altLang="en-US" sz="1600" b="1" dirty="0">
+                          <a:solidFill>
+                            <a:srgbClr val="222222"/>
+                          </a:solidFill>
+                          <a:latin typeface="Pretendard" pitchFamily="34" charset="0"/>
+                          <a:ea typeface="Pretendard" pitchFamily="34" charset="-122"/>
+                          <a:cs typeface="Pretendard" pitchFamily="34" charset="-120"/>
+                        </a:rPr>
+                        <a:t>기능</a:t>
+                      </a:r>
+                      <a:endParaRPr lang="ko-KR" sz="1600" dirty="0">
+                        <a:latin typeface="Pretendard" charset="0"/>
+                        <a:ea typeface="Pretendard" charset="0"/>
+                        <a:cs typeface="Pretendard" charset="0"/>
+                      </a:endParaRPr>
+                    </a:p>
+                  </a:txBody>
+                  <a:tcPr marL="137160" marR="137160" marT="45720" marB="45720" anchor="ctr">
+                    <a:lnL w="12700" cap="flat" cmpd="sng" algn="ctr">
+                      <a:solidFill>
+                        <a:srgbClr val="D9DEE6"/>
+                      </a:solidFill>
+                      <a:prstDash val="solid"/>
+                      <a:round/>
+                      <a:headEnd type="none" w="med" len="med"/>
+                      <a:tailEnd type="none" w="med" len="med"/>
+                    </a:lnL>
+                    <a:lnR w="12700" cap="flat" cmpd="sng" algn="ctr">
+                      <a:solidFill>
+                        <a:srgbClr val="D9DEE6"/>
+                      </a:solidFill>
+                      <a:prstDash val="solid"/>
+                      <a:round/>
+                      <a:headEnd type="none" w="med" len="med"/>
+                      <a:tailEnd type="none" w="med" len="med"/>
+                    </a:lnR>
+                    <a:lnT w="12700" cap="flat" cmpd="sng" algn="ctr">
+                      <a:solidFill>
+                        <a:srgbClr val="D9DEE6"/>
+                      </a:solidFill>
+                      <a:prstDash val="solid"/>
+                      <a:round/>
+                      <a:headEnd type="none" w="med" len="med"/>
+                      <a:tailEnd type="none" w="med" len="med"/>
+                    </a:lnT>
+                    <a:lnB w="12700" cap="flat" cmpd="sng" algn="ctr">
+                      <a:solidFill>
+                        <a:srgbClr val="D9DEE6"/>
+                      </a:solidFill>
+                      <a:prstDash val="solid"/>
+                      <a:round/>
+                      <a:headEnd type="none" w="med" len="med"/>
+                      <a:tailEnd type="none" w="med" len="med"/>
+                    </a:lnB>
+                    <a:solidFill>
+                      <a:srgbClr val="DCE6F2"/>
+                    </a:solidFill>
+                  </a:tcPr>
+                </a:tc>
+                <a:tc>
+                  <a:txBody>
+                    <a:bodyPr/>
+                    <a:lstStyle/>
+                    <a:p>
+                      <a:pPr algn="ctr" indent="0" marL="0">
+                        <a:buNone/>
+                      </a:pPr>
+                      <a:r>
+                        <a:rPr lang="ko-KR" altLang="en-US" sz="1600" b="1" dirty="0">
+                          <a:solidFill>
+                            <a:srgbClr val="222222"/>
+                          </a:solidFill>
+                          <a:latin typeface="Pretendard" pitchFamily="34" charset="0"/>
+                          <a:ea typeface="Pretendard" pitchFamily="34" charset="-122"/>
+                          <a:cs typeface="Pretendard" pitchFamily="34" charset="-120"/>
+                        </a:rPr>
+                        <a:t>상태</a:t>
+                      </a:r>
+                      <a:endParaRPr lang="ko-KR" sz="1600" dirty="0">
+                        <a:latin typeface="Pretendard" charset="0"/>
+                        <a:ea typeface="Pretendard" charset="0"/>
+                        <a:cs typeface="Pretendard" charset="0"/>
+                      </a:endParaRPr>
+                    </a:p>
+                  </a:txBody>
+                  <a:tcPr marL="137160" marR="137160" marT="45720" marB="45720" anchor="ctr">
+                    <a:lnL w="12700" cap="flat" cmpd="sng" algn="ctr">
+                      <a:solidFill>
+                        <a:srgbClr val="D9DEE6"/>
+                      </a:solidFill>
+                      <a:prstDash val="solid"/>
+                      <a:round/>
+                      <a:headEnd type="none" w="med" len="med"/>
+                      <a:tailEnd type="none" w="med" len="med"/>
+                    </a:lnL>
+                    <a:lnR w="12700" cap="flat" cmpd="sng" algn="ctr">
+                      <a:solidFill>
+                        <a:srgbClr val="D9DEE6"/>
+                      </a:solidFill>
+                      <a:prstDash val="solid"/>
+                      <a:round/>
+                      <a:headEnd type="none" w="med" len="med"/>
+                      <a:tailEnd type="none" w="med" len="med"/>
+                    </a:lnR>
+                    <a:lnT w="12700" cap="flat" cmpd="sng" algn="ctr">
+                      <a:solidFill>
+                        <a:srgbClr val="D9DEE6"/>
+                      </a:solidFill>
+                      <a:prstDash val="solid"/>
+                      <a:round/>
+                      <a:headEnd type="none" w="med" len="med"/>
+                      <a:tailEnd type="none" w="med" len="med"/>
+                    </a:lnT>
+                    <a:lnB w="12700" cap="flat" cmpd="sng" algn="ctr">
+                      <a:solidFill>
+                        <a:srgbClr val="D9DEE6"/>
+                      </a:solidFill>
+                      <a:prstDash val="solid"/>
+                      <a:round/>
+                      <a:headEnd type="none" w="med" len="med"/>
+                      <a:tailEnd type="none" w="med" len="med"/>
+                    </a:lnB>
+                    <a:solidFill>
+                      <a:srgbClr val="DCE6F2"/>
+                    </a:solidFill>
+                  </a:tcPr>
+                </a:tc>
+                <a:tc>
+                  <a:txBody>
+                    <a:bodyPr/>
+                    <a:lstStyle/>
+                    <a:p>
+                      <a:pPr algn="l" indent="0" marL="0">
+                        <a:buNone/>
+                      </a:pPr>
+                      <a:r>
+                        <a:rPr lang="ko-KR" altLang="en-US" sz="1600" b="1" dirty="0">
+                          <a:solidFill>
+                            <a:srgbClr val="222222"/>
+                          </a:solidFill>
+                          <a:latin typeface="Pretendard" pitchFamily="34" charset="0"/>
+                          <a:ea typeface="Pretendard" pitchFamily="34" charset="-122"/>
+                          <a:cs typeface="Pretendard" pitchFamily="34" charset="-120"/>
+                        </a:rPr>
+                        <a:t>내용</a:t>
+                      </a:r>
+                      <a:endParaRPr lang="ko-KR" sz="1600" dirty="0">
+                        <a:latin typeface="Pretendard" charset="0"/>
+                        <a:ea typeface="Pretendard" charset="0"/>
+                        <a:cs typeface="Pretendard" charset="0"/>
+                      </a:endParaRPr>
+                    </a:p>
+                  </a:txBody>
+                  <a:tcPr marL="137160" marR="137160" marT="45720" marB="45720" anchor="ctr">
+                    <a:lnL w="12700" cap="flat" cmpd="sng" algn="ctr">
+                      <a:solidFill>
+                        <a:srgbClr val="D9DEE6"/>
+                      </a:solidFill>
+                      <a:prstDash val="solid"/>
+                      <a:round/>
+                      <a:headEnd type="none" w="med" len="med"/>
+                      <a:tailEnd type="none" w="med" len="med"/>
+                    </a:lnL>
+                    <a:lnR w="12700" cap="flat" cmpd="sng" algn="ctr">
+                      <a:solidFill>
+                        <a:srgbClr val="D9DEE6"/>
+                      </a:solidFill>
+                      <a:prstDash val="solid"/>
+                      <a:round/>
+                      <a:headEnd type="none" w="med" len="med"/>
+                      <a:tailEnd type="none" w="med" len="med"/>
+                    </a:lnR>
+                    <a:lnT w="12700" cap="flat" cmpd="sng" algn="ctr">
+                      <a:solidFill>
+                        <a:srgbClr val="D9DEE6"/>
+                      </a:solidFill>
+                      <a:prstDash val="solid"/>
+                      <a:round/>
+                      <a:headEnd type="none" w="med" len="med"/>
+                      <a:tailEnd type="none" w="med" len="med"/>
+                    </a:lnT>
+                    <a:lnB w="12700" cap="flat" cmpd="sng" algn="ctr">
+                      <a:solidFill>
+                        <a:srgbClr val="D9DEE6"/>
+                      </a:solidFill>
+                      <a:prstDash val="solid"/>
+                      <a:round/>
+                      <a:headEnd type="none" w="med" len="med"/>
+                      <a:tailEnd type="none" w="med" len="med"/>
+                    </a:lnB>
+                    <a:solidFill>
+                      <a:srgbClr val="DCE6F2"/>
+                    </a:solidFill>
+                  </a:tcPr>
+                </a:tc>
+              </a:tr>
+              <a:tr h="642112">
+                <a:tc>
+                  <a:txBody>
+                    <a:bodyPr/>
+                    <a:lstStyle/>
+                    <a:p>
+                      <a:pPr algn="l" indent="0" marL="0">
+                        <a:buNone/>
+                      </a:pPr>
+                      <a:r>
+                        <a:rPr lang="ko-KR" altLang="en-US" sz="1600" dirty="0">
+                          <a:solidFill>
+                            <a:srgbClr val="222222"/>
+                          </a:solidFill>
+                          <a:latin typeface="Pretendard" pitchFamily="34" charset="0"/>
+                          <a:ea typeface="Pretendard" pitchFamily="34" charset="-122"/>
+                          <a:cs typeface="Pretendard" pitchFamily="34" charset="-120"/>
+                        </a:rPr>
+                        <a:t>탐지기</a:t>
+                      </a:r>
+                      <a:endParaRPr lang="ko-KR" sz="1600" dirty="0">
+                        <a:latin typeface="Pretendard" charset="0"/>
+                        <a:ea typeface="Pretendard" charset="0"/>
+                        <a:cs typeface="Pretendard" charset="0"/>
+                      </a:endParaRPr>
+                    </a:p>
+                  </a:txBody>
+                  <a:tcPr marL="137160" marR="137160" marT="45720" marB="45720" anchor="ctr">
+                    <a:lnL w="12700" cap="flat" cmpd="sng" algn="ctr">
+                      <a:solidFill>
+                        <a:srgbClr val="D9DEE6"/>
+                      </a:solidFill>
+                      <a:prstDash val="solid"/>
+                      <a:round/>
+                      <a:headEnd type="none" w="med" len="med"/>
+                      <a:tailEnd type="none" w="med" len="med"/>
+                    </a:lnL>
+                    <a:lnR w="12700" cap="flat" cmpd="sng" algn="ctr">
+                      <a:solidFill>
+                        <a:srgbClr val="D9DEE6"/>
+                      </a:solidFill>
+                      <a:prstDash val="solid"/>
+                      <a:round/>
+                      <a:headEnd type="none" w="med" len="med"/>
+                      <a:tailEnd type="none" w="med" len="med"/>
+                    </a:lnR>
+                    <a:lnT w="12700" cap="flat" cmpd="sng" algn="ctr">
+                      <a:solidFill>
+                        <a:srgbClr val="D9DEE6"/>
+                      </a:solidFill>
+                      <a:prstDash val="solid"/>
+                      <a:round/>
+                      <a:headEnd type="none" w="med" len="med"/>
+                      <a:tailEnd type="none" w="med" len="med"/>
+                    </a:lnT>
+                    <a:lnB w="12700" cap="flat" cmpd="sng" algn="ctr">
+                      <a:solidFill>
+                        <a:srgbClr val="D9DEE6"/>
+                      </a:solidFill>
+                      <a:prstDash val="solid"/>
+                      <a:round/>
+                      <a:headEnd type="none" w="med" len="med"/>
+                      <a:tailEnd type="none" w="med" len="med"/>
+                    </a:lnB>
+                    <a:solidFill>
+                      <a:srgbClr val="FFFFFF"/>
+                    </a:solidFill>
+                  </a:tcPr>
+                </a:tc>
+                <a:tc>
+                  <a:txBody>
+                    <a:bodyPr/>
+                    <a:lstStyle/>
+                    <a:p>
+                      <a:pPr algn="ctr" indent="0" marL="0">
+                        <a:buNone/>
+                      </a:pPr>
+                      <a:r>
+                        <a:rPr lang="ko-KR" altLang="en-US" sz="1600" dirty="0">
+                          <a:solidFill>
+                            <a:srgbClr val="222222"/>
+                          </a:solidFill>
+                          <a:latin typeface="Pretendard" pitchFamily="34" charset="0"/>
+                          <a:ea typeface="Pretendard" pitchFamily="34" charset="-122"/>
+                          <a:cs typeface="Pretendard" pitchFamily="34" charset="-120"/>
+                        </a:rPr>
+                        <a:t>완료</a:t>
+                      </a:r>
+                      <a:endParaRPr lang="ko-KR" sz="1600" dirty="0">
+                        <a:latin typeface="Pretendard" charset="0"/>
+                        <a:ea typeface="Pretendard" charset="0"/>
+                        <a:cs typeface="Pretendard" charset="0"/>
+                      </a:endParaRPr>
+                    </a:p>
+                  </a:txBody>
+                  <a:tcPr marL="137160" marR="137160" marT="45720" marB="45720" anchor="ctr">
+                    <a:lnL w="12700" cap="flat" cmpd="sng" algn="ctr">
+                      <a:solidFill>
+                        <a:srgbClr val="D9DEE6"/>
+                      </a:solidFill>
+                      <a:prstDash val="solid"/>
+                      <a:round/>
+                      <a:headEnd type="none" w="med" len="med"/>
+                      <a:tailEnd type="none" w="med" len="med"/>
+                    </a:lnL>
+                    <a:lnR w="12700" cap="flat" cmpd="sng" algn="ctr">
+                      <a:solidFill>
+                        <a:srgbClr val="D9DEE6"/>
+                      </a:solidFill>
+                      <a:prstDash val="solid"/>
+                      <a:round/>
+                      <a:headEnd type="none" w="med" len="med"/>
+                      <a:tailEnd type="none" w="med" len="med"/>
+                    </a:lnR>
+                    <a:lnT w="12700" cap="flat" cmpd="sng" algn="ctr">
+                      <a:solidFill>
+                        <a:srgbClr val="D9DEE6"/>
+                      </a:solidFill>
+                      <a:prstDash val="solid"/>
+                      <a:round/>
+                      <a:headEnd type="none" w="med" len="med"/>
+                      <a:tailEnd type="none" w="med" len="med"/>
+                    </a:lnT>
+                    <a:lnB w="12700" cap="flat" cmpd="sng" algn="ctr">
+                      <a:solidFill>
+                        <a:srgbClr val="D9DEE6"/>
+                      </a:solidFill>
+                      <a:prstDash val="solid"/>
+                      <a:round/>
+                      <a:headEnd type="none" w="med" len="med"/>
+                      <a:tailEnd type="none" w="med" len="med"/>
+                    </a:lnB>
+                    <a:solidFill>
+                      <a:srgbClr val="FFFFFF"/>
+                    </a:solidFill>
+                  </a:tcPr>
+                </a:tc>
+                <a:tc>
+                  <a:txBody>
+                    <a:bodyPr/>
+                    <a:lstStyle/>
+                    <a:p>
+                      <a:pPr algn="l" indent="0" marL="0">
+                        <a:buNone/>
+                      </a:pPr>
+                      <a:r>
+                        <a:rPr lang="ko-KR" altLang="en-US" sz="1600" dirty="0">
+                          <a:solidFill>
+                            <a:srgbClr val="222222"/>
+                          </a:solidFill>
+                          <a:latin typeface="Pretendard" pitchFamily="34" charset="0"/>
+                          <a:ea typeface="Pretendard" pitchFamily="34" charset="-122"/>
+                          <a:cs typeface="Pretendard" pitchFamily="34" charset="-120"/>
+                        </a:rPr>
+                        <a:t>17종 — 태양광 4, ESS 4, 수전해·연료전지 4, 수소 체인 2, 데이터 품질 1, 가평 구성 3(감압밸브 누설·폐열회수 저하·산소 중 수소)</a:t>
+                      </a:r>
+                      <a:endParaRPr lang="ko-KR" sz="1600" dirty="0">
+                        <a:latin typeface="Pretendard" charset="0"/>
+                        <a:ea typeface="Pretendard" charset="0"/>
+                        <a:cs typeface="Pretendard" charset="0"/>
+                      </a:endParaRPr>
+                    </a:p>
+                  </a:txBody>
+                  <a:tcPr marL="137160" marR="137160" marT="45720" marB="45720" anchor="ctr">
+                    <a:lnL w="12700" cap="flat" cmpd="sng" algn="ctr">
+                      <a:solidFill>
+                        <a:srgbClr val="D9DEE6"/>
+                      </a:solidFill>
+                      <a:prstDash val="solid"/>
+                      <a:round/>
+                      <a:headEnd type="none" w="med" len="med"/>
+                      <a:tailEnd type="none" w="med" len="med"/>
+                    </a:lnL>
+                    <a:lnR w="12700" cap="flat" cmpd="sng" algn="ctr">
+                      <a:solidFill>
+                        <a:srgbClr val="D9DEE6"/>
+                      </a:solidFill>
+                      <a:prstDash val="solid"/>
+                      <a:round/>
+                      <a:headEnd type="none" w="med" len="med"/>
+                      <a:tailEnd type="none" w="med" len="med"/>
+                    </a:lnR>
+                    <a:lnT w="12700" cap="flat" cmpd="sng" algn="ctr">
+                      <a:solidFill>
+                        <a:srgbClr val="D9DEE6"/>
+                      </a:solidFill>
+                      <a:prstDash val="solid"/>
+                      <a:round/>
+                      <a:headEnd type="none" w="med" len="med"/>
+                      <a:tailEnd type="none" w="med" len="med"/>
+                    </a:lnT>
+                    <a:lnB w="12700" cap="flat" cmpd="sng" algn="ctr">
+                      <a:solidFill>
+                        <a:srgbClr val="D9DEE6"/>
+                      </a:solidFill>
+                      <a:prstDash val="solid"/>
+                      <a:round/>
+                      <a:headEnd type="none" w="med" len="med"/>
+                      <a:tailEnd type="none" w="med" len="med"/>
+                    </a:lnB>
+                    <a:solidFill>
+                      <a:srgbClr val="FFFFFF"/>
+                    </a:solidFill>
+                  </a:tcPr>
+                </a:tc>
+              </a:tr>
+              <a:tr h="642112">
+                <a:tc>
+                  <a:txBody>
+                    <a:bodyPr/>
+                    <a:lstStyle/>
+                    <a:p>
+                      <a:pPr algn="l" indent="0" marL="0">
+                        <a:buNone/>
+                      </a:pPr>
+                      <a:r>
+                        <a:rPr lang="ko-KR" altLang="en-US" sz="1600" dirty="0">
+                          <a:solidFill>
+                            <a:srgbClr val="222222"/>
+                          </a:solidFill>
+                          <a:latin typeface="Pretendard" pitchFamily="34" charset="0"/>
+                          <a:ea typeface="Pretendard" pitchFamily="34" charset="-122"/>
+                          <a:cs typeface="Pretendard" pitchFamily="34" charset="-120"/>
+                        </a:rPr>
+                        <a:t>분석 실행 · 준비도</a:t>
+                      </a:r>
+                      <a:endParaRPr lang="ko-KR" sz="1600" dirty="0">
+                        <a:latin typeface="Pretendard" charset="0"/>
+                        <a:ea typeface="Pretendard" charset="0"/>
+                        <a:cs typeface="Pretendard" charset="0"/>
+                      </a:endParaRPr>
+                    </a:p>
+                  </a:txBody>
+                  <a:tcPr marL="137160" marR="137160" marT="45720" marB="45720" anchor="ctr">
+                    <a:lnL w="12700" cap="flat" cmpd="sng" algn="ctr">
+                      <a:solidFill>
+                        <a:srgbClr val="D9DEE6"/>
+                      </a:solidFill>
+                      <a:prstDash val="solid"/>
+                      <a:round/>
+                      <a:headEnd type="none" w="med" len="med"/>
+                      <a:tailEnd type="none" w="med" len="med"/>
+                    </a:lnL>
+                    <a:lnR w="12700" cap="flat" cmpd="sng" algn="ctr">
+                      <a:solidFill>
+                        <a:srgbClr val="D9DEE6"/>
+                      </a:solidFill>
+                      <a:prstDash val="solid"/>
+                      <a:round/>
+                      <a:headEnd type="none" w="med" len="med"/>
+                      <a:tailEnd type="none" w="med" len="med"/>
+                    </a:lnR>
+                    <a:lnT w="12700" cap="flat" cmpd="sng" algn="ctr">
+                      <a:solidFill>
+                        <a:srgbClr val="D9DEE6"/>
+                      </a:solidFill>
+                      <a:prstDash val="solid"/>
+                      <a:round/>
+                      <a:headEnd type="none" w="med" len="med"/>
+                      <a:tailEnd type="none" w="med" len="med"/>
+                    </a:lnT>
+                    <a:lnB w="12700" cap="flat" cmpd="sng" algn="ctr">
+                      <a:solidFill>
+                        <a:srgbClr val="D9DEE6"/>
+                      </a:solidFill>
+                      <a:prstDash val="solid"/>
+                      <a:round/>
+                      <a:headEnd type="none" w="med" len="med"/>
+                      <a:tailEnd type="none" w="med" len="med"/>
+                    </a:lnB>
+                    <a:solidFill>
+                      <a:srgbClr val="FFFFFF"/>
+                    </a:solidFill>
+                  </a:tcPr>
+                </a:tc>
+                <a:tc>
+                  <a:txBody>
+                    <a:bodyPr/>
+                    <a:lstStyle/>
+                    <a:p>
+                      <a:pPr algn="ctr" indent="0" marL="0">
+                        <a:buNone/>
+                      </a:pPr>
+                      <a:r>
+                        <a:rPr lang="ko-KR" altLang="en-US" sz="1600" dirty="0">
+                          <a:solidFill>
+                            <a:srgbClr val="222222"/>
+                          </a:solidFill>
+                          <a:latin typeface="Pretendard" pitchFamily="34" charset="0"/>
+                          <a:ea typeface="Pretendard" pitchFamily="34" charset="-122"/>
+                          <a:cs typeface="Pretendard" pitchFamily="34" charset="-120"/>
+                        </a:rPr>
+                        <a:t>완료</a:t>
+                      </a:r>
+                      <a:endParaRPr lang="ko-KR" sz="1600" dirty="0">
+                        <a:latin typeface="Pretendard" charset="0"/>
+                        <a:ea typeface="Pretendard" charset="0"/>
+                        <a:cs typeface="Pretendard" charset="0"/>
+                      </a:endParaRPr>
+                    </a:p>
+                  </a:txBody>
+                  <a:tcPr marL="137160" marR="137160" marT="45720" marB="45720" anchor="ctr">
+                    <a:lnL w="12700" cap="flat" cmpd="sng" algn="ctr">
+                      <a:solidFill>
+                        <a:srgbClr val="D9DEE6"/>
+                      </a:solidFill>
+                      <a:prstDash val="solid"/>
+                      <a:round/>
+                      <a:headEnd type="none" w="med" len="med"/>
+                      <a:tailEnd type="none" w="med" len="med"/>
+                    </a:lnL>
+                    <a:lnR w="12700" cap="flat" cmpd="sng" algn="ctr">
+                      <a:solidFill>
+                        <a:srgbClr val="D9DEE6"/>
+                      </a:solidFill>
+                      <a:prstDash val="solid"/>
+                      <a:round/>
+                      <a:headEnd type="none" w="med" len="med"/>
+                      <a:tailEnd type="none" w="med" len="med"/>
+                    </a:lnR>
+                    <a:lnT w="12700" cap="flat" cmpd="sng" algn="ctr">
+                      <a:solidFill>
+                        <a:srgbClr val="D9DEE6"/>
+                      </a:solidFill>
+                      <a:prstDash val="solid"/>
+                      <a:round/>
+                      <a:headEnd type="none" w="med" len="med"/>
+                      <a:tailEnd type="none" w="med" len="med"/>
+                    </a:lnT>
+                    <a:lnB w="12700" cap="flat" cmpd="sng" algn="ctr">
+                      <a:solidFill>
+                        <a:srgbClr val="D9DEE6"/>
+                      </a:solidFill>
+                      <a:prstDash val="solid"/>
+                      <a:round/>
+                      <a:headEnd type="none" w="med" len="med"/>
+                      <a:tailEnd type="none" w="med" len="med"/>
+                    </a:lnB>
+                    <a:solidFill>
+                      <a:srgbClr val="FFFFFF"/>
+                    </a:solidFill>
+                  </a:tcPr>
+                </a:tc>
+                <a:tc>
+                  <a:txBody>
+                    <a:bodyPr/>
+                    <a:lstStyle/>
+                    <a:p>
+                      <a:pPr algn="l" indent="0" marL="0">
+                        <a:buNone/>
+                      </a:pPr>
+                      <a:r>
+                        <a:rPr lang="ko-KR" altLang="en-US" sz="1600" dirty="0">
+                          <a:solidFill>
+                            <a:srgbClr val="222222"/>
+                          </a:solidFill>
+                          <a:latin typeface="Pretendard" pitchFamily="34" charset="0"/>
+                          <a:ea typeface="Pretendard" pitchFamily="34" charset="-122"/>
+                          <a:cs typeface="Pretendard" pitchFamily="34" charset="-120"/>
+                        </a:rPr>
+                        <a:t>관리자가 사이트·기간을 골라 수동 실행. 입력이 없으면 0으로 채우지 않고 ‘판정 불능’. 준비도 매트릭스가 부족한 계측 항목을 지목한다</a:t>
+                      </a:r>
+                      <a:endParaRPr lang="ko-KR" sz="1600" dirty="0">
+                        <a:latin typeface="Pretendard" charset="0"/>
+                        <a:ea typeface="Pretendard" charset="0"/>
+                        <a:cs typeface="Pretendard" charset="0"/>
+                      </a:endParaRPr>
+                    </a:p>
+                  </a:txBody>
+                  <a:tcPr marL="137160" marR="137160" marT="45720" marB="45720" anchor="ctr">
+                    <a:lnL w="12700" cap="flat" cmpd="sng" algn="ctr">
+                      <a:solidFill>
+                        <a:srgbClr val="D9DEE6"/>
+                      </a:solidFill>
+                      <a:prstDash val="solid"/>
+                      <a:round/>
+                      <a:headEnd type="none" w="med" len="med"/>
+                      <a:tailEnd type="none" w="med" len="med"/>
+                    </a:lnL>
+                    <a:lnR w="12700" cap="flat" cmpd="sng" algn="ctr">
+                      <a:solidFill>
+                        <a:srgbClr val="D9DEE6"/>
+                      </a:solidFill>
+                      <a:prstDash val="solid"/>
+                      <a:round/>
+                      <a:headEnd type="none" w="med" len="med"/>
+                      <a:tailEnd type="none" w="med" len="med"/>
+                    </a:lnR>
+                    <a:lnT w="12700" cap="flat" cmpd="sng" algn="ctr">
+                      <a:solidFill>
+                        <a:srgbClr val="D9DEE6"/>
+                      </a:solidFill>
+                      <a:prstDash val="solid"/>
+                      <a:round/>
+                      <a:headEnd type="none" w="med" len="med"/>
+                      <a:tailEnd type="none" w="med" len="med"/>
+                    </a:lnT>
+                    <a:lnB w="12700" cap="flat" cmpd="sng" algn="ctr">
+                      <a:solidFill>
+                        <a:srgbClr val="D9DEE6"/>
+                      </a:solidFill>
+                      <a:prstDash val="solid"/>
+                      <a:round/>
+                      <a:headEnd type="none" w="med" len="med"/>
+                      <a:tailEnd type="none" w="med" len="med"/>
+                    </a:lnB>
+                    <a:solidFill>
+                      <a:srgbClr val="FFFFFF"/>
+                    </a:solidFill>
+                  </a:tcPr>
+                </a:tc>
+              </a:tr>
+              <a:tr h="640080">
+                <a:tc>
+                  <a:txBody>
+                    <a:bodyPr/>
+                    <a:lstStyle/>
+                    <a:p>
+                      <a:pPr algn="l" indent="0" marL="0">
+                        <a:buNone/>
+                      </a:pPr>
+                      <a:r>
+                        <a:rPr lang="ko-KR" altLang="en-US" sz="1600" dirty="0">
+                          <a:solidFill>
+                            <a:srgbClr val="222222"/>
+                          </a:solidFill>
+                          <a:latin typeface="Pretendard" pitchFamily="34" charset="0"/>
+                          <a:ea typeface="Pretendard" pitchFamily="34" charset="-122"/>
+                          <a:cs typeface="Pretendard" pitchFamily="34" charset="-120"/>
+                        </a:rPr>
+                        <a:t>코칭 리포트</a:t>
+                      </a:r>
+                      <a:endParaRPr lang="ko-KR" sz="1600" dirty="0">
+                        <a:latin typeface="Pretendard" charset="0"/>
+                        <a:ea typeface="Pretendard" charset="0"/>
+                        <a:cs typeface="Pretendard" charset="0"/>
+                      </a:endParaRPr>
+                    </a:p>
+                  </a:txBody>
+                  <a:tcPr marL="137160" marR="137160" marT="45720" marB="45720" anchor="ctr">
+                    <a:lnL w="12700" cap="flat" cmpd="sng" algn="ctr">
+                      <a:solidFill>
+                        <a:srgbClr val="D9DEE6"/>
+                      </a:solidFill>
+                      <a:prstDash val="solid"/>
+                      <a:round/>
+                      <a:headEnd type="none" w="med" len="med"/>
+                      <a:tailEnd type="none" w="med" len="med"/>
+                    </a:lnL>
+                    <a:lnR w="12700" cap="flat" cmpd="sng" algn="ctr">
+                      <a:solidFill>
+                        <a:srgbClr val="D9DEE6"/>
+                      </a:solidFill>
+                      <a:prstDash val="solid"/>
+                      <a:round/>
+                      <a:headEnd type="none" w="med" len="med"/>
+                      <a:tailEnd type="none" w="med" len="med"/>
+                    </a:lnR>
+                    <a:lnT w="12700" cap="flat" cmpd="sng" algn="ctr">
+                      <a:solidFill>
+                        <a:srgbClr val="D9DEE6"/>
+                      </a:solidFill>
+                      <a:prstDash val="solid"/>
+                      <a:round/>
+                      <a:headEnd type="none" w="med" len="med"/>
+                      <a:tailEnd type="none" w="med" len="med"/>
+                    </a:lnT>
+                    <a:lnB w="12700" cap="flat" cmpd="sng" algn="ctr">
+                      <a:solidFill>
+                        <a:srgbClr val="D9DEE6"/>
+                      </a:solidFill>
+                      <a:prstDash val="solid"/>
+                      <a:round/>
+                      <a:headEnd type="none" w="med" len="med"/>
+                      <a:tailEnd type="none" w="med" len="med"/>
+                    </a:lnB>
+                    <a:solidFill>
+                      <a:srgbClr val="FFFFFF"/>
+                    </a:solidFill>
+                  </a:tcPr>
+                </a:tc>
+                <a:tc>
+                  <a:txBody>
+                    <a:bodyPr/>
+                    <a:lstStyle/>
+                    <a:p>
+                      <a:pPr algn="ctr" indent="0" marL="0">
+                        <a:buNone/>
+                      </a:pPr>
+                      <a:r>
+                        <a:rPr lang="ko-KR" altLang="en-US" sz="1600" dirty="0">
+                          <a:solidFill>
+                            <a:srgbClr val="222222"/>
+                          </a:solidFill>
+                          <a:latin typeface="Pretendard" pitchFamily="34" charset="0"/>
+                          <a:ea typeface="Pretendard" pitchFamily="34" charset="-122"/>
+                          <a:cs typeface="Pretendard" pitchFamily="34" charset="-120"/>
+                        </a:rPr>
+                        <a:t>완료</a:t>
+                      </a:r>
+                      <a:endParaRPr lang="ko-KR" sz="1600" dirty="0">
+                        <a:latin typeface="Pretendard" charset="0"/>
+                        <a:ea typeface="Pretendard" charset="0"/>
+                        <a:cs typeface="Pretendard" charset="0"/>
+                      </a:endParaRPr>
+                    </a:p>
+                  </a:txBody>
+                  <a:tcPr marL="137160" marR="137160" marT="45720" marB="45720" anchor="ctr">
+                    <a:lnL w="12700" cap="flat" cmpd="sng" algn="ctr">
+                      <a:solidFill>
+                        <a:srgbClr val="D9DEE6"/>
+                      </a:solidFill>
+                      <a:prstDash val="solid"/>
+                      <a:round/>
+                      <a:headEnd type="none" w="med" len="med"/>
+                      <a:tailEnd type="none" w="med" len="med"/>
+                    </a:lnL>
+                    <a:lnR w="12700" cap="flat" cmpd="sng" algn="ctr">
+                      <a:solidFill>
+                        <a:srgbClr val="D9DEE6"/>
+                      </a:solidFill>
+                      <a:prstDash val="solid"/>
+                      <a:round/>
+                      <a:headEnd type="none" w="med" len="med"/>
+                      <a:tailEnd type="none" w="med" len="med"/>
+                    </a:lnR>
+                    <a:lnT w="12700" cap="flat" cmpd="sng" algn="ctr">
+                      <a:solidFill>
+                        <a:srgbClr val="D9DEE6"/>
+                      </a:solidFill>
+                      <a:prstDash val="solid"/>
+                      <a:round/>
+                      <a:headEnd type="none" w="med" len="med"/>
+                      <a:tailEnd type="none" w="med" len="med"/>
+                    </a:lnT>
+                    <a:lnB w="12700" cap="flat" cmpd="sng" algn="ctr">
+                      <a:solidFill>
+                        <a:srgbClr val="D9DEE6"/>
+                      </a:solidFill>
+                      <a:prstDash val="solid"/>
+                      <a:round/>
+                      <a:headEnd type="none" w="med" len="med"/>
+                      <a:tailEnd type="none" w="med" len="med"/>
+                    </a:lnB>
+                    <a:solidFill>
+                      <a:srgbClr val="FFFFFF"/>
+                    </a:solidFill>
+                  </a:tcPr>
+                </a:tc>
+                <a:tc>
+                  <a:txBody>
+                    <a:bodyPr/>
+                    <a:lstStyle/>
+                    <a:p>
+                      <a:pPr algn="l" indent="0" marL="0">
+                        <a:buNone/>
+                      </a:pPr>
+                      <a:r>
+                        <a:rPr lang="ko-KR" altLang="en-US" sz="1600" dirty="0">
+                          <a:solidFill>
+                            <a:srgbClr val="222222"/>
+                          </a:solidFill>
+                          <a:latin typeface="Pretendard" pitchFamily="34" charset="0"/>
+                          <a:ea typeface="Pretendard" pitchFamily="34" charset="-122"/>
+                          <a:cs typeface="Pretendard" pitchFamily="34" charset="-120"/>
+                        </a:rPr>
+                        <a:t>월간·분기·연간 초안 생성 → 검토 → 승인 → PDF 출력. 분석과 출력이 분리되어 있다</a:t>
+                      </a:r>
+                      <a:endParaRPr lang="ko-KR" sz="1600" dirty="0">
+                        <a:latin typeface="Pretendard" charset="0"/>
+                        <a:ea typeface="Pretendard" charset="0"/>
+                        <a:cs typeface="Pretendard" charset="0"/>
+                      </a:endParaRPr>
+                    </a:p>
+                  </a:txBody>
+                  <a:tcPr marL="137160" marR="137160" marT="45720" marB="45720" anchor="ctr">
+                    <a:lnL w="12700" cap="flat" cmpd="sng" algn="ctr">
+                      <a:solidFill>
+                        <a:srgbClr val="D9DEE6"/>
+                      </a:solidFill>
+                      <a:prstDash val="solid"/>
+                      <a:round/>
+                      <a:headEnd type="none" w="med" len="med"/>
+                      <a:tailEnd type="none" w="med" len="med"/>
+                    </a:lnL>
+                    <a:lnR w="12700" cap="flat" cmpd="sng" algn="ctr">
+                      <a:solidFill>
+                        <a:srgbClr val="D9DEE6"/>
+                      </a:solidFill>
+                      <a:prstDash val="solid"/>
+                      <a:round/>
+                      <a:headEnd type="none" w="med" len="med"/>
+                      <a:tailEnd type="none" w="med" len="med"/>
+                    </a:lnR>
+                    <a:lnT w="12700" cap="flat" cmpd="sng" algn="ctr">
+                      <a:solidFill>
+                        <a:srgbClr val="D9DEE6"/>
+                      </a:solidFill>
+                      <a:prstDash val="solid"/>
+                      <a:round/>
+                      <a:headEnd type="none" w="med" len="med"/>
+                      <a:tailEnd type="none" w="med" len="med"/>
+                    </a:lnT>
+                    <a:lnB w="12700" cap="flat" cmpd="sng" algn="ctr">
+                      <a:solidFill>
+                        <a:srgbClr val="D9DEE6"/>
+                      </a:solidFill>
+                      <a:prstDash val="solid"/>
+                      <a:round/>
+                      <a:headEnd type="none" w="med" len="med"/>
+                      <a:tailEnd type="none" w="med" len="med"/>
+                    </a:lnB>
+                    <a:solidFill>
+                      <a:srgbClr val="FFFFFF"/>
+                    </a:solidFill>
+                  </a:tcPr>
+                </a:tc>
+              </a:tr>
+              <a:tr h="640080">
+                <a:tc>
+                  <a:txBody>
+                    <a:bodyPr/>
+                    <a:lstStyle/>
+                    <a:p>
+                      <a:pPr algn="l" indent="0" marL="0">
+                        <a:buNone/>
+                      </a:pPr>
+                      <a:r>
+                        <a:rPr lang="ko-KR" altLang="en-US" sz="1600" dirty="0">
+                          <a:solidFill>
+                            <a:srgbClr val="222222"/>
+                          </a:solidFill>
+                          <a:latin typeface="Pretendard" pitchFamily="34" charset="0"/>
+                          <a:ea typeface="Pretendard" pitchFamily="34" charset="-122"/>
+                          <a:cs typeface="Pretendard" pitchFamily="34" charset="-120"/>
+                        </a:rPr>
+                        <a:t>조치 추적·효과 검증</a:t>
+                      </a:r>
+                      <a:endParaRPr lang="ko-KR" sz="1600" dirty="0">
+                        <a:latin typeface="Pretendard" charset="0"/>
+                        <a:ea typeface="Pretendard" charset="0"/>
+                        <a:cs typeface="Pretendard" charset="0"/>
+                      </a:endParaRPr>
+                    </a:p>
+                  </a:txBody>
+                  <a:tcPr marL="137160" marR="137160" marT="45720" marB="45720" anchor="ctr">
+                    <a:lnL w="12700" cap="flat" cmpd="sng" algn="ctr">
+                      <a:solidFill>
+                        <a:srgbClr val="D9DEE6"/>
+                      </a:solidFill>
+                      <a:prstDash val="solid"/>
+                      <a:round/>
+                      <a:headEnd type="none" w="med" len="med"/>
+                      <a:tailEnd type="none" w="med" len="med"/>
+                    </a:lnL>
+                    <a:lnR w="12700" cap="flat" cmpd="sng" algn="ctr">
+                      <a:solidFill>
+                        <a:srgbClr val="D9DEE6"/>
+                      </a:solidFill>
+                      <a:prstDash val="solid"/>
+                      <a:round/>
+                      <a:headEnd type="none" w="med" len="med"/>
+                      <a:tailEnd type="none" w="med" len="med"/>
+                    </a:lnR>
+                    <a:lnT w="12700" cap="flat" cmpd="sng" algn="ctr">
+                      <a:solidFill>
+                        <a:srgbClr val="D9DEE6"/>
+                      </a:solidFill>
+                      <a:prstDash val="solid"/>
+                      <a:round/>
+                      <a:headEnd type="none" w="med" len="med"/>
+                      <a:tailEnd type="none" w="med" len="med"/>
+                    </a:lnT>
+                    <a:lnB w="12700" cap="flat" cmpd="sng" algn="ctr">
+                      <a:solidFill>
+                        <a:srgbClr val="D9DEE6"/>
+                      </a:solidFill>
+                      <a:prstDash val="solid"/>
+                      <a:round/>
+                      <a:headEnd type="none" w="med" len="med"/>
+                      <a:tailEnd type="none" w="med" len="med"/>
+                    </a:lnB>
+                    <a:solidFill>
+                      <a:srgbClr val="FFFFFF"/>
+                    </a:solidFill>
+                  </a:tcPr>
+                </a:tc>
+                <a:tc>
+                  <a:txBody>
+                    <a:bodyPr/>
+                    <a:lstStyle/>
+                    <a:p>
+                      <a:pPr algn="ctr" indent="0" marL="0">
+                        <a:buNone/>
+                      </a:pPr>
+                      <a:r>
+                        <a:rPr lang="ko-KR" altLang="en-US" sz="1600" dirty="0">
+                          <a:solidFill>
+                            <a:srgbClr val="222222"/>
+                          </a:solidFill>
+                          <a:latin typeface="Pretendard" pitchFamily="34" charset="0"/>
+                          <a:ea typeface="Pretendard" pitchFamily="34" charset="-122"/>
+                          <a:cs typeface="Pretendard" pitchFamily="34" charset="-120"/>
+                        </a:rPr>
+                        <a:t>완료</a:t>
+                      </a:r>
+                      <a:endParaRPr lang="ko-KR" sz="1600" dirty="0">
+                        <a:latin typeface="Pretendard" charset="0"/>
+                        <a:ea typeface="Pretendard" charset="0"/>
+                        <a:cs typeface="Pretendard" charset="0"/>
+                      </a:endParaRPr>
+                    </a:p>
+                  </a:txBody>
+                  <a:tcPr marL="137160" marR="137160" marT="45720" marB="45720" anchor="ctr">
+                    <a:lnL w="12700" cap="flat" cmpd="sng" algn="ctr">
+                      <a:solidFill>
+                        <a:srgbClr val="D9DEE6"/>
+                      </a:solidFill>
+                      <a:prstDash val="solid"/>
+                      <a:round/>
+                      <a:headEnd type="none" w="med" len="med"/>
+                      <a:tailEnd type="none" w="med" len="med"/>
+                    </a:lnL>
+                    <a:lnR w="12700" cap="flat" cmpd="sng" algn="ctr">
+                      <a:solidFill>
+                        <a:srgbClr val="D9DEE6"/>
+                      </a:solidFill>
+                      <a:prstDash val="solid"/>
+                      <a:round/>
+                      <a:headEnd type="none" w="med" len="med"/>
+                      <a:tailEnd type="none" w="med" len="med"/>
+                    </a:lnR>
+                    <a:lnT w="12700" cap="flat" cmpd="sng" algn="ctr">
+                      <a:solidFill>
+                        <a:srgbClr val="D9DEE6"/>
+                      </a:solidFill>
+                      <a:prstDash val="solid"/>
+                      <a:round/>
+                      <a:headEnd type="none" w="med" len="med"/>
+                      <a:tailEnd type="none" w="med" len="med"/>
+                    </a:lnT>
+                    <a:lnB w="12700" cap="flat" cmpd="sng" algn="ctr">
+                      <a:solidFill>
+                        <a:srgbClr val="D9DEE6"/>
+                      </a:solidFill>
+                      <a:prstDash val="solid"/>
+                      <a:round/>
+                      <a:headEnd type="none" w="med" len="med"/>
+                      <a:tailEnd type="none" w="med" len="med"/>
+                    </a:lnB>
+                    <a:solidFill>
+                      <a:srgbClr val="FFFFFF"/>
+                    </a:solidFill>
+                  </a:tcPr>
+                </a:tc>
+                <a:tc>
+                  <a:txBody>
+                    <a:bodyPr/>
+                    <a:lstStyle/>
+                    <a:p>
+                      <a:pPr algn="l" indent="0" marL="0">
+                        <a:buNone/>
+                      </a:pPr>
+                      <a:r>
+                        <a:rPr lang="ko-KR" altLang="en-US" sz="1600" dirty="0">
+                          <a:solidFill>
+                            <a:srgbClr val="222222"/>
+                          </a:solidFill>
+                          <a:latin typeface="Pretendard" pitchFamily="34" charset="0"/>
+                          <a:ea typeface="Pretendard" pitchFamily="34" charset="-122"/>
+                          <a:cs typeface="Pretendard" pitchFamily="34" charset="-120"/>
+                        </a:rPr>
+                        <a:t>발견사항 → 조치 기록 → 조치 전후 같은 조건 비교. 정비이력 CSV 가져오기 포함</a:t>
+                      </a:r>
+                      <a:endParaRPr lang="ko-KR" sz="1600" dirty="0">
+                        <a:latin typeface="Pretendard" charset="0"/>
+                        <a:ea typeface="Pretendard" charset="0"/>
+                        <a:cs typeface="Pretendard" charset="0"/>
+                      </a:endParaRPr>
+                    </a:p>
+                  </a:txBody>
+                  <a:tcPr marL="137160" marR="137160" marT="45720" marB="45720" anchor="ctr">
+                    <a:lnL w="12700" cap="flat" cmpd="sng" algn="ctr">
+                      <a:solidFill>
+                        <a:srgbClr val="D9DEE6"/>
+                      </a:solidFill>
+                      <a:prstDash val="solid"/>
+                      <a:round/>
+                      <a:headEnd type="none" w="med" len="med"/>
+                      <a:tailEnd type="none" w="med" len="med"/>
+                    </a:lnL>
+                    <a:lnR w="12700" cap="flat" cmpd="sng" algn="ctr">
+                      <a:solidFill>
+                        <a:srgbClr val="D9DEE6"/>
+                      </a:solidFill>
+                      <a:prstDash val="solid"/>
+                      <a:round/>
+                      <a:headEnd type="none" w="med" len="med"/>
+                      <a:tailEnd type="none" w="med" len="med"/>
+                    </a:lnR>
+                    <a:lnT w="12700" cap="flat" cmpd="sng" algn="ctr">
+                      <a:solidFill>
+                        <a:srgbClr val="D9DEE6"/>
+                      </a:solidFill>
+                      <a:prstDash val="solid"/>
+                      <a:round/>
+                      <a:headEnd type="none" w="med" len="med"/>
+                      <a:tailEnd type="none" w="med" len="med"/>
+                    </a:lnT>
+                    <a:lnB w="12700" cap="flat" cmpd="sng" algn="ctr">
+                      <a:solidFill>
+                        <a:srgbClr val="D9DEE6"/>
+                      </a:solidFill>
+                      <a:prstDash val="solid"/>
+                      <a:round/>
+                      <a:headEnd type="none" w="med" len="med"/>
+                      <a:tailEnd type="none" w="med" len="med"/>
+                    </a:lnB>
+                    <a:solidFill>
+                      <a:srgbClr val="FFFFFF"/>
+                    </a:solidFill>
+                  </a:tcPr>
+                </a:tc>
+              </a:tr>
+              <a:tr h="640080">
+                <a:tc>
+                  <a:txBody>
+                    <a:bodyPr/>
+                    <a:lstStyle/>
+                    <a:p>
+                      <a:pPr algn="l" indent="0" marL="0">
+                        <a:buNone/>
+                      </a:pPr>
+                      <a:r>
+                        <a:rPr lang="ko-KR" altLang="en-US" sz="1600" dirty="0">
+                          <a:solidFill>
+                            <a:srgbClr val="222222"/>
+                          </a:solidFill>
+                          <a:latin typeface="Pretendard" pitchFamily="34" charset="0"/>
+                          <a:ea typeface="Pretendard" pitchFamily="34" charset="-122"/>
+                          <a:cs typeface="Pretendard" pitchFamily="34" charset="-120"/>
+                        </a:rPr>
+                        <a:t>원장 · 물질수지</a:t>
+                      </a:r>
+                      <a:endParaRPr lang="ko-KR" sz="1600" dirty="0">
+                        <a:latin typeface="Pretendard" charset="0"/>
+                        <a:ea typeface="Pretendard" charset="0"/>
+                        <a:cs typeface="Pretendard" charset="0"/>
+                      </a:endParaRPr>
+                    </a:p>
+                  </a:txBody>
+                  <a:tcPr marL="137160" marR="137160" marT="45720" marB="45720" anchor="ctr">
+                    <a:lnL w="12700" cap="flat" cmpd="sng" algn="ctr">
+                      <a:solidFill>
+                        <a:srgbClr val="D9DEE6"/>
+                      </a:solidFill>
+                      <a:prstDash val="solid"/>
+                      <a:round/>
+                      <a:headEnd type="none" w="med" len="med"/>
+                      <a:tailEnd type="none" w="med" len="med"/>
+                    </a:lnL>
+                    <a:lnR w="12700" cap="flat" cmpd="sng" algn="ctr">
+                      <a:solidFill>
+                        <a:srgbClr val="D9DEE6"/>
+                      </a:solidFill>
+                      <a:prstDash val="solid"/>
+                      <a:round/>
+                      <a:headEnd type="none" w="med" len="med"/>
+                      <a:tailEnd type="none" w="med" len="med"/>
+                    </a:lnR>
+                    <a:lnT w="12700" cap="flat" cmpd="sng" algn="ctr">
+                      <a:solidFill>
+                        <a:srgbClr val="D9DEE6"/>
+                      </a:solidFill>
+                      <a:prstDash val="solid"/>
+                      <a:round/>
+                      <a:headEnd type="none" w="med" len="med"/>
+                      <a:tailEnd type="none" w="med" len="med"/>
+                    </a:lnT>
+                    <a:lnB w="12700" cap="flat" cmpd="sng" algn="ctr">
+                      <a:solidFill>
+                        <a:srgbClr val="D9DEE6"/>
+                      </a:solidFill>
+                      <a:prstDash val="solid"/>
+                      <a:round/>
+                      <a:headEnd type="none" w="med" len="med"/>
+                      <a:tailEnd type="none" w="med" len="med"/>
+                    </a:lnB>
+                    <a:solidFill>
+                      <a:srgbClr val="FFFFFF"/>
+                    </a:solidFill>
+                  </a:tcPr>
+                </a:tc>
+                <a:tc>
+                  <a:txBody>
+                    <a:bodyPr/>
+                    <a:lstStyle/>
+                    <a:p>
+                      <a:pPr algn="ctr" indent="0" marL="0">
+                        <a:buNone/>
+                      </a:pPr>
+                      <a:r>
+                        <a:rPr lang="ko-KR" altLang="en-US" sz="1600" dirty="0">
+                          <a:solidFill>
+                            <a:srgbClr val="222222"/>
+                          </a:solidFill>
+                          <a:latin typeface="Pretendard" pitchFamily="34" charset="0"/>
+                          <a:ea typeface="Pretendard" pitchFamily="34" charset="-122"/>
+                          <a:cs typeface="Pretendard" pitchFamily="34" charset="-120"/>
+                        </a:rPr>
+                        <a:t>완료</a:t>
+                      </a:r>
+                      <a:endParaRPr lang="ko-KR" sz="1600" dirty="0">
+                        <a:latin typeface="Pretendard" charset="0"/>
+                        <a:ea typeface="Pretendard" charset="0"/>
+                        <a:cs typeface="Pretendard" charset="0"/>
+                      </a:endParaRPr>
+                    </a:p>
+                  </a:txBody>
+                  <a:tcPr marL="137160" marR="137160" marT="45720" marB="45720" anchor="ctr">
+                    <a:lnL w="12700" cap="flat" cmpd="sng" algn="ctr">
+                      <a:solidFill>
+                        <a:srgbClr val="D9DEE6"/>
+                      </a:solidFill>
+                      <a:prstDash val="solid"/>
+                      <a:round/>
+                      <a:headEnd type="none" w="med" len="med"/>
+                      <a:tailEnd type="none" w="med" len="med"/>
+                    </a:lnL>
+                    <a:lnR w="12700" cap="flat" cmpd="sng" algn="ctr">
+                      <a:solidFill>
+                        <a:srgbClr val="D9DEE6"/>
+                      </a:solidFill>
+                      <a:prstDash val="solid"/>
+                      <a:round/>
+                      <a:headEnd type="none" w="med" len="med"/>
+                      <a:tailEnd type="none" w="med" len="med"/>
+                    </a:lnR>
+                    <a:lnT w="12700" cap="flat" cmpd="sng" algn="ctr">
+                      <a:solidFill>
+                        <a:srgbClr val="D9DEE6"/>
+                      </a:solidFill>
+                      <a:prstDash val="solid"/>
+                      <a:round/>
+                      <a:headEnd type="none" w="med" len="med"/>
+                      <a:tailEnd type="none" w="med" len="med"/>
+                    </a:lnT>
+                    <a:lnB w="12700" cap="flat" cmpd="sng" algn="ctr">
+                      <a:solidFill>
+                        <a:srgbClr val="D9DEE6"/>
+                      </a:solidFill>
+                      <a:prstDash val="solid"/>
+                      <a:round/>
+                      <a:headEnd type="none" w="med" len="med"/>
+                      <a:tailEnd type="none" w="med" len="med"/>
+                    </a:lnB>
+                    <a:solidFill>
+                      <a:srgbClr val="FFFFFF"/>
+                    </a:solidFill>
+                  </a:tcPr>
+                </a:tc>
+                <a:tc>
+                  <a:txBody>
+                    <a:bodyPr/>
+                    <a:lstStyle/>
+                    <a:p>
+                      <a:pPr algn="l" indent="0" marL="0">
+                        <a:buNone/>
+                      </a:pPr>
+                      <a:r>
+                        <a:rPr lang="ko-KR" altLang="en-US" sz="1600" dirty="0">
+                          <a:solidFill>
+                            <a:srgbClr val="222222"/>
+                          </a:solidFill>
+                          <a:latin typeface="Pretendard" pitchFamily="34" charset="0"/>
+                          <a:ea typeface="Pretendard" pitchFamily="34" charset="-122"/>
+                          <a:cs typeface="Pretendard" pitchFamily="34" charset="-120"/>
+                        </a:rPr>
+                        <a:t>에너지·수소 원장을 일 단위로 닫고 잔차를 감시. 도면 검토를 반영해 식에 ‘반입’ 항을 넣었다(적산계 → 전표 → 판정 불능)</a:t>
+                      </a:r>
+                      <a:endParaRPr lang="ko-KR" sz="1600" dirty="0">
+                        <a:latin typeface="Pretendard" charset="0"/>
+                        <a:ea typeface="Pretendard" charset="0"/>
+                        <a:cs typeface="Pretendard" charset="0"/>
+                      </a:endParaRPr>
+                    </a:p>
+                  </a:txBody>
+                  <a:tcPr marL="137160" marR="137160" marT="45720" marB="45720" anchor="ctr">
+                    <a:lnL w="12700" cap="flat" cmpd="sng" algn="ctr">
+                      <a:solidFill>
+                        <a:srgbClr val="D9DEE6"/>
+                      </a:solidFill>
+                      <a:prstDash val="solid"/>
+                      <a:round/>
+                      <a:headEnd type="none" w="med" len="med"/>
+                      <a:tailEnd type="none" w="med" len="med"/>
+                    </a:lnL>
+                    <a:lnR w="12700" cap="flat" cmpd="sng" algn="ctr">
+                      <a:solidFill>
+                        <a:srgbClr val="D9DEE6"/>
+                      </a:solidFill>
+                      <a:prstDash val="solid"/>
+                      <a:round/>
+                      <a:headEnd type="none" w="med" len="med"/>
+                      <a:tailEnd type="none" w="med" len="med"/>
+                    </a:lnR>
+                    <a:lnT w="12700" cap="flat" cmpd="sng" algn="ctr">
+                      <a:solidFill>
+                        <a:srgbClr val="D9DEE6"/>
+                      </a:solidFill>
+                      <a:prstDash val="solid"/>
+                      <a:round/>
+                      <a:headEnd type="none" w="med" len="med"/>
+                      <a:tailEnd type="none" w="med" len="med"/>
+                    </a:lnT>
+                    <a:lnB w="12700" cap="flat" cmpd="sng" algn="ctr">
+                      <a:solidFill>
+                        <a:srgbClr val="D9DEE6"/>
+                      </a:solidFill>
+                      <a:prstDash val="solid"/>
+                      <a:round/>
+                      <a:headEnd type="none" w="med" len="med"/>
+                      <a:tailEnd type="none" w="med" len="med"/>
+                    </a:lnB>
+                    <a:solidFill>
+                      <a:srgbClr val="FFFFFF"/>
+                    </a:solidFill>
+                  </a:tcPr>
+                </a:tc>
+              </a:tr>
+              <a:tr h="642112">
+                <a:tc>
+                  <a:txBody>
+                    <a:bodyPr/>
+                    <a:lstStyle/>
+                    <a:p>
+                      <a:pPr algn="l" indent="0" marL="0">
+                        <a:buNone/>
+                      </a:pPr>
+                      <a:r>
+                        <a:rPr lang="ko-KR" altLang="en-US" sz="1600" dirty="0">
+                          <a:solidFill>
+                            <a:srgbClr val="222222"/>
+                          </a:solidFill>
+                          <a:latin typeface="Pretendard" pitchFamily="34" charset="0"/>
+                          <a:ea typeface="Pretendard" pitchFamily="34" charset="-122"/>
+                          <a:cs typeface="Pretendard" pitchFamily="34" charset="-120"/>
+                        </a:rPr>
+                        <a:t>지도 · 공정도 · 가평 사이트</a:t>
+                      </a:r>
+                      <a:endParaRPr lang="ko-KR" sz="1600" dirty="0">
+                        <a:latin typeface="Pretendard" charset="0"/>
+                        <a:ea typeface="Pretendard" charset="0"/>
+                        <a:cs typeface="Pretendard" charset="0"/>
+                      </a:endParaRPr>
+                    </a:p>
+                  </a:txBody>
+                  <a:tcPr marL="137160" marR="137160" marT="45720" marB="45720" anchor="ctr">
+                    <a:lnL w="12700" cap="flat" cmpd="sng" algn="ctr">
+                      <a:solidFill>
+                        <a:srgbClr val="D9DEE6"/>
+                      </a:solidFill>
+                      <a:prstDash val="solid"/>
+                      <a:round/>
+                      <a:headEnd type="none" w="med" len="med"/>
+                      <a:tailEnd type="none" w="med" len="med"/>
+                    </a:lnL>
+                    <a:lnR w="12700" cap="flat" cmpd="sng" algn="ctr">
+                      <a:solidFill>
+                        <a:srgbClr val="D9DEE6"/>
+                      </a:solidFill>
+                      <a:prstDash val="solid"/>
+                      <a:round/>
+                      <a:headEnd type="none" w="med" len="med"/>
+                      <a:tailEnd type="none" w="med" len="med"/>
+                    </a:lnR>
+                    <a:lnT w="12700" cap="flat" cmpd="sng" algn="ctr">
+                      <a:solidFill>
+                        <a:srgbClr val="D9DEE6"/>
+                      </a:solidFill>
+                      <a:prstDash val="solid"/>
+                      <a:round/>
+                      <a:headEnd type="none" w="med" len="med"/>
+                      <a:tailEnd type="none" w="med" len="med"/>
+                    </a:lnT>
+                    <a:lnB w="12700" cap="flat" cmpd="sng" algn="ctr">
+                      <a:solidFill>
+                        <a:srgbClr val="D9DEE6"/>
+                      </a:solidFill>
+                      <a:prstDash val="solid"/>
+                      <a:round/>
+                      <a:headEnd type="none" w="med" len="med"/>
+                      <a:tailEnd type="none" w="med" len="med"/>
+                    </a:lnB>
+                    <a:solidFill>
+                      <a:srgbClr val="FFFFFF"/>
+                    </a:solidFill>
+                  </a:tcPr>
+                </a:tc>
+                <a:tc>
+                  <a:txBody>
+                    <a:bodyPr/>
+                    <a:lstStyle/>
+                    <a:p>
+                      <a:pPr algn="ctr" indent="0" marL="0">
+                        <a:buNone/>
+                      </a:pPr>
+                      <a:r>
+                        <a:rPr lang="ko-KR" altLang="en-US" sz="1600" dirty="0">
+                          <a:solidFill>
+                            <a:srgbClr val="222222"/>
+                          </a:solidFill>
+                          <a:latin typeface="Pretendard" pitchFamily="34" charset="0"/>
+                          <a:ea typeface="Pretendard" pitchFamily="34" charset="-122"/>
+                          <a:cs typeface="Pretendard" pitchFamily="34" charset="-120"/>
+                        </a:rPr>
+                        <a:t>완료</a:t>
+                      </a:r>
+                      <a:endParaRPr lang="ko-KR" sz="1600" dirty="0">
+                        <a:latin typeface="Pretendard" charset="0"/>
+                        <a:ea typeface="Pretendard" charset="0"/>
+                        <a:cs typeface="Pretendard" charset="0"/>
+                      </a:endParaRPr>
+                    </a:p>
+                  </a:txBody>
+                  <a:tcPr marL="137160" marR="137160" marT="45720" marB="45720" anchor="ctr">
+                    <a:lnL w="12700" cap="flat" cmpd="sng" algn="ctr">
+                      <a:solidFill>
+                        <a:srgbClr val="D9DEE6"/>
+                      </a:solidFill>
+                      <a:prstDash val="solid"/>
+                      <a:round/>
+                      <a:headEnd type="none" w="med" len="med"/>
+                      <a:tailEnd type="none" w="med" len="med"/>
+                    </a:lnL>
+                    <a:lnR w="12700" cap="flat" cmpd="sng" algn="ctr">
+                      <a:solidFill>
+                        <a:srgbClr val="D9DEE6"/>
+                      </a:solidFill>
+                      <a:prstDash val="solid"/>
+                      <a:round/>
+                      <a:headEnd type="none" w="med" len="med"/>
+                      <a:tailEnd type="none" w="med" len="med"/>
+                    </a:lnR>
+                    <a:lnT w="12700" cap="flat" cmpd="sng" algn="ctr">
+                      <a:solidFill>
+                        <a:srgbClr val="D9DEE6"/>
+                      </a:solidFill>
+                      <a:prstDash val="solid"/>
+                      <a:round/>
+                      <a:headEnd type="none" w="med" len="med"/>
+                      <a:tailEnd type="none" w="med" len="med"/>
+                    </a:lnT>
+                    <a:lnB w="12700" cap="flat" cmpd="sng" algn="ctr">
+                      <a:solidFill>
+                        <a:srgbClr val="D9DEE6"/>
+                      </a:solidFill>
+                      <a:prstDash val="solid"/>
+                      <a:round/>
+                      <a:headEnd type="none" w="med" len="med"/>
+                      <a:tailEnd type="none" w="med" len="med"/>
+                    </a:lnB>
+                    <a:solidFill>
+                      <a:srgbClr val="FFFFFF"/>
+                    </a:solidFill>
+                  </a:tcPr>
+                </a:tc>
+                <a:tc>
+                  <a:txBody>
+                    <a:bodyPr/>
+                    <a:lstStyle/>
+                    <a:p>
+                      <a:pPr algn="l" indent="0" marL="0">
+                        <a:buNone/>
+                      </a:pPr>
+                      <a:r>
+                        <a:rPr lang="ko-KR" altLang="en-US" sz="1600" dirty="0">
+                          <a:solidFill>
+                            <a:srgbClr val="222222"/>
+                          </a:solidFill>
+                          <a:latin typeface="Pretendard" pitchFamily="34" charset="0"/>
+                          <a:ea typeface="Pretendard" pitchFamily="34" charset="-122"/>
+                          <a:cs typeface="Pretendard" pitchFamily="34" charset="-120"/>
+                        </a:rPr>
+                        <a:t>상태 지도와 도면 좌표 기반 공정도 화면. 가평은 설비 17개를 도면 명판 그대로 등록(미확인은 ‘미확인’), 태그 10점 매핑, 미설치 52행은 요청 목록으로 분리</a:t>
+                      </a:r>
+                      <a:endParaRPr lang="ko-KR" sz="1600" dirty="0">
+                        <a:latin typeface="Pretendard" charset="0"/>
+                        <a:ea typeface="Pretendard" charset="0"/>
+                        <a:cs typeface="Pretendard" charset="0"/>
+                      </a:endParaRPr>
+                    </a:p>
+                  </a:txBody>
+                  <a:tcPr marL="137160" marR="137160" marT="45720" marB="45720" anchor="ctr">
+                    <a:lnL w="12700" cap="flat" cmpd="sng" algn="ctr">
+                      <a:solidFill>
+                        <a:srgbClr val="D9DEE6"/>
+                      </a:solidFill>
+                      <a:prstDash val="solid"/>
+                      <a:round/>
+                      <a:headEnd type="none" w="med" len="med"/>
+                      <a:tailEnd type="none" w="med" len="med"/>
+                    </a:lnL>
+                    <a:lnR w="12700" cap="flat" cmpd="sng" algn="ctr">
+                      <a:solidFill>
+                        <a:srgbClr val="D9DEE6"/>
+                      </a:solidFill>
+                      <a:prstDash val="solid"/>
+                      <a:round/>
+                      <a:headEnd type="none" w="med" len="med"/>
+                      <a:tailEnd type="none" w="med" len="med"/>
+                    </a:lnR>
+                    <a:lnT w="12700" cap="flat" cmpd="sng" algn="ctr">
+                      <a:solidFill>
+                        <a:srgbClr val="D9DEE6"/>
+                      </a:solidFill>
+                      <a:prstDash val="solid"/>
+                      <a:round/>
+                      <a:headEnd type="none" w="med" len="med"/>
+                      <a:tailEnd type="none" w="med" len="med"/>
+                    </a:lnT>
+                    <a:lnB w="12700" cap="flat" cmpd="sng" algn="ctr">
+                      <a:solidFill>
+                        <a:srgbClr val="D9DEE6"/>
+                      </a:solidFill>
+                      <a:prstDash val="solid"/>
+                      <a:round/>
+                      <a:headEnd type="none" w="med" len="med"/>
+                      <a:tailEnd type="none" w="med" len="med"/>
+                    </a:lnB>
+                    <a:solidFill>
+                      <a:srgbClr val="FFFFFF"/>
+                    </a:solidFill>
+                  </a:tcPr>
+                </a:tc>
+              </a:tr>
+              <a:tr h="640080">
+                <a:tc>
+                  <a:txBody>
+                    <a:bodyPr/>
+                    <a:lstStyle/>
+                    <a:p>
+                      <a:pPr algn="l" indent="0" marL="0">
+                        <a:buNone/>
+                      </a:pPr>
+                      <a:r>
+                        <a:rPr lang="ko-KR" altLang="en-US" sz="1600" dirty="0">
+                          <a:solidFill>
+                            <a:srgbClr val="222222"/>
+                          </a:solidFill>
+                          <a:latin typeface="Pretendard" pitchFamily="34" charset="0"/>
+                          <a:ea typeface="Pretendard" pitchFamily="34" charset="-122"/>
+                          <a:cs typeface="Pretendard" pitchFamily="34" charset="-120"/>
+                        </a:rPr>
+                        <a:t>AI 설명 · 전표 입력</a:t>
+                      </a:r>
+                      <a:endParaRPr lang="ko-KR" sz="1600" dirty="0">
+                        <a:latin typeface="Pretendard" charset="0"/>
+                        <a:ea typeface="Pretendard" charset="0"/>
+                        <a:cs typeface="Pretendard" charset="0"/>
+                      </a:endParaRPr>
+                    </a:p>
+                  </a:txBody>
+                  <a:tcPr marL="137160" marR="137160" marT="45720" marB="45720" anchor="ctr">
+                    <a:lnL w="12700" cap="flat" cmpd="sng" algn="ctr">
+                      <a:solidFill>
+                        <a:srgbClr val="D9DEE6"/>
+                      </a:solidFill>
+                      <a:prstDash val="solid"/>
+                      <a:round/>
+                      <a:headEnd type="none" w="med" len="med"/>
+                      <a:tailEnd type="none" w="med" len="med"/>
+                    </a:lnL>
+                    <a:lnR w="12700" cap="flat" cmpd="sng" algn="ctr">
+                      <a:solidFill>
+                        <a:srgbClr val="D9DEE6"/>
+                      </a:solidFill>
+                      <a:prstDash val="solid"/>
+                      <a:round/>
+                      <a:headEnd type="none" w="med" len="med"/>
+                      <a:tailEnd type="none" w="med" len="med"/>
+                    </a:lnR>
+                    <a:lnT w="12700" cap="flat" cmpd="sng" algn="ctr">
+                      <a:solidFill>
+                        <a:srgbClr val="D9DEE6"/>
+                      </a:solidFill>
+                      <a:prstDash val="solid"/>
+                      <a:round/>
+                      <a:headEnd type="none" w="med" len="med"/>
+                      <a:tailEnd type="none" w="med" len="med"/>
+                    </a:lnT>
+                    <a:lnB w="12700" cap="flat" cmpd="sng" algn="ctr">
+                      <a:solidFill>
+                        <a:srgbClr val="D9DEE6"/>
+                      </a:solidFill>
+                      <a:prstDash val="solid"/>
+                      <a:round/>
+                      <a:headEnd type="none" w="med" len="med"/>
+                      <a:tailEnd type="none" w="med" len="med"/>
+                    </a:lnB>
+                    <a:solidFill>
+                      <a:srgbClr val="FFFFFF"/>
+                    </a:solidFill>
+                  </a:tcPr>
+                </a:tc>
+                <a:tc>
+                  <a:txBody>
+                    <a:bodyPr/>
+                    <a:lstStyle/>
+                    <a:p>
+                      <a:pPr algn="ctr" indent="0" marL="0">
+                        <a:buNone/>
+                      </a:pPr>
+                      <a:r>
+                        <a:rPr lang="ko-KR" altLang="en-US" sz="1600" dirty="0">
+                          <a:solidFill>
+                            <a:srgbClr val="222222"/>
+                          </a:solidFill>
+                          <a:latin typeface="Pretendard" pitchFamily="34" charset="0"/>
+                          <a:ea typeface="Pretendard" pitchFamily="34" charset="-122"/>
+                          <a:cs typeface="Pretendard" pitchFamily="34" charset="-120"/>
+                        </a:rPr>
+                        <a:t>완료</a:t>
+                      </a:r>
+                      <a:endParaRPr lang="ko-KR" sz="1600" dirty="0">
+                        <a:latin typeface="Pretendard" charset="0"/>
+                        <a:ea typeface="Pretendard" charset="0"/>
+                        <a:cs typeface="Pretendard" charset="0"/>
+                      </a:endParaRPr>
+                    </a:p>
+                  </a:txBody>
+                  <a:tcPr marL="137160" marR="137160" marT="45720" marB="45720" anchor="ctr">
+                    <a:lnL w="12700" cap="flat" cmpd="sng" algn="ctr">
+                      <a:solidFill>
+                        <a:srgbClr val="D9DEE6"/>
+                      </a:solidFill>
+                      <a:prstDash val="solid"/>
+                      <a:round/>
+                      <a:headEnd type="none" w="med" len="med"/>
+                      <a:tailEnd type="none" w="med" len="med"/>
+                    </a:lnL>
+                    <a:lnR w="12700" cap="flat" cmpd="sng" algn="ctr">
+                      <a:solidFill>
+                        <a:srgbClr val="D9DEE6"/>
+                      </a:solidFill>
+                      <a:prstDash val="solid"/>
+                      <a:round/>
+                      <a:headEnd type="none" w="med" len="med"/>
+                      <a:tailEnd type="none" w="med" len="med"/>
+                    </a:lnR>
+                    <a:lnT w="12700" cap="flat" cmpd="sng" algn="ctr">
+                      <a:solidFill>
+                        <a:srgbClr val="D9DEE6"/>
+                      </a:solidFill>
+                      <a:prstDash val="solid"/>
+                      <a:round/>
+                      <a:headEnd type="none" w="med" len="med"/>
+                      <a:tailEnd type="none" w="med" len="med"/>
+                    </a:lnT>
+                    <a:lnB w="12700" cap="flat" cmpd="sng" algn="ctr">
+                      <a:solidFill>
+                        <a:srgbClr val="D9DEE6"/>
+                      </a:solidFill>
+                      <a:prstDash val="solid"/>
+                      <a:round/>
+                      <a:headEnd type="none" w="med" len="med"/>
+                      <a:tailEnd type="none" w="med" len="med"/>
+                    </a:lnB>
+                    <a:solidFill>
+                      <a:srgbClr val="FFFFFF"/>
+                    </a:solidFill>
+                  </a:tcPr>
+                </a:tc>
+                <a:tc>
+                  <a:txBody>
+                    <a:bodyPr/>
+                    <a:lstStyle/>
+                    <a:p>
+                      <a:pPr algn="l" indent="0" marL="0">
+                        <a:buNone/>
+                      </a:pPr>
+                      <a:r>
+                        <a:rPr lang="ko-KR" altLang="en-US" sz="1600" dirty="0">
+                          <a:solidFill>
+                            <a:srgbClr val="222222"/>
+                          </a:solidFill>
+                          <a:latin typeface="Pretendard" pitchFamily="34" charset="0"/>
+                          <a:ea typeface="Pretendard" pitchFamily="34" charset="-122"/>
+                          <a:cs typeface="Pretendard" pitchFamily="34" charset="-120"/>
+                        </a:rPr>
+                        <a:t>수치는 통계, 문장은 LLM + 검증·폴백. 반입·출하 전표는 수기 입력과 CSV로 받는다</a:t>
+                      </a:r>
+                      <a:endParaRPr lang="ko-KR" sz="1600" dirty="0">
+                        <a:latin typeface="Pretendard" charset="0"/>
+                        <a:ea typeface="Pretendard" charset="0"/>
+                        <a:cs typeface="Pretendard" charset="0"/>
+                      </a:endParaRPr>
+                    </a:p>
+                  </a:txBody>
+                  <a:tcPr marL="137160" marR="137160" marT="45720" marB="45720" anchor="ctr">
+                    <a:lnL w="12700" cap="flat" cmpd="sng" algn="ctr">
+                      <a:solidFill>
+                        <a:srgbClr val="D9DEE6"/>
+                      </a:solidFill>
+                      <a:prstDash val="solid"/>
+                      <a:round/>
+                      <a:headEnd type="none" w="med" len="med"/>
+                      <a:tailEnd type="none" w="med" len="med"/>
+                    </a:lnL>
+                    <a:lnR w="12700" cap="flat" cmpd="sng" algn="ctr">
+                      <a:solidFill>
+                        <a:srgbClr val="D9DEE6"/>
+                      </a:solidFill>
+                      <a:prstDash val="solid"/>
+                      <a:round/>
+                      <a:headEnd type="none" w="med" len="med"/>
+                      <a:tailEnd type="none" w="med" len="med"/>
+                    </a:lnR>
+                    <a:lnT w="12700" cap="flat" cmpd="sng" algn="ctr">
+                      <a:solidFill>
+                        <a:srgbClr val="D9DEE6"/>
+                      </a:solidFill>
+                      <a:prstDash val="solid"/>
+                      <a:round/>
+                      <a:headEnd type="none" w="med" len="med"/>
+                      <a:tailEnd type="none" w="med" len="med"/>
+                    </a:lnT>
+                    <a:lnB w="12700" cap="flat" cmpd="sng" algn="ctr">
+                      <a:solidFill>
+                        <a:srgbClr val="D9DEE6"/>
+                      </a:solidFill>
+                      <a:prstDash val="solid"/>
+                      <a:round/>
+                      <a:headEnd type="none" w="med" len="med"/>
+                      <a:tailEnd type="none" w="med" len="med"/>
+                    </a:lnB>
+                    <a:solidFill>
+                      <a:srgbClr val="FFFFFF"/>
+                    </a:solidFill>
+                  </a:tcPr>
+                </a:tc>
+              </a:tr>
+              <a:tr h="640080">
+                <a:tc>
+                  <a:txBody>
+                    <a:bodyPr/>
+                    <a:lstStyle/>
+                    <a:p>
+                      <a:pPr algn="l" indent="0" marL="0">
+                        <a:buNone/>
+                      </a:pPr>
+                      <a:r>
+                        <a:rPr lang="ko-KR" altLang="en-US" sz="1600" dirty="0">
+                          <a:solidFill>
+                            <a:srgbClr val="222222"/>
+                          </a:solidFill>
+                          <a:latin typeface="Pretendard" pitchFamily="34" charset="0"/>
+                          <a:ea typeface="Pretendard" pitchFamily="34" charset="-122"/>
+                          <a:cs typeface="Pretendard" pitchFamily="34" charset="-120"/>
+                        </a:rPr>
+                        <a:t>산소·물 원장 / 현장 수집</a:t>
+                      </a:r>
+                      <a:endParaRPr lang="ko-KR" sz="1600" dirty="0">
+                        <a:latin typeface="Pretendard" charset="0"/>
+                        <a:ea typeface="Pretendard" charset="0"/>
+                        <a:cs typeface="Pretendard" charset="0"/>
+                      </a:endParaRPr>
+                    </a:p>
+                  </a:txBody>
+                  <a:tcPr marL="137160" marR="137160" marT="45720" marB="45720" anchor="ctr">
+                    <a:lnL w="12700" cap="flat" cmpd="sng" algn="ctr">
+                      <a:solidFill>
+                        <a:srgbClr val="D9DEE6"/>
+                      </a:solidFill>
+                      <a:prstDash val="solid"/>
+                      <a:round/>
+                      <a:headEnd type="none" w="med" len="med"/>
+                      <a:tailEnd type="none" w="med" len="med"/>
+                    </a:lnL>
+                    <a:lnR w="12700" cap="flat" cmpd="sng" algn="ctr">
+                      <a:solidFill>
+                        <a:srgbClr val="D9DEE6"/>
+                      </a:solidFill>
+                      <a:prstDash val="solid"/>
+                      <a:round/>
+                      <a:headEnd type="none" w="med" len="med"/>
+                      <a:tailEnd type="none" w="med" len="med"/>
+                    </a:lnR>
+                    <a:lnT w="12700" cap="flat" cmpd="sng" algn="ctr">
+                      <a:solidFill>
+                        <a:srgbClr val="D9DEE6"/>
+                      </a:solidFill>
+                      <a:prstDash val="solid"/>
+                      <a:round/>
+                      <a:headEnd type="none" w="med" len="med"/>
+                      <a:tailEnd type="none" w="med" len="med"/>
+                    </a:lnT>
+                    <a:lnB w="12700" cap="flat" cmpd="sng" algn="ctr">
+                      <a:solidFill>
+                        <a:srgbClr val="D9DEE6"/>
+                      </a:solidFill>
+                      <a:prstDash val="solid"/>
+                      <a:round/>
+                      <a:headEnd type="none" w="med" len="med"/>
+                      <a:tailEnd type="none" w="med" len="med"/>
+                    </a:lnB>
+                    <a:solidFill>
+                      <a:srgbClr val="FFFFFF"/>
+                    </a:solidFill>
+                  </a:tcPr>
+                </a:tc>
+                <a:tc>
+                  <a:txBody>
+                    <a:bodyPr/>
+                    <a:lstStyle/>
+                    <a:p>
+                      <a:pPr algn="ctr" indent="0" marL="0">
+                        <a:buNone/>
+                      </a:pPr>
+                      <a:r>
+                        <a:rPr lang="ko-KR" altLang="en-US" sz="1600" dirty="0">
+                          <a:solidFill>
+                            <a:srgbClr val="222222"/>
+                          </a:solidFill>
+                          <a:latin typeface="Pretendard" pitchFamily="34" charset="0"/>
+                          <a:ea typeface="Pretendard" pitchFamily="34" charset="-122"/>
+                          <a:cs typeface="Pretendard" pitchFamily="34" charset="-120"/>
+                        </a:rPr>
+                        <a:t>대기</a:t>
+                      </a:r>
+                      <a:endParaRPr lang="ko-KR" sz="1600" dirty="0">
+                        <a:latin typeface="Pretendard" charset="0"/>
+                        <a:ea typeface="Pretendard" charset="0"/>
+                        <a:cs typeface="Pretendard" charset="0"/>
+                      </a:endParaRPr>
+                    </a:p>
+                  </a:txBody>
+                  <a:tcPr marL="137160" marR="137160" marT="45720" marB="45720" anchor="ctr">
+                    <a:lnL w="12700" cap="flat" cmpd="sng" algn="ctr">
+                      <a:solidFill>
+                        <a:srgbClr val="D9DEE6"/>
+                      </a:solidFill>
+                      <a:prstDash val="solid"/>
+                      <a:round/>
+                      <a:headEnd type="none" w="med" len="med"/>
+                      <a:tailEnd type="none" w="med" len="med"/>
+                    </a:lnL>
+                    <a:lnR w="12700" cap="flat" cmpd="sng" algn="ctr">
+                      <a:solidFill>
+                        <a:srgbClr val="D9DEE6"/>
+                      </a:solidFill>
+                      <a:prstDash val="solid"/>
+                      <a:round/>
+                      <a:headEnd type="none" w="med" len="med"/>
+                      <a:tailEnd type="none" w="med" len="med"/>
+                    </a:lnR>
+                    <a:lnT w="12700" cap="flat" cmpd="sng" algn="ctr">
+                      <a:solidFill>
+                        <a:srgbClr val="D9DEE6"/>
+                      </a:solidFill>
+                      <a:prstDash val="solid"/>
+                      <a:round/>
+                      <a:headEnd type="none" w="med" len="med"/>
+                      <a:tailEnd type="none" w="med" len="med"/>
+                    </a:lnT>
+                    <a:lnB w="12700" cap="flat" cmpd="sng" algn="ctr">
+                      <a:solidFill>
+                        <a:srgbClr val="D9DEE6"/>
+                      </a:solidFill>
+                      <a:prstDash val="solid"/>
+                      <a:round/>
+                      <a:headEnd type="none" w="med" len="med"/>
+                      <a:tailEnd type="none" w="med" len="med"/>
+                    </a:lnB>
+                    <a:solidFill>
+                      <a:srgbClr val="FFFFFF"/>
+                    </a:solidFill>
+                  </a:tcPr>
+                </a:tc>
+                <a:tc>
+                  <a:txBody>
+                    <a:bodyPr/>
+                    <a:lstStyle/>
+                    <a:p>
+                      <a:pPr algn="l" indent="0" marL="0">
+                        <a:buNone/>
+                      </a:pPr>
+                      <a:r>
+                        <a:rPr lang="ko-KR" altLang="en-US" sz="1600" dirty="0">
+                          <a:solidFill>
+                            <a:srgbClr val="222222"/>
+                          </a:solidFill>
+                          <a:latin typeface="Pretendard" pitchFamily="34" charset="0"/>
+                          <a:ea typeface="Pretendard" pitchFamily="34" charset="-122"/>
+                          <a:cs typeface="Pretendard" pitchFamily="34" charset="-120"/>
+                        </a:rPr>
+                        <a:t>설계는 확정 — 유량계·적산계가 붙으면 바로 적재. 현장 수집은 게이트웨이 설치와 데이터 계약이 선행된다</a:t>
+                      </a:r>
+                      <a:endParaRPr lang="ko-KR" sz="1600" dirty="0">
+                        <a:latin typeface="Pretendard" charset="0"/>
+                        <a:ea typeface="Pretendard" charset="0"/>
+                        <a:cs typeface="Pretendard" charset="0"/>
+                      </a:endParaRPr>
+                    </a:p>
+                  </a:txBody>
+                  <a:tcPr marL="137160" marR="137160" marT="45720" marB="45720" anchor="ctr">
+                    <a:lnL w="12700" cap="flat" cmpd="sng" algn="ctr">
+                      <a:solidFill>
+                        <a:srgbClr val="D9DEE6"/>
+                      </a:solidFill>
+                      <a:prstDash val="solid"/>
+                      <a:round/>
+                      <a:headEnd type="none" w="med" len="med"/>
+                      <a:tailEnd type="none" w="med" len="med"/>
+                    </a:lnL>
+                    <a:lnR w="12700" cap="flat" cmpd="sng" algn="ctr">
+                      <a:solidFill>
+                        <a:srgbClr val="D9DEE6"/>
+                      </a:solidFill>
+                      <a:prstDash val="solid"/>
+                      <a:round/>
+                      <a:headEnd type="none" w="med" len="med"/>
+                      <a:tailEnd type="none" w="med" len="med"/>
+                    </a:lnR>
+                    <a:lnT w="12700" cap="flat" cmpd="sng" algn="ctr">
+                      <a:solidFill>
+                        <a:srgbClr val="D9DEE6"/>
+                      </a:solidFill>
+                      <a:prstDash val="solid"/>
+                      <a:round/>
+                      <a:headEnd type="none" w="med" len="med"/>
+                      <a:tailEnd type="none" w="med" len="med"/>
+                    </a:lnT>
+                    <a:lnB w="12700" cap="flat" cmpd="sng" algn="ctr">
+                      <a:solidFill>
+                        <a:srgbClr val="D9DEE6"/>
+                      </a:solidFill>
+                      <a:prstDash val="solid"/>
+                      <a:round/>
+                      <a:headEnd type="none" w="med" len="med"/>
+                      <a:tailEnd type="none" w="med" len="med"/>
+                    </a:lnB>
+                    <a:solidFill>
+                      <a:srgbClr val="FFFFFF"/>
+                    </a:solidFill>
+                  </a:tcPr>
+                </a:tc>
+              </a:tr>
+            </a:tbl>
+          </a:graphicData>
+        </a:graphic>
+      </p:graphicFrame>
     </p:spTree>
   </p:cSld>
   <p:clrMapOvr>
@@ -8397,7 +16024,7 @@
       </p:grpSpPr>
       <p:pic>
         <p:nvPicPr>
-          <p:cNvPr id="2" name="Image 0" descr="C:\Users\jungm\AppData\Local\Temp\claude\c--Users-jungm-Desktop-projects-simple-solar-dashboard\d489bc63-0117-4773-8ee7-099d2a95864b\scratchpad\docbuild\assets\first-logo.png">    </p:cNvPr>
+          <p:cNvPr id="2" name="Image 0" descr="C:\Users\jungm\Desktop\projects\simple\solar-dashboard\docs\reports\_source\first-logo.png">    </p:cNvPr>
           <p:cNvPicPr>
             <a:picLocks noChangeAspect="1"/>
           </p:cNvPicPr>
@@ -8777,7 +16404,7 @@
                 <a:ea typeface="Pretendard" pitchFamily="34" charset="-122"/>
                 <a:cs typeface="Pretendard" pitchFamily="34" charset="-120"/>
               </a:rPr>
-              <a:t>연계형 수소발전을 시작하지만 실제 원시데이터와 수소 설비 사양이 아직 없어, 공개 자료로 먼저 만든 예상안입니다</a:t>
+              <a:t>연계형 수소발전을 시작하며 공개 자료로 먼저 만든 예상안입니다. 2026년 7월 진행 예정 사업의 실제 P&amp;ID를 받아 적용 결과를 더했습니다</a:t>
             </a:r>
             <a:endParaRPr lang="ko-KR" sz="2200" dirty="0"/>
           </a:p>
@@ -9023,9 +16650,751 @@
                 <a:ea typeface="Pretendard" pitchFamily="34" charset="-122"/>
                 <a:cs typeface="Pretendard" pitchFamily="34" charset="-120"/>
               </a:rPr>
-              <a:t>제조사 데이터는 계약에 적어야 확보되므로, 계약 전 수집 목록과 리포트 설계의 출발점으로 씁니다</a:t>
+              <a:t>제조사 데이터는 계약에 적어야 확보됩니다. 계약 전 수집 목록과 리포트 설계의 출발점이자, 도면이 오면 바로 쓰는 절차서로 씁니다</a:t>
             </a:r>
             <a:endParaRPr lang="ko-KR" sz="2200" dirty="0"/>
+          </a:p>
+        </p:txBody>
+      </p:sp>
+    </p:spTree>
+  </p:cSld>
+  <p:clrMapOvr>
+    <a:masterClrMapping/>
+  </p:clrMapOvr>
+</p:sld>
+</file>
+
+<file path=ppt/slides/slide20.xml><?xml version="1.0" encoding="utf-8"?>
+<p:sld xmlns:a="http://schemas.openxmlformats.org/drawingml/2006/main" xmlns:r="http://schemas.openxmlformats.org/officeDocument/2006/relationships" xmlns:p="http://schemas.openxmlformats.org/presentationml/2006/main">
+  <p:cSld name="Slide 20">
+    <p:bg>
+      <p:bgPr>
+        <a:solidFill>
+          <a:srgbClr val="FAFAFA"/>
+        </a:solidFill>
+      </p:bgPr>
+    </p:bg>
+    <p:spTree>
+      <p:nvGrpSpPr>
+        <p:cNvPr id="1" name=""/>
+        <p:cNvGrpSpPr/>
+        <p:nvPr/>
+      </p:nvGrpSpPr>
+      <p:grpSpPr>
+        <a:xfrm>
+          <a:off x="0" y="0"/>
+          <a:ext cx="0" cy="0"/>
+          <a:chOff x="0" y="0"/>
+          <a:chExt cx="0" cy="0"/>
+        </a:xfrm>
+      </p:grpSpPr>
+      <p:pic>
+        <p:nvPicPr>
+          <p:cNvPr id="2" name="Image 0" descr="C:\Users\jungm\Desktop\projects\simple\solar-dashboard\docs\reports\_source\first-logo.png">    </p:cNvPr>
+          <p:cNvPicPr>
+            <a:picLocks noChangeAspect="1"/>
+          </p:cNvPicPr>
+          <p:nvPr/>
+        </p:nvPicPr>
+        <p:blipFill>
+          <a:blip r:embed="rId1"/>
+          <a:stretch>
+            <a:fillRect/>
+          </a:stretch>
+        </p:blipFill>
+        <p:spPr>
+          <a:xfrm>
+            <a:off x="14950440" y="502920"/>
+            <a:ext cx="2468880" cy="384048"/>
+          </a:xfrm>
+          <a:prstGeom prst="rect">
+            <a:avLst/>
+          </a:prstGeom>
+        </p:spPr>
+      </p:pic>
+      <p:sp>
+        <p:nvSpPr>
+          <p:cNvPr id="3" name="Text 0"/>
+          <p:cNvSpPr/>
+          <p:nvPr/>
+        </p:nvSpPr>
+        <p:spPr>
+          <a:xfrm>
+            <a:off x="914400" y="566928"/>
+            <a:ext cx="4572000" cy="1051560"/>
+          </a:xfrm>
+          <a:prstGeom prst="rect">
+            <a:avLst/>
+          </a:prstGeom>
+          <a:noFill/>
+          <a:ln/>
+        </p:spPr>
+        <p:txBody>
+          <a:bodyPr wrap="square" lIns="0" tIns="0" rIns="0" bIns="0" rtlCol="0" anchor="b"/>
+          <a:lstStyle/>
+          <a:p>
+            <a:pPr indent="0" marL="0">
+              <a:buNone/>
+            </a:pPr>
+            <a:r>
+              <a:rPr lang="ko-KR" altLang="en-US" sz="6600" b="1" dirty="0">
+                <a:solidFill>
+                  <a:srgbClr val="4081ED"/>
+                </a:solidFill>
+                <a:latin typeface="Pretendard" pitchFamily="34" charset="0"/>
+                <a:ea typeface="Pretendard" pitchFamily="34" charset="-122"/>
+                <a:cs typeface="Pretendard" pitchFamily="34" charset="-120"/>
+              </a:rPr>
+              <a:t>19</a:t>
+            </a:r>
+            <a:endParaRPr lang="ko-KR" sz="6600" dirty="0"/>
+          </a:p>
+        </p:txBody>
+      </p:sp>
+      <p:sp>
+        <p:nvSpPr>
+          <p:cNvPr id="4" name="Text 1"/>
+          <p:cNvSpPr/>
+          <p:nvPr/>
+        </p:nvSpPr>
+        <p:spPr>
+          <a:xfrm>
+            <a:off x="914400" y="1600200"/>
+            <a:ext cx="16002000" cy="1234440"/>
+          </a:xfrm>
+          <a:prstGeom prst="rect">
+            <a:avLst/>
+          </a:prstGeom>
+          <a:noFill/>
+          <a:ln/>
+        </p:spPr>
+        <p:txBody>
+          <a:bodyPr wrap="square" lIns="0" tIns="0" rIns="0" bIns="0" rtlCol="0" anchor="ctr"/>
+          <a:lstStyle/>
+          <a:p>
+            <a:pPr indent="0" marL="0">
+              <a:buNone/>
+            </a:pPr>
+            <a:r>
+              <a:rPr lang="ko-KR" altLang="en-US" sz="4400" b="1" dirty="0">
+                <a:solidFill>
+                  <a:srgbClr val="222222"/>
+                </a:solidFill>
+                <a:latin typeface="Pretendard" pitchFamily="34" charset="0"/>
+                <a:ea typeface="Pretendard" pitchFamily="34" charset="-122"/>
+                <a:cs typeface="Pretendard" pitchFamily="34" charset="-120"/>
+              </a:rPr>
+              <a:t>한계 · 결론과 다음 단계</a:t>
+            </a:r>
+            <a:endParaRPr lang="ko-KR" sz="4400" dirty="0"/>
+          </a:p>
+        </p:txBody>
+      </p:sp>
+      <p:sp>
+        <p:nvSpPr>
+          <p:cNvPr id="5" name="Shape 2"/>
+          <p:cNvSpPr/>
+          <p:nvPr/>
+        </p:nvSpPr>
+        <p:spPr>
+          <a:xfrm>
+            <a:off x="914400" y="2852928"/>
+            <a:ext cx="16459200" cy="18288"/>
+          </a:xfrm>
+          <a:prstGeom prst="rect">
+            <a:avLst/>
+          </a:prstGeom>
+          <a:solidFill>
+            <a:srgbClr val="D9DEE6"/>
+          </a:solidFill>
+          <a:ln/>
+        </p:spPr>
+      </p:sp>
+      <p:sp>
+        <p:nvSpPr>
+          <p:cNvPr id="6" name="Shape 3"/>
+          <p:cNvSpPr/>
+          <p:nvPr/>
+        </p:nvSpPr>
+        <p:spPr>
+          <a:xfrm>
+            <a:off x="914400" y="2825496"/>
+            <a:ext cx="2834640" cy="64008"/>
+          </a:xfrm>
+          <a:prstGeom prst="rect">
+            <a:avLst/>
+          </a:prstGeom>
+          <a:solidFill>
+            <a:srgbClr val="3E7EE7"/>
+          </a:solidFill>
+          <a:ln/>
+        </p:spPr>
+      </p:sp>
+      <p:sp>
+        <p:nvSpPr>
+          <p:cNvPr id="7" name="Text 4"/>
+          <p:cNvSpPr/>
+          <p:nvPr/>
+        </p:nvSpPr>
+        <p:spPr>
+          <a:xfrm>
+            <a:off x="914400" y="9555480"/>
+            <a:ext cx="16459200" cy="365760"/>
+          </a:xfrm>
+          <a:prstGeom prst="rect">
+            <a:avLst/>
+          </a:prstGeom>
+          <a:noFill/>
+          <a:ln/>
+        </p:spPr>
+        <p:txBody>
+          <a:bodyPr wrap="square" lIns="0" tIns="0" rIns="0" bIns="0" rtlCol="0" anchor="ctr"/>
+          <a:lstStyle/>
+          <a:p>
+            <a:pPr indent="0" marL="0">
+              <a:buNone/>
+            </a:pPr>
+            <a:r>
+              <a:rPr lang="ko-KR" altLang="en-US" sz="1600" dirty="0">
+                <a:solidFill>
+                  <a:srgbClr val="5F6368"/>
+                </a:solidFill>
+                <a:latin typeface="Pretendard" pitchFamily="34" charset="0"/>
+                <a:ea typeface="Pretendard" pitchFamily="34" charset="-122"/>
+                <a:cs typeface="Pretendard" pitchFamily="34" charset="-120"/>
+              </a:rPr>
+              <a:t>※ 계기 신설은 설계 단계에서만 쌉니다. 시공 후에는 배관 개조가 따라와 몇 배가 듭니다</a:t>
+            </a:r>
+            <a:endParaRPr lang="ko-KR" sz="1600" dirty="0"/>
+          </a:p>
+        </p:txBody>
+      </p:sp>
+      <p:sp>
+        <p:nvSpPr>
+          <p:cNvPr id="8" name="Shape 5"/>
+          <p:cNvSpPr/>
+          <p:nvPr/>
+        </p:nvSpPr>
+        <p:spPr>
+          <a:xfrm>
+            <a:off x="914400" y="3246120"/>
+            <a:ext cx="16459200" cy="1591056"/>
+          </a:xfrm>
+          <a:prstGeom prst="rect">
+            <a:avLst/>
+          </a:prstGeom>
+          <a:solidFill>
+            <a:srgbClr val="EEF3FC"/>
+          </a:solidFill>
+          <a:ln/>
+        </p:spPr>
+      </p:sp>
+      <p:sp>
+        <p:nvSpPr>
+          <p:cNvPr id="9" name="Text 6"/>
+          <p:cNvSpPr/>
+          <p:nvPr/>
+        </p:nvSpPr>
+        <p:spPr>
+          <a:xfrm>
+            <a:off x="1234440" y="3355848"/>
+            <a:ext cx="15819120" cy="1371600"/>
+          </a:xfrm>
+          <a:prstGeom prst="rect">
+            <a:avLst/>
+          </a:prstGeom>
+          <a:noFill/>
+          <a:ln/>
+        </p:spPr>
+        <p:txBody>
+          <a:bodyPr wrap="square" lIns="0" tIns="0" rIns="0" bIns="0" rtlCol="0" anchor="ctr"/>
+          <a:lstStyle/>
+          <a:p>
+            <a:pPr indent="0" marL="0">
+              <a:spcAft>
+                <a:spcPts val="400"/>
+              </a:spcAft>
+              <a:buNone/>
+            </a:pPr>
+            <a:r>
+              <a:rPr lang="ko-KR" altLang="en-US" sz="2200" b="1" dirty="0">
+                <a:solidFill>
+                  <a:srgbClr val="4081ED"/>
+                </a:solidFill>
+                <a:latin typeface="Pretendard" pitchFamily="34" charset="0"/>
+                <a:ea typeface="Pretendard" pitchFamily="34" charset="-122"/>
+                <a:cs typeface="Pretendard" pitchFamily="34" charset="-120"/>
+              </a:rPr>
+              <a:t>결론</a:t>
+            </a:r>
+            <a:endParaRPr lang="ko-KR" sz="2200" dirty="0"/>
+          </a:p>
+          <a:p>
+            <a:pPr indent="0" marL="0">
+              <a:buNone/>
+            </a:pPr>
+            <a:r>
+              <a:rPr lang="ko-KR" altLang="en-US" sz="2000" dirty="0">
+                <a:solidFill>
+                  <a:srgbClr val="222222"/>
+                </a:solidFill>
+                <a:latin typeface="Pretendard" pitchFamily="34" charset="0"/>
+                <a:ea typeface="Pretendard" pitchFamily="34" charset="-122"/>
+                <a:cs typeface="Pretendard" pitchFamily="34" charset="-120"/>
+              </a:rPr>
+              <a:t>보통 받는 데이터 189개를 같은 조건으로 쌓고 주기별 판정 수준을 나누면 노후와 개선 여지를 근거와 함께 설명할 수 있고, 실제 도면 한 장만 있어도 그 준비의 절반은 데이터가 오기 전에 끝낼 수 있습니다.</a:t>
+            </a:r>
+            <a:endParaRPr lang="ko-KR" sz="2200" dirty="0"/>
+          </a:p>
+        </p:txBody>
+      </p:sp>
+      <p:sp>
+        <p:nvSpPr>
+          <p:cNvPr id="10" name="Shape 7"/>
+          <p:cNvSpPr/>
+          <p:nvPr/>
+        </p:nvSpPr>
+        <p:spPr>
+          <a:xfrm>
+            <a:off x="914400" y="5111496"/>
+            <a:ext cx="5303520" cy="3657600"/>
+          </a:xfrm>
+          <a:prstGeom prst="rect">
+            <a:avLst/>
+          </a:prstGeom>
+          <a:solidFill>
+            <a:srgbClr val="FFFFFF"/>
+          </a:solidFill>
+          <a:ln w="12700">
+            <a:solidFill>
+              <a:srgbClr val="D9DEE6"/>
+            </a:solidFill>
+            <a:prstDash val="solid"/>
+          </a:ln>
+        </p:spPr>
+      </p:sp>
+      <p:sp>
+        <p:nvSpPr>
+          <p:cNvPr id="11" name="Shape 8"/>
+          <p:cNvSpPr/>
+          <p:nvPr/>
+        </p:nvSpPr>
+        <p:spPr>
+          <a:xfrm>
+            <a:off x="914400" y="5111496"/>
+            <a:ext cx="5303520" cy="64008"/>
+          </a:xfrm>
+          <a:prstGeom prst="rect">
+            <a:avLst/>
+          </a:prstGeom>
+          <a:solidFill>
+            <a:srgbClr val="3E7EE7"/>
+          </a:solidFill>
+          <a:ln/>
+        </p:spPr>
+      </p:sp>
+      <p:sp>
+        <p:nvSpPr>
+          <p:cNvPr id="12" name="Text 9"/>
+          <p:cNvSpPr/>
+          <p:nvPr/>
+        </p:nvSpPr>
+        <p:spPr>
+          <a:xfrm>
+            <a:off x="1234440" y="5431536"/>
+            <a:ext cx="4663440" cy="3108960"/>
+          </a:xfrm>
+          <a:prstGeom prst="rect">
+            <a:avLst/>
+          </a:prstGeom>
+          <a:noFill/>
+          <a:ln/>
+        </p:spPr>
+        <p:txBody>
+          <a:bodyPr wrap="square" lIns="0" tIns="0" rIns="0" bIns="0" rtlCol="0" anchor="t"/>
+          <a:lstStyle/>
+          <a:p>
+            <a:pPr indent="0" marL="0">
+              <a:spcAft>
+                <a:spcPts val="1000"/>
+              </a:spcAft>
+              <a:buNone/>
+            </a:pPr>
+            <a:r>
+              <a:rPr lang="ko-KR" altLang="en-US" sz="2300" b="1" dirty="0">
+                <a:solidFill>
+                  <a:srgbClr val="4081ED"/>
+                </a:solidFill>
+                <a:latin typeface="Pretendard" pitchFamily="34" charset="0"/>
+                <a:ea typeface="Pretendard" pitchFamily="34" charset="-122"/>
+                <a:cs typeface="Pretendard" pitchFamily="34" charset="-120"/>
+              </a:rPr>
+              <a:t>한계</a:t>
+            </a:r>
+            <a:endParaRPr lang="ko-KR" sz="2300" dirty="0"/>
+          </a:p>
+          <a:p>
+            <a:pPr marL="279400" indent="-279400">
+              <a:spcAft>
+                <a:spcPts val="1400"/>
+              </a:spcAft>
+              <a:buSzPct val="100000"/>
+              <a:buChar char="•"/>
+            </a:pPr>
+            <a:r>
+              <a:rPr lang="ko-KR" altLang="en-US" sz="1700" dirty="0">
+                <a:solidFill>
+                  <a:srgbClr val="222222"/>
+                </a:solidFill>
+                <a:latin typeface="Pretendard" pitchFamily="34" charset="0"/>
+                <a:ea typeface="Pretendard" pitchFamily="34" charset="-122"/>
+                <a:cs typeface="Pretendard" pitchFamily="34" charset="-120"/>
+              </a:rPr>
+              <a:t>운전 데이터는 아직 없다 — 도면 검토는 역산값이다</a:t>
+            </a:r>
+            <a:endParaRPr lang="ko-KR" sz="2300" dirty="0"/>
+          </a:p>
+          <a:p>
+            <a:pPr marL="279400" indent="-279400">
+              <a:spcAft>
+                <a:spcPts val="1400"/>
+              </a:spcAft>
+              <a:buSzPct val="100000"/>
+              <a:buChar char="•"/>
+            </a:pPr>
+            <a:r>
+              <a:rPr lang="ko-KR" altLang="en-US" sz="1700" dirty="0">
+                <a:solidFill>
+                  <a:srgbClr val="222222"/>
+                </a:solidFill>
+                <a:latin typeface="Pretendard" pitchFamily="34" charset="0"/>
+                <a:ea typeface="Pretendard" pitchFamily="34" charset="-122"/>
+                <a:cs typeface="Pretendard" pitchFamily="34" charset="-120"/>
+              </a:rPr>
+              <a:t>압력 기준·Nm³ 기준조건 미확정(환산 3%·7% 불확실)</a:t>
+            </a:r>
+            <a:endParaRPr lang="ko-KR" sz="2300" dirty="0"/>
+          </a:p>
+          <a:p>
+            <a:pPr marL="279400" indent="-279400">
+              <a:spcAft>
+                <a:spcPts val="1400"/>
+              </a:spcAft>
+              <a:buSzPct val="100000"/>
+              <a:buChar char="•"/>
+            </a:pPr>
+            <a:r>
+              <a:rPr lang="ko-KR" altLang="en-US" sz="1700" dirty="0">
+                <a:solidFill>
+                  <a:srgbClr val="222222"/>
+                </a:solidFill>
+                <a:latin typeface="Pretendard" pitchFamily="34" charset="0"/>
+                <a:ea typeface="Pretendard" pitchFamily="34" charset="-122"/>
+                <a:cs typeface="Pretendard" pitchFamily="34" charset="-120"/>
+              </a:rPr>
+              <a:t>벤더 데이터 접근권이 없으면 셀·스택 판정 불가</a:t>
+            </a:r>
+            <a:endParaRPr lang="ko-KR" sz="2300" dirty="0"/>
+          </a:p>
+        </p:txBody>
+      </p:sp>
+      <p:sp>
+        <p:nvSpPr>
+          <p:cNvPr id="13" name="Shape 10"/>
+          <p:cNvSpPr/>
+          <p:nvPr/>
+        </p:nvSpPr>
+        <p:spPr>
+          <a:xfrm>
+            <a:off x="6492240" y="5111496"/>
+            <a:ext cx="5303520" cy="3657600"/>
+          </a:xfrm>
+          <a:prstGeom prst="rect">
+            <a:avLst/>
+          </a:prstGeom>
+          <a:solidFill>
+            <a:srgbClr val="FFFFFF"/>
+          </a:solidFill>
+          <a:ln w="12700">
+            <a:solidFill>
+              <a:srgbClr val="D9DEE6"/>
+            </a:solidFill>
+            <a:prstDash val="solid"/>
+          </a:ln>
+        </p:spPr>
+      </p:sp>
+      <p:sp>
+        <p:nvSpPr>
+          <p:cNvPr id="14" name="Shape 11"/>
+          <p:cNvSpPr/>
+          <p:nvPr/>
+        </p:nvSpPr>
+        <p:spPr>
+          <a:xfrm>
+            <a:off x="6492240" y="5111496"/>
+            <a:ext cx="5303520" cy="64008"/>
+          </a:xfrm>
+          <a:prstGeom prst="rect">
+            <a:avLst/>
+          </a:prstGeom>
+          <a:solidFill>
+            <a:srgbClr val="3E7EE7"/>
+          </a:solidFill>
+          <a:ln/>
+        </p:spPr>
+      </p:sp>
+      <p:sp>
+        <p:nvSpPr>
+          <p:cNvPr id="15" name="Text 12"/>
+          <p:cNvSpPr/>
+          <p:nvPr/>
+        </p:nvSpPr>
+        <p:spPr>
+          <a:xfrm>
+            <a:off x="6812280" y="5431536"/>
+            <a:ext cx="4663440" cy="3108960"/>
+          </a:xfrm>
+          <a:prstGeom prst="rect">
+            <a:avLst/>
+          </a:prstGeom>
+          <a:noFill/>
+          <a:ln/>
+        </p:spPr>
+        <p:txBody>
+          <a:bodyPr wrap="square" lIns="0" tIns="0" rIns="0" bIns="0" rtlCol="0" anchor="t"/>
+          <a:lstStyle/>
+          <a:p>
+            <a:pPr indent="0" marL="0">
+              <a:spcAft>
+                <a:spcPts val="1000"/>
+              </a:spcAft>
+              <a:buNone/>
+            </a:pPr>
+            <a:r>
+              <a:rPr lang="ko-KR" altLang="en-US" sz="2300" b="1" dirty="0">
+                <a:solidFill>
+                  <a:srgbClr val="4081ED"/>
+                </a:solidFill>
+                <a:latin typeface="Pretendard" pitchFamily="34" charset="0"/>
+                <a:ea typeface="Pretendard" pitchFamily="34" charset="-122"/>
+                <a:cs typeface="Pretendard" pitchFamily="34" charset="-120"/>
+              </a:rPr>
+              <a:t>다음 단계</a:t>
+            </a:r>
+            <a:endParaRPr lang="ko-KR" sz="2300" dirty="0"/>
+          </a:p>
+          <a:p>
+            <a:pPr marL="279400" indent="-279400">
+              <a:spcAft>
+                <a:spcPts val="1400"/>
+              </a:spcAft>
+              <a:buSzPct val="100000"/>
+              <a:buChar char="•"/>
+            </a:pPr>
+            <a:r>
+              <a:rPr lang="ko-KR" altLang="en-US" sz="1700" dirty="0">
+                <a:solidFill>
+                  <a:srgbClr val="222222"/>
+                </a:solidFill>
+                <a:latin typeface="Pretendard" pitchFamily="34" charset="0"/>
+                <a:ea typeface="Pretendard" pitchFamily="34" charset="-122"/>
+                <a:cs typeface="Pretendard" pitchFamily="34" charset="-120"/>
+              </a:rPr>
+              <a:t>압력 기준·Nm³ 기준조건부터 회신 확보</a:t>
+            </a:r>
+            <a:endParaRPr lang="ko-KR" sz="2300" dirty="0"/>
+          </a:p>
+          <a:p>
+            <a:pPr marL="279400" indent="-279400">
+              <a:spcAft>
+                <a:spcPts val="1400"/>
+              </a:spcAft>
+              <a:buSzPct val="100000"/>
+              <a:buChar char="•"/>
+            </a:pPr>
+            <a:r>
+              <a:rPr lang="ko-KR" altLang="en-US" sz="1700" dirty="0">
+                <a:solidFill>
+                  <a:srgbClr val="222222"/>
+                </a:solidFill>
+                <a:latin typeface="Pretendard" pitchFamily="34" charset="0"/>
+                <a:ea typeface="Pretendard" pitchFamily="34" charset="-122"/>
+                <a:cs typeface="Pretendard" pitchFamily="34" charset="-120"/>
+              </a:rPr>
+              <a:t>필수 115개 + 가평 신설 52행을 REV.3 전에 송부</a:t>
+            </a:r>
+            <a:endParaRPr lang="ko-KR" sz="2300" dirty="0"/>
+          </a:p>
+          <a:p>
+            <a:pPr marL="279400" indent="-279400">
+              <a:spcAft>
+                <a:spcPts val="1400"/>
+              </a:spcAft>
+              <a:buSzPct val="100000"/>
+              <a:buChar char="•"/>
+            </a:pPr>
+            <a:r>
+              <a:rPr lang="ko-KR" altLang="en-US" sz="1700" dirty="0">
+                <a:solidFill>
+                  <a:srgbClr val="222222"/>
+                </a:solidFill>
+                <a:latin typeface="Pretendard" pitchFamily="34" charset="0"/>
+                <a:ea typeface="Pretendard" pitchFamily="34" charset="-122"/>
+                <a:cs typeface="Pretendard" pitchFamily="34" charset="-120"/>
+              </a:rPr>
+              <a:t>파일럿 3개월 기준값 → 월간 리포트 시범 발행</a:t>
+            </a:r>
+            <a:endParaRPr lang="ko-KR" sz="2300" dirty="0"/>
+          </a:p>
+        </p:txBody>
+      </p:sp>
+      <p:sp>
+        <p:nvSpPr>
+          <p:cNvPr id="16" name="Shape 13"/>
+          <p:cNvSpPr/>
+          <p:nvPr/>
+        </p:nvSpPr>
+        <p:spPr>
+          <a:xfrm>
+            <a:off x="12070080" y="5111496"/>
+            <a:ext cx="5303520" cy="3657600"/>
+          </a:xfrm>
+          <a:prstGeom prst="rect">
+            <a:avLst/>
+          </a:prstGeom>
+          <a:solidFill>
+            <a:srgbClr val="FFFFFF"/>
+          </a:solidFill>
+          <a:ln w="12700">
+            <a:solidFill>
+              <a:srgbClr val="D9DEE6"/>
+            </a:solidFill>
+            <a:prstDash val="solid"/>
+          </a:ln>
+        </p:spPr>
+      </p:sp>
+      <p:sp>
+        <p:nvSpPr>
+          <p:cNvPr id="17" name="Shape 14"/>
+          <p:cNvSpPr/>
+          <p:nvPr/>
+        </p:nvSpPr>
+        <p:spPr>
+          <a:xfrm>
+            <a:off x="12070080" y="5111496"/>
+            <a:ext cx="5303520" cy="64008"/>
+          </a:xfrm>
+          <a:prstGeom prst="rect">
+            <a:avLst/>
+          </a:prstGeom>
+          <a:solidFill>
+            <a:srgbClr val="3E7EE7"/>
+          </a:solidFill>
+          <a:ln/>
+        </p:spPr>
+      </p:sp>
+      <p:sp>
+        <p:nvSpPr>
+          <p:cNvPr id="18" name="Text 15"/>
+          <p:cNvSpPr/>
+          <p:nvPr/>
+        </p:nvSpPr>
+        <p:spPr>
+          <a:xfrm>
+            <a:off x="12390120" y="5431536"/>
+            <a:ext cx="4663440" cy="3108960"/>
+          </a:xfrm>
+          <a:prstGeom prst="rect">
+            <a:avLst/>
+          </a:prstGeom>
+          <a:noFill/>
+          <a:ln/>
+        </p:spPr>
+        <p:txBody>
+          <a:bodyPr wrap="square" lIns="0" tIns="0" rIns="0" bIns="0" rtlCol="0" anchor="t"/>
+          <a:lstStyle/>
+          <a:p>
+            <a:pPr indent="0" marL="0">
+              <a:spcAft>
+                <a:spcPts val="1000"/>
+              </a:spcAft>
+              <a:buNone/>
+            </a:pPr>
+            <a:r>
+              <a:rPr lang="ko-KR" altLang="en-US" sz="2300" b="1" dirty="0">
+                <a:solidFill>
+                  <a:srgbClr val="4081ED"/>
+                </a:solidFill>
+                <a:latin typeface="Pretendard" pitchFamily="34" charset="0"/>
+                <a:ea typeface="Pretendard" pitchFamily="34" charset="-122"/>
+                <a:cs typeface="Pretendard" pitchFamily="34" charset="-120"/>
+              </a:rPr>
+              <a:t>기대 효과</a:t>
+            </a:r>
+            <a:endParaRPr lang="ko-KR" sz="2300" dirty="0"/>
+          </a:p>
+          <a:p>
+            <a:pPr marL="279400" indent="-279400">
+              <a:spcAft>
+                <a:spcPts val="1400"/>
+              </a:spcAft>
+              <a:buSzPct val="100000"/>
+              <a:buChar char="•"/>
+            </a:pPr>
+            <a:r>
+              <a:rPr lang="ko-KR" altLang="en-US" sz="1700" dirty="0">
+                <a:solidFill>
+                  <a:srgbClr val="222222"/>
+                </a:solidFill>
+                <a:latin typeface="Pretendard" pitchFamily="34" charset="0"/>
+                <a:ea typeface="Pretendard" pitchFamily="34" charset="-122"/>
+                <a:cs typeface="Pretendard" pitchFamily="34" charset="-120"/>
+              </a:rPr>
+              <a:t>도면만으로 설계 검토 3건을 계산 근거와 함께 제시</a:t>
+            </a:r>
+            <a:endParaRPr lang="ko-KR" sz="2300" dirty="0"/>
+          </a:p>
+          <a:p>
+            <a:pPr marL="279400" indent="-279400">
+              <a:spcAft>
+                <a:spcPts val="1400"/>
+              </a:spcAft>
+              <a:buSzPct val="100000"/>
+              <a:buChar char="•"/>
+            </a:pPr>
+            <a:r>
+              <a:rPr lang="ko-KR" altLang="en-US" sz="1700" dirty="0">
+                <a:solidFill>
+                  <a:srgbClr val="222222"/>
+                </a:solidFill>
+                <a:latin typeface="Pretendard" pitchFamily="34" charset="0"/>
+                <a:ea typeface="Pretendard" pitchFamily="34" charset="-122"/>
+                <a:cs typeface="Pretendard" pitchFamily="34" charset="-120"/>
+              </a:rPr>
+              <a:t>월간: 손실·트립·오염을 원인별로 나눠 조치</a:t>
+            </a:r>
+            <a:endParaRPr lang="ko-KR" sz="2300" dirty="0"/>
+          </a:p>
+          <a:p>
+            <a:pPr marL="279400" indent="-279400">
+              <a:spcAft>
+                <a:spcPts val="1400"/>
+              </a:spcAft>
+              <a:buSzPct val="100000"/>
+              <a:buChar char="•"/>
+            </a:pPr>
+            <a:r>
+              <a:rPr lang="ko-KR" altLang="en-US" sz="1700" dirty="0">
+                <a:solidFill>
+                  <a:srgbClr val="222222"/>
+                </a:solidFill>
+                <a:latin typeface="Pretendard" pitchFamily="34" charset="0"/>
+                <a:ea typeface="Pretendard" pitchFamily="34" charset="-122"/>
+                <a:cs typeface="Pretendard" pitchFamily="34" charset="-120"/>
+              </a:rPr>
+              <a:t>분기·연간: 용량·스택 추세로 교체·보강 시점 판단</a:t>
+            </a:r>
+            <a:endParaRPr lang="ko-KR" sz="2300" dirty="0"/>
           </a:p>
         </p:txBody>
       </p:sp>
@@ -9063,7 +17432,7 @@
       </p:grpSpPr>
       <p:pic>
         <p:nvPicPr>
-          <p:cNvPr id="2" name="Image 0" descr="C:\Users\jungm\AppData\Local\Temp\claude\c--Users-jungm-Desktop-projects-simple-solar-dashboard\d489bc63-0117-4773-8ee7-099d2a95864b\scratchpad\docbuild\assets\first-logo.png">    </p:cNvPr>
+          <p:cNvPr id="2" name="Image 0" descr="C:\Users\jungm\Desktop\projects\simple\solar-dashboard\docs\reports\_source\first-logo.png">    </p:cNvPr>
           <p:cNvPicPr>
             <a:picLocks noChangeAspect="1"/>
           </p:cNvPicPr>
@@ -9539,7 +17908,7 @@
                 <a:ea typeface="Pretendard" pitchFamily="34" charset="-122"/>
                 <a:cs typeface="Pretendard" pitchFamily="34" charset="-120"/>
               </a:rPr>
-              <a:t>핵심 주장 315건 대조 결과(출처 485행)</a:t>
+              <a:t>핵심 주장 315건 대조 결과(출처 604행 = 초판 485 + 도면 조사 119)</a:t>
             </a:r>
             <a:endParaRPr lang="ko-KR" sz="2400" dirty="0"/>
           </a:p>
@@ -10407,8 +18776,8 @@
         </p:nvSpPr>
         <p:spPr>
           <a:xfrm>
-            <a:off x="914400" y="8293608"/>
-            <a:ext cx="16459200" cy="1261872"/>
+            <a:off x="914400" y="7964424"/>
+            <a:ext cx="16459200" cy="1591056"/>
           </a:xfrm>
           <a:prstGeom prst="rect">
             <a:avLst/>
@@ -10427,8 +18796,8 @@
         </p:nvSpPr>
         <p:spPr>
           <a:xfrm>
-            <a:off x="1234440" y="8403336"/>
-            <a:ext cx="15819120" cy="1042416"/>
+            <a:off x="1234440" y="8074152"/>
+            <a:ext cx="15819120" cy="1371600"/>
           </a:xfrm>
           <a:prstGeom prst="rect">
             <a:avLst/>
@@ -10455,7 +18824,7 @@
                 <a:ea typeface="Pretendard" pitchFamily="34" charset="-122"/>
                 <a:cs typeface="Pretendard" pitchFamily="34" charset="-120"/>
               </a:rPr>
-              <a:t>예상안 성격</a:t>
+              <a:t>문서의 성격</a:t>
             </a:r>
             <a:endParaRPr lang="ko-KR" sz="2200" dirty="0"/>
           </a:p>
@@ -10472,7 +18841,7 @@
                 <a:ea typeface="Pretendard" pitchFamily="34" charset="-122"/>
                 <a:cs typeface="Pretendard" pitchFamily="34" charset="-120"/>
               </a:rPr>
-              <a:t>실측이 아닌 공개 자료 기반 예상안이며, 리포트 예시의 발전소와 수치는 가상입니다.</a:t>
+              <a:t>1~13장표는 공개 자료 기반 예상안이고 리포트 예시 수치는 가상입니다. 14~16장표는 실제 도면 검토 결과, 17~18장표는 구현 완료 기능입니다.</a:t>
             </a:r>
             <a:endParaRPr lang="ko-KR" sz="2200" dirty="0"/>
           </a:p>
@@ -10512,7 +18881,7 @@
       </p:grpSpPr>
       <p:pic>
         <p:nvPicPr>
-          <p:cNvPr id="2" name="Image 0" descr="C:\Users\jungm\AppData\Local\Temp\claude\c--Users-jungm-Desktop-projects-simple-solar-dashboard\d489bc63-0117-4773-8ee7-099d2a95864b\scratchpad\docbuild\assets\first-logo.png">    </p:cNvPr>
+          <p:cNvPr id="2" name="Image 0" descr="C:\Users\jungm\Desktop\projects\simple\solar-dashboard\docs\reports\_source\first-logo.png">    </p:cNvPr>
           <p:cNvPicPr>
             <a:picLocks noChangeAspect="1"/>
           </p:cNvPicPr>
@@ -11785,7 +20154,7 @@
       </p:grpSpPr>
       <p:pic>
         <p:nvPicPr>
-          <p:cNvPr id="2" name="Image 0" descr="C:\Users\jungm\AppData\Local\Temp\claude\c--Users-jungm-Desktop-projects-simple-solar-dashboard\d489bc63-0117-4773-8ee7-099d2a95864b\scratchpad\docbuild\assets\first-logo.png">    </p:cNvPr>
+          <p:cNvPr id="2" name="Image 0" descr="C:\Users\jungm\Desktop\projects\simple\solar-dashboard\docs\reports\_source\first-logo.png">    </p:cNvPr>
           <p:cNvPicPr>
             <a:picLocks noChangeAspect="1"/>
           </p:cNvPicPr>
@@ -13988,7 +22357,7 @@
       </p:grpSpPr>
       <p:pic>
         <p:nvPicPr>
-          <p:cNvPr id="2" name="Image 0" descr="C:\Users\jungm\AppData\Local\Temp\claude\c--Users-jungm-Desktop-projects-simple-solar-dashboard\d489bc63-0117-4773-8ee7-099d2a95864b\scratchpad\docbuild\assets\first-logo.png">    </p:cNvPr>
+          <p:cNvPr id="2" name="Image 0" descr="C:\Users\jungm\Desktop\projects\simple\solar-dashboard\docs\reports\_source\first-logo.png">    </p:cNvPr>
           <p:cNvPicPr>
             <a:picLocks noChangeAspect="1"/>
           </p:cNvPicPr>
@@ -16191,7 +24560,7 @@
       </p:grpSpPr>
       <p:pic>
         <p:nvPicPr>
-          <p:cNvPr id="2" name="Image 0" descr="C:\Users\jungm\AppData\Local\Temp\claude\c--Users-jungm-Desktop-projects-simple-solar-dashboard\d489bc63-0117-4773-8ee7-099d2a95864b\scratchpad\docbuild\assets\first-logo.png">    </p:cNvPr>
+          <p:cNvPr id="2" name="Image 0" descr="C:\Users\jungm\Desktop\projects\simple\solar-dashboard\docs\reports\_source\first-logo.png">    </p:cNvPr>
           <p:cNvPicPr>
             <a:picLocks noChangeAspect="1"/>
           </p:cNvPicPr>
@@ -17163,7 +25532,7 @@
       </p:grpSpPr>
       <p:pic>
         <p:nvPicPr>
-          <p:cNvPr id="2" name="Image 0" descr="C:\Users\jungm\AppData\Local\Temp\claude\c--Users-jungm-Desktop-projects-simple-solar-dashboard\d489bc63-0117-4773-8ee7-099d2a95864b\scratchpad\docbuild\assets\first-logo.png">    </p:cNvPr>
+          <p:cNvPr id="2" name="Image 0" descr="C:\Users\jungm\Desktop\projects\simple\solar-dashboard\docs\reports\_source\first-logo.png">    </p:cNvPr>
           <p:cNvPicPr>
             <a:picLocks noChangeAspect="1"/>
           </p:cNvPicPr>
@@ -17344,7 +25713,7 @@
       </p:sp>
       <p:pic>
         <p:nvPicPr>
-          <p:cNvPr id="8" name="Image 1" descr="C:\Users\jungm\AppData\Local\Temp\claude\c--Users-jungm-Desktop-projects-simple-solar-dashboard\d489bc63-0117-4773-8ee7-099d2a95864b\scratchpad\docbuild\first\out\charts\lifespan-slide.png">    </p:cNvPr>
+          <p:cNvPr id="8" name="Image 1" descr="C:\Users\jungm\Desktop\projects\simple\solar-dashboard\docs\reports\_source\charts\lifespan-slide.png">    </p:cNvPr>
           <p:cNvPicPr>
             <a:picLocks noChangeAspect="1"/>
           </p:cNvPicPr>
@@ -17407,7 +25776,7 @@
       </p:sp>
       <p:pic>
         <p:nvPicPr>
-          <p:cNvPr id="10" name="Image 2" descr="C:\Users\jungm\AppData\Local\Temp\claude\c--Users-jungm-Desktop-projects-simple-solar-dashboard\d489bc63-0117-4773-8ee7-099d2a95864b\scratchpad\docbuild\first\out\charts\stack-hours-slide.png">    </p:cNvPr>
+          <p:cNvPr id="10" name="Image 2" descr="C:\Users\jungm\Desktop\projects\simple\solar-dashboard\docs\reports\_source\charts\stack-hours-slide.png">    </p:cNvPr>
           <p:cNvPicPr>
             <a:picLocks noChangeAspect="1"/>
           </p:cNvPicPr>
@@ -17542,7 +25911,7 @@
       </p:grpSpPr>
       <p:pic>
         <p:nvPicPr>
-          <p:cNvPr id="2" name="Image 0" descr="C:\Users\jungm\AppData\Local\Temp\claude\c--Users-jungm-Desktop-projects-simple-solar-dashboard\d489bc63-0117-4773-8ee7-099d2a95864b\scratchpad\docbuild\assets\first-logo.png">    </p:cNvPr>
+          <p:cNvPr id="2" name="Image 0" descr="C:\Users\jungm\Desktop\projects\simple\solar-dashboard\docs\reports\_source\first-logo.png">    </p:cNvPr>
           <p:cNvPicPr>
             <a:picLocks noChangeAspect="1"/>
           </p:cNvPicPr>

--- a/docs/reports/태양광·수소 데이터수집·AI분석 예상안.pptx
+++ b/docs/reports/태양광·수소 데이터수집·AI분석 예상안.pptx
@@ -11711,7 +11711,7 @@
                           <a:ea typeface="Pretendard" pitchFamily="34" charset="-122"/>
                           <a:cs typeface="Pretendard" pitchFamily="34" charset="-120"/>
                         </a:rPr>
-                        <a:t>12</a:t>
+                        <a:t>13</a:t>
                       </a:r>
                       <a:endParaRPr lang="ko-KR" sz="1700" dirty="0">
                         <a:latin typeface="Pretendard" charset="0"/>
@@ -12121,7 +12121,7 @@
                           <a:ea typeface="Pretendard" pitchFamily="34" charset="-122"/>
                           <a:cs typeface="Pretendard" pitchFamily="34" charset="-120"/>
                         </a:rPr>
-                        <a:t>온도 쌍 편차 0.1 °C 이내(EN 1434 Class 2) — 안 맞으면 ΔT 15 K에서 오차가 바로 1%를 먹는다</a:t>
+                        <a:t>온도 쌍 편차 0.1 °C 이내(EN 1434 Class 2) — 0.1 K 불일치만으로 ΔT 15 K에서 0.67% 오차가 실린다</a:t>
                       </a:r>
                       <a:endParaRPr lang="ko-KR" sz="1700" dirty="0">
                         <a:latin typeface="Pretendard" charset="0"/>
@@ -12259,7 +12259,7 @@
                           <a:ea typeface="Pretendard" pitchFamily="34" charset="-122"/>
                           <a:cs typeface="Pretendard" pitchFamily="34" charset="-120"/>
                         </a:rPr>
-                        <a:t>14</a:t>
+                        <a:t>15</a:t>
                       </a:r>
                       <a:endParaRPr lang="ko-KR" sz="1700" dirty="0">
                         <a:latin typeface="Pretendard" charset="0"/>
@@ -14492,7 +14492,7 @@
                           <a:ea typeface="Pretendard" pitchFamily="34" charset="-122"/>
                           <a:cs typeface="Pretendard" pitchFamily="34" charset="-120"/>
                         </a:rPr>
-                        <a:t>17종 — 태양광 4, ESS 4, 수전해·연료전지 4, 수소 체인 2, 데이터 품질 1, 가평 구성 3(감압밸브 누설·폐열회수 저하·산소 중 수소)</a:t>
+                        <a:t>17종 — 태양광 3, ESS 3, 수전해·연료전지 4, 수소 체인 3, 데이터 품질 1, 가평 구성 3(감압밸브 누설·폐열회수 저하·산소 중 수소)</a:t>
                       </a:r>
                       <a:endParaRPr lang="ko-KR" sz="1600" dirty="0">
                         <a:latin typeface="Pretendard" charset="0"/>
@@ -20114,7 +20114,7 @@
                 <a:ea typeface="Pretendard" pitchFamily="34" charset="-122"/>
                 <a:cs typeface="Pretendard" pitchFamily="34" charset="-120"/>
               </a:rPr>
-              <a:t>전체 86개: 동봉 엑셀 ‘수집데이터_수소’ 시트</a:t>
+              <a:t>본체 86개(부속 39개 포함 125행): 엑셀 ‘수집데이터_수소’</a:t>
             </a:r>
             <a:endParaRPr lang="ko-KR" sz="2300" dirty="0"/>
           </a:p>
@@ -24520,7 +24520,7 @@
                 <a:ea typeface="Pretendard" pitchFamily="34" charset="-122"/>
                 <a:cs typeface="Pretendard" pitchFamily="34" charset="-120"/>
               </a:rPr>
-              <a:t>가스 누출·비상정지는 월간 분석과 별도로 현장 인터록과 안전관리자가 즉시 판단합니다. 전체 86개는 동봉 엑셀 ‘수집데이터_수소’ 시트에 있습니다.</a:t>
+              <a:t>가스 누출·비상정지는 월간 분석과 별도로 현장 인터록과 안전관리자가 즉시 판단합니다. 본체 86개는 동봉 엑셀 ‘수집데이터_수소’ 시트에 있습니다(부속 계통 39개를 더해 125행).</a:t>
             </a:r>
             <a:endParaRPr lang="ko-KR" sz="2200" dirty="0"/>
           </a:p>
@@ -24733,7 +24733,7 @@
                 <a:ea typeface="Pretendard" pitchFamily="34" charset="-122"/>
                 <a:cs typeface="Pretendard" pitchFamily="34" charset="-120"/>
               </a:rPr>
-              <a:t>※ 계측값만으로는 원인과 정답을 알 수 없습니다. 전체 131행은 동봉 엑셀 ‘운영·비정형 데이터’ 시트</a:t>
+              <a:t>※ 계측값만으로는 원인과 정답을 알 수 없습니다. 전체 136행은 동봉 엑셀 ‘운영·비정형 데이터’ 시트</a:t>
             </a:r>
             <a:endParaRPr lang="ko-KR" sz="1600" dirty="0"/>
           </a:p>

--- a/docs/reports/태양광·수소 데이터수집·AI분석 예상안.pptx
+++ b/docs/reports/태양광·수소 데이터수집·AI분석 예상안.pptx
@@ -2781,7 +2781,7 @@
                 <a:ea typeface="Pretendard" pitchFamily="34" charset="-122"/>
                 <a:cs typeface="Pretendard" pitchFamily="34" charset="-120"/>
               </a:rPr>
-              <a:t>주식회사 퍼스트씨앤디      |      작성일 2026. 09. 17</a:t>
+              <a:t>주식회사 퍼스트씨앤디      |      작성일 2026. 09. 22</a:t>
             </a:r>
             <a:endParaRPr lang="ko-KR" sz="2200" dirty="0"/>
           </a:p>
@@ -9603,7 +9603,7 @@
                 <a:ea typeface="Pretendard" pitchFamily="34" charset="-122"/>
                 <a:cs typeface="Pretendard" pitchFamily="34" charset="-120"/>
               </a:rPr>
-              <a:t>52행(필수 37·권장 15) — 계기 39점</a:t>
+              <a:t>53행(필수 37·권장 16) — 계기 39점</a:t>
             </a:r>
             <a:endParaRPr lang="ko-KR" sz="1600" dirty="0"/>
           </a:p>
@@ -9646,6 +9646,27 @@
                 <a:cs typeface="Pretendard" pitchFamily="34" charset="-120"/>
               </a:rPr>
               <a:t>계기는 설계 단계에서만 싸다 — REV.3 전에 송부</a:t>
+            </a:r>
+            <a:endParaRPr lang="ko-KR" sz="1600" dirty="0"/>
+          </a:p>
+          <a:p>
+            <a:pPr marL="279400" indent="-279400">
+              <a:spcAft>
+                <a:spcPts val="800"/>
+              </a:spcAft>
+              <a:buSzPct val="100000"/>
+              <a:buChar char="•"/>
+            </a:pPr>
+            <a:r>
+              <a:rPr lang="ko-KR" altLang="en-US" sz="1700" dirty="0">
+                <a:solidFill>
+                  <a:srgbClr val="222222"/>
+                </a:solidFill>
+                <a:latin typeface="Pretendard" pitchFamily="34" charset="0"/>
+                <a:ea typeface="Pretendard" pitchFamily="34" charset="-122"/>
+                <a:cs typeface="Pretendard" pitchFamily="34" charset="-120"/>
+              </a:rPr>
+              <a:t>전해조 퍼지 카운터 1행은 계기 없이 PLC 값만 — 가장 싸게 얻는 판별 근거</a:t>
             </a:r>
             <a:endParaRPr lang="ko-KR" sz="1600" dirty="0"/>
           </a:p>
